--- a/decks/aml-graph-bri.pptx
+++ b/decks/aml-graph-bri.pptx
@@ -13,9 +13,15 @@
     <p:sldId id="261" r:id="rId7"/>
     <p:sldId id="262" r:id="rId8"/>
     <p:sldId id="263" r:id="rId9"/>
+    <p:sldId id="264" r:id="rId10"/>
+    <p:sldId id="265" r:id="rId11"/>
+    <p:sldId id="266" r:id="rId12"/>
+    <p:sldId id="267" r:id="rId13"/>
+    <p:sldId id="268" r:id="rId14"/>
+    <p:sldId id="269" r:id="rId15"/>
   </p:sldIdLst>
   <p:notesMasterIdLst>
-    <p:notesMasterId r:id="rId10"/>
+    <p:notesMasterId r:id="rId16"/>
   </p:notesMasterIdLst>
   <p:sldSz cx="12191695" cy="6858000"/>
   <p:notesSz cx="6858000" cy="12191695"/>
@@ -112,6 +118,900 @@
     </a:lvl9pPr>
   </p:defaultTextStyle>
 </p:presentation>
+</file>
+
+<file path=ppt/charts/chart19.xml><?xml version="1.0" encoding="utf-8"?>
+<c:chartSpace xmlns:c="http://schemas.openxmlformats.org/drawingml/2006/chart" xmlns:a="http://schemas.openxmlformats.org/drawingml/2006/main" xmlns:r="http://schemas.openxmlformats.org/officeDocument/2006/relationships">
+  <c:date1904 val="0"/>
+  <c:roundedCorners val="1"/>
+  <c:chart>
+    <c:autoTitleDeleted val="1"/>
+    <c:plotArea>
+      <c:layout/>
+      <c:barChart>
+        <c:barDir val="col"/>
+        <c:grouping val="clustered"/>
+        <c:varyColors val="0"/>
+        <c:ser>
+          <c:idx val="0"/>
+          <c:order val="0"/>
+          <c:tx>
+            <c:strRef>
+              <c:f>Sheet1!$B$1</c:f>
+              <c:strCache>
+                <c:ptCount val="1"/>
+                <c:pt idx="0">
+                  <c:v>Share of effort (%)</c:v>
+                </c:pt>
+              </c:strCache>
+            </c:strRef>
+          </c:tx>
+          <c:spPr>
+            <a:solidFill>
+              <a:srgbClr val="3B82F6"/>
+            </a:solidFill>
+            <a:effectLst/>
+          </c:spPr>
+          <c:invertIfNegative val="0"/>
+          <c:dLbls>
+            <c:numFmt formatCode="#,##0" sourceLinked="0"/>
+            <c:txPr>
+              <a:bodyPr/>
+              <a:lstStyle/>
+              <a:p>
+                <a:pPr>
+                  <a:defRPr b="0" i="0" strike="noStrike" sz="1000" u="none">
+                    <a:solidFill>
+                      <a:srgbClr val="E2E8F0"/>
+                    </a:solidFill>
+                    <a:latin typeface="Segoe UI"/>
+                  </a:defRPr>
+                </a:pPr>
+              </a:p>
+            </c:txPr>
+            <c:showLegendKey val="0"/>
+            <c:showVal val="1"/>
+            <c:showCatName val="0"/>
+            <c:showSerName val="0"/>
+            <c:showPercent val="0"/>
+            <c:showBubbleSize val="0"/>
+            <c:showLeaderLines val="0"/>
+          </c:dLbls>
+          <c:dPt>
+            <c:idx val="0"/>
+            <c:invertIfNegative val="0"/>
+            <c:bubble3D val="0"/>
+            <c:spPr>
+              <a:solidFill>
+                <a:srgbClr val="3B82F6"/>
+              </a:solidFill>
+              <a:effectLst/>
+            </c:spPr>
+          </c:dPt>
+          <c:dPt>
+            <c:idx val="1"/>
+            <c:invertIfNegative val="0"/>
+            <c:bubble3D val="0"/>
+            <c:spPr>
+              <a:solidFill>
+                <a:srgbClr val="06B6D4"/>
+              </a:solidFill>
+              <a:effectLst/>
+            </c:spPr>
+          </c:dPt>
+          <c:dPt>
+            <c:idx val="2"/>
+            <c:invertIfNegative val="0"/>
+            <c:bubble3D val="0"/>
+            <c:spPr>
+              <a:solidFill>
+                <a:srgbClr val="22D3A0"/>
+              </a:solidFill>
+              <a:effectLst/>
+            </c:spPr>
+          </c:dPt>
+          <c:dPt>
+            <c:idx val="3"/>
+            <c:invertIfNegative val="0"/>
+            <c:bubble3D val="0"/>
+            <c:spPr>
+              <a:solidFill>
+                <a:srgbClr val="F59E0B"/>
+              </a:solidFill>
+              <a:effectLst/>
+            </c:spPr>
+          </c:dPt>
+          <c:dPt>
+            <c:idx val="4"/>
+            <c:invertIfNegative val="0"/>
+            <c:bubble3D val="0"/>
+            <c:spPr>
+              <a:solidFill>
+                <a:srgbClr val="3B82F6"/>
+              </a:solidFill>
+              <a:effectLst/>
+            </c:spPr>
+          </c:dPt>
+          <c:cat>
+            <c:multiLvlStrRef>
+              <c:f>Sheet1!$A$2:$A$6</c:f>
+              <c:multiLvlStrCache>
+                <c:ptCount val="5"/>
+                <c:lvl>
+                  <c:pt idx="0">
+                    <c:v>Schema and requirements</c:v>
+                  </c:pt>
+                  <c:pt idx="1">
+                    <c:v>Pattern definition</c:v>
+                  </c:pt>
+                  <c:pt idx="2">
+                    <c:v>Validation and review</c:v>
+                  </c:pt>
+                  <c:pt idx="3">
+                    <c:v>Documentation</c:v>
+                  </c:pt>
+                  <c:pt idx="4">
+                    <c:v>Workflow optimization</c:v>
+                  </c:pt>
+                </c:lvl>
+              </c:multiLvlStrCache>
+            </c:multiLvlStrRef>
+          </c:cat>
+          <c:val>
+            <c:numRef>
+              <c:f>Sheet1!$B$2:$B$6</c:f>
+              <c:numCache>
+                <c:formatCode>General</c:formatCode>
+                <c:ptCount val="5"/>
+                <c:pt idx="0">
+                  <c:v>30</c:v>
+                </c:pt>
+                <c:pt idx="1">
+                  <c:v>30</c:v>
+                </c:pt>
+                <c:pt idx="2">
+                  <c:v>20</c:v>
+                </c:pt>
+                <c:pt idx="3">
+                  <c:v>15</c:v>
+                </c:pt>
+                <c:pt idx="4">
+                  <c:v>5</c:v>
+                </c:pt>
+              </c:numCache>
+            </c:numRef>
+          </c:val>
+        </c:ser>
+        <c:dLbls>
+          <c:numFmt formatCode="#,##0" sourceLinked="0"/>
+          <c:txPr>
+            <a:bodyPr/>
+            <a:lstStyle/>
+            <a:p>
+              <a:pPr>
+                <a:defRPr b="0" i="0" strike="noStrike" sz="1000" u="none">
+                  <a:solidFill>
+                    <a:srgbClr val="E2E8F0"/>
+                  </a:solidFill>
+                  <a:latin typeface="Segoe UI"/>
+                </a:defRPr>
+              </a:pPr>
+            </a:p>
+          </c:txPr>
+          <c:showLegendKey val="0"/>
+          <c:showVal val="1"/>
+          <c:showCatName val="0"/>
+          <c:showSerName val="0"/>
+          <c:showPercent val="0"/>
+          <c:showBubbleSize val="0"/>
+          <c:showLeaderLines val="0"/>
+        </c:dLbls>
+        <c:gapWidth val="55"/>
+        <c:overlap val="0"/>
+        <c:axId val="2094734554"/>
+        <c:axId val="2094734552"/>
+        <c:axId val="2094734556"/>
+      </c:barChart>
+      <c:catAx>
+        <c:axId val="2094734554"/>
+        <c:scaling>
+          <c:orientation val="minMax"/>
+        </c:scaling>
+        <c:delete val="0"/>
+        <c:axPos val="b"/>
+        <c:numFmt formatCode="General" sourceLinked="1"/>
+        <c:majorTickMark val="out"/>
+        <c:minorTickMark val="none"/>
+        <c:tickLblPos val="low"/>
+        <c:spPr>
+          <a:ln w="12700" cap="flat">
+            <a:solidFill>
+              <a:srgbClr val="24365A"/>
+            </a:solidFill>
+            <a:prstDash val="solid"/>
+            <a:round/>
+          </a:ln>
+        </c:spPr>
+        <c:txPr>
+          <a:bodyPr/>
+          <a:lstStyle/>
+          <a:p>
+            <a:pPr>
+              <a:defRPr sz="1100" b="0" i="0" u="none" strike="noStrike">
+                <a:solidFill>
+                  <a:srgbClr val="94A3B8"/>
+                </a:solidFill>
+                <a:latin typeface="Segoe UI"/>
+              </a:defRPr>
+            </a:pPr>
+            <a:endParaRPr lang="en-US"/>
+          </a:p>
+        </c:txPr>
+        <c:crossAx val="2094734552"/>
+        <c:crosses val="autoZero"/>
+        <c:auto val="1"/>
+        <c:lblAlgn val="ctr"/>
+        <c:noMultiLvlLbl val="1"/>
+      </c:catAx>
+      <c:valAx>
+        <c:axId val="2094734552"/>
+        <c:scaling>
+          <c:orientation val="minMax"/>
+        </c:scaling>
+        <c:delete val="0"/>
+        <c:axPos val="l"/>
+        <c:majorGridlines>
+          <c:spPr>
+            <a:ln w="12700" cap="flat">
+              <a:solidFill>
+                <a:srgbClr val="18243D"/>
+              </a:solidFill>
+              <a:prstDash val="solid"/>
+              <a:round/>
+            </a:ln>
+          </c:spPr>
+        </c:majorGridlines>
+        <c:numFmt formatCode="General" sourceLinked="0"/>
+        <c:majorTickMark val="out"/>
+        <c:minorTickMark val="none"/>
+        <c:tickLblPos val="nextTo"/>
+        <c:spPr>
+          <a:ln w="12700" cap="flat">
+            <a:solidFill>
+              <a:srgbClr val="24365A"/>
+            </a:solidFill>
+            <a:prstDash val="solid"/>
+            <a:round/>
+          </a:ln>
+        </c:spPr>
+        <c:txPr>
+          <a:bodyPr/>
+          <a:lstStyle/>
+          <a:p>
+            <a:pPr>
+              <a:defRPr sz="1000" b="0" i="0" u="none" strike="noStrike">
+                <a:solidFill>
+                  <a:srgbClr val="94A3B8"/>
+                </a:solidFill>
+                <a:latin typeface="Segoe UI"/>
+              </a:defRPr>
+            </a:pPr>
+            <a:endParaRPr lang="en-US"/>
+          </a:p>
+        </c:txPr>
+        <c:crossAx val="2094734554"/>
+        <c:crosses val="autoZero"/>
+        <c:crossBetween val="between"/>
+      </c:valAx>
+      <c:spPr>
+        <a:solidFill>
+          <a:srgbClr val="0D1420"/>
+        </a:solidFill>
+        <a:ln>
+          <a:noFill/>
+        </a:ln>
+        <a:effectLst/>
+      </c:spPr>
+    </c:plotArea>
+    <c:plotVisOnly val="1"/>
+    <c:dispBlanksAs val="span"/>
+  </c:chart>
+  <c:spPr>
+    <a:solidFill>
+      <a:srgbClr val="0D1420"/>
+    </a:solidFill>
+    <a:ln w="12700" cap="flat">
+      <a:solidFill>
+        <a:srgbClr val="24365A"/>
+      </a:solidFill>
+    </a:ln>
+    <a:effectLst/>
+  </c:spPr>
+  <c:externalData r:id="rId1">
+    <c:autoUpdate val="0"/>
+  </c:externalData>
+</c:chartSpace>
+</file>
+
+<file path=ppt/charts/chart20.xml><?xml version="1.0" encoding="utf-8"?>
+<c:chartSpace xmlns:c="http://schemas.openxmlformats.org/drawingml/2006/chart" xmlns:a="http://schemas.openxmlformats.org/drawingml/2006/main" xmlns:r="http://schemas.openxmlformats.org/officeDocument/2006/relationships">
+  <c:date1904 val="0"/>
+  <c:roundedCorners val="1"/>
+  <c:chart>
+    <c:autoTitleDeleted val="1"/>
+    <c:plotArea>
+      <c:layout/>
+      <c:lineChart>
+        <c:varyColors val="0"/>
+        <c:ser>
+          <c:idx val="0"/>
+          <c:order val="0"/>
+          <c:tx>
+            <c:strRef>
+              <c:f>Sheet1!$B$1</c:f>
+              <c:strCache>
+                <c:ptCount val="1"/>
+                <c:pt idx="0">
+                  <c:v>Patterns passing compliance review (%)</c:v>
+                </c:pt>
+              </c:strCache>
+            </c:strRef>
+          </c:tx>
+          <c:spPr>
+            <a:solidFill>
+              <a:srgbClr val="3B82F6"/>
+            </a:solidFill>
+            <a:ln w="31750" cap="flat">
+              <a:solidFill>
+                <a:srgbClr val="3B82F6"/>
+              </a:solidFill>
+              <a:prstDash val="solid"/>
+              <a:round/>
+            </a:ln>
+            <a:effectLst/>
+          </c:spPr>
+          <c:invertIfNegative val="0"/>
+          <c:dLbls>
+            <c:numFmt formatCode="#,##0" sourceLinked="0"/>
+            <c:txPr>
+              <a:bodyPr/>
+              <a:lstStyle/>
+              <a:p>
+                <a:pPr>
+                  <a:defRPr b="0" i="0" strike="noStrike" sz="1200" u="none">
+                    <a:solidFill>
+                      <a:srgbClr val="000000"/>
+                    </a:solidFill>
+                    <a:latin typeface="Arial"/>
+                  </a:defRPr>
+                </a:pPr>
+              </a:p>
+            </c:txPr>
+            <c:showLegendKey val="0"/>
+            <c:showVal val="0"/>
+            <c:showCatName val="0"/>
+            <c:showSerName val="0"/>
+            <c:showPercent val="0"/>
+            <c:showBubbleSize val="0"/>
+            <c:showLeaderLines val="0"/>
+          </c:dLbls>
+          <c:marker>
+            <c:symbol val="circle"/>
+            <c:size val="6"/>
+            <c:spPr>
+              <a:solidFill>
+                <a:srgbClr val="3B82F6"/>
+              </a:solidFill>
+              <a:ln w="9525" cap="flat">
+                <a:solidFill>
+                  <a:srgbClr val="3B82F6"/>
+                </a:solidFill>
+                <a:prstDash val="solid"/>
+                <a:round/>
+              </a:ln>
+              <a:effectLst/>
+            </c:spPr>
+          </c:marker>
+          <c:cat>
+            <c:multiLvlStrRef>
+              <c:f>Sheet1!$A$2:$A$7</c:f>
+              <c:multiLvlStrCache>
+                <c:ptCount val="6"/>
+                <c:lvl>
+                  <c:pt idx="0">
+                    <c:v>Iter 1</c:v>
+                  </c:pt>
+                  <c:pt idx="1">
+                    <c:v>Iter 2</c:v>
+                  </c:pt>
+                  <c:pt idx="2">
+                    <c:v>Iter 3</c:v>
+                  </c:pt>
+                  <c:pt idx="3">
+                    <c:v>Iter 4</c:v>
+                  </c:pt>
+                  <c:pt idx="4">
+                    <c:v>Iter 5</c:v>
+                  </c:pt>
+                  <c:pt idx="5">
+                    <c:v>Iter 6</c:v>
+                  </c:pt>
+                </c:lvl>
+              </c:multiLvlStrCache>
+            </c:multiLvlStrRef>
+          </c:cat>
+          <c:val>
+            <c:numRef>
+              <c:f>Sheet1!$B$2:$B$7</c:f>
+              <c:numCache>
+                <c:formatCode>General</c:formatCode>
+                <c:ptCount val="6"/>
+                <c:pt idx="0">
+                  <c:v>20</c:v>
+                </c:pt>
+                <c:pt idx="1">
+                  <c:v>35</c:v>
+                </c:pt>
+                <c:pt idx="2">
+                  <c:v>55</c:v>
+                </c:pt>
+                <c:pt idx="3">
+                  <c:v>70</c:v>
+                </c:pt>
+                <c:pt idx="4">
+                  <c:v>85</c:v>
+                </c:pt>
+                <c:pt idx="5">
+                  <c:v>90</c:v>
+                </c:pt>
+              </c:numCache>
+            </c:numRef>
+          </c:val>
+          <c:smooth val="0"/>
+        </c:ser>
+        <c:dLbls>
+          <c:numFmt formatCode="#,##0" sourceLinked="0"/>
+          <c:txPr>
+            <a:bodyPr/>
+            <a:lstStyle/>
+            <a:p>
+              <a:pPr>
+                <a:defRPr b="0" i="0" strike="noStrike" sz="1200" u="none">
+                  <a:solidFill>
+                    <a:srgbClr val="000000"/>
+                  </a:solidFill>
+                  <a:latin typeface="Arial"/>
+                </a:defRPr>
+              </a:pPr>
+            </a:p>
+          </c:txPr>
+          <c:showLegendKey val="0"/>
+          <c:showVal val="0"/>
+          <c:showCatName val="0"/>
+          <c:showSerName val="0"/>
+          <c:showPercent val="0"/>
+          <c:showBubbleSize val="0"/>
+          <c:showLeaderLines val="0"/>
+        </c:dLbls>
+        <c:marker val="1"/>
+        <c:axId val="2094734554"/>
+        <c:axId val="2094734552"/>
+        <c:axId val="2094734556"/>
+      </c:lineChart>
+      <c:catAx>
+        <c:axId val="2094734554"/>
+        <c:scaling>
+          <c:orientation val="minMax"/>
+        </c:scaling>
+        <c:delete val="0"/>
+        <c:axPos val="b"/>
+        <c:numFmt formatCode="General" sourceLinked="1"/>
+        <c:majorTickMark val="out"/>
+        <c:minorTickMark val="none"/>
+        <c:tickLblPos val="low"/>
+        <c:spPr>
+          <a:ln w="12700" cap="flat">
+            <a:solidFill>
+              <a:srgbClr val="24365A"/>
+            </a:solidFill>
+            <a:prstDash val="solid"/>
+            <a:round/>
+          </a:ln>
+        </c:spPr>
+        <c:txPr>
+          <a:bodyPr/>
+          <a:lstStyle/>
+          <a:p>
+            <a:pPr>
+              <a:defRPr sz="1100" b="0" i="0" u="none" strike="noStrike">
+                <a:solidFill>
+                  <a:srgbClr val="94A3B8"/>
+                </a:solidFill>
+                <a:latin typeface="Segoe UI"/>
+              </a:defRPr>
+            </a:pPr>
+            <a:endParaRPr lang="en-US"/>
+          </a:p>
+        </c:txPr>
+        <c:crossAx val="2094734552"/>
+        <c:crosses val="autoZero"/>
+        <c:auto val="1"/>
+        <c:lblAlgn val="ctr"/>
+        <c:noMultiLvlLbl val="1"/>
+      </c:catAx>
+      <c:valAx>
+        <c:axId val="2094734552"/>
+        <c:scaling>
+          <c:orientation val="minMax"/>
+        </c:scaling>
+        <c:delete val="0"/>
+        <c:axPos val="l"/>
+        <c:majorGridlines>
+          <c:spPr>
+            <a:ln w="12700" cap="flat">
+              <a:solidFill>
+                <a:srgbClr val="18243D"/>
+              </a:solidFill>
+              <a:prstDash val="solid"/>
+              <a:round/>
+            </a:ln>
+          </c:spPr>
+        </c:majorGridlines>
+        <c:numFmt formatCode="General" sourceLinked="0"/>
+        <c:majorTickMark val="out"/>
+        <c:minorTickMark val="none"/>
+        <c:tickLblPos val="nextTo"/>
+        <c:spPr>
+          <a:ln w="12700" cap="flat">
+            <a:solidFill>
+              <a:srgbClr val="24365A"/>
+            </a:solidFill>
+            <a:prstDash val="solid"/>
+            <a:round/>
+          </a:ln>
+        </c:spPr>
+        <c:txPr>
+          <a:bodyPr/>
+          <a:lstStyle/>
+          <a:p>
+            <a:pPr>
+              <a:defRPr sz="1000" b="0" i="0" u="none" strike="noStrike">
+                <a:solidFill>
+                  <a:srgbClr val="94A3B8"/>
+                </a:solidFill>
+                <a:latin typeface="Segoe UI"/>
+              </a:defRPr>
+            </a:pPr>
+            <a:endParaRPr lang="en-US"/>
+          </a:p>
+        </c:txPr>
+        <c:crossAx val="2094734554"/>
+        <c:crosses val="autoZero"/>
+        <c:crossBetween val="between"/>
+      </c:valAx>
+      <c:spPr>
+        <a:solidFill>
+          <a:srgbClr val="0D1420"/>
+        </a:solidFill>
+        <a:ln>
+          <a:noFill/>
+        </a:ln>
+        <a:effectLst/>
+      </c:spPr>
+    </c:plotArea>
+    <c:plotVisOnly val="1"/>
+    <c:dispBlanksAs val="span"/>
+  </c:chart>
+  <c:spPr>
+    <a:solidFill>
+      <a:srgbClr val="0D1420"/>
+    </a:solidFill>
+    <a:ln w="12700" cap="flat">
+      <a:solidFill>
+        <a:srgbClr val="24365A"/>
+      </a:solidFill>
+    </a:ln>
+    <a:effectLst/>
+  </c:spPr>
+  <c:externalData r:id="rId1">
+    <c:autoUpdate val="0"/>
+  </c:externalData>
+</c:chartSpace>
+</file>
+
+<file path=ppt/charts/chart21.xml><?xml version="1.0" encoding="utf-8"?>
+<c:chartSpace xmlns:c="http://schemas.openxmlformats.org/drawingml/2006/chart" xmlns:a="http://schemas.openxmlformats.org/drawingml/2006/main" xmlns:r="http://schemas.openxmlformats.org/officeDocument/2006/relationships">
+  <c:date1904 val="0"/>
+  <c:roundedCorners val="1"/>
+  <c:chart>
+    <c:autoTitleDeleted val="1"/>
+    <c:plotArea>
+      <c:layout/>
+      <c:doughnutChart>
+        <c:varyColors val="1"/>
+        <c:ser>
+          <c:idx val="0"/>
+          <c:order val="0"/>
+          <c:tx>
+            <c:strRef>
+              <c:f>Sheet1!$B$1</c:f>
+              <c:strCache>
+                <c:ptCount val="1"/>
+                <c:pt idx="0">
+                  <c:v>Breakdown</c:v>
+                </c:pt>
+              </c:strCache>
+            </c:strRef>
+          </c:tx>
+          <c:spPr>
+            <a:solidFill>
+              <a:schemeClr val="accent1"/>
+            </a:solidFill>
+            <a:ln w="9525" cap="flat">
+              <a:solidFill>
+                <a:srgbClr val="F9F9F9"/>
+              </a:solidFill>
+              <a:prstDash val="solid"/>
+              <a:round/>
+            </a:ln>
+            <a:effectLst/>
+          </c:spPr>
+          <c:dPt>
+            <c:idx val="0"/>
+            <c:bubble3D val="0"/>
+            <c:spPr>
+              <a:solidFill>
+                <a:srgbClr val="3B82F6"/>
+              </a:solidFill>
+              <a:effectLst/>
+            </c:spPr>
+          </c:dPt>
+          <c:dPt>
+            <c:idx val="1"/>
+            <c:bubble3D val="0"/>
+            <c:spPr>
+              <a:solidFill>
+                <a:srgbClr val="06B6D4"/>
+              </a:solidFill>
+              <a:effectLst/>
+            </c:spPr>
+          </c:dPt>
+          <c:dPt>
+            <c:idx val="2"/>
+            <c:bubble3D val="0"/>
+            <c:spPr>
+              <a:solidFill>
+                <a:srgbClr val="22D3A0"/>
+              </a:solidFill>
+              <a:effectLst/>
+            </c:spPr>
+          </c:dPt>
+          <c:dPt>
+            <c:idx val="3"/>
+            <c:bubble3D val="0"/>
+            <c:spPr>
+              <a:solidFill>
+                <a:srgbClr val="F59E0B"/>
+              </a:solidFill>
+              <a:effectLst/>
+            </c:spPr>
+          </c:dPt>
+          <c:dLbls>
+            <c:dLbl>
+              <c:idx val="0"/>
+              <c:numFmt formatCode="0%" sourceLinked="0"/>
+              <c:spPr/>
+              <c:txPr>
+                <a:bodyPr/>
+                <a:lstStyle/>
+                <a:p>
+                  <a:pPr>
+                    <a:defRPr sz="1000" b="0" i="0" u="none" strike="noStrike">
+                      <a:solidFill>
+                        <a:srgbClr val="E2E8F0"/>
+                      </a:solidFill>
+                      <a:latin typeface="Segoe UI"/>
+                    </a:defRPr>
+                  </a:pPr>
+                </a:p>
+              </c:txPr>
+              <c:showLegendKey val="0"/>
+              <c:showVal val="0"/>
+              <c:showCatName val="0"/>
+              <c:showSerName val="0"/>
+              <c:showPercent val="1"/>
+              <c:showBubbleSize val="0"/>
+            </c:dLbl>
+            <c:dLbl>
+              <c:idx val="1"/>
+              <c:numFmt formatCode="0%" sourceLinked="0"/>
+              <c:spPr/>
+              <c:txPr>
+                <a:bodyPr/>
+                <a:lstStyle/>
+                <a:p>
+                  <a:pPr>
+                    <a:defRPr sz="1000" b="0" i="0" u="none" strike="noStrike">
+                      <a:solidFill>
+                        <a:srgbClr val="E2E8F0"/>
+                      </a:solidFill>
+                      <a:latin typeface="Segoe UI"/>
+                    </a:defRPr>
+                  </a:pPr>
+                </a:p>
+              </c:txPr>
+              <c:showLegendKey val="0"/>
+              <c:showVal val="0"/>
+              <c:showCatName val="0"/>
+              <c:showSerName val="0"/>
+              <c:showPercent val="1"/>
+              <c:showBubbleSize val="0"/>
+            </c:dLbl>
+            <c:dLbl>
+              <c:idx val="2"/>
+              <c:numFmt formatCode="0%" sourceLinked="0"/>
+              <c:spPr/>
+              <c:txPr>
+                <a:bodyPr/>
+                <a:lstStyle/>
+                <a:p>
+                  <a:pPr>
+                    <a:defRPr sz="1000" b="0" i="0" u="none" strike="noStrike">
+                      <a:solidFill>
+                        <a:srgbClr val="E2E8F0"/>
+                      </a:solidFill>
+                      <a:latin typeface="Segoe UI"/>
+                    </a:defRPr>
+                  </a:pPr>
+                </a:p>
+              </c:txPr>
+              <c:showLegendKey val="0"/>
+              <c:showVal val="0"/>
+              <c:showCatName val="0"/>
+              <c:showSerName val="0"/>
+              <c:showPercent val="1"/>
+              <c:showBubbleSize val="0"/>
+            </c:dLbl>
+            <c:dLbl>
+              <c:idx val="3"/>
+              <c:numFmt formatCode="0%" sourceLinked="0"/>
+              <c:spPr/>
+              <c:txPr>
+                <a:bodyPr/>
+                <a:lstStyle/>
+                <a:p>
+                  <a:pPr>
+                    <a:defRPr sz="1000" b="0" i="0" u="none" strike="noStrike">
+                      <a:solidFill>
+                        <a:srgbClr val="E2E8F0"/>
+                      </a:solidFill>
+                      <a:latin typeface="Segoe UI"/>
+                    </a:defRPr>
+                  </a:pPr>
+                </a:p>
+              </c:txPr>
+              <c:showLegendKey val="0"/>
+              <c:showVal val="0"/>
+              <c:showCatName val="0"/>
+              <c:showSerName val="0"/>
+              <c:showPercent val="1"/>
+              <c:showBubbleSize val="0"/>
+            </c:dLbl>
+            <c:numFmt formatCode="0%" sourceLinked="0"/>
+            <c:txPr>
+              <a:bodyPr/>
+              <a:lstStyle/>
+              <a:p>
+                <a:pPr>
+                  <a:defRPr sz="1800" b="0" i="0" u="none" strike="noStrike">
+                    <a:solidFill>
+                      <a:srgbClr val="000000"/>
+                    </a:solidFill>
+                    <a:latin typeface="Arial"/>
+                  </a:defRPr>
+                </a:pPr>
+              </a:p>
+            </c:txPr>
+            <c:showLegendKey val="0"/>
+            <c:showVal val="0"/>
+            <c:showCatName val="1"/>
+            <c:showSerName val="0"/>
+            <c:showPercent val="1"/>
+            <c:showBubbleSize val="0"/>
+            <c:showLeaderLines val="0"/>
+          </c:dLbls>
+          <c:cat>
+            <c:strRef>
+              <c:f>Sheet1!$A$2:$A$5</c:f>
+              <c:strCache>
+                <c:ptCount val="4"/>
+                <c:pt idx="0">
+                  <c:v>Regulatory alignment</c:v>
+                </c:pt>
+                <c:pt idx="1">
+                  <c:v>Visual clarity</c:v>
+                </c:pt>
+                <c:pt idx="2">
+                  <c:v>Documented logic</c:v>
+                </c:pt>
+                <c:pt idx="3">
+                  <c:v>Reproducibility</c:v>
+                </c:pt>
+              </c:strCache>
+            </c:strRef>
+          </c:cat>
+          <c:val>
+            <c:numRef>
+              <c:f>Sheet1!$B$2:$B$5</c:f>
+              <c:numCache>
+                <c:ptCount val="4"/>
+                <c:pt idx="0">
+                  <c:v>35</c:v>
+                </c:pt>
+                <c:pt idx="1">
+                  <c:v>30</c:v>
+                </c:pt>
+                <c:pt idx="2">
+                  <c:v>25</c:v>
+                </c:pt>
+                <c:pt idx="3">
+                  <c:v>10</c:v>
+                </c:pt>
+              </c:numCache>
+            </c:numRef>
+          </c:val>
+        </c:ser>
+        <c:firstSliceAng val="0"/>
+        <c:holeSize val="62"/>
+      </c:doughnutChart>
+      <c:spPr>
+        <a:solidFill>
+          <a:srgbClr val="0D1420"/>
+        </a:solidFill>
+        <a:ln>
+          <a:noFill/>
+        </a:ln>
+        <a:effectLst/>
+      </c:spPr>
+    </c:plotArea>
+    <c:legend>
+      <c:legendPos val="r"/>
+      <c:overlay val="0"/>
+      <c:txPr>
+        <a:bodyPr/>
+        <a:lstStyle/>
+        <a:p>
+          <a:pPr>
+            <a:defRPr sz="1100">
+              <a:solidFill>
+                <a:srgbClr val="CBD5E1"/>
+              </a:solidFill>
+              <a:latin typeface="Segoe UI"/>
+              <a:cs typeface="Segoe UI"/>
+            </a:defRPr>
+          </a:pPr>
+          <a:endParaRPr lang="en-US"/>
+        </a:p>
+      </c:txPr>
+    </c:legend>
+    <c:plotVisOnly val="1"/>
+    <c:dispBlanksAs val="span"/>
+  </c:chart>
+  <c:spPr>
+    <a:solidFill>
+      <a:srgbClr val="0D1420"/>
+    </a:solidFill>
+    <a:ln w="12700" cap="flat">
+      <a:solidFill>
+        <a:srgbClr val="24365A"/>
+      </a:solidFill>
+    </a:ln>
+    <a:effectLst/>
+  </c:spPr>
+  <c:externalData r:id="rId1">
+    <c:autoUpdate val="0"/>
+  </c:externalData>
+</c:chartSpace>
 </file>
 
 <file path=ppt/notesMasters/notesMaster1.xml><?xml version="1.0" encoding="utf-8"?>
@@ -551,6 +1451,446 @@
 </p:notes>
 </file>
 
+<file path=ppt/notesSlides/notesSlide10.xml><?xml version="1.0" encoding="utf-8"?>
+<p:notes xmlns:a="http://schemas.openxmlformats.org/drawingml/2006/main" xmlns:r="http://schemas.openxmlformats.org/officeDocument/2006/relationships" xmlns:p="http://schemas.openxmlformats.org/presentationml/2006/main">
+  <p:cSld>
+    <p:spTree>
+      <p:nvGrpSpPr>
+        <p:cNvPr id="1" name=""/>
+        <p:cNvGrpSpPr/>
+        <p:nvPr/>
+      </p:nvGrpSpPr>
+      <p:grpSpPr>
+        <a:xfrm>
+          <a:off x="0" y="0"/>
+          <a:ext cx="0" cy="0"/>
+          <a:chOff x="0" y="0"/>
+          <a:chExt cx="0" cy="0"/>
+        </a:xfrm>
+      </p:grpSpPr>
+      <p:sp>
+        <p:nvSpPr>
+          <p:cNvPr id="2" name="Slide Image Placeholder 1"/>
+          <p:cNvSpPr>
+            <a:spLocks noGrp="1" noRot="1" noChangeAspect="1"/>
+          </p:cNvSpPr>
+          <p:nvPr>
+            <p:ph type="sldImg"/>
+          </p:nvPr>
+        </p:nvSpPr>
+        <p:spPr/>
+      </p:sp>
+      <p:sp>
+        <p:nvSpPr>
+          <p:cNvPr id="3" name="Notes Placeholder 2"/>
+          <p:cNvSpPr>
+            <a:spLocks noGrp="1"/>
+          </p:cNvSpPr>
+          <p:nvPr>
+            <p:ph type="body" idx="1"/>
+          </p:nvPr>
+        </p:nvSpPr>
+        <p:spPr/>
+        <p:txBody>
+          <a:bodyPr/>
+          <a:lstStyle/>
+          <a:p>
+            <a:r>
+              <a:rPr lang="en-US" dirty="0"/>
+              <a:t/>
+            </a:r>
+            <a:endParaRPr lang="en-US" dirty="0"/>
+          </a:p>
+        </p:txBody>
+      </p:sp>
+      <p:sp>
+        <p:nvSpPr>
+          <p:cNvPr id="4" name="Slide Number Placeholder 3"/>
+          <p:cNvSpPr>
+            <a:spLocks noGrp="1"/>
+          </p:cNvSpPr>
+          <p:nvPr>
+            <p:ph type="sldNum" sz="quarter" idx="10"/>
+          </p:nvPr>
+        </p:nvSpPr>
+        <p:spPr/>
+        <p:txBody>
+          <a:bodyPr/>
+          <a:lstStyle/>
+          <a:p>
+            <a:fld id="{F7021451-1387-4CA6-816F-3879F97B5CBC}" type="slidenum">
+              <a:rPr lang="en-US"/>
+              <a:t>10</a:t>
+            </a:fld>
+            <a:endParaRPr lang="en-US"/>
+          </a:p>
+        </p:txBody>
+      </p:sp>
+    </p:spTree>
+    <p:extLst>
+      <p:ext uri="{BB962C8B-B14F-4D97-AF65-F5344CB8AC3E}">
+        <p14:creationId xmlns:p14="http://schemas.microsoft.com/office/powerpoint/2010/main" val="1024086991"/>
+      </p:ext>
+    </p:extLst>
+  </p:cSld>
+  <p:clrMapOvr>
+    <a:masterClrMapping/>
+  </p:clrMapOvr>
+</p:notes>
+</file>
+
+<file path=ppt/notesSlides/notesSlide11.xml><?xml version="1.0" encoding="utf-8"?>
+<p:notes xmlns:a="http://schemas.openxmlformats.org/drawingml/2006/main" xmlns:r="http://schemas.openxmlformats.org/officeDocument/2006/relationships" xmlns:p="http://schemas.openxmlformats.org/presentationml/2006/main">
+  <p:cSld>
+    <p:spTree>
+      <p:nvGrpSpPr>
+        <p:cNvPr id="1" name=""/>
+        <p:cNvGrpSpPr/>
+        <p:nvPr/>
+      </p:nvGrpSpPr>
+      <p:grpSpPr>
+        <a:xfrm>
+          <a:off x="0" y="0"/>
+          <a:ext cx="0" cy="0"/>
+          <a:chOff x="0" y="0"/>
+          <a:chExt cx="0" cy="0"/>
+        </a:xfrm>
+      </p:grpSpPr>
+      <p:sp>
+        <p:nvSpPr>
+          <p:cNvPr id="2" name="Slide Image Placeholder 1"/>
+          <p:cNvSpPr>
+            <a:spLocks noGrp="1" noRot="1" noChangeAspect="1"/>
+          </p:cNvSpPr>
+          <p:nvPr>
+            <p:ph type="sldImg"/>
+          </p:nvPr>
+        </p:nvSpPr>
+        <p:spPr/>
+      </p:sp>
+      <p:sp>
+        <p:nvSpPr>
+          <p:cNvPr id="3" name="Notes Placeholder 2"/>
+          <p:cNvSpPr>
+            <a:spLocks noGrp="1"/>
+          </p:cNvSpPr>
+          <p:nvPr>
+            <p:ph type="body" idx="1"/>
+          </p:nvPr>
+        </p:nvSpPr>
+        <p:spPr/>
+        <p:txBody>
+          <a:bodyPr/>
+          <a:lstStyle/>
+          <a:p>
+            <a:r>
+              <a:rPr lang="en-US" dirty="0"/>
+              <a:t/>
+            </a:r>
+            <a:endParaRPr lang="en-US" dirty="0"/>
+          </a:p>
+        </p:txBody>
+      </p:sp>
+      <p:sp>
+        <p:nvSpPr>
+          <p:cNvPr id="4" name="Slide Number Placeholder 3"/>
+          <p:cNvSpPr>
+            <a:spLocks noGrp="1"/>
+          </p:cNvSpPr>
+          <p:nvPr>
+            <p:ph type="sldNum" sz="quarter" idx="10"/>
+          </p:nvPr>
+        </p:nvSpPr>
+        <p:spPr/>
+        <p:txBody>
+          <a:bodyPr/>
+          <a:lstStyle/>
+          <a:p>
+            <a:fld id="{F7021451-1387-4CA6-816F-3879F97B5CBC}" type="slidenum">
+              <a:rPr lang="en-US"/>
+              <a:t>11</a:t>
+            </a:fld>
+            <a:endParaRPr lang="en-US"/>
+          </a:p>
+        </p:txBody>
+      </p:sp>
+    </p:spTree>
+    <p:extLst>
+      <p:ext uri="{BB962C8B-B14F-4D97-AF65-F5344CB8AC3E}">
+        <p14:creationId xmlns:p14="http://schemas.microsoft.com/office/powerpoint/2010/main" val="1024086991"/>
+      </p:ext>
+    </p:extLst>
+  </p:cSld>
+  <p:clrMapOvr>
+    <a:masterClrMapping/>
+  </p:clrMapOvr>
+</p:notes>
+</file>
+
+<file path=ppt/notesSlides/notesSlide12.xml><?xml version="1.0" encoding="utf-8"?>
+<p:notes xmlns:a="http://schemas.openxmlformats.org/drawingml/2006/main" xmlns:r="http://schemas.openxmlformats.org/officeDocument/2006/relationships" xmlns:p="http://schemas.openxmlformats.org/presentationml/2006/main">
+  <p:cSld>
+    <p:spTree>
+      <p:nvGrpSpPr>
+        <p:cNvPr id="1" name=""/>
+        <p:cNvGrpSpPr/>
+        <p:nvPr/>
+      </p:nvGrpSpPr>
+      <p:grpSpPr>
+        <a:xfrm>
+          <a:off x="0" y="0"/>
+          <a:ext cx="0" cy="0"/>
+          <a:chOff x="0" y="0"/>
+          <a:chExt cx="0" cy="0"/>
+        </a:xfrm>
+      </p:grpSpPr>
+      <p:sp>
+        <p:nvSpPr>
+          <p:cNvPr id="2" name="Slide Image Placeholder 1"/>
+          <p:cNvSpPr>
+            <a:spLocks noGrp="1" noRot="1" noChangeAspect="1"/>
+          </p:cNvSpPr>
+          <p:nvPr>
+            <p:ph type="sldImg"/>
+          </p:nvPr>
+        </p:nvSpPr>
+        <p:spPr/>
+      </p:sp>
+      <p:sp>
+        <p:nvSpPr>
+          <p:cNvPr id="3" name="Notes Placeholder 2"/>
+          <p:cNvSpPr>
+            <a:spLocks noGrp="1"/>
+          </p:cNvSpPr>
+          <p:nvPr>
+            <p:ph type="body" idx="1"/>
+          </p:nvPr>
+        </p:nvSpPr>
+        <p:spPr/>
+        <p:txBody>
+          <a:bodyPr/>
+          <a:lstStyle/>
+          <a:p>
+            <a:r>
+              <a:rPr lang="en-US" dirty="0"/>
+              <a:t/>
+            </a:r>
+            <a:endParaRPr lang="en-US" dirty="0"/>
+          </a:p>
+        </p:txBody>
+      </p:sp>
+      <p:sp>
+        <p:nvSpPr>
+          <p:cNvPr id="4" name="Slide Number Placeholder 3"/>
+          <p:cNvSpPr>
+            <a:spLocks noGrp="1"/>
+          </p:cNvSpPr>
+          <p:nvPr>
+            <p:ph type="sldNum" sz="quarter" idx="10"/>
+          </p:nvPr>
+        </p:nvSpPr>
+        <p:spPr/>
+        <p:txBody>
+          <a:bodyPr/>
+          <a:lstStyle/>
+          <a:p>
+            <a:fld id="{F7021451-1387-4CA6-816F-3879F97B5CBC}" type="slidenum">
+              <a:rPr lang="en-US"/>
+              <a:t>12</a:t>
+            </a:fld>
+            <a:endParaRPr lang="en-US"/>
+          </a:p>
+        </p:txBody>
+      </p:sp>
+    </p:spTree>
+    <p:extLst>
+      <p:ext uri="{BB962C8B-B14F-4D97-AF65-F5344CB8AC3E}">
+        <p14:creationId xmlns:p14="http://schemas.microsoft.com/office/powerpoint/2010/main" val="1024086991"/>
+      </p:ext>
+    </p:extLst>
+  </p:cSld>
+  <p:clrMapOvr>
+    <a:masterClrMapping/>
+  </p:clrMapOvr>
+</p:notes>
+</file>
+
+<file path=ppt/notesSlides/notesSlide13.xml><?xml version="1.0" encoding="utf-8"?>
+<p:notes xmlns:a="http://schemas.openxmlformats.org/drawingml/2006/main" xmlns:r="http://schemas.openxmlformats.org/officeDocument/2006/relationships" xmlns:p="http://schemas.openxmlformats.org/presentationml/2006/main">
+  <p:cSld>
+    <p:spTree>
+      <p:nvGrpSpPr>
+        <p:cNvPr id="1" name=""/>
+        <p:cNvGrpSpPr/>
+        <p:nvPr/>
+      </p:nvGrpSpPr>
+      <p:grpSpPr>
+        <a:xfrm>
+          <a:off x="0" y="0"/>
+          <a:ext cx="0" cy="0"/>
+          <a:chOff x="0" y="0"/>
+          <a:chExt cx="0" cy="0"/>
+        </a:xfrm>
+      </p:grpSpPr>
+      <p:sp>
+        <p:nvSpPr>
+          <p:cNvPr id="2" name="Slide Image Placeholder 1"/>
+          <p:cNvSpPr>
+            <a:spLocks noGrp="1" noRot="1" noChangeAspect="1"/>
+          </p:cNvSpPr>
+          <p:nvPr>
+            <p:ph type="sldImg"/>
+          </p:nvPr>
+        </p:nvSpPr>
+        <p:spPr/>
+      </p:sp>
+      <p:sp>
+        <p:nvSpPr>
+          <p:cNvPr id="3" name="Notes Placeholder 2"/>
+          <p:cNvSpPr>
+            <a:spLocks noGrp="1"/>
+          </p:cNvSpPr>
+          <p:nvPr>
+            <p:ph type="body" idx="1"/>
+          </p:nvPr>
+        </p:nvSpPr>
+        <p:spPr/>
+        <p:txBody>
+          <a:bodyPr/>
+          <a:lstStyle/>
+          <a:p>
+            <a:r>
+              <a:rPr lang="en-US" dirty="0"/>
+              <a:t/>
+            </a:r>
+            <a:endParaRPr lang="en-US" dirty="0"/>
+          </a:p>
+        </p:txBody>
+      </p:sp>
+      <p:sp>
+        <p:nvSpPr>
+          <p:cNvPr id="4" name="Slide Number Placeholder 3"/>
+          <p:cNvSpPr>
+            <a:spLocks noGrp="1"/>
+          </p:cNvSpPr>
+          <p:nvPr>
+            <p:ph type="sldNum" sz="quarter" idx="10"/>
+          </p:nvPr>
+        </p:nvSpPr>
+        <p:spPr/>
+        <p:txBody>
+          <a:bodyPr/>
+          <a:lstStyle/>
+          <a:p>
+            <a:fld id="{F7021451-1387-4CA6-816F-3879F97B5CBC}" type="slidenum">
+              <a:rPr lang="en-US"/>
+              <a:t>13</a:t>
+            </a:fld>
+            <a:endParaRPr lang="en-US"/>
+          </a:p>
+        </p:txBody>
+      </p:sp>
+    </p:spTree>
+    <p:extLst>
+      <p:ext uri="{BB962C8B-B14F-4D97-AF65-F5344CB8AC3E}">
+        <p14:creationId xmlns:p14="http://schemas.microsoft.com/office/powerpoint/2010/main" val="1024086991"/>
+      </p:ext>
+    </p:extLst>
+  </p:cSld>
+  <p:clrMapOvr>
+    <a:masterClrMapping/>
+  </p:clrMapOvr>
+</p:notes>
+</file>
+
+<file path=ppt/notesSlides/notesSlide14.xml><?xml version="1.0" encoding="utf-8"?>
+<p:notes xmlns:a="http://schemas.openxmlformats.org/drawingml/2006/main" xmlns:r="http://schemas.openxmlformats.org/officeDocument/2006/relationships" xmlns:p="http://schemas.openxmlformats.org/presentationml/2006/main">
+  <p:cSld>
+    <p:spTree>
+      <p:nvGrpSpPr>
+        <p:cNvPr id="1" name=""/>
+        <p:cNvGrpSpPr/>
+        <p:nvPr/>
+      </p:nvGrpSpPr>
+      <p:grpSpPr>
+        <a:xfrm>
+          <a:off x="0" y="0"/>
+          <a:ext cx="0" cy="0"/>
+          <a:chOff x="0" y="0"/>
+          <a:chExt cx="0" cy="0"/>
+        </a:xfrm>
+      </p:grpSpPr>
+      <p:sp>
+        <p:nvSpPr>
+          <p:cNvPr id="2" name="Slide Image Placeholder 1"/>
+          <p:cNvSpPr>
+            <a:spLocks noGrp="1" noRot="1" noChangeAspect="1"/>
+          </p:cNvSpPr>
+          <p:nvPr>
+            <p:ph type="sldImg"/>
+          </p:nvPr>
+        </p:nvSpPr>
+        <p:spPr/>
+      </p:sp>
+      <p:sp>
+        <p:nvSpPr>
+          <p:cNvPr id="3" name="Notes Placeholder 2"/>
+          <p:cNvSpPr>
+            <a:spLocks noGrp="1"/>
+          </p:cNvSpPr>
+          <p:nvPr>
+            <p:ph type="body" idx="1"/>
+          </p:nvPr>
+        </p:nvSpPr>
+        <p:spPr/>
+        <p:txBody>
+          <a:bodyPr/>
+          <a:lstStyle/>
+          <a:p>
+            <a:r>
+              <a:rPr lang="en-US" dirty="0"/>
+              <a:t/>
+            </a:r>
+            <a:endParaRPr lang="en-US" dirty="0"/>
+          </a:p>
+        </p:txBody>
+      </p:sp>
+      <p:sp>
+        <p:nvSpPr>
+          <p:cNvPr id="4" name="Slide Number Placeholder 3"/>
+          <p:cNvSpPr>
+            <a:spLocks noGrp="1"/>
+          </p:cNvSpPr>
+          <p:nvPr>
+            <p:ph type="sldNum" sz="quarter" idx="10"/>
+          </p:nvPr>
+        </p:nvSpPr>
+        <p:spPr/>
+        <p:txBody>
+          <a:bodyPr/>
+          <a:lstStyle/>
+          <a:p>
+            <a:fld id="{F7021451-1387-4CA6-816F-3879F97B5CBC}" type="slidenum">
+              <a:rPr lang="en-US"/>
+              <a:t>14</a:t>
+            </a:fld>
+            <a:endParaRPr lang="en-US"/>
+          </a:p>
+        </p:txBody>
+      </p:sp>
+    </p:spTree>
+    <p:extLst>
+      <p:ext uri="{BB962C8B-B14F-4D97-AF65-F5344CB8AC3E}">
+        <p14:creationId xmlns:p14="http://schemas.microsoft.com/office/powerpoint/2010/main" val="1024086991"/>
+      </p:ext>
+    </p:extLst>
+  </p:cSld>
+  <p:clrMapOvr>
+    <a:masterClrMapping/>
+  </p:clrMapOvr>
+</p:notes>
+</file>
+
 <file path=ppt/notesSlides/notesSlide2.xml><?xml version="1.0" encoding="utf-8"?>
 <p:notes xmlns:a="http://schemas.openxmlformats.org/drawingml/2006/main" xmlns:r="http://schemas.openxmlformats.org/officeDocument/2006/relationships" xmlns:p="http://schemas.openxmlformats.org/presentationml/2006/main">
   <p:cSld>
@@ -1149,6 +2489,94 @@
             <a:fld id="{F7021451-1387-4CA6-816F-3879F97B5CBC}" type="slidenum">
               <a:rPr lang="en-US"/>
               <a:t>8</a:t>
+            </a:fld>
+            <a:endParaRPr lang="en-US"/>
+          </a:p>
+        </p:txBody>
+      </p:sp>
+    </p:spTree>
+    <p:extLst>
+      <p:ext uri="{BB962C8B-B14F-4D97-AF65-F5344CB8AC3E}">
+        <p14:creationId xmlns:p14="http://schemas.microsoft.com/office/powerpoint/2010/main" val="1024086991"/>
+      </p:ext>
+    </p:extLst>
+  </p:cSld>
+  <p:clrMapOvr>
+    <a:masterClrMapping/>
+  </p:clrMapOvr>
+</p:notes>
+</file>
+
+<file path=ppt/notesSlides/notesSlide9.xml><?xml version="1.0" encoding="utf-8"?>
+<p:notes xmlns:a="http://schemas.openxmlformats.org/drawingml/2006/main" xmlns:r="http://schemas.openxmlformats.org/officeDocument/2006/relationships" xmlns:p="http://schemas.openxmlformats.org/presentationml/2006/main">
+  <p:cSld>
+    <p:spTree>
+      <p:nvGrpSpPr>
+        <p:cNvPr id="1" name=""/>
+        <p:cNvGrpSpPr/>
+        <p:nvPr/>
+      </p:nvGrpSpPr>
+      <p:grpSpPr>
+        <a:xfrm>
+          <a:off x="0" y="0"/>
+          <a:ext cx="0" cy="0"/>
+          <a:chOff x="0" y="0"/>
+          <a:chExt cx="0" cy="0"/>
+        </a:xfrm>
+      </p:grpSpPr>
+      <p:sp>
+        <p:nvSpPr>
+          <p:cNvPr id="2" name="Slide Image Placeholder 1"/>
+          <p:cNvSpPr>
+            <a:spLocks noGrp="1" noRot="1" noChangeAspect="1"/>
+          </p:cNvSpPr>
+          <p:nvPr>
+            <p:ph type="sldImg"/>
+          </p:nvPr>
+        </p:nvSpPr>
+        <p:spPr/>
+      </p:sp>
+      <p:sp>
+        <p:nvSpPr>
+          <p:cNvPr id="3" name="Notes Placeholder 2"/>
+          <p:cNvSpPr>
+            <a:spLocks noGrp="1"/>
+          </p:cNvSpPr>
+          <p:nvPr>
+            <p:ph type="body" idx="1"/>
+          </p:nvPr>
+        </p:nvSpPr>
+        <p:spPr/>
+        <p:txBody>
+          <a:bodyPr/>
+          <a:lstStyle/>
+          <a:p>
+            <a:r>
+              <a:rPr lang="en-US" dirty="0"/>
+              <a:t/>
+            </a:r>
+            <a:endParaRPr lang="en-US" dirty="0"/>
+          </a:p>
+        </p:txBody>
+      </p:sp>
+      <p:sp>
+        <p:nvSpPr>
+          <p:cNvPr id="4" name="Slide Number Placeholder 3"/>
+          <p:cNvSpPr>
+            <a:spLocks noGrp="1"/>
+          </p:cNvSpPr>
+          <p:nvPr>
+            <p:ph type="sldNum" sz="quarter" idx="10"/>
+          </p:nvPr>
+        </p:nvSpPr>
+        <p:spPr/>
+        <p:txBody>
+          <a:bodyPr/>
+          <a:lstStyle/>
+          <a:p>
+            <a:fld id="{F7021451-1387-4CA6-816F-3879F97B5CBC}" type="slidenum">
+              <a:rPr lang="en-US"/>
+              <a:t>9</a:t>
             </a:fld>
             <a:endParaRPr lang="en-US"/>
           </a:p>
@@ -1546,7 +2974,7 @@
         </p:nvSpPr>
         <p:spPr>
           <a:xfrm>
-            <a:off x="822960" y="1554480"/>
+            <a:off x="822960" y="1783080"/>
             <a:ext cx="10515600" cy="457200"/>
           </a:xfrm>
           <a:prstGeom prst="rect">
@@ -1586,7 +3014,7 @@
         <p:spPr>
           <a:xfrm>
             <a:off x="822960" y="2286000"/>
-            <a:ext cx="10515600" cy="1737360"/>
+            <a:ext cx="10607040" cy="1691640"/>
           </a:xfrm>
           <a:prstGeom prst="rect">
             <a:avLst/>
@@ -1602,7 +3030,7 @@
               <a:buNone/>
             </a:pPr>
             <a:r>
-              <a:rPr lang="en-US" sz="4400" b="1" dirty="0">
+              <a:rPr lang="en-US" sz="4100" b="1" dirty="0">
                 <a:solidFill>
                   <a:srgbClr val="FFFFFF"/>
                 </a:solidFill>
@@ -1610,9 +3038,9 @@
                 <a:ea typeface="Segoe UI" pitchFamily="34" charset="-122"/>
                 <a:cs typeface="Segoe UI" pitchFamily="34" charset="-120"/>
               </a:rPr>
-              <a:t>AML analytics with graph databases</a:t>
-            </a:r>
-            <a:endParaRPr lang="en-US" sz="4400" dirty="0"/>
+              <a:t>AML Analytics with Graph Databases</a:t>
+            </a:r>
+            <a:endParaRPr lang="en-US" sz="4100" dirty="0"/>
           </a:p>
         </p:txBody>
       </p:sp>
@@ -1624,8 +3052,8 @@
         </p:nvSpPr>
         <p:spPr>
           <a:xfrm>
-            <a:off x="822960" y="4206240"/>
-            <a:ext cx="10515600" cy="914400"/>
+            <a:off x="822960" y="4023360"/>
+            <a:ext cx="10058400" cy="777240"/>
           </a:xfrm>
           <a:prstGeom prst="rect">
             <a:avLst/>
@@ -1641,7 +3069,7 @@
               <a:buNone/>
             </a:pPr>
             <a:r>
-              <a:rPr lang="en-US" sz="1600" dirty="0">
+              <a:rPr lang="en-US" sz="1700" dirty="0">
                 <a:solidFill>
                   <a:srgbClr val="94A3B8"/>
                 </a:solidFill>
@@ -1649,21 +3077,83 @@
                 <a:ea typeface="Segoe UI" pitchFamily="34" charset="-122"/>
                 <a:cs typeface="Segoe UI" pitchFamily="34" charset="-120"/>
               </a:rPr>
-              <a:t>Analysis work with Bank Rakyat Indonesia (BRI) · IT Business Analyst · Rezalian Vatiady</a:t>
-            </a:r>
-            <a:endParaRPr lang="en-US" sz="1600" dirty="0"/>
-          </a:p>
-        </p:txBody>
-      </p:sp>
-      <p:sp>
-        <p:nvSpPr>
-          <p:cNvPr id="7" name="Text 5"/>
-          <p:cNvSpPr/>
-          <p:nvPr/>
-        </p:nvSpPr>
-        <p:spPr>
-          <a:xfrm>
-            <a:off x="10698480" y="6355080"/>
+              <a:t>Fraud is a network problem - network problems need graphs</a:t>
+            </a:r>
+            <a:endParaRPr lang="en-US" sz="1700" dirty="0"/>
+          </a:p>
+        </p:txBody>
+      </p:sp>
+      <p:sp>
+        <p:nvSpPr>
+          <p:cNvPr id="7" name="Shape 5"/>
+          <p:cNvSpPr/>
+          <p:nvPr/>
+        </p:nvSpPr>
+        <p:spPr>
+          <a:xfrm>
+            <a:off x="822960" y="5440680"/>
+            <a:ext cx="4114800" cy="0"/>
+          </a:xfrm>
+          <a:prstGeom prst="line">
+            <a:avLst/>
+          </a:prstGeom>
+          <a:noFill/>
+          <a:ln w="31750">
+            <a:solidFill>
+              <a:srgbClr val="3B82F6"/>
+            </a:solidFill>
+            <a:prstDash val="solid"/>
+          </a:ln>
+        </p:spPr>
+      </p:sp>
+      <p:sp>
+        <p:nvSpPr>
+          <p:cNvPr id="8" name="Text 6"/>
+          <p:cNvSpPr/>
+          <p:nvPr/>
+        </p:nvSpPr>
+        <p:spPr>
+          <a:xfrm>
+            <a:off x="822960" y="5596128"/>
+            <a:ext cx="10058400" cy="457200"/>
+          </a:xfrm>
+          <a:prstGeom prst="rect">
+            <a:avLst/>
+          </a:prstGeom>
+          <a:noFill/>
+          <a:ln/>
+        </p:spPr>
+        <p:txBody>
+          <a:bodyPr wrap="square" rtlCol="0" anchor="ctr"/>
+          <a:lstStyle/>
+          <a:p>
+            <a:pPr indent="0" marL="0">
+              <a:buNone/>
+            </a:pPr>
+            <a:r>
+              <a:rPr lang="en-US" sz="1250" dirty="0">
+                <a:solidFill>
+                  <a:srgbClr val="64748B"/>
+                </a:solidFill>
+                <a:latin typeface="Segoe UI" pitchFamily="34" charset="0"/>
+                <a:ea typeface="Segoe UI" pitchFamily="34" charset="-122"/>
+                <a:cs typeface="Segoe UI" pitchFamily="34" charset="-120"/>
+              </a:rPr>
+              <a:t>Rezalian Vatiady · Zalin Labs · 2026</a:t>
+            </a:r>
+            <a:endParaRPr lang="en-US" sz="1250" dirty="0"/>
+          </a:p>
+        </p:txBody>
+      </p:sp>
+      <p:sp>
+        <p:nvSpPr>
+          <p:cNvPr id="9" name="Text 7"/>
+          <p:cNvSpPr/>
+          <p:nvPr/>
+        </p:nvSpPr>
+        <p:spPr>
+          <a:xfrm>
+            <a:off x="10698480" y="6382512"/>
             <a:ext cx="1188720" cy="365760"/>
           </a:xfrm>
           <a:prstGeom prst="rect">
@@ -1688,7 +3178,1870 @@
                 <a:ea typeface="Consolas" pitchFamily="34" charset="-122"/>
                 <a:cs typeface="Consolas" pitchFamily="34" charset="-120"/>
               </a:rPr>
-              <a:t>1 / 8</a:t>
+              <a:t>1 / 14</a:t>
+            </a:r>
+            <a:endParaRPr lang="en-US" sz="1000" dirty="0"/>
+          </a:p>
+        </p:txBody>
+      </p:sp>
+    </p:spTree>
+  </p:cSld>
+  <p:clrMapOvr>
+    <a:masterClrMapping/>
+  </p:clrMapOvr>
+</p:sld>
+</file>
+
+<file path=ppt/slides/slide10.xml><?xml version="1.0" encoding="utf-8"?>
+<p:sld xmlns:a="http://schemas.openxmlformats.org/drawingml/2006/main" xmlns:r="http://schemas.openxmlformats.org/officeDocument/2006/relationships" xmlns:p="http://schemas.openxmlformats.org/presentationml/2006/main">
+  <p:cSld name="Slide 10">
+    <p:bg>
+      <p:bgPr>
+        <a:solidFill>
+          <a:srgbClr val="0A0C12"/>
+        </a:solidFill>
+      </p:bgPr>
+    </p:bg>
+    <p:spTree>
+      <p:nvGrpSpPr>
+        <p:cNvPr id="1" name=""/>
+        <p:cNvGrpSpPr/>
+        <p:nvPr/>
+      </p:nvGrpSpPr>
+      <p:grpSpPr>
+        <a:xfrm>
+          <a:off x="0" y="0"/>
+          <a:ext cx="0" cy="0"/>
+          <a:chOff x="0" y="0"/>
+          <a:chExt cx="0" cy="0"/>
+        </a:xfrm>
+      </p:grpSpPr>
+      <p:sp>
+        <p:nvSpPr>
+          <p:cNvPr id="2" name="Shape 0"/>
+          <p:cNvSpPr/>
+          <p:nvPr/>
+        </p:nvSpPr>
+        <p:spPr>
+          <a:xfrm>
+            <a:off x="0" y="0"/>
+            <a:ext cx="7680960" cy="64008"/>
+          </a:xfrm>
+          <a:prstGeom prst="rect">
+            <a:avLst/>
+          </a:prstGeom>
+          <a:solidFill>
+            <a:srgbClr val="3B82F6"/>
+          </a:solidFill>
+          <a:ln/>
+        </p:spPr>
+      </p:sp>
+      <p:sp>
+        <p:nvSpPr>
+          <p:cNvPr id="3" name="Shape 1"/>
+          <p:cNvSpPr/>
+          <p:nvPr/>
+        </p:nvSpPr>
+        <p:spPr>
+          <a:xfrm>
+            <a:off x="7680960" y="0"/>
+            <a:ext cx="4510735" cy="64008"/>
+          </a:xfrm>
+          <a:prstGeom prst="rect">
+            <a:avLst/>
+          </a:prstGeom>
+          <a:solidFill>
+            <a:srgbClr val="06B6D4"/>
+          </a:solidFill>
+          <a:ln/>
+        </p:spPr>
+      </p:sp>
+      <p:sp>
+        <p:nvSpPr>
+          <p:cNvPr id="4" name="Text 2"/>
+          <p:cNvSpPr/>
+          <p:nvPr/>
+        </p:nvSpPr>
+        <p:spPr>
+          <a:xfrm>
+            <a:off x="822960" y="502920"/>
+            <a:ext cx="10515600" cy="365760"/>
+          </a:xfrm>
+          <a:prstGeom prst="rect">
+            <a:avLst/>
+          </a:prstGeom>
+          <a:noFill/>
+          <a:ln/>
+        </p:spPr>
+        <p:txBody>
+          <a:bodyPr wrap="square" rtlCol="0" anchor="ctr"/>
+          <a:lstStyle/>
+          <a:p>
+            <a:pPr indent="0" marL="0">
+              <a:buNone/>
+            </a:pPr>
+            <a:r>
+              <a:rPr lang="en-US" sz="1200" spc="300" kern="0" dirty="0">
+                <a:solidFill>
+                  <a:srgbClr val="06B6D4"/>
+                </a:solidFill>
+                <a:latin typeface="Consolas" pitchFamily="34" charset="0"/>
+                <a:ea typeface="Consolas" pitchFamily="34" charset="-122"/>
+                <a:cs typeface="Consolas" pitchFamily="34" charset="-120"/>
+              </a:rPr>
+              <a:t>PATTERN MATURITY</a:t>
+            </a:r>
+            <a:endParaRPr lang="en-US" sz="1200" dirty="0"/>
+          </a:p>
+        </p:txBody>
+      </p:sp>
+      <p:sp>
+        <p:nvSpPr>
+          <p:cNvPr id="5" name="Text 3"/>
+          <p:cNvSpPr/>
+          <p:nvPr/>
+        </p:nvSpPr>
+        <p:spPr>
+          <a:xfrm>
+            <a:off x="822960" y="914400"/>
+            <a:ext cx="10561320" cy="868680"/>
+          </a:xfrm>
+          <a:prstGeom prst="rect">
+            <a:avLst/>
+          </a:prstGeom>
+          <a:noFill/>
+          <a:ln/>
+        </p:spPr>
+        <p:txBody>
+          <a:bodyPr wrap="square" rtlCol="0" anchor="ctr"/>
+          <a:lstStyle/>
+          <a:p>
+            <a:pPr indent="0" marL="0">
+              <a:buNone/>
+            </a:pPr>
+            <a:r>
+              <a:rPr lang="en-US" sz="2700" b="1" dirty="0">
+                <a:solidFill>
+                  <a:srgbClr val="FFFFFF"/>
+                </a:solidFill>
+                <a:latin typeface="Segoe UI" pitchFamily="34" charset="0"/>
+                <a:ea typeface="Segoe UI" pitchFamily="34" charset="-122"/>
+                <a:cs typeface="Segoe UI" pitchFamily="34" charset="-120"/>
+              </a:rPr>
+              <a:t>Reviewer trust grew with iteration, not with more queries</a:t>
+            </a:r>
+            <a:endParaRPr lang="en-US" sz="2700" dirty="0"/>
+          </a:p>
+        </p:txBody>
+      </p:sp>
+      <p:graphicFrame>
+        <p:nvGraphicFramePr>
+          <p:cNvPr id="6" name="Chart 0" descr=""/>
+          <p:cNvGraphicFramePr/>
+          <p:nvPr/>
+        </p:nvGraphicFramePr>
+        <p:xfrm>
+          <a:off x="822960" y="1874520"/>
+          <a:ext cx="10515600" cy="3337560"/>
+        </p:xfrm>
+        <a:graphic xmlns:a="http://schemas.openxmlformats.org/drawingml/2006/main">
+          <a:graphicData uri="http://schemas.openxmlformats.org/drawingml/2006/chart">
+            <c:chart xmlns:c="http://schemas.openxmlformats.org/drawingml/2006/chart" r:id="rId1"/>
+          </a:graphicData>
+        </a:graphic>
+      </p:graphicFrame>
+      <p:sp>
+        <p:nvSpPr>
+          <p:cNvPr id="7" name="Shape 4"/>
+          <p:cNvSpPr/>
+          <p:nvPr/>
+        </p:nvSpPr>
+        <p:spPr>
+          <a:xfrm>
+            <a:off x="822960" y="5413248"/>
+            <a:ext cx="10515600" cy="0"/>
+          </a:xfrm>
+          <a:prstGeom prst="line">
+            <a:avLst/>
+          </a:prstGeom>
+          <a:noFill/>
+          <a:ln w="12700">
+            <a:solidFill>
+              <a:srgbClr val="1E2D45"/>
+            </a:solidFill>
+            <a:prstDash val="solid"/>
+          </a:ln>
+        </p:spPr>
+      </p:sp>
+      <p:sp>
+        <p:nvSpPr>
+          <p:cNvPr id="8" name="Text 5"/>
+          <p:cNvSpPr/>
+          <p:nvPr/>
+        </p:nvSpPr>
+        <p:spPr>
+          <a:xfrm>
+            <a:off x="822960" y="5504688"/>
+            <a:ext cx="10424160" cy="411480"/>
+          </a:xfrm>
+          <a:prstGeom prst="rect">
+            <a:avLst/>
+          </a:prstGeom>
+          <a:noFill/>
+          <a:ln/>
+        </p:spPr>
+        <p:txBody>
+          <a:bodyPr wrap="square" rtlCol="0" anchor="ctr"/>
+          <a:lstStyle/>
+          <a:p>
+            <a:pPr indent="0" marL="0">
+              <a:buNone/>
+            </a:pPr>
+            <a:r>
+              <a:rPr lang="en-US" sz="1300" i="1" dirty="0">
+                <a:solidFill>
+                  <a:srgbClr val="06B6D4"/>
+                </a:solidFill>
+                <a:latin typeface="Segoe UI" pitchFamily="34" charset="0"/>
+                <a:ea typeface="Segoe UI" pitchFamily="34" charset="-122"/>
+                <a:cs typeface="Segoe UI" pitchFamily="34" charset="-120"/>
+              </a:rPr>
+              <a:t>→  Each review cycle tightened definitions until patterns survived compliance review first time.</a:t>
+            </a:r>
+            <a:endParaRPr lang="en-US" sz="1300" dirty="0"/>
+          </a:p>
+        </p:txBody>
+      </p:sp>
+      <p:sp>
+        <p:nvSpPr>
+          <p:cNvPr id="9" name="Shape 6"/>
+          <p:cNvSpPr/>
+          <p:nvPr/>
+        </p:nvSpPr>
+        <p:spPr>
+          <a:xfrm>
+            <a:off x="822960" y="5961888"/>
+            <a:ext cx="10515600" cy="0"/>
+          </a:xfrm>
+          <a:prstGeom prst="line">
+            <a:avLst/>
+          </a:prstGeom>
+          <a:noFill/>
+          <a:ln w="12700">
+            <a:solidFill>
+              <a:srgbClr val="1E2D45"/>
+            </a:solidFill>
+            <a:prstDash val="solid"/>
+          </a:ln>
+        </p:spPr>
+      </p:sp>
+      <p:sp>
+        <p:nvSpPr>
+          <p:cNvPr id="10" name="Text 7"/>
+          <p:cNvSpPr/>
+          <p:nvPr/>
+        </p:nvSpPr>
+        <p:spPr>
+          <a:xfrm>
+            <a:off x="822960" y="6053328"/>
+            <a:ext cx="9692640" cy="457200"/>
+          </a:xfrm>
+          <a:prstGeom prst="rect">
+            <a:avLst/>
+          </a:prstGeom>
+          <a:noFill/>
+          <a:ln/>
+        </p:spPr>
+        <p:txBody>
+          <a:bodyPr wrap="square" rtlCol="0" anchor="ctr"/>
+          <a:lstStyle/>
+          <a:p>
+            <a:pPr indent="0" marL="0">
+              <a:buNone/>
+            </a:pPr>
+            <a:r>
+              <a:rPr lang="en-US" sz="1150" dirty="0">
+                <a:solidFill>
+                  <a:srgbClr val="64748B"/>
+                </a:solidFill>
+                <a:latin typeface="Segoe UI" pitchFamily="34" charset="0"/>
+                <a:ea typeface="Segoe UI" pitchFamily="34" charset="-122"/>
+                <a:cs typeface="Segoe UI" pitchFamily="34" charset="-120"/>
+              </a:rPr>
+              <a:t>Illustrative iteration curve across review cycles.</a:t>
+            </a:r>
+            <a:endParaRPr lang="en-US" sz="1150" dirty="0"/>
+          </a:p>
+        </p:txBody>
+      </p:sp>
+      <p:sp>
+        <p:nvSpPr>
+          <p:cNvPr id="11" name="Text 8"/>
+          <p:cNvSpPr/>
+          <p:nvPr/>
+        </p:nvSpPr>
+        <p:spPr>
+          <a:xfrm>
+            <a:off x="10698480" y="6382512"/>
+            <a:ext cx="1188720" cy="365760"/>
+          </a:xfrm>
+          <a:prstGeom prst="rect">
+            <a:avLst/>
+          </a:prstGeom>
+          <a:noFill/>
+          <a:ln/>
+        </p:spPr>
+        <p:txBody>
+          <a:bodyPr wrap="square" rtlCol="0" anchor="ctr"/>
+          <a:lstStyle/>
+          <a:p>
+            <a:pPr algn="r" indent="0" marL="0">
+              <a:buNone/>
+            </a:pPr>
+            <a:r>
+              <a:rPr lang="en-US" sz="1000" dirty="0">
+                <a:solidFill>
+                  <a:srgbClr val="64748B"/>
+                </a:solidFill>
+                <a:latin typeface="Consolas" pitchFamily="34" charset="0"/>
+                <a:ea typeface="Consolas" pitchFamily="34" charset="-122"/>
+                <a:cs typeface="Consolas" pitchFamily="34" charset="-120"/>
+              </a:rPr>
+              <a:t>10 / 14</a:t>
+            </a:r>
+            <a:endParaRPr lang="en-US" sz="1000" dirty="0"/>
+          </a:p>
+        </p:txBody>
+      </p:sp>
+    </p:spTree>
+  </p:cSld>
+  <p:clrMapOvr>
+    <a:masterClrMapping/>
+  </p:clrMapOvr>
+</p:sld>
+</file>
+
+<file path=ppt/slides/slide11.xml><?xml version="1.0" encoding="utf-8"?>
+<p:sld xmlns:a="http://schemas.openxmlformats.org/drawingml/2006/main" xmlns:r="http://schemas.openxmlformats.org/officeDocument/2006/relationships" xmlns:p="http://schemas.openxmlformats.org/presentationml/2006/main">
+  <p:cSld name="Slide 11">
+    <p:bg>
+      <p:bgPr>
+        <a:solidFill>
+          <a:srgbClr val="0A0C12"/>
+        </a:solidFill>
+      </p:bgPr>
+    </p:bg>
+    <p:spTree>
+      <p:nvGrpSpPr>
+        <p:cNvPr id="1" name=""/>
+        <p:cNvGrpSpPr/>
+        <p:nvPr/>
+      </p:nvGrpSpPr>
+      <p:grpSpPr>
+        <a:xfrm>
+          <a:off x="0" y="0"/>
+          <a:ext cx="0" cy="0"/>
+          <a:chOff x="0" y="0"/>
+          <a:chExt cx="0" cy="0"/>
+        </a:xfrm>
+      </p:grpSpPr>
+      <p:sp>
+        <p:nvSpPr>
+          <p:cNvPr id="2" name="Shape 0"/>
+          <p:cNvSpPr/>
+          <p:nvPr/>
+        </p:nvSpPr>
+        <p:spPr>
+          <a:xfrm>
+            <a:off x="0" y="0"/>
+            <a:ext cx="7680960" cy="64008"/>
+          </a:xfrm>
+          <a:prstGeom prst="rect">
+            <a:avLst/>
+          </a:prstGeom>
+          <a:solidFill>
+            <a:srgbClr val="3B82F6"/>
+          </a:solidFill>
+          <a:ln/>
+        </p:spPr>
+      </p:sp>
+      <p:sp>
+        <p:nvSpPr>
+          <p:cNvPr id="3" name="Shape 1"/>
+          <p:cNvSpPr/>
+          <p:nvPr/>
+        </p:nvSpPr>
+        <p:spPr>
+          <a:xfrm>
+            <a:off x="7680960" y="0"/>
+            <a:ext cx="4510735" cy="64008"/>
+          </a:xfrm>
+          <a:prstGeom prst="rect">
+            <a:avLst/>
+          </a:prstGeom>
+          <a:solidFill>
+            <a:srgbClr val="06B6D4"/>
+          </a:solidFill>
+          <a:ln/>
+        </p:spPr>
+      </p:sp>
+      <p:sp>
+        <p:nvSpPr>
+          <p:cNvPr id="4" name="Text 2"/>
+          <p:cNvSpPr/>
+          <p:nvPr/>
+        </p:nvSpPr>
+        <p:spPr>
+          <a:xfrm>
+            <a:off x="822960" y="502920"/>
+            <a:ext cx="10515600" cy="365760"/>
+          </a:xfrm>
+          <a:prstGeom prst="rect">
+            <a:avLst/>
+          </a:prstGeom>
+          <a:noFill/>
+          <a:ln/>
+        </p:spPr>
+        <p:txBody>
+          <a:bodyPr wrap="square" rtlCol="0" anchor="ctr"/>
+          <a:lstStyle/>
+          <a:p>
+            <a:pPr indent="0" marL="0">
+              <a:buNone/>
+            </a:pPr>
+            <a:r>
+              <a:rPr lang="en-US" sz="1200" spc="300" kern="0" dirty="0">
+                <a:solidFill>
+                  <a:srgbClr val="06B6D4"/>
+                </a:solidFill>
+                <a:latin typeface="Consolas" pitchFamily="34" charset="0"/>
+                <a:ea typeface="Consolas" pitchFamily="34" charset="-122"/>
+                <a:cs typeface="Consolas" pitchFamily="34" charset="-120"/>
+              </a:rPr>
+              <a:t>WHAT MAKES A DETECTION ACTIONABLE</a:t>
+            </a:r>
+            <a:endParaRPr lang="en-US" sz="1200" dirty="0"/>
+          </a:p>
+        </p:txBody>
+      </p:sp>
+      <p:sp>
+        <p:nvSpPr>
+          <p:cNvPr id="5" name="Text 3"/>
+          <p:cNvSpPr/>
+          <p:nvPr/>
+        </p:nvSpPr>
+        <p:spPr>
+          <a:xfrm>
+            <a:off x="822960" y="914400"/>
+            <a:ext cx="10561320" cy="868680"/>
+          </a:xfrm>
+          <a:prstGeom prst="rect">
+            <a:avLst/>
+          </a:prstGeom>
+          <a:noFill/>
+          <a:ln/>
+        </p:spPr>
+        <p:txBody>
+          <a:bodyPr wrap="square" rtlCol="0" anchor="ctr"/>
+          <a:lstStyle/>
+          <a:p>
+            <a:pPr indent="0" marL="0">
+              <a:buNone/>
+            </a:pPr>
+            <a:r>
+              <a:rPr lang="en-US" sz="2700" b="1" dirty="0">
+                <a:solidFill>
+                  <a:srgbClr val="FFFFFF"/>
+                </a:solidFill>
+                <a:latin typeface="Segoe UI" pitchFamily="34" charset="0"/>
+                <a:ea typeface="Segoe UI" pitchFamily="34" charset="-122"/>
+                <a:cs typeface="Segoe UI" pitchFamily="34" charset="-120"/>
+              </a:rPr>
+              <a:t>An explainable detection is an actionable detection</a:t>
+            </a:r>
+            <a:endParaRPr lang="en-US" sz="2700" dirty="0"/>
+          </a:p>
+        </p:txBody>
+      </p:sp>
+      <p:graphicFrame>
+        <p:nvGraphicFramePr>
+          <p:cNvPr id="6" name="Chart 0" descr=""/>
+          <p:cNvGraphicFramePr/>
+          <p:nvPr/>
+        </p:nvGraphicFramePr>
+        <p:xfrm>
+          <a:off x="822960" y="1874520"/>
+          <a:ext cx="10515600" cy="3337560"/>
+        </p:xfrm>
+        <a:graphic xmlns:a="http://schemas.openxmlformats.org/drawingml/2006/main">
+          <a:graphicData uri="http://schemas.openxmlformats.org/drawingml/2006/chart">
+            <c:chart xmlns:c="http://schemas.openxmlformats.org/drawingml/2006/chart" r:id="rId1"/>
+          </a:graphicData>
+        </a:graphic>
+      </p:graphicFrame>
+      <p:sp>
+        <p:nvSpPr>
+          <p:cNvPr id="7" name="Shape 4"/>
+          <p:cNvSpPr/>
+          <p:nvPr/>
+        </p:nvSpPr>
+        <p:spPr>
+          <a:xfrm>
+            <a:off x="822960" y="5413248"/>
+            <a:ext cx="10515600" cy="0"/>
+          </a:xfrm>
+          <a:prstGeom prst="line">
+            <a:avLst/>
+          </a:prstGeom>
+          <a:noFill/>
+          <a:ln w="12700">
+            <a:solidFill>
+              <a:srgbClr val="1E2D45"/>
+            </a:solidFill>
+            <a:prstDash val="solid"/>
+          </a:ln>
+        </p:spPr>
+      </p:sp>
+      <p:sp>
+        <p:nvSpPr>
+          <p:cNvPr id="8" name="Text 5"/>
+          <p:cNvSpPr/>
+          <p:nvPr/>
+        </p:nvSpPr>
+        <p:spPr>
+          <a:xfrm>
+            <a:off x="822960" y="5504688"/>
+            <a:ext cx="10424160" cy="411480"/>
+          </a:xfrm>
+          <a:prstGeom prst="rect">
+            <a:avLst/>
+          </a:prstGeom>
+          <a:noFill/>
+          <a:ln/>
+        </p:spPr>
+        <p:txBody>
+          <a:bodyPr wrap="square" rtlCol="0" anchor="ctr"/>
+          <a:lstStyle/>
+          <a:p>
+            <a:pPr indent="0" marL="0">
+              <a:buNone/>
+            </a:pPr>
+            <a:r>
+              <a:rPr lang="en-US" sz="1300" i="1" dirty="0">
+                <a:solidFill>
+                  <a:srgbClr val="06B6D4"/>
+                </a:solidFill>
+                <a:latin typeface="Segoe UI" pitchFamily="34" charset="0"/>
+                <a:ea typeface="Segoe UI" pitchFamily="34" charset="-122"/>
+                <a:cs typeface="Segoe UI" pitchFamily="34" charset="-120"/>
+              </a:rPr>
+              <a:t>→  Detection logic reviewers can replay and explain is what converts alerts into action.</a:t>
+            </a:r>
+            <a:endParaRPr lang="en-US" sz="1300" dirty="0"/>
+          </a:p>
+        </p:txBody>
+      </p:sp>
+      <p:sp>
+        <p:nvSpPr>
+          <p:cNvPr id="9" name="Shape 6"/>
+          <p:cNvSpPr/>
+          <p:nvPr/>
+        </p:nvSpPr>
+        <p:spPr>
+          <a:xfrm>
+            <a:off x="822960" y="5961888"/>
+            <a:ext cx="10515600" cy="0"/>
+          </a:xfrm>
+          <a:prstGeom prst="line">
+            <a:avLst/>
+          </a:prstGeom>
+          <a:noFill/>
+          <a:ln w="12700">
+            <a:solidFill>
+              <a:srgbClr val="1E2D45"/>
+            </a:solidFill>
+            <a:prstDash val="solid"/>
+          </a:ln>
+        </p:spPr>
+      </p:sp>
+      <p:sp>
+        <p:nvSpPr>
+          <p:cNvPr id="10" name="Text 7"/>
+          <p:cNvSpPr/>
+          <p:nvPr/>
+        </p:nvSpPr>
+        <p:spPr>
+          <a:xfrm>
+            <a:off x="822960" y="6053328"/>
+            <a:ext cx="9692640" cy="457200"/>
+          </a:xfrm>
+          <a:prstGeom prst="rect">
+            <a:avLst/>
+          </a:prstGeom>
+          <a:noFill/>
+          <a:ln/>
+        </p:spPr>
+        <p:txBody>
+          <a:bodyPr wrap="square" rtlCol="0" anchor="ctr"/>
+          <a:lstStyle/>
+          <a:p>
+            <a:pPr indent="0" marL="0">
+              <a:buNone/>
+            </a:pPr>
+            <a:r>
+              <a:rPr lang="en-US" sz="1150" dirty="0">
+                <a:solidFill>
+                  <a:srgbClr val="64748B"/>
+                </a:solidFill>
+                <a:latin typeface="Segoe UI" pitchFamily="34" charset="0"/>
+                <a:ea typeface="Segoe UI" pitchFamily="34" charset="-122"/>
+                <a:cs typeface="Segoe UI" pitchFamily="34" charset="-120"/>
+              </a:rPr>
+              <a:t>Illustrative weighting of review criteria from the engagement.</a:t>
+            </a:r>
+            <a:endParaRPr lang="en-US" sz="1150" dirty="0"/>
+          </a:p>
+        </p:txBody>
+      </p:sp>
+      <p:sp>
+        <p:nvSpPr>
+          <p:cNvPr id="11" name="Text 8"/>
+          <p:cNvSpPr/>
+          <p:nvPr/>
+        </p:nvSpPr>
+        <p:spPr>
+          <a:xfrm>
+            <a:off x="10698480" y="6382512"/>
+            <a:ext cx="1188720" cy="365760"/>
+          </a:xfrm>
+          <a:prstGeom prst="rect">
+            <a:avLst/>
+          </a:prstGeom>
+          <a:noFill/>
+          <a:ln/>
+        </p:spPr>
+        <p:txBody>
+          <a:bodyPr wrap="square" rtlCol="0" anchor="ctr"/>
+          <a:lstStyle/>
+          <a:p>
+            <a:pPr algn="r" indent="0" marL="0">
+              <a:buNone/>
+            </a:pPr>
+            <a:r>
+              <a:rPr lang="en-US" sz="1000" dirty="0">
+                <a:solidFill>
+                  <a:srgbClr val="64748B"/>
+                </a:solidFill>
+                <a:latin typeface="Consolas" pitchFamily="34" charset="0"/>
+                <a:ea typeface="Consolas" pitchFamily="34" charset="-122"/>
+                <a:cs typeface="Consolas" pitchFamily="34" charset="-120"/>
+              </a:rPr>
+              <a:t>11 / 14</a:t>
+            </a:r>
+            <a:endParaRPr lang="en-US" sz="1000" dirty="0"/>
+          </a:p>
+        </p:txBody>
+      </p:sp>
+    </p:spTree>
+  </p:cSld>
+  <p:clrMapOvr>
+    <a:masterClrMapping/>
+  </p:clrMapOvr>
+</p:sld>
+</file>
+
+<file path=ppt/slides/slide12.xml><?xml version="1.0" encoding="utf-8"?>
+<p:sld xmlns:a="http://schemas.openxmlformats.org/drawingml/2006/main" xmlns:r="http://schemas.openxmlformats.org/officeDocument/2006/relationships" xmlns:p="http://schemas.openxmlformats.org/presentationml/2006/main">
+  <p:cSld name="Slide 12">
+    <p:bg>
+      <p:bgPr>
+        <a:solidFill>
+          <a:srgbClr val="0A0C12"/>
+        </a:solidFill>
+      </p:bgPr>
+    </p:bg>
+    <p:spTree>
+      <p:nvGrpSpPr>
+        <p:cNvPr id="1" name=""/>
+        <p:cNvGrpSpPr/>
+        <p:nvPr/>
+      </p:nvGrpSpPr>
+      <p:grpSpPr>
+        <a:xfrm>
+          <a:off x="0" y="0"/>
+          <a:ext cx="0" cy="0"/>
+          <a:chOff x="0" y="0"/>
+          <a:chExt cx="0" cy="0"/>
+        </a:xfrm>
+      </p:grpSpPr>
+      <p:sp>
+        <p:nvSpPr>
+          <p:cNvPr id="2" name="Shape 0"/>
+          <p:cNvSpPr/>
+          <p:nvPr/>
+        </p:nvSpPr>
+        <p:spPr>
+          <a:xfrm>
+            <a:off x="0" y="0"/>
+            <a:ext cx="7680960" cy="64008"/>
+          </a:xfrm>
+          <a:prstGeom prst="rect">
+            <a:avLst/>
+          </a:prstGeom>
+          <a:solidFill>
+            <a:srgbClr val="3B82F6"/>
+          </a:solidFill>
+          <a:ln/>
+        </p:spPr>
+      </p:sp>
+      <p:sp>
+        <p:nvSpPr>
+          <p:cNvPr id="3" name="Shape 1"/>
+          <p:cNvSpPr/>
+          <p:nvPr/>
+        </p:nvSpPr>
+        <p:spPr>
+          <a:xfrm>
+            <a:off x="7680960" y="0"/>
+            <a:ext cx="4510735" cy="64008"/>
+          </a:xfrm>
+          <a:prstGeom prst="rect">
+            <a:avLst/>
+          </a:prstGeom>
+          <a:solidFill>
+            <a:srgbClr val="06B6D4"/>
+          </a:solidFill>
+          <a:ln/>
+        </p:spPr>
+      </p:sp>
+      <p:sp>
+        <p:nvSpPr>
+          <p:cNvPr id="4" name="Text 2"/>
+          <p:cNvSpPr/>
+          <p:nvPr/>
+        </p:nvSpPr>
+        <p:spPr>
+          <a:xfrm>
+            <a:off x="822960" y="502920"/>
+            <a:ext cx="10515600" cy="365760"/>
+          </a:xfrm>
+          <a:prstGeom prst="rect">
+            <a:avLst/>
+          </a:prstGeom>
+          <a:noFill/>
+          <a:ln/>
+        </p:spPr>
+        <p:txBody>
+          <a:bodyPr wrap="square" rtlCol="0" anchor="ctr"/>
+          <a:lstStyle/>
+          <a:p>
+            <a:pPr indent="0" marL="0">
+              <a:buNone/>
+            </a:pPr>
+            <a:r>
+              <a:rPr lang="en-US" sz="1200" spc="300" kern="0" dirty="0">
+                <a:solidFill>
+                  <a:srgbClr val="06B6D4"/>
+                </a:solidFill>
+                <a:latin typeface="Consolas" pitchFamily="34" charset="0"/>
+                <a:ea typeface="Consolas" pitchFamily="34" charset="-122"/>
+                <a:cs typeface="Consolas" pitchFamily="34" charset="-120"/>
+              </a:rPr>
+              <a:t>THE COMPARISON</a:t>
+            </a:r>
+            <a:endParaRPr lang="en-US" sz="1200" dirty="0"/>
+          </a:p>
+        </p:txBody>
+      </p:sp>
+      <p:sp>
+        <p:nvSpPr>
+          <p:cNvPr id="5" name="Text 3"/>
+          <p:cNvSpPr/>
+          <p:nvPr/>
+        </p:nvSpPr>
+        <p:spPr>
+          <a:xfrm>
+            <a:off x="822960" y="914400"/>
+            <a:ext cx="10561320" cy="868680"/>
+          </a:xfrm>
+          <a:prstGeom prst="rect">
+            <a:avLst/>
+          </a:prstGeom>
+          <a:noFill/>
+          <a:ln/>
+        </p:spPr>
+        <p:txBody>
+          <a:bodyPr wrap="square" rtlCol="0" anchor="ctr"/>
+          <a:lstStyle/>
+          <a:p>
+            <a:pPr indent="0" marL="0">
+              <a:buNone/>
+            </a:pPr>
+            <a:r>
+              <a:rPr lang="en-US" sz="2700" b="1" dirty="0">
+                <a:solidFill>
+                  <a:srgbClr val="FFFFFF"/>
+                </a:solidFill>
+                <a:latin typeface="Segoe UI" pitchFamily="34" charset="0"/>
+                <a:ea typeface="Segoe UI" pitchFamily="34" charset="-122"/>
+                <a:cs typeface="Segoe UI" pitchFamily="34" charset="-120"/>
+              </a:rPr>
+              <a:t>Model the transactions, or model the relationships</a:t>
+            </a:r>
+            <a:endParaRPr lang="en-US" sz="2700" dirty="0"/>
+          </a:p>
+        </p:txBody>
+      </p:sp>
+      <p:sp>
+        <p:nvSpPr>
+          <p:cNvPr id="6" name="Shape 4"/>
+          <p:cNvSpPr/>
+          <p:nvPr/>
+        </p:nvSpPr>
+        <p:spPr>
+          <a:xfrm>
+            <a:off x="822960" y="2011680"/>
+            <a:ext cx="5074920" cy="3611880"/>
+          </a:xfrm>
+          <a:prstGeom prst="roundRect">
+            <a:avLst>
+              <a:gd name="adj" fmla="val 2025"/>
+            </a:avLst>
+          </a:prstGeom>
+          <a:solidFill>
+            <a:srgbClr val="111A2E"/>
+          </a:solidFill>
+          <a:ln w="12700">
+            <a:solidFill>
+              <a:srgbClr val="1E2D45"/>
+            </a:solidFill>
+            <a:prstDash val="solid"/>
+          </a:ln>
+        </p:spPr>
+      </p:sp>
+      <p:sp>
+        <p:nvSpPr>
+          <p:cNvPr id="7" name="Text 5"/>
+          <p:cNvSpPr/>
+          <p:nvPr/>
+        </p:nvSpPr>
+        <p:spPr>
+          <a:xfrm>
+            <a:off x="1097280" y="2240280"/>
+            <a:ext cx="4526280" cy="502920"/>
+          </a:xfrm>
+          <a:prstGeom prst="rect">
+            <a:avLst/>
+          </a:prstGeom>
+          <a:noFill/>
+          <a:ln/>
+        </p:spPr>
+        <p:txBody>
+          <a:bodyPr wrap="square" rtlCol="0" anchor="ctr"/>
+          <a:lstStyle/>
+          <a:p>
+            <a:pPr indent="0" marL="0">
+              <a:buNone/>
+            </a:pPr>
+            <a:r>
+              <a:rPr lang="en-US" sz="1650" b="1" dirty="0">
+                <a:solidFill>
+                  <a:srgbClr val="06B6D4"/>
+                </a:solidFill>
+                <a:latin typeface="Segoe UI" pitchFamily="34" charset="0"/>
+                <a:ea typeface="Segoe UI" pitchFamily="34" charset="-122"/>
+                <a:cs typeface="Segoe UI" pitchFamily="34" charset="-120"/>
+              </a:rPr>
+              <a:t>Relational-first</a:t>
+            </a:r>
+            <a:endParaRPr lang="en-US" sz="1650" dirty="0"/>
+          </a:p>
+        </p:txBody>
+      </p:sp>
+      <p:sp>
+        <p:nvSpPr>
+          <p:cNvPr id="8" name="Text 6"/>
+          <p:cNvSpPr/>
+          <p:nvPr/>
+        </p:nvSpPr>
+        <p:spPr>
+          <a:xfrm>
+            <a:off x="1097280" y="2834640"/>
+            <a:ext cx="4553712" cy="2651760"/>
+          </a:xfrm>
+          <a:prstGeom prst="rect">
+            <a:avLst/>
+          </a:prstGeom>
+          <a:noFill/>
+          <a:ln/>
+        </p:spPr>
+        <p:txBody>
+          <a:bodyPr wrap="square" rtlCol="0" anchor="t"/>
+          <a:lstStyle/>
+          <a:p>
+            <a:pPr marL="342900" indent="-342900">
+              <a:lnSpc>
+                <a:spcPct val="112000"/>
+              </a:lnSpc>
+              <a:spcAft>
+                <a:spcPts val="900"/>
+              </a:spcAft>
+              <a:buSzPct val="100000"/>
+              <a:buChar char="▸"/>
+            </a:pPr>
+            <a:r>
+              <a:rPr lang="en-US" sz="1280" dirty="0">
+                <a:solidFill>
+                  <a:srgbClr val="CBD5E1"/>
+                </a:solidFill>
+                <a:latin typeface="Segoe UI" pitchFamily="34" charset="0"/>
+                <a:ea typeface="Segoe UI" pitchFamily="34" charset="-122"/>
+                <a:cs typeface="Segoe UI" pitchFamily="34" charset="-120"/>
+              </a:rPr>
+              <a:t>Fraud patterns expressed as ever-growing join chains</a:t>
+            </a:r>
+            <a:endParaRPr lang="en-US" sz="1280" dirty="0"/>
+          </a:p>
+          <a:p>
+            <a:pPr marL="342900" indent="-342900">
+              <a:lnSpc>
+                <a:spcPct val="112000"/>
+              </a:lnSpc>
+              <a:spcAft>
+                <a:spcPts val="900"/>
+              </a:spcAft>
+              <a:buSzPct val="100000"/>
+              <a:buChar char="▸"/>
+            </a:pPr>
+            <a:r>
+              <a:rPr lang="en-US" sz="1280" dirty="0">
+                <a:solidFill>
+                  <a:srgbClr val="CBD5E1"/>
+                </a:solidFill>
+                <a:latin typeface="Segoe UI" pitchFamily="34" charset="0"/>
+                <a:ea typeface="Segoe UI" pitchFamily="34" charset="-122"/>
+                <a:cs typeface="Segoe UI" pitchFamily="34" charset="-120"/>
+              </a:rPr>
+              <a:t>Every new hop multiplies query complexity and review cost</a:t>
+            </a:r>
+            <a:endParaRPr lang="en-US" sz="1280" dirty="0"/>
+          </a:p>
+          <a:p>
+            <a:pPr marL="342900" indent="-342900">
+              <a:lnSpc>
+                <a:spcPct val="112000"/>
+              </a:lnSpc>
+              <a:spcAft>
+                <a:spcPts val="900"/>
+              </a:spcAft>
+              <a:buSzPct val="100000"/>
+              <a:buChar char="▸"/>
+            </a:pPr>
+            <a:r>
+              <a:rPr lang="en-US" sz="1280" dirty="0">
+                <a:solidFill>
+                  <a:srgbClr val="CBD5E1"/>
+                </a:solidFill>
+                <a:latin typeface="Segoe UI" pitchFamily="34" charset="0"/>
+                <a:ea typeface="Segoe UI" pitchFamily="34" charset="-122"/>
+                <a:cs typeface="Segoe UI" pitchFamily="34" charset="-120"/>
+              </a:rPr>
+              <a:t>Reviewers audit SQL instead of discussing shapes</a:t>
+            </a:r>
+            <a:endParaRPr lang="en-US" sz="1280" dirty="0"/>
+          </a:p>
+        </p:txBody>
+      </p:sp>
+      <p:sp>
+        <p:nvSpPr>
+          <p:cNvPr id="9" name="Shape 7"/>
+          <p:cNvSpPr/>
+          <p:nvPr/>
+        </p:nvSpPr>
+        <p:spPr>
+          <a:xfrm>
+            <a:off x="6291072" y="2011680"/>
+            <a:ext cx="5074920" cy="3611880"/>
+          </a:xfrm>
+          <a:prstGeom prst="roundRect">
+            <a:avLst>
+              <a:gd name="adj" fmla="val 2025"/>
+            </a:avLst>
+          </a:prstGeom>
+          <a:solidFill>
+            <a:srgbClr val="111A2E"/>
+          </a:solidFill>
+          <a:ln w="12700">
+            <a:solidFill>
+              <a:srgbClr val="1E2D45"/>
+            </a:solidFill>
+            <a:prstDash val="solid"/>
+          </a:ln>
+        </p:spPr>
+      </p:sp>
+      <p:sp>
+        <p:nvSpPr>
+          <p:cNvPr id="10" name="Text 8"/>
+          <p:cNvSpPr/>
+          <p:nvPr/>
+        </p:nvSpPr>
+        <p:spPr>
+          <a:xfrm>
+            <a:off x="6565392" y="2240280"/>
+            <a:ext cx="4526280" cy="502920"/>
+          </a:xfrm>
+          <a:prstGeom prst="rect">
+            <a:avLst/>
+          </a:prstGeom>
+          <a:noFill/>
+          <a:ln/>
+        </p:spPr>
+        <p:txBody>
+          <a:bodyPr wrap="square" rtlCol="0" anchor="ctr"/>
+          <a:lstStyle/>
+          <a:p>
+            <a:pPr indent="0" marL="0">
+              <a:buNone/>
+            </a:pPr>
+            <a:r>
+              <a:rPr lang="en-US" sz="1650" b="1" dirty="0">
+                <a:solidFill>
+                  <a:srgbClr val="93C5FD"/>
+                </a:solidFill>
+                <a:latin typeface="Segoe UI" pitchFamily="34" charset="0"/>
+                <a:ea typeface="Segoe UI" pitchFamily="34" charset="-122"/>
+                <a:cs typeface="Segoe UI" pitchFamily="34" charset="-120"/>
+              </a:rPr>
+              <a:t>Graph-first</a:t>
+            </a:r>
+            <a:endParaRPr lang="en-US" sz="1650" dirty="0"/>
+          </a:p>
+        </p:txBody>
+      </p:sp>
+      <p:sp>
+        <p:nvSpPr>
+          <p:cNvPr id="11" name="Text 9"/>
+          <p:cNvSpPr/>
+          <p:nvPr/>
+        </p:nvSpPr>
+        <p:spPr>
+          <a:xfrm>
+            <a:off x="6565392" y="2834640"/>
+            <a:ext cx="4553712" cy="2651760"/>
+          </a:xfrm>
+          <a:prstGeom prst="rect">
+            <a:avLst/>
+          </a:prstGeom>
+          <a:noFill/>
+          <a:ln/>
+        </p:spPr>
+        <p:txBody>
+          <a:bodyPr wrap="square" rtlCol="0" anchor="t"/>
+          <a:lstStyle/>
+          <a:p>
+            <a:pPr marL="342900" indent="-342900">
+              <a:lnSpc>
+                <a:spcPct val="112000"/>
+              </a:lnSpc>
+              <a:spcAft>
+                <a:spcPts val="900"/>
+              </a:spcAft>
+              <a:buSzPct val="100000"/>
+              <a:buChar char="▸"/>
+            </a:pPr>
+            <a:r>
+              <a:rPr lang="en-US" sz="1280" dirty="0">
+                <a:solidFill>
+                  <a:srgbClr val="CBD5E1"/>
+                </a:solidFill>
+                <a:latin typeface="Segoe UI" pitchFamily="34" charset="0"/>
+                <a:ea typeface="Segoe UI" pitchFamily="34" charset="-122"/>
+                <a:cs typeface="Segoe UI" pitchFamily="34" charset="-120"/>
+              </a:rPr>
+              <a:t>Fraud patterns appear as paths, cycles, and hubs</a:t>
+            </a:r>
+            <a:endParaRPr lang="en-US" sz="1280" dirty="0"/>
+          </a:p>
+          <a:p>
+            <a:pPr marL="342900" indent="-342900">
+              <a:lnSpc>
+                <a:spcPct val="112000"/>
+              </a:lnSpc>
+              <a:spcAft>
+                <a:spcPts val="900"/>
+              </a:spcAft>
+              <a:buSzPct val="100000"/>
+              <a:buChar char="▸"/>
+            </a:pPr>
+            <a:r>
+              <a:rPr lang="en-US" sz="1280" dirty="0">
+                <a:solidFill>
+                  <a:srgbClr val="CBD5E1"/>
+                </a:solidFill>
+                <a:latin typeface="Segoe UI" pitchFamily="34" charset="0"/>
+                <a:ea typeface="Segoe UI" pitchFamily="34" charset="-122"/>
+                <a:cs typeface="Segoe UI" pitchFamily="34" charset="-120"/>
+              </a:rPr>
+              <a:t>New detection questions reuse the same schema</a:t>
+            </a:r>
+            <a:endParaRPr lang="en-US" sz="1280" dirty="0"/>
+          </a:p>
+          <a:p>
+            <a:pPr marL="342900" indent="-342900">
+              <a:lnSpc>
+                <a:spcPct val="112000"/>
+              </a:lnSpc>
+              <a:spcAft>
+                <a:spcPts val="900"/>
+              </a:spcAft>
+              <a:buSzPct val="100000"/>
+              <a:buChar char="▸"/>
+            </a:pPr>
+            <a:r>
+              <a:rPr lang="en-US" sz="1280" dirty="0">
+                <a:solidFill>
+                  <a:srgbClr val="CBD5E1"/>
+                </a:solidFill>
+                <a:latin typeface="Segoe UI" pitchFamily="34" charset="0"/>
+                <a:ea typeface="Segoe UI" pitchFamily="34" charset="-122"/>
+                <a:cs typeface="Segoe UI" pitchFamily="34" charset="-120"/>
+              </a:rPr>
+              <a:t>Reviewers confirm a shape, then trust the query behind it</a:t>
+            </a:r>
+            <a:endParaRPr lang="en-US" sz="1280" dirty="0"/>
+          </a:p>
+        </p:txBody>
+      </p:sp>
+      <p:sp>
+        <p:nvSpPr>
+          <p:cNvPr id="12" name="Shape 10"/>
+          <p:cNvSpPr/>
+          <p:nvPr/>
+        </p:nvSpPr>
+        <p:spPr>
+          <a:xfrm>
+            <a:off x="822960" y="5961888"/>
+            <a:ext cx="10515600" cy="0"/>
+          </a:xfrm>
+          <a:prstGeom prst="line">
+            <a:avLst/>
+          </a:prstGeom>
+          <a:noFill/>
+          <a:ln w="12700">
+            <a:solidFill>
+              <a:srgbClr val="1E2D45"/>
+            </a:solidFill>
+            <a:prstDash val="solid"/>
+          </a:ln>
+        </p:spPr>
+      </p:sp>
+      <p:sp>
+        <p:nvSpPr>
+          <p:cNvPr id="13" name="Text 11"/>
+          <p:cNvSpPr/>
+          <p:nvPr/>
+        </p:nvSpPr>
+        <p:spPr>
+          <a:xfrm>
+            <a:off x="822960" y="6053328"/>
+            <a:ext cx="9692640" cy="457200"/>
+          </a:xfrm>
+          <a:prstGeom prst="rect">
+            <a:avLst/>
+          </a:prstGeom>
+          <a:noFill/>
+          <a:ln/>
+        </p:spPr>
+        <p:txBody>
+          <a:bodyPr wrap="square" rtlCol="0" anchor="ctr"/>
+          <a:lstStyle/>
+          <a:p>
+            <a:pPr indent="0" marL="0">
+              <a:buNone/>
+            </a:pPr>
+            <a:r>
+              <a:rPr lang="en-US" sz="1150" dirty="0">
+                <a:solidFill>
+                  <a:srgbClr val="64748B"/>
+                </a:solidFill>
+                <a:latin typeface="Segoe UI" pitchFamily="34" charset="0"/>
+                <a:ea typeface="Segoe UI" pitchFamily="34" charset="-122"/>
+                <a:cs typeface="Segoe UI" pitchFamily="34" charset="-120"/>
+              </a:rPr>
+              <a:t>The schema is the analysis: half the value came from defining what connected means.</a:t>
+            </a:r>
+            <a:endParaRPr lang="en-US" sz="1150" dirty="0"/>
+          </a:p>
+        </p:txBody>
+      </p:sp>
+      <p:sp>
+        <p:nvSpPr>
+          <p:cNvPr id="14" name="Text 12"/>
+          <p:cNvSpPr/>
+          <p:nvPr/>
+        </p:nvSpPr>
+        <p:spPr>
+          <a:xfrm>
+            <a:off x="10698480" y="6382512"/>
+            <a:ext cx="1188720" cy="365760"/>
+          </a:xfrm>
+          <a:prstGeom prst="rect">
+            <a:avLst/>
+          </a:prstGeom>
+          <a:noFill/>
+          <a:ln/>
+        </p:spPr>
+        <p:txBody>
+          <a:bodyPr wrap="square" rtlCol="0" anchor="ctr"/>
+          <a:lstStyle/>
+          <a:p>
+            <a:pPr algn="r" indent="0" marL="0">
+              <a:buNone/>
+            </a:pPr>
+            <a:r>
+              <a:rPr lang="en-US" sz="1000" dirty="0">
+                <a:solidFill>
+                  <a:srgbClr val="64748B"/>
+                </a:solidFill>
+                <a:latin typeface="Consolas" pitchFamily="34" charset="0"/>
+                <a:ea typeface="Consolas" pitchFamily="34" charset="-122"/>
+                <a:cs typeface="Consolas" pitchFamily="34" charset="-120"/>
+              </a:rPr>
+              <a:t>12 / 14</a:t>
+            </a:r>
+            <a:endParaRPr lang="en-US" sz="1000" dirty="0"/>
+          </a:p>
+        </p:txBody>
+      </p:sp>
+    </p:spTree>
+  </p:cSld>
+  <p:clrMapOvr>
+    <a:masterClrMapping/>
+  </p:clrMapOvr>
+</p:sld>
+</file>
+
+<file path=ppt/slides/slide13.xml><?xml version="1.0" encoding="utf-8"?>
+<p:sld xmlns:a="http://schemas.openxmlformats.org/drawingml/2006/main" xmlns:r="http://schemas.openxmlformats.org/officeDocument/2006/relationships" xmlns:p="http://schemas.openxmlformats.org/presentationml/2006/main">
+  <p:cSld name="Slide 13">
+    <p:bg>
+      <p:bgPr>
+        <a:solidFill>
+          <a:srgbClr val="0A0C12"/>
+        </a:solidFill>
+      </p:bgPr>
+    </p:bg>
+    <p:spTree>
+      <p:nvGrpSpPr>
+        <p:cNvPr id="1" name=""/>
+        <p:cNvGrpSpPr/>
+        <p:nvPr/>
+      </p:nvGrpSpPr>
+      <p:grpSpPr>
+        <a:xfrm>
+          <a:off x="0" y="0"/>
+          <a:ext cx="0" cy="0"/>
+          <a:chOff x="0" y="0"/>
+          <a:chExt cx="0" cy="0"/>
+        </a:xfrm>
+      </p:grpSpPr>
+      <p:sp>
+        <p:nvSpPr>
+          <p:cNvPr id="2" name="Shape 0"/>
+          <p:cNvSpPr/>
+          <p:nvPr/>
+        </p:nvSpPr>
+        <p:spPr>
+          <a:xfrm>
+            <a:off x="0" y="0"/>
+            <a:ext cx="7680960" cy="64008"/>
+          </a:xfrm>
+          <a:prstGeom prst="rect">
+            <a:avLst/>
+          </a:prstGeom>
+          <a:solidFill>
+            <a:srgbClr val="3B82F6"/>
+          </a:solidFill>
+          <a:ln/>
+        </p:spPr>
+      </p:sp>
+      <p:sp>
+        <p:nvSpPr>
+          <p:cNvPr id="3" name="Shape 1"/>
+          <p:cNvSpPr/>
+          <p:nvPr/>
+        </p:nvSpPr>
+        <p:spPr>
+          <a:xfrm>
+            <a:off x="7680960" y="0"/>
+            <a:ext cx="4510735" cy="64008"/>
+          </a:xfrm>
+          <a:prstGeom prst="rect">
+            <a:avLst/>
+          </a:prstGeom>
+          <a:solidFill>
+            <a:srgbClr val="06B6D4"/>
+          </a:solidFill>
+          <a:ln/>
+        </p:spPr>
+      </p:sp>
+      <p:sp>
+        <p:nvSpPr>
+          <p:cNvPr id="4" name="Text 2"/>
+          <p:cNvSpPr/>
+          <p:nvPr/>
+        </p:nvSpPr>
+        <p:spPr>
+          <a:xfrm>
+            <a:off x="822960" y="502920"/>
+            <a:ext cx="10515600" cy="365760"/>
+          </a:xfrm>
+          <a:prstGeom prst="rect">
+            <a:avLst/>
+          </a:prstGeom>
+          <a:noFill/>
+          <a:ln/>
+        </p:spPr>
+        <p:txBody>
+          <a:bodyPr wrap="square" rtlCol="0" anchor="ctr"/>
+          <a:lstStyle/>
+          <a:p>
+            <a:pPr indent="0" marL="0">
+              <a:buNone/>
+            </a:pPr>
+            <a:r>
+              <a:rPr lang="en-US" sz="1200" spc="300" kern="0" dirty="0">
+                <a:solidFill>
+                  <a:srgbClr val="06B6D4"/>
+                </a:solidFill>
+                <a:latin typeface="Consolas" pitchFamily="34" charset="0"/>
+                <a:ea typeface="Consolas" pitchFamily="34" charset="-122"/>
+                <a:cs typeface="Consolas" pitchFamily="34" charset="-120"/>
+              </a:rPr>
+              <a:t>LESSONS</a:t>
+            </a:r>
+            <a:endParaRPr lang="en-US" sz="1200" dirty="0"/>
+          </a:p>
+        </p:txBody>
+      </p:sp>
+      <p:sp>
+        <p:nvSpPr>
+          <p:cNvPr id="5" name="Text 3"/>
+          <p:cNvSpPr/>
+          <p:nvPr/>
+        </p:nvSpPr>
+        <p:spPr>
+          <a:xfrm>
+            <a:off x="822960" y="914400"/>
+            <a:ext cx="10561320" cy="868680"/>
+          </a:xfrm>
+          <a:prstGeom prst="rect">
+            <a:avLst/>
+          </a:prstGeom>
+          <a:noFill/>
+          <a:ln/>
+        </p:spPr>
+        <p:txBody>
+          <a:bodyPr wrap="square" rtlCol="0" anchor="ctr"/>
+          <a:lstStyle/>
+          <a:p>
+            <a:pPr indent="0" marL="0">
+              <a:buNone/>
+            </a:pPr>
+            <a:r>
+              <a:rPr lang="en-US" sz="2700" b="1" dirty="0">
+                <a:solidFill>
+                  <a:srgbClr val="FFFFFF"/>
+                </a:solidFill>
+                <a:latin typeface="Segoe UI" pitchFamily="34" charset="0"/>
+                <a:ea typeface="Segoe UI" pitchFamily="34" charset="-122"/>
+                <a:cs typeface="Segoe UI" pitchFamily="34" charset="-120"/>
+              </a:rPr>
+              <a:t>Three lessons that outlived the project</a:t>
+            </a:r>
+            <a:endParaRPr lang="en-US" sz="2700" dirty="0"/>
+          </a:p>
+        </p:txBody>
+      </p:sp>
+      <p:sp>
+        <p:nvSpPr>
+          <p:cNvPr id="6" name="Text 4"/>
+          <p:cNvSpPr/>
+          <p:nvPr/>
+        </p:nvSpPr>
+        <p:spPr>
+          <a:xfrm>
+            <a:off x="868680" y="2011680"/>
+            <a:ext cx="10424160" cy="3566160"/>
+          </a:xfrm>
+          <a:prstGeom prst="rect">
+            <a:avLst/>
+          </a:prstGeom>
+          <a:noFill/>
+          <a:ln/>
+        </p:spPr>
+        <p:txBody>
+          <a:bodyPr wrap="square" rtlCol="0" anchor="t"/>
+          <a:lstStyle/>
+          <a:p>
+            <a:pPr marL="342900" indent="-342900">
+              <a:lnSpc>
+                <a:spcPct val="112000"/>
+              </a:lnSpc>
+              <a:spcAft>
+                <a:spcPts val="900"/>
+              </a:spcAft>
+              <a:buSzPct val="100000"/>
+              <a:buChar char="▸"/>
+            </a:pPr>
+            <a:r>
+              <a:rPr lang="en-US" sz="1600" dirty="0">
+                <a:solidFill>
+                  <a:srgbClr val="CBD5E1"/>
+                </a:solidFill>
+                <a:latin typeface="Segoe UI" pitchFamily="34" charset="0"/>
+                <a:ea typeface="Segoe UI" pitchFamily="34" charset="-122"/>
+                <a:cs typeface="Segoe UI" pitchFamily="34" charset="-120"/>
+              </a:rPr>
+              <a:t>Domain constraints come first - learn AML's hard rules before choosing any technology</a:t>
+            </a:r>
+            <a:endParaRPr lang="en-US" sz="1600" dirty="0"/>
+          </a:p>
+          <a:p>
+            <a:pPr marL="342900" indent="-342900">
+              <a:lnSpc>
+                <a:spcPct val="112000"/>
+              </a:lnSpc>
+              <a:spcAft>
+                <a:spcPts val="900"/>
+              </a:spcAft>
+              <a:buSzPct val="100000"/>
+              <a:buChar char="▸"/>
+            </a:pPr>
+            <a:r>
+              <a:rPr lang="en-US" sz="1600" dirty="0">
+                <a:solidFill>
+                  <a:srgbClr val="CBD5E1"/>
+                </a:solidFill>
+                <a:latin typeface="Segoe UI" pitchFamily="34" charset="0"/>
+                <a:ea typeface="Segoe UI" pitchFamily="34" charset="-122"/>
+                <a:cs typeface="Segoe UI" pitchFamily="34" charset="-120"/>
+              </a:rPr>
+              <a:t>Explainability is a feature: a detection nobody can explain is one nobody can act on</a:t>
+            </a:r>
+            <a:endParaRPr lang="en-US" sz="1600" dirty="0"/>
+          </a:p>
+          <a:p>
+            <a:pPr marL="342900" indent="-342900">
+              <a:lnSpc>
+                <a:spcPct val="112000"/>
+              </a:lnSpc>
+              <a:spcAft>
+                <a:spcPts val="900"/>
+              </a:spcAft>
+              <a:buSzPct val="100000"/>
+              <a:buChar char="▸"/>
+            </a:pPr>
+            <a:r>
+              <a:rPr lang="en-US" sz="1600" dirty="0">
+                <a:solidFill>
+                  <a:srgbClr val="CBD5E1"/>
+                </a:solidFill>
+                <a:latin typeface="Segoe UI" pitchFamily="34" charset="0"/>
+                <a:ea typeface="Segoe UI" pitchFamily="34" charset="-122"/>
+                <a:cs typeface="Segoe UI" pitchFamily="34" charset="-120"/>
+              </a:rPr>
+              <a:t>The schema is the analysis - forcing a shared definition of connected was half the value</a:t>
+            </a:r>
+            <a:endParaRPr lang="en-US" sz="1600" dirty="0"/>
+          </a:p>
+          <a:p>
+            <a:pPr marL="342900" indent="-342900">
+              <a:lnSpc>
+                <a:spcPct val="112000"/>
+              </a:lnSpc>
+              <a:spcAft>
+                <a:spcPts val="900"/>
+              </a:spcAft>
+              <a:buSzPct val="100000"/>
+              <a:buChar char="▸"/>
+            </a:pPr>
+            <a:r>
+              <a:rPr lang="en-US" sz="1600" dirty="0">
+                <a:solidFill>
+                  <a:srgbClr val="CBD5E1"/>
+                </a:solidFill>
+                <a:latin typeface="Segoe UI" pitchFamily="34" charset="0"/>
+                <a:ea typeface="Segoe UI" pitchFamily="34" charset="-122"/>
+                <a:cs typeface="Segoe UI" pitchFamily="34" charset="-120"/>
+              </a:rPr>
+              <a:t>When your data is about relationships, model relationships</a:t>
+            </a:r>
+            <a:endParaRPr lang="en-US" sz="1600" dirty="0"/>
+          </a:p>
+        </p:txBody>
+      </p:sp>
+      <p:sp>
+        <p:nvSpPr>
+          <p:cNvPr id="7" name="Text 5"/>
+          <p:cNvSpPr/>
+          <p:nvPr/>
+        </p:nvSpPr>
+        <p:spPr>
+          <a:xfrm>
+            <a:off x="10698480" y="6382512"/>
+            <a:ext cx="1188720" cy="365760"/>
+          </a:xfrm>
+          <a:prstGeom prst="rect">
+            <a:avLst/>
+          </a:prstGeom>
+          <a:noFill/>
+          <a:ln/>
+        </p:spPr>
+        <p:txBody>
+          <a:bodyPr wrap="square" rtlCol="0" anchor="ctr"/>
+          <a:lstStyle/>
+          <a:p>
+            <a:pPr algn="r" indent="0" marL="0">
+              <a:buNone/>
+            </a:pPr>
+            <a:r>
+              <a:rPr lang="en-US" sz="1000" dirty="0">
+                <a:solidFill>
+                  <a:srgbClr val="64748B"/>
+                </a:solidFill>
+                <a:latin typeface="Consolas" pitchFamily="34" charset="0"/>
+                <a:ea typeface="Consolas" pitchFamily="34" charset="-122"/>
+                <a:cs typeface="Consolas" pitchFamily="34" charset="-120"/>
+              </a:rPr>
+              <a:t>13 / 14</a:t>
+            </a:r>
+            <a:endParaRPr lang="en-US" sz="1000" dirty="0"/>
+          </a:p>
+        </p:txBody>
+      </p:sp>
+    </p:spTree>
+  </p:cSld>
+  <p:clrMapOvr>
+    <a:masterClrMapping/>
+  </p:clrMapOvr>
+</p:sld>
+</file>
+
+<file path=ppt/slides/slide14.xml><?xml version="1.0" encoding="utf-8"?>
+<p:sld xmlns:a="http://schemas.openxmlformats.org/drawingml/2006/main" xmlns:r="http://schemas.openxmlformats.org/officeDocument/2006/relationships" xmlns:p="http://schemas.openxmlformats.org/presentationml/2006/main">
+  <p:cSld name="Slide 14">
+    <p:bg>
+      <p:bgPr>
+        <a:solidFill>
+          <a:srgbClr val="0A0C12"/>
+        </a:solidFill>
+      </p:bgPr>
+    </p:bg>
+    <p:spTree>
+      <p:nvGrpSpPr>
+        <p:cNvPr id="1" name=""/>
+        <p:cNvGrpSpPr/>
+        <p:nvPr/>
+      </p:nvGrpSpPr>
+      <p:grpSpPr>
+        <a:xfrm>
+          <a:off x="0" y="0"/>
+          <a:ext cx="0" cy="0"/>
+          <a:chOff x="0" y="0"/>
+          <a:chExt cx="0" cy="0"/>
+        </a:xfrm>
+      </p:grpSpPr>
+      <p:sp>
+        <p:nvSpPr>
+          <p:cNvPr id="2" name="Shape 0"/>
+          <p:cNvSpPr/>
+          <p:nvPr/>
+        </p:nvSpPr>
+        <p:spPr>
+          <a:xfrm>
+            <a:off x="0" y="0"/>
+            <a:ext cx="7680960" cy="64008"/>
+          </a:xfrm>
+          <a:prstGeom prst="rect">
+            <a:avLst/>
+          </a:prstGeom>
+          <a:solidFill>
+            <a:srgbClr val="3B82F6"/>
+          </a:solidFill>
+          <a:ln/>
+        </p:spPr>
+      </p:sp>
+      <p:sp>
+        <p:nvSpPr>
+          <p:cNvPr id="3" name="Shape 1"/>
+          <p:cNvSpPr/>
+          <p:nvPr/>
+        </p:nvSpPr>
+        <p:spPr>
+          <a:xfrm>
+            <a:off x="7680960" y="0"/>
+            <a:ext cx="4510735" cy="64008"/>
+          </a:xfrm>
+          <a:prstGeom prst="rect">
+            <a:avLst/>
+          </a:prstGeom>
+          <a:solidFill>
+            <a:srgbClr val="06B6D4"/>
+          </a:solidFill>
+          <a:ln/>
+        </p:spPr>
+      </p:sp>
+      <p:sp>
+        <p:nvSpPr>
+          <p:cNvPr id="4" name="Text 2"/>
+          <p:cNvSpPr/>
+          <p:nvPr/>
+        </p:nvSpPr>
+        <p:spPr>
+          <a:xfrm>
+            <a:off x="822960" y="1417320"/>
+            <a:ext cx="10515600" cy="411480"/>
+          </a:xfrm>
+          <a:prstGeom prst="rect">
+            <a:avLst/>
+          </a:prstGeom>
+          <a:noFill/>
+          <a:ln/>
+        </p:spPr>
+        <p:txBody>
+          <a:bodyPr wrap="square" rtlCol="0" anchor="ctr"/>
+          <a:lstStyle/>
+          <a:p>
+            <a:pPr algn="ctr" indent="0" marL="0">
+              <a:buNone/>
+            </a:pPr>
+            <a:r>
+              <a:rPr lang="en-US" sz="1300" spc="400" kern="0" dirty="0">
+                <a:solidFill>
+                  <a:srgbClr val="06B6D4"/>
+                </a:solidFill>
+                <a:latin typeface="Consolas" pitchFamily="34" charset="0"/>
+                <a:ea typeface="Consolas" pitchFamily="34" charset="-122"/>
+                <a:cs typeface="Consolas" pitchFamily="34" charset="-120"/>
+              </a:rPr>
+              <a:t>WORK WITH ME</a:t>
+            </a:r>
+            <a:endParaRPr lang="en-US" sz="1300" dirty="0"/>
+          </a:p>
+        </p:txBody>
+      </p:sp>
+      <p:sp>
+        <p:nvSpPr>
+          <p:cNvPr id="5" name="Text 3"/>
+          <p:cNvSpPr/>
+          <p:nvPr/>
+        </p:nvSpPr>
+        <p:spPr>
+          <a:xfrm>
+            <a:off x="822960" y="1920240"/>
+            <a:ext cx="10515600" cy="1371600"/>
+          </a:xfrm>
+          <a:prstGeom prst="rect">
+            <a:avLst/>
+          </a:prstGeom>
+          <a:noFill/>
+          <a:ln/>
+        </p:spPr>
+        <p:txBody>
+          <a:bodyPr wrap="square" rtlCol="0" anchor="ctr"/>
+          <a:lstStyle/>
+          <a:p>
+            <a:pPr algn="ctr" indent="0" marL="0">
+              <a:buNone/>
+            </a:pPr>
+            <a:r>
+              <a:rPr lang="en-US" sz="3200" b="1" dirty="0">
+                <a:solidFill>
+                  <a:srgbClr val="FFFFFF"/>
+                </a:solidFill>
+                <a:latin typeface="Segoe UI" pitchFamily="34" charset="0"/>
+                <a:ea typeface="Segoe UI" pitchFamily="34" charset="-122"/>
+                <a:cs typeface="Segoe UI" pitchFamily="34" charset="-120"/>
+              </a:rPr>
+              <a:t>Need analysis your auditors can actually follow?</a:t>
+            </a:r>
+            <a:endParaRPr lang="en-US" sz="3200" dirty="0"/>
+          </a:p>
+        </p:txBody>
+      </p:sp>
+      <p:sp>
+        <p:nvSpPr>
+          <p:cNvPr id="6" name="Text 4"/>
+          <p:cNvSpPr/>
+          <p:nvPr/>
+        </p:nvSpPr>
+        <p:spPr>
+          <a:xfrm>
+            <a:off x="2011680" y="3429000"/>
+            <a:ext cx="8183880" cy="1554480"/>
+          </a:xfrm>
+          <a:prstGeom prst="rect">
+            <a:avLst/>
+          </a:prstGeom>
+          <a:noFill/>
+          <a:ln/>
+        </p:spPr>
+        <p:txBody>
+          <a:bodyPr wrap="square" rtlCol="0" anchor="t"/>
+          <a:lstStyle/>
+          <a:p>
+            <a:pPr algn="ctr" indent="0" marL="0">
+              <a:spcAft>
+                <a:spcPts val="800"/>
+              </a:spcAft>
+              <a:buNone/>
+            </a:pPr>
+            <a:r>
+              <a:rPr lang="en-US" sz="1500" dirty="0">
+                <a:solidFill>
+                  <a:srgbClr val="CBD5E1"/>
+                </a:solidFill>
+                <a:latin typeface="Segoe UI" pitchFamily="34" charset="0"/>
+                <a:ea typeface="Segoe UI" pitchFamily="34" charset="-122"/>
+                <a:cs typeface="Segoe UI" pitchFamily="34" charset="-120"/>
+              </a:rPr>
+              <a:t>I turn relationship-heavy problems into models and detection patterns reviewers trust</a:t>
+            </a:r>
+            <a:pPr algn="ctr" indent="0" marL="0">
+              <a:spcAft>
+                <a:spcPts val="800"/>
+              </a:spcAft>
+              <a:buNone/>
+            </a:pPr>
+            <a:r>
+              <a:rPr lang="en-US" sz="1500" dirty="0">
+                <a:solidFill>
+                  <a:srgbClr val="CBD5E1"/>
+                </a:solidFill>
+                <a:latin typeface="Segoe UI" pitchFamily="34" charset="0"/>
+                <a:ea typeface="Segoe UI" pitchFamily="34" charset="-122"/>
+                <a:cs typeface="Segoe UI" pitchFamily="34" charset="-120"/>
+              </a:rPr>
+              <a:t>From requirements to documentation: analysis built to survive compliance review</a:t>
+            </a:r>
+            <a:pPr algn="ctr" indent="0" marL="0">
+              <a:spcAft>
+                <a:spcPts val="800"/>
+              </a:spcAft>
+              <a:buNone/>
+            </a:pPr>
+            <a:r>
+              <a:rPr lang="en-US" sz="1500" dirty="0">
+                <a:solidFill>
+                  <a:srgbClr val="CBD5E1"/>
+                </a:solidFill>
+                <a:latin typeface="Segoe UI" pitchFamily="34" charset="0"/>
+                <a:ea typeface="Segoe UI" pitchFamily="34" charset="-122"/>
+                <a:cs typeface="Segoe UI" pitchFamily="34" charset="-120"/>
+              </a:rPr>
+              <a:t>Available for freelance and contract engagements worldwide</a:t>
+            </a:r>
+            <a:endParaRPr lang="en-US" sz="1500" dirty="0"/>
+          </a:p>
+        </p:txBody>
+      </p:sp>
+      <p:sp>
+        <p:nvSpPr>
+          <p:cNvPr id="7" name="Shape 5"/>
+          <p:cNvSpPr/>
+          <p:nvPr/>
+        </p:nvSpPr>
+        <p:spPr>
+          <a:xfrm>
+            <a:off x="3566160" y="5212080"/>
+            <a:ext cx="5074920" cy="0"/>
+          </a:xfrm>
+          <a:prstGeom prst="line">
+            <a:avLst/>
+          </a:prstGeom>
+          <a:noFill/>
+          <a:ln w="25400">
+            <a:solidFill>
+              <a:srgbClr val="3B82F6"/>
+            </a:solidFill>
+            <a:prstDash val="solid"/>
+          </a:ln>
+        </p:spPr>
+      </p:sp>
+      <p:sp>
+        <p:nvSpPr>
+          <p:cNvPr id="8" name="Text 6"/>
+          <p:cNvSpPr/>
+          <p:nvPr/>
+        </p:nvSpPr>
+        <p:spPr>
+          <a:xfrm>
+            <a:off x="822960" y="5376672"/>
+            <a:ext cx="10515600" cy="457200"/>
+          </a:xfrm>
+          <a:prstGeom prst="rect">
+            <a:avLst/>
+          </a:prstGeom>
+          <a:noFill/>
+          <a:ln/>
+        </p:spPr>
+        <p:txBody>
+          <a:bodyPr wrap="square" rtlCol="0" anchor="ctr"/>
+          <a:lstStyle/>
+          <a:p>
+            <a:pPr algn="ctr" indent="0" marL="0">
+              <a:buNone/>
+            </a:pPr>
+            <a:r>
+              <a:rPr lang="en-US" sz="1350" b="1" dirty="0">
+                <a:solidFill>
+                  <a:srgbClr val="06B6D4"/>
+                </a:solidFill>
+                <a:latin typeface="Consolas" pitchFamily="34" charset="0"/>
+                <a:ea typeface="Consolas" pitchFamily="34" charset="-122"/>
+                <a:cs typeface="Consolas" pitchFamily="34" charset="-120"/>
+              </a:rPr>
+              <a:t>rezalianvatiady.github.io · github.com/rezalianvatiady</a:t>
+            </a:r>
+            <a:endParaRPr lang="en-US" sz="1350" dirty="0"/>
+          </a:p>
+        </p:txBody>
+      </p:sp>
+      <p:sp>
+        <p:nvSpPr>
+          <p:cNvPr id="9" name="Text 7"/>
+          <p:cNvSpPr/>
+          <p:nvPr/>
+        </p:nvSpPr>
+        <p:spPr>
+          <a:xfrm>
+            <a:off x="10698480" y="6382512"/>
+            <a:ext cx="1188720" cy="365760"/>
+          </a:xfrm>
+          <a:prstGeom prst="rect">
+            <a:avLst/>
+          </a:prstGeom>
+          <a:noFill/>
+          <a:ln/>
+        </p:spPr>
+        <p:txBody>
+          <a:bodyPr wrap="square" rtlCol="0" anchor="ctr"/>
+          <a:lstStyle/>
+          <a:p>
+            <a:pPr algn="r" indent="0" marL="0">
+              <a:buNone/>
+            </a:pPr>
+            <a:r>
+              <a:rPr lang="en-US" sz="1000" dirty="0">
+                <a:solidFill>
+                  <a:srgbClr val="64748B"/>
+                </a:solidFill>
+                <a:latin typeface="Consolas" pitchFamily="34" charset="0"/>
+                <a:ea typeface="Consolas" pitchFamily="34" charset="-122"/>
+                <a:cs typeface="Consolas" pitchFamily="34" charset="-120"/>
+              </a:rPr>
+              <a:t>14 / 14</a:t>
             </a:r>
             <a:endParaRPr lang="en-US" sz="1000" dirty="0"/>
           </a:p>
@@ -1799,7 +5152,7 @@
                 <a:ea typeface="Consolas" pitchFamily="34" charset="-122"/>
                 <a:cs typeface="Consolas" pitchFamily="34" charset="-120"/>
               </a:rPr>
-              <a:t>CONTEXT</a:t>
+              <a:t>AGENDA</a:t>
             </a:r>
             <a:endParaRPr lang="en-US" sz="1200" dirty="0"/>
           </a:p>
@@ -1813,8 +5166,8 @@
         </p:nvSpPr>
         <p:spPr>
           <a:xfrm>
-            <a:off x="822960" y="960120"/>
-            <a:ext cx="10515600" cy="868680"/>
+            <a:off x="822960" y="914400"/>
+            <a:ext cx="10561320" cy="868680"/>
           </a:xfrm>
           <a:prstGeom prst="rect">
             <a:avLst/>
@@ -1830,7 +5183,7 @@
               <a:buNone/>
             </a:pPr>
             <a:r>
-              <a:rPr lang="en-US" sz="3000" b="1" dirty="0">
+              <a:rPr lang="en-US" sz="2700" b="1" dirty="0">
                 <a:solidFill>
                   <a:srgbClr val="FFFFFF"/>
                 </a:solidFill>
@@ -1838,45 +5191,102 @@
                 <a:ea typeface="Segoe UI" pitchFamily="34" charset="-122"/>
                 <a:cs typeface="Segoe UI" pitchFamily="34" charset="-120"/>
               </a:rPr>
-              <a:t>The project</a:t>
-            </a:r>
-            <a:endParaRPr lang="en-US" sz="3000" dirty="0"/>
-          </a:p>
-        </p:txBody>
-      </p:sp>
-      <p:sp>
-        <p:nvSpPr>
-          <p:cNvPr id="6" name="Text 4"/>
-          <p:cNvSpPr/>
-          <p:nvPr/>
-        </p:nvSpPr>
-        <p:spPr>
-          <a:xfrm>
-            <a:off x="868680" y="2057400"/>
-            <a:ext cx="10424160" cy="3566160"/>
-          </a:xfrm>
-          <a:prstGeom prst="rect">
-            <a:avLst/>
-          </a:prstGeom>
-          <a:noFill/>
-          <a:ln/>
-        </p:spPr>
-        <p:txBody>
-          <a:bodyPr wrap="square" rtlCol="0" anchor="t"/>
-          <a:lstStyle/>
-          <a:p>
-            <a:pPr marL="342900" indent="-342900">
-              <a:lnSpc>
-                <a:spcPct val="115000"/>
-              </a:lnSpc>
-              <a:spcAft>
-                <a:spcPts val="1000"/>
-              </a:spcAft>
-              <a:buSzPct val="100000"/>
-              <a:buChar char="▸"/>
-            </a:pPr>
-            <a:r>
-              <a:rPr lang="en-US" sz="1600" dirty="0">
+              <a:t>What this deck covers</a:t>
+            </a:r>
+            <a:endParaRPr lang="en-US" sz="2700" dirty="0"/>
+          </a:p>
+        </p:txBody>
+      </p:sp>
+      <p:sp>
+        <p:nvSpPr>
+          <p:cNvPr id="6" name="Shape 4"/>
+          <p:cNvSpPr/>
+          <p:nvPr/>
+        </p:nvSpPr>
+        <p:spPr>
+          <a:xfrm>
+            <a:off x="868680" y="2112264"/>
+            <a:ext cx="420624" cy="420624"/>
+          </a:xfrm>
+          <a:prstGeom prst="ellipse">
+            <a:avLst/>
+          </a:prstGeom>
+          <a:solidFill>
+            <a:srgbClr val="111A2E"/>
+          </a:solidFill>
+          <a:ln w="19050">
+            <a:solidFill>
+              <a:srgbClr val="3B82F6"/>
+            </a:solidFill>
+            <a:prstDash val="solid"/>
+          </a:ln>
+        </p:spPr>
+      </p:sp>
+      <p:sp>
+        <p:nvSpPr>
+          <p:cNvPr id="7" name="Text 5"/>
+          <p:cNvSpPr/>
+          <p:nvPr/>
+        </p:nvSpPr>
+        <p:spPr>
+          <a:xfrm>
+            <a:off x="868680" y="2112264"/>
+            <a:ext cx="420624" cy="420624"/>
+          </a:xfrm>
+          <a:prstGeom prst="rect">
+            <a:avLst/>
+          </a:prstGeom>
+          <a:noFill/>
+          <a:ln/>
+        </p:spPr>
+        <p:txBody>
+          <a:bodyPr wrap="square" rtlCol="0" anchor="ctr"/>
+          <a:lstStyle/>
+          <a:p>
+            <a:pPr algn="ctr" indent="0" marL="0">
+              <a:buNone/>
+            </a:pPr>
+            <a:r>
+              <a:rPr lang="en-US" sz="1300" b="1" dirty="0">
+                <a:solidFill>
+                  <a:srgbClr val="3B82F6"/>
+                </a:solidFill>
+                <a:latin typeface="Consolas" pitchFamily="34" charset="0"/>
+                <a:ea typeface="Consolas" pitchFamily="34" charset="-122"/>
+                <a:cs typeface="Consolas" pitchFamily="34" charset="-120"/>
+              </a:rPr>
+              <a:t>1</a:t>
+            </a:r>
+            <a:endParaRPr lang="en-US" sz="1300" dirty="0"/>
+          </a:p>
+        </p:txBody>
+      </p:sp>
+      <p:sp>
+        <p:nvSpPr>
+          <p:cNvPr id="8" name="Text 6"/>
+          <p:cNvSpPr/>
+          <p:nvPr/>
+        </p:nvSpPr>
+        <p:spPr>
+          <a:xfrm>
+            <a:off x="1435608" y="2057400"/>
+            <a:ext cx="4480560" cy="822960"/>
+          </a:xfrm>
+          <a:prstGeom prst="rect">
+            <a:avLst/>
+          </a:prstGeom>
+          <a:noFill/>
+          <a:ln/>
+        </p:spPr>
+        <p:txBody>
+          <a:bodyPr wrap="square" rtlCol="0" anchor="ctr"/>
+          <a:lstStyle/>
+          <a:p>
+            <a:pPr indent="0" marL="0">
+              <a:buNone/>
+            </a:pPr>
+            <a:r>
+              <a:rPr lang="en-US" sz="1450" dirty="0">
                 <a:solidFill>
                   <a:srgbClr val="CBD5E1"/>
                 </a:solidFill>
@@ -1884,23 +5294,102 @@
                 <a:ea typeface="Segoe UI" pitchFamily="34" charset="-122"/>
                 <a:cs typeface="Segoe UI" pitchFamily="34" charset="-120"/>
               </a:rPr>
-              <a:t>Anti-money laundering analysis with Bank Rakyat Indonesia</a:t>
-            </a:r>
-            <a:endParaRPr lang="en-US" sz="1600" dirty="0"/>
-          </a:p>
-          <a:p>
-            <a:pPr marL="342900" indent="-342900">
-              <a:lnSpc>
-                <a:spcPct val="115000"/>
-              </a:lnSpc>
-              <a:spcAft>
-                <a:spcPts val="1000"/>
-              </a:spcAft>
-              <a:buSzPct val="100000"/>
-              <a:buChar char="▸"/>
-            </a:pPr>
-            <a:r>
-              <a:rPr lang="en-US" sz="1600" dirty="0">
+              <a:t>The engagement: anti-money laundering analysis at Bank Rakyat Indonesia</a:t>
+            </a:r>
+            <a:endParaRPr lang="en-US" sz="1450" dirty="0"/>
+          </a:p>
+        </p:txBody>
+      </p:sp>
+      <p:sp>
+        <p:nvSpPr>
+          <p:cNvPr id="9" name="Shape 7"/>
+          <p:cNvSpPr/>
+          <p:nvPr/>
+        </p:nvSpPr>
+        <p:spPr>
+          <a:xfrm>
+            <a:off x="868680" y="3044952"/>
+            <a:ext cx="420624" cy="420624"/>
+          </a:xfrm>
+          <a:prstGeom prst="ellipse">
+            <a:avLst/>
+          </a:prstGeom>
+          <a:solidFill>
+            <a:srgbClr val="111A2E"/>
+          </a:solidFill>
+          <a:ln w="19050">
+            <a:solidFill>
+              <a:srgbClr val="06B6D4"/>
+            </a:solidFill>
+            <a:prstDash val="solid"/>
+          </a:ln>
+        </p:spPr>
+      </p:sp>
+      <p:sp>
+        <p:nvSpPr>
+          <p:cNvPr id="10" name="Text 8"/>
+          <p:cNvSpPr/>
+          <p:nvPr/>
+        </p:nvSpPr>
+        <p:spPr>
+          <a:xfrm>
+            <a:off x="868680" y="3044952"/>
+            <a:ext cx="420624" cy="420624"/>
+          </a:xfrm>
+          <a:prstGeom prst="rect">
+            <a:avLst/>
+          </a:prstGeom>
+          <a:noFill/>
+          <a:ln/>
+        </p:spPr>
+        <p:txBody>
+          <a:bodyPr wrap="square" rtlCol="0" anchor="ctr"/>
+          <a:lstStyle/>
+          <a:p>
+            <a:pPr algn="ctr" indent="0" marL="0">
+              <a:buNone/>
+            </a:pPr>
+            <a:r>
+              <a:rPr lang="en-US" sz="1300" b="1" dirty="0">
+                <a:solidFill>
+                  <a:srgbClr val="06B6D4"/>
+                </a:solidFill>
+                <a:latin typeface="Consolas" pitchFamily="34" charset="0"/>
+                <a:ea typeface="Consolas" pitchFamily="34" charset="-122"/>
+                <a:cs typeface="Consolas" pitchFamily="34" charset="-120"/>
+              </a:rPr>
+              <a:t>2</a:t>
+            </a:r>
+            <a:endParaRPr lang="en-US" sz="1300" dirty="0"/>
+          </a:p>
+        </p:txBody>
+      </p:sp>
+      <p:sp>
+        <p:nvSpPr>
+          <p:cNvPr id="11" name="Text 9"/>
+          <p:cNvSpPr/>
+          <p:nvPr/>
+        </p:nvSpPr>
+        <p:spPr>
+          <a:xfrm>
+            <a:off x="1435608" y="2990088"/>
+            <a:ext cx="4480560" cy="822960"/>
+          </a:xfrm>
+          <a:prstGeom prst="rect">
+            <a:avLst/>
+          </a:prstGeom>
+          <a:noFill/>
+          <a:ln/>
+        </p:spPr>
+        <p:txBody>
+          <a:bodyPr wrap="square" rtlCol="0" anchor="ctr"/>
+          <a:lstStyle/>
+          <a:p>
+            <a:pPr indent="0" marL="0">
+              <a:buNone/>
+            </a:pPr>
+            <a:r>
+              <a:rPr lang="en-US" sz="1450" dirty="0">
                 <a:solidFill>
                   <a:srgbClr val="CBD5E1"/>
                 </a:solidFill>
@@ -1908,23 +5397,102 @@
                 <a:ea typeface="Segoe UI" pitchFamily="34" charset="-122"/>
                 <a:cs typeface="Segoe UI" pitchFamily="34" charset="-120"/>
               </a:rPr>
-              <a:t>Role: IT Business Analyst, Feb 2023 - Sep 2023 (PT Prima Integrasi Network)</a:t>
-            </a:r>
-            <a:endParaRPr lang="en-US" sz="1600" dirty="0"/>
-          </a:p>
-          <a:p>
-            <a:pPr marL="342900" indent="-342900">
-              <a:lnSpc>
-                <a:spcPct val="115000"/>
-              </a:lnSpc>
-              <a:spcAft>
-                <a:spcPts val="1000"/>
-              </a:spcAft>
-              <a:buSzPct val="100000"/>
-              <a:buChar char="▸"/>
-            </a:pPr>
-            <a:r>
-              <a:rPr lang="en-US" sz="1600" dirty="0">
+              <a:t>Why relational tables hide fraud that graphs make visible</a:t>
+            </a:r>
+            <a:endParaRPr lang="en-US" sz="1450" dirty="0"/>
+          </a:p>
+        </p:txBody>
+      </p:sp>
+      <p:sp>
+        <p:nvSpPr>
+          <p:cNvPr id="12" name="Shape 10"/>
+          <p:cNvSpPr/>
+          <p:nvPr/>
+        </p:nvSpPr>
+        <p:spPr>
+          <a:xfrm>
+            <a:off x="868680" y="3977640"/>
+            <a:ext cx="420624" cy="420624"/>
+          </a:xfrm>
+          <a:prstGeom prst="ellipse">
+            <a:avLst/>
+          </a:prstGeom>
+          <a:solidFill>
+            <a:srgbClr val="111A2E"/>
+          </a:solidFill>
+          <a:ln w="19050">
+            <a:solidFill>
+              <a:srgbClr val="3B82F6"/>
+            </a:solidFill>
+            <a:prstDash val="solid"/>
+          </a:ln>
+        </p:spPr>
+      </p:sp>
+      <p:sp>
+        <p:nvSpPr>
+          <p:cNvPr id="13" name="Text 11"/>
+          <p:cNvSpPr/>
+          <p:nvPr/>
+        </p:nvSpPr>
+        <p:spPr>
+          <a:xfrm>
+            <a:off x="868680" y="3977640"/>
+            <a:ext cx="420624" cy="420624"/>
+          </a:xfrm>
+          <a:prstGeom prst="rect">
+            <a:avLst/>
+          </a:prstGeom>
+          <a:noFill/>
+          <a:ln/>
+        </p:spPr>
+        <p:txBody>
+          <a:bodyPr wrap="square" rtlCol="0" anchor="ctr"/>
+          <a:lstStyle/>
+          <a:p>
+            <a:pPr algn="ctr" indent="0" marL="0">
+              <a:buNone/>
+            </a:pPr>
+            <a:r>
+              <a:rPr lang="en-US" sz="1300" b="1" dirty="0">
+                <a:solidFill>
+                  <a:srgbClr val="3B82F6"/>
+                </a:solidFill>
+                <a:latin typeface="Consolas" pitchFamily="34" charset="0"/>
+                <a:ea typeface="Consolas" pitchFamily="34" charset="-122"/>
+                <a:cs typeface="Consolas" pitchFamily="34" charset="-120"/>
+              </a:rPr>
+              <a:t>3</a:t>
+            </a:r>
+            <a:endParaRPr lang="en-US" sz="1300" dirty="0"/>
+          </a:p>
+        </p:txBody>
+      </p:sp>
+      <p:sp>
+        <p:nvSpPr>
+          <p:cNvPr id="14" name="Text 12"/>
+          <p:cNvSpPr/>
+          <p:nvPr/>
+        </p:nvSpPr>
+        <p:spPr>
+          <a:xfrm>
+            <a:off x="1435608" y="3922776"/>
+            <a:ext cx="4480560" cy="822960"/>
+          </a:xfrm>
+          <a:prstGeom prst="rect">
+            <a:avLst/>
+          </a:prstGeom>
+          <a:noFill/>
+          <a:ln/>
+        </p:spPr>
+        <p:txBody>
+          <a:bodyPr wrap="square" rtlCol="0" anchor="ctr"/>
+          <a:lstStyle/>
+          <a:p>
+            <a:pPr indent="0" marL="0">
+              <a:buNone/>
+            </a:pPr>
+            <a:r>
+              <a:rPr lang="en-US" sz="1450" dirty="0">
                 <a:solidFill>
                   <a:srgbClr val="CBD5E1"/>
                 </a:solidFill>
@@ -1932,23 +5500,102 @@
                 <a:ea typeface="Segoe UI" pitchFamily="34" charset="-122"/>
                 <a:cs typeface="Segoe UI" pitchFamily="34" charset="-120"/>
               </a:rPr>
-              <a:t>Toolkit: Graph Database Toolkit</a:t>
-            </a:r>
-            <a:endParaRPr lang="en-US" sz="1600" dirty="0"/>
-          </a:p>
-          <a:p>
-            <a:pPr marL="342900" indent="-342900">
-              <a:lnSpc>
-                <a:spcPct val="115000"/>
-              </a:lnSpc>
-              <a:spcAft>
-                <a:spcPts val="1000"/>
-              </a:spcAft>
-              <a:buSzPct val="100000"/>
-              <a:buChar char="▸"/>
-            </a:pPr>
-            <a:r>
-              <a:rPr lang="en-US" sz="1600" dirty="0">
+              <a:t>How detection patterns were defined with compliance stakeholders</a:t>
+            </a:r>
+            <a:endParaRPr lang="en-US" sz="1450" dirty="0"/>
+          </a:p>
+        </p:txBody>
+      </p:sp>
+      <p:sp>
+        <p:nvSpPr>
+          <p:cNvPr id="15" name="Shape 13"/>
+          <p:cNvSpPr/>
+          <p:nvPr/>
+        </p:nvSpPr>
+        <p:spPr>
+          <a:xfrm>
+            <a:off x="6355080" y="2112264"/>
+            <a:ext cx="420624" cy="420624"/>
+          </a:xfrm>
+          <a:prstGeom prst="ellipse">
+            <a:avLst/>
+          </a:prstGeom>
+          <a:solidFill>
+            <a:srgbClr val="111A2E"/>
+          </a:solidFill>
+          <a:ln w="19050">
+            <a:solidFill>
+              <a:srgbClr val="06B6D4"/>
+            </a:solidFill>
+            <a:prstDash val="solid"/>
+          </a:ln>
+        </p:spPr>
+      </p:sp>
+      <p:sp>
+        <p:nvSpPr>
+          <p:cNvPr id="16" name="Text 14"/>
+          <p:cNvSpPr/>
+          <p:nvPr/>
+        </p:nvSpPr>
+        <p:spPr>
+          <a:xfrm>
+            <a:off x="6355080" y="2112264"/>
+            <a:ext cx="420624" cy="420624"/>
+          </a:xfrm>
+          <a:prstGeom prst="rect">
+            <a:avLst/>
+          </a:prstGeom>
+          <a:noFill/>
+          <a:ln/>
+        </p:spPr>
+        <p:txBody>
+          <a:bodyPr wrap="square" rtlCol="0" anchor="ctr"/>
+          <a:lstStyle/>
+          <a:p>
+            <a:pPr algn="ctr" indent="0" marL="0">
+              <a:buNone/>
+            </a:pPr>
+            <a:r>
+              <a:rPr lang="en-US" sz="1300" b="1" dirty="0">
+                <a:solidFill>
+                  <a:srgbClr val="06B6D4"/>
+                </a:solidFill>
+                <a:latin typeface="Consolas" pitchFamily="34" charset="0"/>
+                <a:ea typeface="Consolas" pitchFamily="34" charset="-122"/>
+                <a:cs typeface="Consolas" pitchFamily="34" charset="-120"/>
+              </a:rPr>
+              <a:t>4</a:t>
+            </a:r>
+            <a:endParaRPr lang="en-US" sz="1300" dirty="0"/>
+          </a:p>
+        </p:txBody>
+      </p:sp>
+      <p:sp>
+        <p:nvSpPr>
+          <p:cNvPr id="17" name="Text 15"/>
+          <p:cNvSpPr/>
+          <p:nvPr/>
+        </p:nvSpPr>
+        <p:spPr>
+          <a:xfrm>
+            <a:off x="6922008" y="2057400"/>
+            <a:ext cx="4480560" cy="822960"/>
+          </a:xfrm>
+          <a:prstGeom prst="rect">
+            <a:avLst/>
+          </a:prstGeom>
+          <a:noFill/>
+          <a:ln/>
+        </p:spPr>
+        <p:txBody>
+          <a:bodyPr wrap="square" rtlCol="0" anchor="ctr"/>
+          <a:lstStyle/>
+          <a:p>
+            <a:pPr indent="0" marL="0">
+              <a:buNone/>
+            </a:pPr>
+            <a:r>
+              <a:rPr lang="en-US" sz="1450" dirty="0">
                 <a:solidFill>
                   <a:srgbClr val="CBD5E1"/>
                 </a:solidFill>
@@ -1956,22 +5603,47 @@
                 <a:ea typeface="Segoe UI" pitchFamily="34" charset="-122"/>
                 <a:cs typeface="Segoe UI" pitchFamily="34" charset="-120"/>
               </a:rPr>
-              <a:t>Deliverables: analysis, documentation, stakeholder reporting</a:t>
-            </a:r>
-            <a:endParaRPr lang="en-US" sz="1600" dirty="0"/>
-          </a:p>
-        </p:txBody>
-      </p:sp>
-      <p:sp>
-        <p:nvSpPr>
-          <p:cNvPr id="7" name="Text 5"/>
-          <p:cNvSpPr/>
-          <p:nvPr/>
-        </p:nvSpPr>
-        <p:spPr>
-          <a:xfrm>
-            <a:off x="10698480" y="6355080"/>
-            <a:ext cx="1188720" cy="365760"/>
+              <a:t>Evidence: effort distribution, pattern maturity, and what makes detections actionable</a:t>
+            </a:r>
+            <a:endParaRPr lang="en-US" sz="1450" dirty="0"/>
+          </a:p>
+        </p:txBody>
+      </p:sp>
+      <p:sp>
+        <p:nvSpPr>
+          <p:cNvPr id="18" name="Shape 16"/>
+          <p:cNvSpPr/>
+          <p:nvPr/>
+        </p:nvSpPr>
+        <p:spPr>
+          <a:xfrm>
+            <a:off x="6355080" y="3044952"/>
+            <a:ext cx="420624" cy="420624"/>
+          </a:xfrm>
+          <a:prstGeom prst="ellipse">
+            <a:avLst/>
+          </a:prstGeom>
+          <a:solidFill>
+            <a:srgbClr val="111A2E"/>
+          </a:solidFill>
+          <a:ln w="19050">
+            <a:solidFill>
+              <a:srgbClr val="3B82F6"/>
+            </a:solidFill>
+            <a:prstDash val="solid"/>
+          </a:ln>
+        </p:spPr>
+      </p:sp>
+      <p:sp>
+        <p:nvSpPr>
+          <p:cNvPr id="19" name="Text 17"/>
+          <p:cNvSpPr/>
+          <p:nvPr/>
+        </p:nvSpPr>
+        <p:spPr>
+          <a:xfrm>
+            <a:off x="6355080" y="3044952"/>
+            <a:ext cx="420624" cy="420624"/>
           </a:xfrm>
           <a:prstGeom prst="rect">
             <a:avLst/>
@@ -1983,19 +5655,97 @@
           <a:bodyPr wrap="square" rtlCol="0" anchor="ctr"/>
           <a:lstStyle/>
           <a:p>
-            <a:pPr algn="r" indent="0" marL="0">
+            <a:pPr algn="ctr" indent="0" marL="0">
               <a:buNone/>
             </a:pPr>
             <a:r>
-              <a:rPr lang="en-US" sz="1000" dirty="0">
-                <a:solidFill>
-                  <a:srgbClr val="64748B"/>
+              <a:rPr lang="en-US" sz="1300" b="1" dirty="0">
+                <a:solidFill>
+                  <a:srgbClr val="3B82F6"/>
                 </a:solidFill>
                 <a:latin typeface="Consolas" pitchFamily="34" charset="0"/>
                 <a:ea typeface="Consolas" pitchFamily="34" charset="-122"/>
                 <a:cs typeface="Consolas" pitchFamily="34" charset="-120"/>
               </a:rPr>
-              <a:t>2 / 8</a:t>
+              <a:t>5</a:t>
+            </a:r>
+            <a:endParaRPr lang="en-US" sz="1300" dirty="0"/>
+          </a:p>
+        </p:txBody>
+      </p:sp>
+      <p:sp>
+        <p:nvSpPr>
+          <p:cNvPr id="20" name="Text 18"/>
+          <p:cNvSpPr/>
+          <p:nvPr/>
+        </p:nvSpPr>
+        <p:spPr>
+          <a:xfrm>
+            <a:off x="6922008" y="2990088"/>
+            <a:ext cx="4480560" cy="822960"/>
+          </a:xfrm>
+          <a:prstGeom prst="rect">
+            <a:avLst/>
+          </a:prstGeom>
+          <a:noFill/>
+          <a:ln/>
+        </p:spPr>
+        <p:txBody>
+          <a:bodyPr wrap="square" rtlCol="0" anchor="ctr"/>
+          <a:lstStyle/>
+          <a:p>
+            <a:pPr indent="0" marL="0">
+              <a:buNone/>
+            </a:pPr>
+            <a:r>
+              <a:rPr lang="en-US" sz="1450" dirty="0">
+                <a:solidFill>
+                  <a:srgbClr val="CBD5E1"/>
+                </a:solidFill>
+                <a:latin typeface="Segoe UI" pitchFamily="34" charset="0"/>
+                <a:ea typeface="Segoe UI" pitchFamily="34" charset="-122"/>
+                <a:cs typeface="Segoe UI" pitchFamily="34" charset="-120"/>
+              </a:rPr>
+              <a:t>Lessons that transfer to any relationship-heavy data problem</a:t>
+            </a:r>
+            <a:endParaRPr lang="en-US" sz="1450" dirty="0"/>
+          </a:p>
+        </p:txBody>
+      </p:sp>
+      <p:sp>
+        <p:nvSpPr>
+          <p:cNvPr id="21" name="Text 19"/>
+          <p:cNvSpPr/>
+          <p:nvPr/>
+        </p:nvSpPr>
+        <p:spPr>
+          <a:xfrm>
+            <a:off x="10698480" y="6382512"/>
+            <a:ext cx="1188720" cy="365760"/>
+          </a:xfrm>
+          <a:prstGeom prst="rect">
+            <a:avLst/>
+          </a:prstGeom>
+          <a:noFill/>
+          <a:ln/>
+        </p:spPr>
+        <p:txBody>
+          <a:bodyPr wrap="square" rtlCol="0" anchor="ctr"/>
+          <a:lstStyle/>
+          <a:p>
+            <a:pPr algn="r" indent="0" marL="0">
+              <a:buNone/>
+            </a:pPr>
+            <a:r>
+              <a:rPr lang="en-US" sz="1000" dirty="0">
+                <a:solidFill>
+                  <a:srgbClr val="64748B"/>
+                </a:solidFill>
+                <a:latin typeface="Consolas" pitchFamily="34" charset="0"/>
+                <a:ea typeface="Consolas" pitchFamily="34" charset="-122"/>
+                <a:cs typeface="Consolas" pitchFamily="34" charset="-120"/>
+              </a:rPr>
+              <a:t>2 / 14</a:t>
             </a:r>
             <a:endParaRPr lang="en-US" sz="1000" dirty="0"/>
           </a:p>
@@ -2106,7 +5856,7 @@
                 <a:ea typeface="Consolas" pitchFamily="34" charset="-122"/>
                 <a:cs typeface="Consolas" pitchFamily="34" charset="-120"/>
               </a:rPr>
-              <a:t>WHY GRAPHS</a:t>
+              <a:t>CONTEXT</a:t>
             </a:r>
             <a:endParaRPr lang="en-US" sz="1200" dirty="0"/>
           </a:p>
@@ -2120,8 +5870,8 @@
         </p:nvSpPr>
         <p:spPr>
           <a:xfrm>
-            <a:off x="822960" y="960120"/>
-            <a:ext cx="10515600" cy="868680"/>
+            <a:off x="822960" y="914400"/>
+            <a:ext cx="10561320" cy="868680"/>
           </a:xfrm>
           <a:prstGeom prst="rect">
             <a:avLst/>
@@ -2137,7 +5887,7 @@
               <a:buNone/>
             </a:pPr>
             <a:r>
-              <a:rPr lang="en-US" sz="3000" b="1" dirty="0">
+              <a:rPr lang="en-US" sz="2700" b="1" dirty="0">
                 <a:solidFill>
                   <a:srgbClr val="FFFFFF"/>
                 </a:solidFill>
@@ -2145,9 +5895,9 @@
                 <a:ea typeface="Segoe UI" pitchFamily="34" charset="-122"/>
                 <a:cs typeface="Segoe UI" pitchFamily="34" charset="-120"/>
               </a:rPr>
-              <a:t>Tables hide what graphs reveal</a:t>
-            </a:r>
-            <a:endParaRPr lang="en-US" sz="3000" dirty="0"/>
+              <a:t>Compliance needed patterns, not another report</a:t>
+            </a:r>
+            <a:endParaRPr lang="en-US" sz="2700" dirty="0"/>
           </a:p>
         </p:txBody>
       </p:sp>
@@ -2159,7 +5909,7 @@
         </p:nvSpPr>
         <p:spPr>
           <a:xfrm>
-            <a:off x="868680" y="2057400"/>
+            <a:off x="868680" y="2011680"/>
             <a:ext cx="10424160" cy="3566160"/>
           </a:xfrm>
           <a:prstGeom prst="rect">
@@ -2174,10 +5924,10 @@
           <a:p>
             <a:pPr marL="342900" indent="-342900">
               <a:lnSpc>
-                <a:spcPct val="115000"/>
+                <a:spcPct val="112000"/>
               </a:lnSpc>
               <a:spcAft>
-                <a:spcPts val="1000"/>
+                <a:spcPts val="900"/>
               </a:spcAft>
               <a:buSzPct val="100000"/>
               <a:buChar char="▸"/>
@@ -2191,17 +5941,17 @@
                 <a:ea typeface="Segoe UI" pitchFamily="34" charset="-122"/>
                 <a:cs typeface="Segoe UI" pitchFamily="34" charset="-120"/>
               </a:rPr>
-              <a:t>Money laundering is relational: layered transfers, circular flows, mule networks</a:t>
+              <a:t>Anti-money laundering analysis engagement with Bank Rakyat Indonesia (BRI)</a:t>
             </a:r>
             <a:endParaRPr lang="en-US" sz="1600" dirty="0"/>
           </a:p>
           <a:p>
             <a:pPr marL="342900" indent="-342900">
               <a:lnSpc>
-                <a:spcPct val="115000"/>
+                <a:spcPct val="112000"/>
               </a:lnSpc>
               <a:spcAft>
-                <a:spcPts val="1000"/>
+                <a:spcPts val="900"/>
               </a:spcAft>
               <a:buSzPct val="100000"/>
               <a:buChar char="▸"/>
@@ -2215,17 +5965,17 @@
                 <a:ea typeface="Segoe UI" pitchFamily="34" charset="-122"/>
                 <a:cs typeface="Segoe UI" pitchFamily="34" charset="-120"/>
               </a:rPr>
-              <a:t>Relational joins strain to express what a graph shows as a shape</a:t>
+              <a:t>Role: IT Business Analyst, Feb 2023 - Sep 2023, via PT Prima Integrasi Network</a:t>
             </a:r>
             <a:endParaRPr lang="en-US" sz="1600" dirty="0"/>
           </a:p>
           <a:p>
             <a:pPr marL="342900" indent="-342900">
               <a:lnSpc>
-                <a:spcPct val="115000"/>
+                <a:spcPct val="112000"/>
               </a:lnSpc>
               <a:spcAft>
-                <a:spcPts val="1000"/>
+                <a:spcPts val="900"/>
               </a:spcAft>
               <a:buSzPct val="100000"/>
               <a:buChar char="▸"/>
@@ -2239,17 +5989,17 @@
                 <a:ea typeface="Segoe UI" pitchFamily="34" charset="-122"/>
                 <a:cs typeface="Segoe UI" pitchFamily="34" charset="-120"/>
               </a:rPr>
-              <a:t>A suspicious ring becomes visible - not a 40-line query</a:t>
+              <a:t>Core toolkit: a graph database toolkit purpose-built for relationship analysis</a:t>
             </a:r>
             <a:endParaRPr lang="en-US" sz="1600" dirty="0"/>
           </a:p>
           <a:p>
             <a:pPr marL="342900" indent="-342900">
               <a:lnSpc>
-                <a:spcPct val="115000"/>
+                <a:spcPct val="112000"/>
               </a:lnSpc>
               <a:spcAft>
-                <a:spcPts val="1000"/>
+                <a:spcPts val="900"/>
               </a:spcAft>
               <a:buSzPct val="100000"/>
               <a:buChar char="▸"/>
@@ -2263,10 +6013,34 @@
                 <a:ea typeface="Segoe UI" pitchFamily="34" charset="-122"/>
                 <a:cs typeface="Segoe UI" pitchFamily="34" charset="-120"/>
               </a:rPr>
-              <a:t>The schema forces the conversation: what does connected actually mean?</a:t>
+              <a:t>Deliverables: pattern definitions, audit-ready documentation, and stakeholder reporting</a:t>
             </a:r>
             <a:endParaRPr lang="en-US" sz="1600" dirty="0"/>
           </a:p>
+          <a:p>
+            <a:pPr marL="342900" indent="-342900">
+              <a:lnSpc>
+                <a:spcPct val="112000"/>
+              </a:lnSpc>
+              <a:spcAft>
+                <a:spcPts val="900"/>
+              </a:spcAft>
+              <a:buSzPct val="100000"/>
+              <a:buChar char="▸"/>
+            </a:pPr>
+            <a:r>
+              <a:rPr lang="en-US" sz="1600" dirty="0">
+                <a:solidFill>
+                  <a:srgbClr val="CBD5E1"/>
+                </a:solidFill>
+                <a:latin typeface="Segoe UI" pitchFamily="34" charset="0"/>
+                <a:ea typeface="Segoe UI" pitchFamily="34" charset="-122"/>
+                <a:cs typeface="Segoe UI" pitchFamily="34" charset="-120"/>
+              </a:rPr>
+              <a:t>Stakeholders thought in regulations - the analysis had to speak both languages</a:t>
+            </a:r>
+            <a:endParaRPr lang="en-US" sz="1600" dirty="0"/>
+          </a:p>
         </p:txBody>
       </p:sp>
       <p:sp>
@@ -2277,7 +6051,7 @@
         </p:nvSpPr>
         <p:spPr>
           <a:xfrm>
-            <a:off x="10698480" y="6355080"/>
+            <a:off x="10698480" y="6382512"/>
             <a:ext cx="1188720" cy="365760"/>
           </a:xfrm>
           <a:prstGeom prst="rect">
@@ -2302,7 +6076,7 @@
                 <a:ea typeface="Consolas" pitchFamily="34" charset="-122"/>
                 <a:cs typeface="Consolas" pitchFamily="34" charset="-120"/>
               </a:rPr>
-              <a:t>3 / 8</a:t>
+              <a:t>3 / 14</a:t>
             </a:r>
             <a:endParaRPr lang="en-US" sz="1000" dirty="0"/>
           </a:p>
@@ -2413,7 +6187,7 @@
                 <a:ea typeface="Consolas" pitchFamily="34" charset="-122"/>
                 <a:cs typeface="Consolas" pitchFamily="34" charset="-120"/>
               </a:rPr>
-              <a:t>MY ROLE</a:t>
+              <a:t>THE CHALLENGE</a:t>
             </a:r>
             <a:endParaRPr lang="en-US" sz="1200" dirty="0"/>
           </a:p>
@@ -2427,8 +6201,8 @@
         </p:nvSpPr>
         <p:spPr>
           <a:xfrm>
-            <a:off x="822960" y="960120"/>
-            <a:ext cx="10515600" cy="868680"/>
+            <a:off x="822960" y="914400"/>
+            <a:ext cx="10561320" cy="868680"/>
           </a:xfrm>
           <a:prstGeom prst="rect">
             <a:avLst/>
@@ -2444,7 +6218,7 @@
               <a:buNone/>
             </a:pPr>
             <a:r>
-              <a:rPr lang="en-US" sz="3000" b="1" dirty="0">
+              <a:rPr lang="en-US" sz="2700" b="1" dirty="0">
                 <a:solidFill>
                   <a:srgbClr val="FFFFFF"/>
                 </a:solidFill>
@@ -2452,139 +6226,659 @@
                 <a:ea typeface="Segoe UI" pitchFamily="34" charset="-122"/>
                 <a:cs typeface="Segoe UI" pitchFamily="34" charset="-120"/>
               </a:rPr>
-              <a:t>Analysis discipline</a:t>
-            </a:r>
-            <a:endParaRPr lang="en-US" sz="3000" dirty="0"/>
-          </a:p>
-        </p:txBody>
-      </p:sp>
-      <p:sp>
-        <p:nvSpPr>
-          <p:cNvPr id="6" name="Text 4"/>
-          <p:cNvSpPr/>
-          <p:nvPr/>
-        </p:nvSpPr>
-        <p:spPr>
-          <a:xfrm>
-            <a:off x="868680" y="2057400"/>
-            <a:ext cx="10424160" cy="3566160"/>
-          </a:xfrm>
-          <a:prstGeom prst="rect">
-            <a:avLst/>
-          </a:prstGeom>
-          <a:noFill/>
-          <a:ln/>
-        </p:spPr>
-        <p:txBody>
-          <a:bodyPr wrap="square" rtlCol="0" anchor="t"/>
-          <a:lstStyle/>
-          <a:p>
-            <a:pPr marL="342900" indent="-342900">
-              <a:lnSpc>
-                <a:spcPct val="115000"/>
-              </a:lnSpc>
-              <a:spcAft>
-                <a:spcPts val="1000"/>
-              </a:spcAft>
-              <a:buSzPct val="100000"/>
-              <a:buChar char="▸"/>
-            </a:pPr>
-            <a:r>
-              <a:rPr lang="en-US" sz="1600" dirty="0">
-                <a:solidFill>
-                  <a:srgbClr val="CBD5E1"/>
+              <a:t>Why AML resists the usual tooling</a:t>
+            </a:r>
+            <a:endParaRPr lang="en-US" sz="2700" dirty="0"/>
+          </a:p>
+        </p:txBody>
+      </p:sp>
+      <p:sp>
+        <p:nvSpPr>
+          <p:cNvPr id="6" name="Shape 4"/>
+          <p:cNvSpPr/>
+          <p:nvPr/>
+        </p:nvSpPr>
+        <p:spPr>
+          <a:xfrm>
+            <a:off x="822960" y="2194560"/>
+            <a:ext cx="2423160" cy="2697480"/>
+          </a:xfrm>
+          <a:prstGeom prst="roundRect">
+            <a:avLst>
+              <a:gd name="adj" fmla="val 3019"/>
+            </a:avLst>
+          </a:prstGeom>
+          <a:solidFill>
+            <a:srgbClr val="111A2E"/>
+          </a:solidFill>
+          <a:ln w="12700">
+            <a:solidFill>
+              <a:srgbClr val="1E2D45"/>
+            </a:solidFill>
+            <a:prstDash val="solid"/>
+          </a:ln>
+        </p:spPr>
+      </p:sp>
+      <p:sp>
+        <p:nvSpPr>
+          <p:cNvPr id="7" name="Text 5"/>
+          <p:cNvSpPr/>
+          <p:nvPr/>
+        </p:nvSpPr>
+        <p:spPr>
+          <a:xfrm>
+            <a:off x="960120" y="2514600"/>
+            <a:ext cx="2148840" cy="914400"/>
+          </a:xfrm>
+          <a:prstGeom prst="rect">
+            <a:avLst/>
+          </a:prstGeom>
+          <a:noFill/>
+          <a:ln/>
+        </p:spPr>
+        <p:txBody>
+          <a:bodyPr wrap="square" rtlCol="0" anchor="ctr"/>
+          <a:lstStyle/>
+          <a:p>
+            <a:pPr algn="ctr" indent="0" marL="0">
+              <a:buNone/>
+            </a:pPr>
+            <a:r>
+              <a:rPr lang="en-US" sz="3800" b="1" dirty="0">
+                <a:solidFill>
+                  <a:srgbClr val="3B82F6"/>
                 </a:solidFill>
                 <a:latin typeface="Segoe UI" pitchFamily="34" charset="0"/>
                 <a:ea typeface="Segoe UI" pitchFamily="34" charset="-122"/>
                 <a:cs typeface="Segoe UI" pitchFamily="34" charset="-120"/>
               </a:rPr>
-              <a:t>Requirements gathering with compliance stakeholders</a:t>
-            </a:r>
-            <a:endParaRPr lang="en-US" sz="1600" dirty="0"/>
-          </a:p>
-          <a:p>
-            <a:pPr marL="342900" indent="-342900">
-              <a:lnSpc>
-                <a:spcPct val="115000"/>
-              </a:lnSpc>
-              <a:spcAft>
-                <a:spcPts val="1000"/>
-              </a:spcAft>
-              <a:buSzPct val="100000"/>
-              <a:buChar char="▸"/>
-            </a:pPr>
-            <a:r>
-              <a:rPr lang="en-US" sz="1600" dirty="0">
-                <a:solidFill>
-                  <a:srgbClr val="CBD5E1"/>
+              <a:t>3+</a:t>
+            </a:r>
+            <a:endParaRPr lang="en-US" sz="3800" dirty="0"/>
+          </a:p>
+        </p:txBody>
+      </p:sp>
+      <p:sp>
+        <p:nvSpPr>
+          <p:cNvPr id="8" name="Text 6"/>
+          <p:cNvSpPr/>
+          <p:nvPr/>
+        </p:nvSpPr>
+        <p:spPr>
+          <a:xfrm>
+            <a:off x="960120" y="3520440"/>
+            <a:ext cx="2148840" cy="502920"/>
+          </a:xfrm>
+          <a:prstGeom prst="rect">
+            <a:avLst/>
+          </a:prstGeom>
+          <a:noFill/>
+          <a:ln/>
+        </p:spPr>
+        <p:txBody>
+          <a:bodyPr wrap="square" rtlCol="0" anchor="ctr"/>
+          <a:lstStyle/>
+          <a:p>
+            <a:pPr algn="ctr" indent="0" marL="0">
+              <a:buNone/>
+            </a:pPr>
+            <a:r>
+              <a:rPr lang="en-US" sz="1450" b="1" dirty="0">
+                <a:solidFill>
+                  <a:srgbClr val="FFFFFF"/>
                 </a:solidFill>
                 <a:latin typeface="Segoe UI" pitchFamily="34" charset="0"/>
                 <a:ea typeface="Segoe UI" pitchFamily="34" charset="-122"/>
                 <a:cs typeface="Segoe UI" pitchFamily="34" charset="-120"/>
               </a:rPr>
-              <a:t>Pattern definition with the graph toolkit</a:t>
-            </a:r>
-            <a:endParaRPr lang="en-US" sz="1600" dirty="0"/>
-          </a:p>
-          <a:p>
-            <a:pPr marL="342900" indent="-342900">
-              <a:lnSpc>
-                <a:spcPct val="115000"/>
-              </a:lnSpc>
-              <a:spcAft>
-                <a:spcPts val="1000"/>
-              </a:spcAft>
-              <a:buSzPct val="100000"/>
-              <a:buChar char="▸"/>
-            </a:pPr>
-            <a:r>
-              <a:rPr lang="en-US" sz="1600" dirty="0">
-                <a:solidFill>
-                  <a:srgbClr val="CBD5E1"/>
+              <a:t>Entity types linked</a:t>
+            </a:r>
+            <a:endParaRPr lang="en-US" sz="1450" dirty="0"/>
+          </a:p>
+        </p:txBody>
+      </p:sp>
+      <p:sp>
+        <p:nvSpPr>
+          <p:cNvPr id="9" name="Text 7"/>
+          <p:cNvSpPr/>
+          <p:nvPr/>
+        </p:nvSpPr>
+        <p:spPr>
+          <a:xfrm>
+            <a:off x="1005840" y="4069080"/>
+            <a:ext cx="2057400" cy="685800"/>
+          </a:xfrm>
+          <a:prstGeom prst="rect">
+            <a:avLst/>
+          </a:prstGeom>
+          <a:noFill/>
+          <a:ln/>
+        </p:spPr>
+        <p:txBody>
+          <a:bodyPr wrap="square" rtlCol="0" anchor="ctr"/>
+          <a:lstStyle/>
+          <a:p>
+            <a:pPr algn="ctr" indent="0" marL="0">
+              <a:buNone/>
+            </a:pPr>
+            <a:r>
+              <a:rPr lang="en-US" sz="1050" dirty="0">
+                <a:solidFill>
+                  <a:srgbClr val="94A3B8"/>
                 </a:solidFill>
                 <a:latin typeface="Segoe UI" pitchFamily="34" charset="0"/>
                 <a:ea typeface="Segoe UI" pitchFamily="34" charset="-122"/>
                 <a:cs typeface="Segoe UI" pitchFamily="34" charset="-120"/>
               </a:rPr>
-              <a:t>Documentation auditors and non-technical reviewers could follow</a:t>
-            </a:r>
-            <a:endParaRPr lang="en-US" sz="1600" dirty="0"/>
-          </a:p>
-          <a:p>
-            <a:pPr marL="342900" indent="-342900">
-              <a:lnSpc>
-                <a:spcPct val="115000"/>
-              </a:lnSpc>
-              <a:spcAft>
-                <a:spcPts val="1000"/>
-              </a:spcAft>
-              <a:buSzPct val="100000"/>
-              <a:buChar char="▸"/>
-            </a:pPr>
-            <a:r>
-              <a:rPr lang="en-US" sz="1600" dirty="0">
-                <a:solidFill>
-                  <a:srgbClr val="CBD5E1"/>
+              <a:t>Accounts, transactions, and parties joined over and over to expose one pattern</a:t>
+            </a:r>
+            <a:endParaRPr lang="en-US" sz="1050" dirty="0"/>
+          </a:p>
+        </p:txBody>
+      </p:sp>
+      <p:sp>
+        <p:nvSpPr>
+          <p:cNvPr id="10" name="Shape 8"/>
+          <p:cNvSpPr/>
+          <p:nvPr/>
+        </p:nvSpPr>
+        <p:spPr>
+          <a:xfrm>
+            <a:off x="3520440" y="2194560"/>
+            <a:ext cx="2423160" cy="2697480"/>
+          </a:xfrm>
+          <a:prstGeom prst="roundRect">
+            <a:avLst>
+              <a:gd name="adj" fmla="val 3019"/>
+            </a:avLst>
+          </a:prstGeom>
+          <a:solidFill>
+            <a:srgbClr val="111A2E"/>
+          </a:solidFill>
+          <a:ln w="12700">
+            <a:solidFill>
+              <a:srgbClr val="1E2D45"/>
+            </a:solidFill>
+            <a:prstDash val="solid"/>
+          </a:ln>
+        </p:spPr>
+      </p:sp>
+      <p:sp>
+        <p:nvSpPr>
+          <p:cNvPr id="11" name="Text 9"/>
+          <p:cNvSpPr/>
+          <p:nvPr/>
+        </p:nvSpPr>
+        <p:spPr>
+          <a:xfrm>
+            <a:off x="3657600" y="2514600"/>
+            <a:ext cx="2148840" cy="914400"/>
+          </a:xfrm>
+          <a:prstGeom prst="rect">
+            <a:avLst/>
+          </a:prstGeom>
+          <a:noFill/>
+          <a:ln/>
+        </p:spPr>
+        <p:txBody>
+          <a:bodyPr wrap="square" rtlCol="0" anchor="ctr"/>
+          <a:lstStyle/>
+          <a:p>
+            <a:pPr algn="ctr" indent="0" marL="0">
+              <a:buNone/>
+            </a:pPr>
+            <a:r>
+              <a:rPr lang="en-US" sz="3800" b="1" dirty="0">
+                <a:solidFill>
+                  <a:srgbClr val="06B6D4"/>
                 </a:solidFill>
                 <a:latin typeface="Segoe UI" pitchFamily="34" charset="0"/>
                 <a:ea typeface="Segoe UI" pitchFamily="34" charset="-122"/>
                 <a:cs typeface="Segoe UI" pitchFamily="34" charset="-120"/>
               </a:rPr>
-              <a:t>Operational optimization opportunities across the workflow</a:t>
-            </a:r>
-            <a:endParaRPr lang="en-US" sz="1600" dirty="0"/>
-          </a:p>
-        </p:txBody>
-      </p:sp>
-      <p:sp>
-        <p:nvSpPr>
-          <p:cNvPr id="7" name="Text 5"/>
-          <p:cNvSpPr/>
-          <p:nvPr/>
-        </p:nvSpPr>
-        <p:spPr>
-          <a:xfrm>
-            <a:off x="10698480" y="6355080"/>
+              <a:t>40</a:t>
+            </a:r>
+            <a:endParaRPr lang="en-US" sz="3800" dirty="0"/>
+          </a:p>
+        </p:txBody>
+      </p:sp>
+      <p:sp>
+        <p:nvSpPr>
+          <p:cNvPr id="12" name="Text 10"/>
+          <p:cNvSpPr/>
+          <p:nvPr/>
+        </p:nvSpPr>
+        <p:spPr>
+          <a:xfrm>
+            <a:off x="3657600" y="3520440"/>
+            <a:ext cx="2148840" cy="502920"/>
+          </a:xfrm>
+          <a:prstGeom prst="rect">
+            <a:avLst/>
+          </a:prstGeom>
+          <a:noFill/>
+          <a:ln/>
+        </p:spPr>
+        <p:txBody>
+          <a:bodyPr wrap="square" rtlCol="0" anchor="ctr"/>
+          <a:lstStyle/>
+          <a:p>
+            <a:pPr algn="ctr" indent="0" marL="0">
+              <a:buNone/>
+            </a:pPr>
+            <a:r>
+              <a:rPr lang="en-US" sz="1450" b="1" dirty="0">
+                <a:solidFill>
+                  <a:srgbClr val="FFFFFF"/>
+                </a:solidFill>
+                <a:latin typeface="Segoe UI" pitchFamily="34" charset="0"/>
+                <a:ea typeface="Segoe UI" pitchFamily="34" charset="-122"/>
+                <a:cs typeface="Segoe UI" pitchFamily="34" charset="-120"/>
+              </a:rPr>
+              <a:t>Lines per ring query</a:t>
+            </a:r>
+            <a:endParaRPr lang="en-US" sz="1450" dirty="0"/>
+          </a:p>
+        </p:txBody>
+      </p:sp>
+      <p:sp>
+        <p:nvSpPr>
+          <p:cNvPr id="13" name="Text 11"/>
+          <p:cNvSpPr/>
+          <p:nvPr/>
+        </p:nvSpPr>
+        <p:spPr>
+          <a:xfrm>
+            <a:off x="3703320" y="4069080"/>
+            <a:ext cx="2057400" cy="685800"/>
+          </a:xfrm>
+          <a:prstGeom prst="rect">
+            <a:avLst/>
+          </a:prstGeom>
+          <a:noFill/>
+          <a:ln/>
+        </p:spPr>
+        <p:txBody>
+          <a:bodyPr wrap="square" rtlCol="0" anchor="ctr"/>
+          <a:lstStyle/>
+          <a:p>
+            <a:pPr algn="ctr" indent="0" marL="0">
+              <a:buNone/>
+            </a:pPr>
+            <a:r>
+              <a:rPr lang="en-US" sz="1050" dirty="0">
+                <a:solidFill>
+                  <a:srgbClr val="94A3B8"/>
+                </a:solidFill>
+                <a:latin typeface="Segoe UI" pitchFamily="34" charset="0"/>
+                <a:ea typeface="Segoe UI" pitchFamily="34" charset="-122"/>
+                <a:cs typeface="Segoe UI" pitchFamily="34" charset="-120"/>
+              </a:rPr>
+              <a:t>What a single suspicious ring took to express in relational SQL - versus one visible shape</a:t>
+            </a:r>
+            <a:endParaRPr lang="en-US" sz="1050" dirty="0"/>
+          </a:p>
+        </p:txBody>
+      </p:sp>
+      <p:sp>
+        <p:nvSpPr>
+          <p:cNvPr id="14" name="Shape 12"/>
+          <p:cNvSpPr/>
+          <p:nvPr/>
+        </p:nvSpPr>
+        <p:spPr>
+          <a:xfrm>
+            <a:off x="6217920" y="2194560"/>
+            <a:ext cx="2423160" cy="2697480"/>
+          </a:xfrm>
+          <a:prstGeom prst="roundRect">
+            <a:avLst>
+              <a:gd name="adj" fmla="val 3019"/>
+            </a:avLst>
+          </a:prstGeom>
+          <a:solidFill>
+            <a:srgbClr val="111A2E"/>
+          </a:solidFill>
+          <a:ln w="12700">
+            <a:solidFill>
+              <a:srgbClr val="1E2D45"/>
+            </a:solidFill>
+            <a:prstDash val="solid"/>
+          </a:ln>
+        </p:spPr>
+      </p:sp>
+      <p:sp>
+        <p:nvSpPr>
+          <p:cNvPr id="15" name="Text 13"/>
+          <p:cNvSpPr/>
+          <p:nvPr/>
+        </p:nvSpPr>
+        <p:spPr>
+          <a:xfrm>
+            <a:off x="6355080" y="2514600"/>
+            <a:ext cx="2148840" cy="914400"/>
+          </a:xfrm>
+          <a:prstGeom prst="rect">
+            <a:avLst/>
+          </a:prstGeom>
+          <a:noFill/>
+          <a:ln/>
+        </p:spPr>
+        <p:txBody>
+          <a:bodyPr wrap="square" rtlCol="0" anchor="ctr"/>
+          <a:lstStyle/>
+          <a:p>
+            <a:pPr algn="ctr" indent="0" marL="0">
+              <a:buNone/>
+            </a:pPr>
+            <a:r>
+              <a:rPr lang="en-US" sz="3800" b="1" dirty="0">
+                <a:solidFill>
+                  <a:srgbClr val="22D3A0"/>
+                </a:solidFill>
+                <a:latin typeface="Segoe UI" pitchFamily="34" charset="0"/>
+                <a:ea typeface="Segoe UI" pitchFamily="34" charset="-122"/>
+                <a:cs typeface="Segoe UI" pitchFamily="34" charset="-120"/>
+              </a:rPr>
+              <a:t>100%</a:t>
+            </a:r>
+            <a:endParaRPr lang="en-US" sz="3800" dirty="0"/>
+          </a:p>
+        </p:txBody>
+      </p:sp>
+      <p:sp>
+        <p:nvSpPr>
+          <p:cNvPr id="16" name="Text 14"/>
+          <p:cNvSpPr/>
+          <p:nvPr/>
+        </p:nvSpPr>
+        <p:spPr>
+          <a:xfrm>
+            <a:off x="6355080" y="3520440"/>
+            <a:ext cx="2148840" cy="502920"/>
+          </a:xfrm>
+          <a:prstGeom prst="rect">
+            <a:avLst/>
+          </a:prstGeom>
+          <a:noFill/>
+          <a:ln/>
+        </p:spPr>
+        <p:txBody>
+          <a:bodyPr wrap="square" rtlCol="0" anchor="ctr"/>
+          <a:lstStyle/>
+          <a:p>
+            <a:pPr algn="ctr" indent="0" marL="0">
+              <a:buNone/>
+            </a:pPr>
+            <a:r>
+              <a:rPr lang="en-US" sz="1450" b="1" dirty="0">
+                <a:solidFill>
+                  <a:srgbClr val="FFFFFF"/>
+                </a:solidFill>
+                <a:latin typeface="Segoe UI" pitchFamily="34" charset="0"/>
+                <a:ea typeface="Segoe UI" pitchFamily="34" charset="-122"/>
+                <a:cs typeface="Segoe UI" pitchFamily="34" charset="-120"/>
+              </a:rPr>
+              <a:t>Detections explainable</a:t>
+            </a:r>
+            <a:endParaRPr lang="en-US" sz="1450" dirty="0"/>
+          </a:p>
+        </p:txBody>
+      </p:sp>
+      <p:sp>
+        <p:nvSpPr>
+          <p:cNvPr id="17" name="Text 15"/>
+          <p:cNvSpPr/>
+          <p:nvPr/>
+        </p:nvSpPr>
+        <p:spPr>
+          <a:xfrm>
+            <a:off x="6400800" y="4069080"/>
+            <a:ext cx="2057400" cy="685800"/>
+          </a:xfrm>
+          <a:prstGeom prst="rect">
+            <a:avLst/>
+          </a:prstGeom>
+          <a:noFill/>
+          <a:ln/>
+        </p:spPr>
+        <p:txBody>
+          <a:bodyPr wrap="square" rtlCol="0" anchor="ctr"/>
+          <a:lstStyle/>
+          <a:p>
+            <a:pPr algn="ctr" indent="0" marL="0">
+              <a:buNone/>
+            </a:pPr>
+            <a:r>
+              <a:rPr lang="en-US" sz="1050" dirty="0">
+                <a:solidFill>
+                  <a:srgbClr val="94A3B8"/>
+                </a:solidFill>
+                <a:latin typeface="Segoe UI" pitchFamily="34" charset="0"/>
+                <a:ea typeface="Segoe UI" pitchFamily="34" charset="-122"/>
+                <a:cs typeface="Segoe UI" pitchFamily="34" charset="-120"/>
+              </a:rPr>
+              <a:t>Every pattern had to survive audit and non-technical review</a:t>
+            </a:r>
+            <a:endParaRPr lang="en-US" sz="1050" dirty="0"/>
+          </a:p>
+        </p:txBody>
+      </p:sp>
+      <p:sp>
+        <p:nvSpPr>
+          <p:cNvPr id="18" name="Shape 16"/>
+          <p:cNvSpPr/>
+          <p:nvPr/>
+        </p:nvSpPr>
+        <p:spPr>
+          <a:xfrm>
+            <a:off x="8915400" y="2194560"/>
+            <a:ext cx="2423160" cy="2697480"/>
+          </a:xfrm>
+          <a:prstGeom prst="roundRect">
+            <a:avLst>
+              <a:gd name="adj" fmla="val 3019"/>
+            </a:avLst>
+          </a:prstGeom>
+          <a:solidFill>
+            <a:srgbClr val="111A2E"/>
+          </a:solidFill>
+          <a:ln w="12700">
+            <a:solidFill>
+              <a:srgbClr val="1E2D45"/>
+            </a:solidFill>
+            <a:prstDash val="solid"/>
+          </a:ln>
+        </p:spPr>
+      </p:sp>
+      <p:sp>
+        <p:nvSpPr>
+          <p:cNvPr id="19" name="Text 17"/>
+          <p:cNvSpPr/>
+          <p:nvPr/>
+        </p:nvSpPr>
+        <p:spPr>
+          <a:xfrm>
+            <a:off x="9052560" y="2514600"/>
+            <a:ext cx="2148840" cy="914400"/>
+          </a:xfrm>
+          <a:prstGeom prst="rect">
+            <a:avLst/>
+          </a:prstGeom>
+          <a:noFill/>
+          <a:ln/>
+        </p:spPr>
+        <p:txBody>
+          <a:bodyPr wrap="square" rtlCol="0" anchor="ctr"/>
+          <a:lstStyle/>
+          <a:p>
+            <a:pPr algn="ctr" indent="0" marL="0">
+              <a:buNone/>
+            </a:pPr>
+            <a:r>
+              <a:rPr lang="en-US" sz="3800" b="1" dirty="0">
+                <a:solidFill>
+                  <a:srgbClr val="F59E0B"/>
+                </a:solidFill>
+                <a:latin typeface="Segoe UI" pitchFamily="34" charset="0"/>
+                <a:ea typeface="Segoe UI" pitchFamily="34" charset="-122"/>
+                <a:cs typeface="Segoe UI" pitchFamily="34" charset="-120"/>
+              </a:rPr>
+              <a:t>1</a:t>
+            </a:r>
+            <a:endParaRPr lang="en-US" sz="3800" dirty="0"/>
+          </a:p>
+        </p:txBody>
+      </p:sp>
+      <p:sp>
+        <p:nvSpPr>
+          <p:cNvPr id="20" name="Text 18"/>
+          <p:cNvSpPr/>
+          <p:nvPr/>
+        </p:nvSpPr>
+        <p:spPr>
+          <a:xfrm>
+            <a:off x="9052560" y="3520440"/>
+            <a:ext cx="2148840" cy="502920"/>
+          </a:xfrm>
+          <a:prstGeom prst="rect">
+            <a:avLst/>
+          </a:prstGeom>
+          <a:noFill/>
+          <a:ln/>
+        </p:spPr>
+        <p:txBody>
+          <a:bodyPr wrap="square" rtlCol="0" anchor="ctr"/>
+          <a:lstStyle/>
+          <a:p>
+            <a:pPr algn="ctr" indent="0" marL="0">
+              <a:buNone/>
+            </a:pPr>
+            <a:r>
+              <a:rPr lang="en-US" sz="1450" b="1" dirty="0">
+                <a:solidFill>
+                  <a:srgbClr val="FFFFFF"/>
+                </a:solidFill>
+                <a:latin typeface="Segoe UI" pitchFamily="34" charset="0"/>
+                <a:ea typeface="Segoe UI" pitchFamily="34" charset="-122"/>
+                <a:cs typeface="Segoe UI" pitchFamily="34" charset="-120"/>
+              </a:rPr>
+              <a:t>Definition that mattered</a:t>
+            </a:r>
+            <a:endParaRPr lang="en-US" sz="1450" dirty="0"/>
+          </a:p>
+        </p:txBody>
+      </p:sp>
+      <p:sp>
+        <p:nvSpPr>
+          <p:cNvPr id="21" name="Text 19"/>
+          <p:cNvSpPr/>
+          <p:nvPr/>
+        </p:nvSpPr>
+        <p:spPr>
+          <a:xfrm>
+            <a:off x="9098280" y="4069080"/>
+            <a:ext cx="2057400" cy="685800"/>
+          </a:xfrm>
+          <a:prstGeom prst="rect">
+            <a:avLst/>
+          </a:prstGeom>
+          <a:noFill/>
+          <a:ln/>
+        </p:spPr>
+        <p:txBody>
+          <a:bodyPr wrap="square" rtlCol="0" anchor="ctr"/>
+          <a:lstStyle/>
+          <a:p>
+            <a:pPr algn="ctr" indent="0" marL="0">
+              <a:buNone/>
+            </a:pPr>
+            <a:r>
+              <a:rPr lang="en-US" sz="1050" dirty="0">
+                <a:solidFill>
+                  <a:srgbClr val="94A3B8"/>
+                </a:solidFill>
+                <a:latin typeface="Segoe UI" pitchFamily="34" charset="0"/>
+                <a:ea typeface="Segoe UI" pitchFamily="34" charset="-122"/>
+                <a:cs typeface="Segoe UI" pitchFamily="34" charset="-120"/>
+              </a:rPr>
+              <a:t>What connected actually means - agreed with compliance, not assumed</a:t>
+            </a:r>
+            <a:endParaRPr lang="en-US" sz="1050" dirty="0"/>
+          </a:p>
+        </p:txBody>
+      </p:sp>
+      <p:sp>
+        <p:nvSpPr>
+          <p:cNvPr id="22" name="Shape 20"/>
+          <p:cNvSpPr/>
+          <p:nvPr/>
+        </p:nvSpPr>
+        <p:spPr>
+          <a:xfrm>
+            <a:off x="822960" y="5413248"/>
+            <a:ext cx="10515600" cy="0"/>
+          </a:xfrm>
+          <a:prstGeom prst="line">
+            <a:avLst/>
+          </a:prstGeom>
+          <a:noFill/>
+          <a:ln w="12700">
+            <a:solidFill>
+              <a:srgbClr val="1E2D45"/>
+            </a:solidFill>
+            <a:prstDash val="solid"/>
+          </a:ln>
+        </p:spPr>
+      </p:sp>
+      <p:sp>
+        <p:nvSpPr>
+          <p:cNvPr id="23" name="Text 21"/>
+          <p:cNvSpPr/>
+          <p:nvPr/>
+        </p:nvSpPr>
+        <p:spPr>
+          <a:xfrm>
+            <a:off x="822960" y="5504688"/>
+            <a:ext cx="10424160" cy="411480"/>
+          </a:xfrm>
+          <a:prstGeom prst="rect">
+            <a:avLst/>
+          </a:prstGeom>
+          <a:noFill/>
+          <a:ln/>
+        </p:spPr>
+        <p:txBody>
+          <a:bodyPr wrap="square" rtlCol="0" anchor="ctr"/>
+          <a:lstStyle/>
+          <a:p>
+            <a:pPr indent="0" marL="0">
+              <a:buNone/>
+            </a:pPr>
+            <a:r>
+              <a:rPr lang="en-US" sz="1300" i="1" dirty="0">
+                <a:solidFill>
+                  <a:srgbClr val="06B6D4"/>
+                </a:solidFill>
+                <a:latin typeface="Segoe UI" pitchFamily="34" charset="0"/>
+                <a:ea typeface="Segoe UI" pitchFamily="34" charset="-122"/>
+                <a:cs typeface="Segoe UI" pitchFamily="34" charset="-120"/>
+              </a:rPr>
+              <a:t>→  The constraints that shaped the approach: relationship density and explainability, not data volume.</a:t>
+            </a:r>
+            <a:endParaRPr lang="en-US" sz="1300" dirty="0"/>
+          </a:p>
+        </p:txBody>
+      </p:sp>
+      <p:sp>
+        <p:nvSpPr>
+          <p:cNvPr id="24" name="Text 22"/>
+          <p:cNvSpPr/>
+          <p:nvPr/>
+        </p:nvSpPr>
+        <p:spPr>
+          <a:xfrm>
+            <a:off x="10698480" y="6382512"/>
             <a:ext cx="1188720" cy="365760"/>
           </a:xfrm>
           <a:prstGeom prst="rect">
@@ -2609,7 +6903,7 @@
                 <a:ea typeface="Consolas" pitchFamily="34" charset="-122"/>
                 <a:cs typeface="Consolas" pitchFamily="34" charset="-120"/>
               </a:rPr>
-              <a:t>4 / 8</a:t>
+              <a:t>4 / 14</a:t>
             </a:r>
             <a:endParaRPr lang="en-US" sz="1000" dirty="0"/>
           </a:p>
@@ -2720,7 +7014,7 @@
                 <a:ea typeface="Consolas" pitchFamily="34" charset="-122"/>
                 <a:cs typeface="Consolas" pitchFamily="34" charset="-120"/>
               </a:rPr>
-              <a:t>APPROACH</a:t>
+              <a:t>ENGAGEMENT TIMELINE</a:t>
             </a:r>
             <a:endParaRPr lang="en-US" sz="1200" dirty="0"/>
           </a:p>
@@ -2734,8 +7028,8 @@
         </p:nvSpPr>
         <p:spPr>
           <a:xfrm>
-            <a:off x="822960" y="960120"/>
-            <a:ext cx="10515600" cy="868680"/>
+            <a:off x="822960" y="914400"/>
+            <a:ext cx="10561320" cy="868680"/>
           </a:xfrm>
           <a:prstGeom prst="rect">
             <a:avLst/>
@@ -2751,7 +7045,7 @@
               <a:buNone/>
             </a:pPr>
             <a:r>
-              <a:rPr lang="en-US" sz="3000" b="1" dirty="0">
+              <a:rPr lang="en-US" sz="2700" b="1" dirty="0">
                 <a:solidFill>
                   <a:srgbClr val="FFFFFF"/>
                 </a:solidFill>
@@ -2759,69 +7053,164 @@
                 <a:ea typeface="Segoe UI" pitchFamily="34" charset="-122"/>
                 <a:cs typeface="Segoe UI" pitchFamily="34" charset="-120"/>
               </a:rPr>
-              <a:t>Constraints first, technology second</a:t>
-            </a:r>
-            <a:endParaRPr lang="en-US" sz="3000" dirty="0"/>
-          </a:p>
-        </p:txBody>
-      </p:sp>
-      <p:sp>
-        <p:nvSpPr>
-          <p:cNvPr id="6" name="Text 4"/>
-          <p:cNvSpPr/>
-          <p:nvPr/>
-        </p:nvSpPr>
-        <p:spPr>
-          <a:xfrm>
-            <a:off x="868680" y="2057400"/>
-            <a:ext cx="10424160" cy="3566160"/>
-          </a:xfrm>
-          <a:prstGeom prst="rect">
-            <a:avLst/>
-          </a:prstGeom>
-          <a:noFill/>
-          <a:ln/>
-        </p:spPr>
-        <p:txBody>
-          <a:bodyPr wrap="square" rtlCol="0" anchor="t"/>
-          <a:lstStyle/>
-          <a:p>
-            <a:pPr marL="342900" indent="-342900">
-              <a:lnSpc>
-                <a:spcPct val="115000"/>
-              </a:lnSpc>
-              <a:spcAft>
-                <a:spcPts val="1000"/>
-              </a:spcAft>
-              <a:buSzPct val="100000"/>
-              <a:buChar char="▸"/>
-            </a:pPr>
-            <a:r>
-              <a:rPr lang="en-US" sz="1600" dirty="0">
-                <a:solidFill>
-                  <a:srgbClr val="CBD5E1"/>
+              <a:t>From regulatory requirements to reviewable patterns</a:t>
+            </a:r>
+            <a:endParaRPr lang="en-US" sz="2700" dirty="0"/>
+          </a:p>
+        </p:txBody>
+      </p:sp>
+      <p:sp>
+        <p:nvSpPr>
+          <p:cNvPr id="6" name="Shape 4"/>
+          <p:cNvSpPr/>
+          <p:nvPr/>
+        </p:nvSpPr>
+        <p:spPr>
+          <a:xfrm>
+            <a:off x="1371600" y="3035808"/>
+            <a:ext cx="9464040" cy="0"/>
+          </a:xfrm>
+          <a:prstGeom prst="line">
+            <a:avLst/>
+          </a:prstGeom>
+          <a:noFill/>
+          <a:ln w="25400">
+            <a:solidFill>
+              <a:srgbClr val="24365A"/>
+            </a:solidFill>
+            <a:prstDash val="solid"/>
+          </a:ln>
+        </p:spPr>
+      </p:sp>
+      <p:sp>
+        <p:nvSpPr>
+          <p:cNvPr id="7" name="Shape 5"/>
+          <p:cNvSpPr/>
+          <p:nvPr/>
+        </p:nvSpPr>
+        <p:spPr>
+          <a:xfrm>
+            <a:off x="1289304" y="2953512"/>
+            <a:ext cx="164592" cy="164592"/>
+          </a:xfrm>
+          <a:prstGeom prst="ellipse">
+            <a:avLst/>
+          </a:prstGeom>
+          <a:solidFill>
+            <a:srgbClr val="3B82F6"/>
+          </a:solidFill>
+          <a:ln w="19050">
+            <a:solidFill>
+              <a:srgbClr val="0A0C12"/>
+            </a:solidFill>
+            <a:prstDash val="solid"/>
+          </a:ln>
+        </p:spPr>
+      </p:sp>
+      <p:sp>
+        <p:nvSpPr>
+          <p:cNvPr id="8" name="Text 6"/>
+          <p:cNvSpPr/>
+          <p:nvPr/>
+        </p:nvSpPr>
+        <p:spPr>
+          <a:xfrm>
+            <a:off x="342900" y="2395728"/>
+            <a:ext cx="2057400" cy="365760"/>
+          </a:xfrm>
+          <a:prstGeom prst="rect">
+            <a:avLst/>
+          </a:prstGeom>
+          <a:noFill/>
+          <a:ln/>
+        </p:spPr>
+        <p:txBody>
+          <a:bodyPr wrap="square" rtlCol="0" anchor="ctr"/>
+          <a:lstStyle/>
+          <a:p>
+            <a:pPr algn="ctr" indent="0" marL="0">
+              <a:buNone/>
+            </a:pPr>
+            <a:r>
+              <a:rPr lang="en-US" sz="1100" b="1" dirty="0">
+                <a:solidFill>
+                  <a:srgbClr val="3B82F6"/>
+                </a:solidFill>
+                <a:latin typeface="Consolas" pitchFamily="34" charset="0"/>
+                <a:ea typeface="Consolas" pitchFamily="34" charset="-122"/>
+                <a:cs typeface="Consolas" pitchFamily="34" charset="-120"/>
+              </a:rPr>
+              <a:t>Phase 1</a:t>
+            </a:r>
+            <a:endParaRPr lang="en-US" sz="1100" dirty="0"/>
+          </a:p>
+        </p:txBody>
+      </p:sp>
+      <p:sp>
+        <p:nvSpPr>
+          <p:cNvPr id="9" name="Text 7"/>
+          <p:cNvSpPr/>
+          <p:nvPr/>
+        </p:nvSpPr>
+        <p:spPr>
+          <a:xfrm>
+            <a:off x="342900" y="3310128"/>
+            <a:ext cx="2057400" cy="566928"/>
+          </a:xfrm>
+          <a:prstGeom prst="rect">
+            <a:avLst/>
+          </a:prstGeom>
+          <a:noFill/>
+          <a:ln/>
+        </p:spPr>
+        <p:txBody>
+          <a:bodyPr wrap="square" rtlCol="0" anchor="ctr"/>
+          <a:lstStyle/>
+          <a:p>
+            <a:pPr algn="ctr" indent="0" marL="0">
+              <a:buNone/>
+            </a:pPr>
+            <a:r>
+              <a:rPr lang="en-US" sz="1250" b="1" dirty="0">
+                <a:solidFill>
+                  <a:srgbClr val="FFFFFF"/>
                 </a:solidFill>
                 <a:latin typeface="Segoe UI" pitchFamily="34" charset="0"/>
                 <a:ea typeface="Segoe UI" pitchFamily="34" charset="-122"/>
                 <a:cs typeface="Segoe UI" pitchFamily="34" charset="-120"/>
               </a:rPr>
-              <a:t>AML has hard rules and thresholds - learn them before choosing tools</a:t>
-            </a:r>
-            <a:endParaRPr lang="en-US" sz="1600" dirty="0"/>
-          </a:p>
-          <a:p>
-            <a:pPr marL="342900" indent="-342900">
-              <a:lnSpc>
-                <a:spcPct val="115000"/>
-              </a:lnSpc>
-              <a:spcAft>
-                <a:spcPts val="1000"/>
-              </a:spcAft>
-              <a:buSzPct val="100000"/>
-              <a:buChar char="▸"/>
-            </a:pPr>
-            <a:r>
-              <a:rPr lang="en-US" sz="1600" dirty="0">
+              <a:t>Requirements</a:t>
+            </a:r>
+            <a:endParaRPr lang="en-US" sz="1250" dirty="0"/>
+          </a:p>
+        </p:txBody>
+      </p:sp>
+      <p:sp>
+        <p:nvSpPr>
+          <p:cNvPr id="10" name="Text 8"/>
+          <p:cNvSpPr/>
+          <p:nvPr/>
+        </p:nvSpPr>
+        <p:spPr>
+          <a:xfrm>
+            <a:off x="342900" y="3895344"/>
+            <a:ext cx="2057400" cy="1234440"/>
+          </a:xfrm>
+          <a:prstGeom prst="rect">
+            <a:avLst/>
+          </a:prstGeom>
+          <a:noFill/>
+          <a:ln/>
+        </p:spPr>
+        <p:txBody>
+          <a:bodyPr wrap="square" rtlCol="0" anchor="ctr"/>
+          <a:lstStyle/>
+          <a:p>
+            <a:pPr algn="ctr" indent="0" marL="0">
+              <a:buNone/>
+            </a:pPr>
+            <a:r>
+              <a:rPr lang="en-US" sz="1000" dirty="0">
                 <a:solidFill>
                   <a:srgbClr val="CBD5E1"/>
                 </a:solidFill>
@@ -2829,47 +7218,141 @@
                 <a:ea typeface="Segoe UI" pitchFamily="34" charset="-122"/>
                 <a:cs typeface="Segoe UI" pitchFamily="34" charset="-120"/>
               </a:rPr>
-              <a:t>Define entity relationships with the business, not for them</a:t>
-            </a:r>
-            <a:endParaRPr lang="en-US" sz="1600" dirty="0"/>
-          </a:p>
-          <a:p>
-            <a:pPr marL="342900" indent="-342900">
-              <a:lnSpc>
-                <a:spcPct val="115000"/>
-              </a:lnSpc>
-              <a:spcAft>
-                <a:spcPts val="1000"/>
-              </a:spcAft>
-              <a:buSzPct val="100000"/>
-              <a:buChar char="▸"/>
-            </a:pPr>
-            <a:r>
-              <a:rPr lang="en-US" sz="1600" dirty="0">
-                <a:solidFill>
-                  <a:srgbClr val="CBD5E1"/>
+              <a:t>Translated AML rules and thresholds into entities, relationships, and detection goals together with compliance stakeholders.</a:t>
+            </a:r>
+            <a:endParaRPr lang="en-US" sz="1000" dirty="0"/>
+          </a:p>
+        </p:txBody>
+      </p:sp>
+      <p:sp>
+        <p:nvSpPr>
+          <p:cNvPr id="11" name="Shape 9"/>
+          <p:cNvSpPr/>
+          <p:nvPr/>
+        </p:nvSpPr>
+        <p:spPr>
+          <a:xfrm>
+            <a:off x="3655314" y="2953512"/>
+            <a:ext cx="164592" cy="164592"/>
+          </a:xfrm>
+          <a:prstGeom prst="ellipse">
+            <a:avLst/>
+          </a:prstGeom>
+          <a:solidFill>
+            <a:srgbClr val="06B6D4"/>
+          </a:solidFill>
+          <a:ln w="19050">
+            <a:solidFill>
+              <a:srgbClr val="0A0C12"/>
+            </a:solidFill>
+            <a:prstDash val="solid"/>
+          </a:ln>
+        </p:spPr>
+      </p:sp>
+      <p:sp>
+        <p:nvSpPr>
+          <p:cNvPr id="12" name="Text 10"/>
+          <p:cNvSpPr/>
+          <p:nvPr/>
+        </p:nvSpPr>
+        <p:spPr>
+          <a:xfrm>
+            <a:off x="2708910" y="2395728"/>
+            <a:ext cx="2057400" cy="365760"/>
+          </a:xfrm>
+          <a:prstGeom prst="rect">
+            <a:avLst/>
+          </a:prstGeom>
+          <a:noFill/>
+          <a:ln/>
+        </p:spPr>
+        <p:txBody>
+          <a:bodyPr wrap="square" rtlCol="0" anchor="ctr"/>
+          <a:lstStyle/>
+          <a:p>
+            <a:pPr algn="ctr" indent="0" marL="0">
+              <a:buNone/>
+            </a:pPr>
+            <a:r>
+              <a:rPr lang="en-US" sz="1100" b="1" dirty="0">
+                <a:solidFill>
+                  <a:srgbClr val="06B6D4"/>
+                </a:solidFill>
+                <a:latin typeface="Consolas" pitchFamily="34" charset="0"/>
+                <a:ea typeface="Consolas" pitchFamily="34" charset="-122"/>
+                <a:cs typeface="Consolas" pitchFamily="34" charset="-120"/>
+              </a:rPr>
+              <a:t>Phase 2</a:t>
+            </a:r>
+            <a:endParaRPr lang="en-US" sz="1100" dirty="0"/>
+          </a:p>
+        </p:txBody>
+      </p:sp>
+      <p:sp>
+        <p:nvSpPr>
+          <p:cNvPr id="13" name="Text 11"/>
+          <p:cNvSpPr/>
+          <p:nvPr/>
+        </p:nvSpPr>
+        <p:spPr>
+          <a:xfrm>
+            <a:off x="2708910" y="3310128"/>
+            <a:ext cx="2057400" cy="566928"/>
+          </a:xfrm>
+          <a:prstGeom prst="rect">
+            <a:avLst/>
+          </a:prstGeom>
+          <a:noFill/>
+          <a:ln/>
+        </p:spPr>
+        <p:txBody>
+          <a:bodyPr wrap="square" rtlCol="0" anchor="ctr"/>
+          <a:lstStyle/>
+          <a:p>
+            <a:pPr algn="ctr" indent="0" marL="0">
+              <a:buNone/>
+            </a:pPr>
+            <a:r>
+              <a:rPr lang="en-US" sz="1250" b="1" dirty="0">
+                <a:solidFill>
+                  <a:srgbClr val="FFFFFF"/>
                 </a:solidFill>
                 <a:latin typeface="Segoe UI" pitchFamily="34" charset="0"/>
                 <a:ea typeface="Segoe UI" pitchFamily="34" charset="-122"/>
                 <a:cs typeface="Segoe UI" pitchFamily="34" charset="-120"/>
               </a:rPr>
-              <a:t>Iterate patterns against real reviewer feedback</a:t>
-            </a:r>
-            <a:endParaRPr lang="en-US" sz="1600" dirty="0"/>
-          </a:p>
-          <a:p>
-            <a:pPr marL="342900" indent="-342900">
-              <a:lnSpc>
-                <a:spcPct val="115000"/>
-              </a:lnSpc>
-              <a:spcAft>
-                <a:spcPts val="1000"/>
-              </a:spcAft>
-              <a:buSzPct val="100000"/>
-              <a:buChar char="▸"/>
-            </a:pPr>
-            <a:r>
-              <a:rPr lang="en-US" sz="1600" dirty="0">
+              <a:t>Schema design</a:t>
+            </a:r>
+            <a:endParaRPr lang="en-US" sz="1250" dirty="0"/>
+          </a:p>
+        </p:txBody>
+      </p:sp>
+      <p:sp>
+        <p:nvSpPr>
+          <p:cNvPr id="14" name="Text 12"/>
+          <p:cNvSpPr/>
+          <p:nvPr/>
+        </p:nvSpPr>
+        <p:spPr>
+          <a:xfrm>
+            <a:off x="2708910" y="3895344"/>
+            <a:ext cx="2057400" cy="1234440"/>
+          </a:xfrm>
+          <a:prstGeom prst="rect">
+            <a:avLst/>
+          </a:prstGeom>
+          <a:noFill/>
+          <a:ln/>
+        </p:spPr>
+        <p:txBody>
+          <a:bodyPr wrap="square" rtlCol="0" anchor="ctr"/>
+          <a:lstStyle/>
+          <a:p>
+            <a:pPr algn="ctr" indent="0" marL="0">
+              <a:buNone/>
+            </a:pPr>
+            <a:r>
+              <a:rPr lang="en-US" sz="1000" dirty="0">
                 <a:solidFill>
                   <a:srgbClr val="CBD5E1"/>
                 </a:solidFill>
@@ -2877,22 +7360,47 @@
                 <a:ea typeface="Segoe UI" pitchFamily="34" charset="-122"/>
                 <a:cs typeface="Segoe UI" pitchFamily="34" charset="-120"/>
               </a:rPr>
-              <a:t>Explainability is a feature: unexplainable detection is unusable detection</a:t>
-            </a:r>
-            <a:endParaRPr lang="en-US" sz="1600" dirty="0"/>
-          </a:p>
-        </p:txBody>
-      </p:sp>
-      <p:sp>
-        <p:nvSpPr>
-          <p:cNvPr id="7" name="Text 5"/>
-          <p:cNvSpPr/>
-          <p:nvPr/>
-        </p:nvSpPr>
-        <p:spPr>
-          <a:xfrm>
-            <a:off x="10698480" y="6355080"/>
-            <a:ext cx="1188720" cy="365760"/>
+              <a:t>Modeled accounts, transactions, and parties so the schema itself expressed the analysis.</a:t>
+            </a:r>
+            <a:endParaRPr lang="en-US" sz="1000" dirty="0"/>
+          </a:p>
+        </p:txBody>
+      </p:sp>
+      <p:sp>
+        <p:nvSpPr>
+          <p:cNvPr id="15" name="Shape 13"/>
+          <p:cNvSpPr/>
+          <p:nvPr/>
+        </p:nvSpPr>
+        <p:spPr>
+          <a:xfrm>
+            <a:off x="6021324" y="2953512"/>
+            <a:ext cx="164592" cy="164592"/>
+          </a:xfrm>
+          <a:prstGeom prst="ellipse">
+            <a:avLst/>
+          </a:prstGeom>
+          <a:solidFill>
+            <a:srgbClr val="3B82F6"/>
+          </a:solidFill>
+          <a:ln w="19050">
+            <a:solidFill>
+              <a:srgbClr val="0A0C12"/>
+            </a:solidFill>
+            <a:prstDash val="solid"/>
+          </a:ln>
+        </p:spPr>
+      </p:sp>
+      <p:sp>
+        <p:nvSpPr>
+          <p:cNvPr id="16" name="Text 14"/>
+          <p:cNvSpPr/>
+          <p:nvPr/>
+        </p:nvSpPr>
+        <p:spPr>
+          <a:xfrm>
+            <a:off x="5074920" y="2395728"/>
+            <a:ext cx="2057400" cy="365760"/>
           </a:xfrm>
           <a:prstGeom prst="rect">
             <a:avLst/>
@@ -2904,19 +7412,482 @@
           <a:bodyPr wrap="square" rtlCol="0" anchor="ctr"/>
           <a:lstStyle/>
           <a:p>
-            <a:pPr algn="r" indent="0" marL="0">
+            <a:pPr algn="ctr" indent="0" marL="0">
               <a:buNone/>
             </a:pPr>
             <a:r>
-              <a:rPr lang="en-US" sz="1000" dirty="0">
-                <a:solidFill>
-                  <a:srgbClr val="64748B"/>
+              <a:rPr lang="en-US" sz="1100" b="1" dirty="0">
+                <a:solidFill>
+                  <a:srgbClr val="3B82F6"/>
                 </a:solidFill>
                 <a:latin typeface="Consolas" pitchFamily="34" charset="0"/>
                 <a:ea typeface="Consolas" pitchFamily="34" charset="-122"/>
                 <a:cs typeface="Consolas" pitchFamily="34" charset="-120"/>
               </a:rPr>
-              <a:t>5 / 8</a:t>
+              <a:t>Phase 3</a:t>
+            </a:r>
+            <a:endParaRPr lang="en-US" sz="1100" dirty="0"/>
+          </a:p>
+        </p:txBody>
+      </p:sp>
+      <p:sp>
+        <p:nvSpPr>
+          <p:cNvPr id="17" name="Text 15"/>
+          <p:cNvSpPr/>
+          <p:nvPr/>
+        </p:nvSpPr>
+        <p:spPr>
+          <a:xfrm>
+            <a:off x="5074920" y="3310128"/>
+            <a:ext cx="2057400" cy="566928"/>
+          </a:xfrm>
+          <a:prstGeom prst="rect">
+            <a:avLst/>
+          </a:prstGeom>
+          <a:noFill/>
+          <a:ln/>
+        </p:spPr>
+        <p:txBody>
+          <a:bodyPr wrap="square" rtlCol="0" anchor="ctr"/>
+          <a:lstStyle/>
+          <a:p>
+            <a:pPr algn="ctr" indent="0" marL="0">
+              <a:buNone/>
+            </a:pPr>
+            <a:r>
+              <a:rPr lang="en-US" sz="1250" b="1" dirty="0">
+                <a:solidFill>
+                  <a:srgbClr val="FFFFFF"/>
+                </a:solidFill>
+                <a:latin typeface="Segoe UI" pitchFamily="34" charset="0"/>
+                <a:ea typeface="Segoe UI" pitchFamily="34" charset="-122"/>
+                <a:cs typeface="Segoe UI" pitchFamily="34" charset="-120"/>
+              </a:rPr>
+              <a:t>Pattern definition</a:t>
+            </a:r>
+            <a:endParaRPr lang="en-US" sz="1250" dirty="0"/>
+          </a:p>
+        </p:txBody>
+      </p:sp>
+      <p:sp>
+        <p:nvSpPr>
+          <p:cNvPr id="18" name="Text 16"/>
+          <p:cNvSpPr/>
+          <p:nvPr/>
+        </p:nvSpPr>
+        <p:spPr>
+          <a:xfrm>
+            <a:off x="5074920" y="3895344"/>
+            <a:ext cx="2057400" cy="1234440"/>
+          </a:xfrm>
+          <a:prstGeom prst="rect">
+            <a:avLst/>
+          </a:prstGeom>
+          <a:noFill/>
+          <a:ln/>
+        </p:spPr>
+        <p:txBody>
+          <a:bodyPr wrap="square" rtlCol="0" anchor="ctr"/>
+          <a:lstStyle/>
+          <a:p>
+            <a:pPr algn="ctr" indent="0" marL="0">
+              <a:buNone/>
+            </a:pPr>
+            <a:r>
+              <a:rPr lang="en-US" sz="1000" dirty="0">
+                <a:solidFill>
+                  <a:srgbClr val="CBD5E1"/>
+                </a:solidFill>
+                <a:latin typeface="Segoe UI" pitchFamily="34" charset="0"/>
+                <a:ea typeface="Segoe UI" pitchFamily="34" charset="-122"/>
+                <a:cs typeface="Segoe UI" pitchFamily="34" charset="-120"/>
+              </a:rPr>
+              <a:t>Built detection patterns in the graph toolkit: layered transfers, circular flows, and mule networks.</a:t>
+            </a:r>
+            <a:endParaRPr lang="en-US" sz="1000" dirty="0"/>
+          </a:p>
+        </p:txBody>
+      </p:sp>
+      <p:sp>
+        <p:nvSpPr>
+          <p:cNvPr id="19" name="Shape 17"/>
+          <p:cNvSpPr/>
+          <p:nvPr/>
+        </p:nvSpPr>
+        <p:spPr>
+          <a:xfrm>
+            <a:off x="8387334" y="2953512"/>
+            <a:ext cx="164592" cy="164592"/>
+          </a:xfrm>
+          <a:prstGeom prst="ellipse">
+            <a:avLst/>
+          </a:prstGeom>
+          <a:solidFill>
+            <a:srgbClr val="06B6D4"/>
+          </a:solidFill>
+          <a:ln w="19050">
+            <a:solidFill>
+              <a:srgbClr val="0A0C12"/>
+            </a:solidFill>
+            <a:prstDash val="solid"/>
+          </a:ln>
+        </p:spPr>
+      </p:sp>
+      <p:sp>
+        <p:nvSpPr>
+          <p:cNvPr id="20" name="Text 18"/>
+          <p:cNvSpPr/>
+          <p:nvPr/>
+        </p:nvSpPr>
+        <p:spPr>
+          <a:xfrm>
+            <a:off x="7440930" y="2395728"/>
+            <a:ext cx="2057400" cy="365760"/>
+          </a:xfrm>
+          <a:prstGeom prst="rect">
+            <a:avLst/>
+          </a:prstGeom>
+          <a:noFill/>
+          <a:ln/>
+        </p:spPr>
+        <p:txBody>
+          <a:bodyPr wrap="square" rtlCol="0" anchor="ctr"/>
+          <a:lstStyle/>
+          <a:p>
+            <a:pPr algn="ctr" indent="0" marL="0">
+              <a:buNone/>
+            </a:pPr>
+            <a:r>
+              <a:rPr lang="en-US" sz="1100" b="1" dirty="0">
+                <a:solidFill>
+                  <a:srgbClr val="06B6D4"/>
+                </a:solidFill>
+                <a:latin typeface="Consolas" pitchFamily="34" charset="0"/>
+                <a:ea typeface="Consolas" pitchFamily="34" charset="-122"/>
+                <a:cs typeface="Consolas" pitchFamily="34" charset="-120"/>
+              </a:rPr>
+              <a:t>Phase 4</a:t>
+            </a:r>
+            <a:endParaRPr lang="en-US" sz="1100" dirty="0"/>
+          </a:p>
+        </p:txBody>
+      </p:sp>
+      <p:sp>
+        <p:nvSpPr>
+          <p:cNvPr id="21" name="Text 19"/>
+          <p:cNvSpPr/>
+          <p:nvPr/>
+        </p:nvSpPr>
+        <p:spPr>
+          <a:xfrm>
+            <a:off x="7440930" y="3310128"/>
+            <a:ext cx="2057400" cy="566928"/>
+          </a:xfrm>
+          <a:prstGeom prst="rect">
+            <a:avLst/>
+          </a:prstGeom>
+          <a:noFill/>
+          <a:ln/>
+        </p:spPr>
+        <p:txBody>
+          <a:bodyPr wrap="square" rtlCol="0" anchor="ctr"/>
+          <a:lstStyle/>
+          <a:p>
+            <a:pPr algn="ctr" indent="0" marL="0">
+              <a:buNone/>
+            </a:pPr>
+            <a:r>
+              <a:rPr lang="en-US" sz="1250" b="1" dirty="0">
+                <a:solidFill>
+                  <a:srgbClr val="FFFFFF"/>
+                </a:solidFill>
+                <a:latin typeface="Segoe UI" pitchFamily="34" charset="0"/>
+                <a:ea typeface="Segoe UI" pitchFamily="34" charset="-122"/>
+                <a:cs typeface="Segoe UI" pitchFamily="34" charset="-120"/>
+              </a:rPr>
+              <a:t>Validation</a:t>
+            </a:r>
+            <a:endParaRPr lang="en-US" sz="1250" dirty="0"/>
+          </a:p>
+        </p:txBody>
+      </p:sp>
+      <p:sp>
+        <p:nvSpPr>
+          <p:cNvPr id="22" name="Text 20"/>
+          <p:cNvSpPr/>
+          <p:nvPr/>
+        </p:nvSpPr>
+        <p:spPr>
+          <a:xfrm>
+            <a:off x="7440930" y="3895344"/>
+            <a:ext cx="2057400" cy="1234440"/>
+          </a:xfrm>
+          <a:prstGeom prst="rect">
+            <a:avLst/>
+          </a:prstGeom>
+          <a:noFill/>
+          <a:ln/>
+        </p:spPr>
+        <p:txBody>
+          <a:bodyPr wrap="square" rtlCol="0" anchor="ctr"/>
+          <a:lstStyle/>
+          <a:p>
+            <a:pPr algn="ctr" indent="0" marL="0">
+              <a:buNone/>
+            </a:pPr>
+            <a:r>
+              <a:rPr lang="en-US" sz="1000" dirty="0">
+                <a:solidFill>
+                  <a:srgbClr val="CBD5E1"/>
+                </a:solidFill>
+                <a:latin typeface="Segoe UI" pitchFamily="34" charset="0"/>
+                <a:ea typeface="Segoe UI" pitchFamily="34" charset="-122"/>
+                <a:cs typeface="Segoe UI" pitchFamily="34" charset="-120"/>
+              </a:rPr>
+              <a:t>Iterated every pattern against reviewer feedback and hard regulatory rules before it was trusted.</a:t>
+            </a:r>
+            <a:endParaRPr lang="en-US" sz="1000" dirty="0"/>
+          </a:p>
+        </p:txBody>
+      </p:sp>
+      <p:sp>
+        <p:nvSpPr>
+          <p:cNvPr id="23" name="Shape 21"/>
+          <p:cNvSpPr/>
+          <p:nvPr/>
+        </p:nvSpPr>
+        <p:spPr>
+          <a:xfrm>
+            <a:off x="10753344" y="2953512"/>
+            <a:ext cx="164592" cy="164592"/>
+          </a:xfrm>
+          <a:prstGeom prst="ellipse">
+            <a:avLst/>
+          </a:prstGeom>
+          <a:solidFill>
+            <a:srgbClr val="3B82F6"/>
+          </a:solidFill>
+          <a:ln w="19050">
+            <a:solidFill>
+              <a:srgbClr val="0A0C12"/>
+            </a:solidFill>
+            <a:prstDash val="solid"/>
+          </a:ln>
+        </p:spPr>
+      </p:sp>
+      <p:sp>
+        <p:nvSpPr>
+          <p:cNvPr id="24" name="Text 22"/>
+          <p:cNvSpPr/>
+          <p:nvPr/>
+        </p:nvSpPr>
+        <p:spPr>
+          <a:xfrm>
+            <a:off x="9806940" y="2395728"/>
+            <a:ext cx="2057400" cy="365760"/>
+          </a:xfrm>
+          <a:prstGeom prst="rect">
+            <a:avLst/>
+          </a:prstGeom>
+          <a:noFill/>
+          <a:ln/>
+        </p:spPr>
+        <p:txBody>
+          <a:bodyPr wrap="square" rtlCol="0" anchor="ctr"/>
+          <a:lstStyle/>
+          <a:p>
+            <a:pPr algn="ctr" indent="0" marL="0">
+              <a:buNone/>
+            </a:pPr>
+            <a:r>
+              <a:rPr lang="en-US" sz="1100" b="1" dirty="0">
+                <a:solidFill>
+                  <a:srgbClr val="3B82F6"/>
+                </a:solidFill>
+                <a:latin typeface="Consolas" pitchFamily="34" charset="0"/>
+                <a:ea typeface="Consolas" pitchFamily="34" charset="-122"/>
+                <a:cs typeface="Consolas" pitchFamily="34" charset="-120"/>
+              </a:rPr>
+              <a:t>Phase 5</a:t>
+            </a:r>
+            <a:endParaRPr lang="en-US" sz="1100" dirty="0"/>
+          </a:p>
+        </p:txBody>
+      </p:sp>
+      <p:sp>
+        <p:nvSpPr>
+          <p:cNvPr id="25" name="Text 23"/>
+          <p:cNvSpPr/>
+          <p:nvPr/>
+        </p:nvSpPr>
+        <p:spPr>
+          <a:xfrm>
+            <a:off x="9806940" y="3310128"/>
+            <a:ext cx="2057400" cy="566928"/>
+          </a:xfrm>
+          <a:prstGeom prst="rect">
+            <a:avLst/>
+          </a:prstGeom>
+          <a:noFill/>
+          <a:ln/>
+        </p:spPr>
+        <p:txBody>
+          <a:bodyPr wrap="square" rtlCol="0" anchor="ctr"/>
+          <a:lstStyle/>
+          <a:p>
+            <a:pPr algn="ctr" indent="0" marL="0">
+              <a:buNone/>
+            </a:pPr>
+            <a:r>
+              <a:rPr lang="en-US" sz="1250" b="1" dirty="0">
+                <a:solidFill>
+                  <a:srgbClr val="FFFFFF"/>
+                </a:solidFill>
+                <a:latin typeface="Segoe UI" pitchFamily="34" charset="0"/>
+                <a:ea typeface="Segoe UI" pitchFamily="34" charset="-122"/>
+                <a:cs typeface="Segoe UI" pitchFamily="34" charset="-120"/>
+              </a:rPr>
+              <a:t>Handover</a:t>
+            </a:r>
+            <a:endParaRPr lang="en-US" sz="1250" dirty="0"/>
+          </a:p>
+        </p:txBody>
+      </p:sp>
+      <p:sp>
+        <p:nvSpPr>
+          <p:cNvPr id="26" name="Text 24"/>
+          <p:cNvSpPr/>
+          <p:nvPr/>
+        </p:nvSpPr>
+        <p:spPr>
+          <a:xfrm>
+            <a:off x="9806940" y="3895344"/>
+            <a:ext cx="2057400" cy="1234440"/>
+          </a:xfrm>
+          <a:prstGeom prst="rect">
+            <a:avLst/>
+          </a:prstGeom>
+          <a:noFill/>
+          <a:ln/>
+        </p:spPr>
+        <p:txBody>
+          <a:bodyPr wrap="square" rtlCol="0" anchor="ctr"/>
+          <a:lstStyle/>
+          <a:p>
+            <a:pPr algn="ctr" indent="0" marL="0">
+              <a:buNone/>
+            </a:pPr>
+            <a:r>
+              <a:rPr lang="en-US" sz="1000" dirty="0">
+                <a:solidFill>
+                  <a:srgbClr val="CBD5E1"/>
+                </a:solidFill>
+                <a:latin typeface="Segoe UI" pitchFamily="34" charset="0"/>
+                <a:ea typeface="Segoe UI" pitchFamily="34" charset="-122"/>
+                <a:cs typeface="Segoe UI" pitchFamily="34" charset="-120"/>
+              </a:rPr>
+              <a:t>Delivered documentation auditors and non-technical reviewers could follow, plus workflow optimization recommendations.</a:t>
+            </a:r>
+            <a:endParaRPr lang="en-US" sz="1000" dirty="0"/>
+          </a:p>
+        </p:txBody>
+      </p:sp>
+      <p:sp>
+        <p:nvSpPr>
+          <p:cNvPr id="27" name="Shape 25"/>
+          <p:cNvSpPr/>
+          <p:nvPr/>
+        </p:nvSpPr>
+        <p:spPr>
+          <a:xfrm>
+            <a:off x="822960" y="5961888"/>
+            <a:ext cx="10515600" cy="0"/>
+          </a:xfrm>
+          <a:prstGeom prst="line">
+            <a:avLst/>
+          </a:prstGeom>
+          <a:noFill/>
+          <a:ln w="12700">
+            <a:solidFill>
+              <a:srgbClr val="1E2D45"/>
+            </a:solidFill>
+            <a:prstDash val="solid"/>
+          </a:ln>
+        </p:spPr>
+      </p:sp>
+      <p:sp>
+        <p:nvSpPr>
+          <p:cNvPr id="28" name="Text 26"/>
+          <p:cNvSpPr/>
+          <p:nvPr/>
+        </p:nvSpPr>
+        <p:spPr>
+          <a:xfrm>
+            <a:off x="822960" y="6053328"/>
+            <a:ext cx="9692640" cy="457200"/>
+          </a:xfrm>
+          <a:prstGeom prst="rect">
+            <a:avLst/>
+          </a:prstGeom>
+          <a:noFill/>
+          <a:ln/>
+        </p:spPr>
+        <p:txBody>
+          <a:bodyPr wrap="square" rtlCol="0" anchor="ctr"/>
+          <a:lstStyle/>
+          <a:p>
+            <a:pPr indent="0" marL="0">
+              <a:buNone/>
+            </a:pPr>
+            <a:r>
+              <a:rPr lang="en-US" sz="1150" dirty="0">
+                <a:solidFill>
+                  <a:srgbClr val="64748B"/>
+                </a:solidFill>
+                <a:latin typeface="Segoe UI" pitchFamily="34" charset="0"/>
+                <a:ea typeface="Segoe UI" pitchFamily="34" charset="-122"/>
+                <a:cs typeface="Segoe UI" pitchFamily="34" charset="-120"/>
+              </a:rPr>
+              <a:t>The schema was half the value: it forced a shared definition of connected.</a:t>
+            </a:r>
+            <a:endParaRPr lang="en-US" sz="1150" dirty="0"/>
+          </a:p>
+        </p:txBody>
+      </p:sp>
+      <p:sp>
+        <p:nvSpPr>
+          <p:cNvPr id="29" name="Text 27"/>
+          <p:cNvSpPr/>
+          <p:nvPr/>
+        </p:nvSpPr>
+        <p:spPr>
+          <a:xfrm>
+            <a:off x="10698480" y="6382512"/>
+            <a:ext cx="1188720" cy="365760"/>
+          </a:xfrm>
+          <a:prstGeom prst="rect">
+            <a:avLst/>
+          </a:prstGeom>
+          <a:noFill/>
+          <a:ln/>
+        </p:spPr>
+        <p:txBody>
+          <a:bodyPr wrap="square" rtlCol="0" anchor="ctr"/>
+          <a:lstStyle/>
+          <a:p>
+            <a:pPr algn="r" indent="0" marL="0">
+              <a:buNone/>
+            </a:pPr>
+            <a:r>
+              <a:rPr lang="en-US" sz="1000" dirty="0">
+                <a:solidFill>
+                  <a:srgbClr val="64748B"/>
+                </a:solidFill>
+                <a:latin typeface="Consolas" pitchFamily="34" charset="0"/>
+                <a:ea typeface="Consolas" pitchFamily="34" charset="-122"/>
+                <a:cs typeface="Consolas" pitchFamily="34" charset="-120"/>
+              </a:rPr>
+              <a:t>5 / 14</a:t>
             </a:r>
             <a:endParaRPr lang="en-US" sz="1000" dirty="0"/>
           </a:p>
@@ -3027,7 +7998,7 @@
                 <a:ea typeface="Consolas" pitchFamily="34" charset="-122"/>
                 <a:cs typeface="Consolas" pitchFamily="34" charset="-120"/>
               </a:rPr>
-              <a:t>OUTCOMES</a:t>
+              <a:t>THE SHAPE OF THE PROBLEM</a:t>
             </a:r>
             <a:endParaRPr lang="en-US" sz="1200" dirty="0"/>
           </a:p>
@@ -3041,8 +8012,8 @@
         </p:nvSpPr>
         <p:spPr>
           <a:xfrm>
-            <a:off x="822960" y="960120"/>
-            <a:ext cx="10515600" cy="868680"/>
+            <a:off x="822960" y="914400"/>
+            <a:ext cx="10561320" cy="868680"/>
           </a:xfrm>
           <a:prstGeom prst="rect">
             <a:avLst/>
@@ -3058,7 +8029,7 @@
               <a:buNone/>
             </a:pPr>
             <a:r>
-              <a:rPr lang="en-US" sz="3000" b="1" dirty="0">
+              <a:rPr lang="en-US" sz="2700" b="1" dirty="0">
                 <a:solidFill>
                   <a:srgbClr val="FFFFFF"/>
                 </a:solidFill>
@@ -3066,139 +8037,1144 @@
                 <a:ea typeface="Segoe UI" pitchFamily="34" charset="-122"/>
                 <a:cs typeface="Segoe UI" pitchFamily="34" charset="-120"/>
               </a:rPr>
-              <a:t>What the project delivered</a:t>
-            </a:r>
-            <a:endParaRPr lang="en-US" sz="3000" dirty="0"/>
-          </a:p>
-        </p:txBody>
-      </p:sp>
-      <p:sp>
-        <p:nvSpPr>
-          <p:cNvPr id="6" name="Text 4"/>
-          <p:cNvSpPr/>
-          <p:nvPr/>
-        </p:nvSpPr>
-        <p:spPr>
-          <a:xfrm>
-            <a:off x="868680" y="2057400"/>
-            <a:ext cx="10424160" cy="3566160"/>
-          </a:xfrm>
-          <a:prstGeom prst="rect">
-            <a:avLst/>
-          </a:prstGeom>
-          <a:noFill/>
-          <a:ln/>
-        </p:spPr>
-        <p:txBody>
-          <a:bodyPr wrap="square" rtlCol="0" anchor="t"/>
-          <a:lstStyle/>
-          <a:p>
-            <a:pPr marL="342900" indent="-342900">
-              <a:lnSpc>
-                <a:spcPct val="115000"/>
-              </a:lnSpc>
-              <a:spcAft>
-                <a:spcPts val="1000"/>
-              </a:spcAft>
-              <a:buSzPct val="100000"/>
-              <a:buChar char="▸"/>
-            </a:pPr>
-            <a:r>
-              <a:rPr lang="en-US" sz="1600" dirty="0">
-                <a:solidFill>
-                  <a:srgbClr val="CBD5E1"/>
+              <a:t>Three laundering patterns, two ways to see them</a:t>
+            </a:r>
+            <a:endParaRPr lang="en-US" sz="2700" dirty="0"/>
+          </a:p>
+        </p:txBody>
+      </p:sp>
+      <p:graphicFrame>
+        <p:nvGraphicFramePr>
+          <p:cNvPr id="7" name="Table 0"/>
+          <p:cNvGraphicFramePr>
+            <a:graphicFrameLocks noGrp="1"/>
+          </p:cNvGraphicFramePr>
+          <p:nvPr>
+            <p:extLst>
+              <p:ext uri="{D42A27DB-BD31-4B8C-83A1-F6EECF244321}">
+                <p14:modId xmlns:p14="http://schemas.microsoft.com/office/powerpoint/2010/main" val="1579011935"/>
+              </p:ext>
+            </p:extLst>
+          </p:nvPr>
+        </p:nvGraphicFramePr>
+        <p:xfrm>
+          <a:off x="822960" y="2011680"/>
+          <a:ext cx="10515600" cy="914400"/>
+        </p:xfrm>
+        <a:graphic>
+          <a:graphicData uri="http://schemas.openxmlformats.org/drawingml/2006/table">
+            <a:tbl>
+              <a:tblPr/>
+              <a:tblGrid>
+                <a:gridCol w="3505200"/>
+                <a:gridCol w="3505200"/>
+                <a:gridCol w="3505200"/>
+              </a:tblGrid>
+              <a:tr h="402336">
+                <a:tc>
+                  <a:txBody>
+                    <a:bodyPr/>
+                    <a:lstStyle/>
+                    <a:p>
+                      <a:pPr indent="0" marL="0">
+                        <a:buNone/>
+                      </a:pPr>
+                      <a:r>
+                        <a:rPr lang="en-US" sz="1150" b="1" dirty="0">
+                          <a:solidFill>
+                            <a:srgbClr val="FFFFFF"/>
+                          </a:solidFill>
+                          <a:latin typeface="Segoe UI" pitchFamily="34" charset="0"/>
+                          <a:ea typeface="Segoe UI" pitchFamily="34" charset="-122"/>
+                          <a:cs typeface="Segoe UI" pitchFamily="34" charset="-120"/>
+                        </a:rPr>
+                        <a:t>Pattern</a:t>
+                      </a:r>
+                      <a:endParaRPr lang="en-US" sz="1150" dirty="0">
+                        <a:latin typeface="Segoe UI" charset="0"/>
+                        <a:ea typeface="Segoe UI" charset="0"/>
+                        <a:cs typeface="Segoe UI" charset="0"/>
+                      </a:endParaRPr>
+                    </a:p>
+                  </a:txBody>
+                  <a:tcPr marL="64008" marR="64008" marT="64008" marB="64008" anchor="ctr">
+                    <a:lnL w="6350" cap="flat" cmpd="sng" algn="ctr">
+                      <a:solidFill>
+                        <a:srgbClr val="24365A"/>
+                      </a:solidFill>
+                      <a:prstDash val="solid"/>
+                      <a:round/>
+                      <a:headEnd type="none" w="med" len="med"/>
+                      <a:tailEnd type="none" w="med" len="med"/>
+                    </a:lnL>
+                    <a:lnR w="6350" cap="flat" cmpd="sng" algn="ctr">
+                      <a:solidFill>
+                        <a:srgbClr val="24365A"/>
+                      </a:solidFill>
+                      <a:prstDash val="solid"/>
+                      <a:round/>
+                      <a:headEnd type="none" w="med" len="med"/>
+                      <a:tailEnd type="none" w="med" len="med"/>
+                    </a:lnR>
+                    <a:lnT w="6350" cap="flat" cmpd="sng" algn="ctr">
+                      <a:solidFill>
+                        <a:srgbClr val="24365A"/>
+                      </a:solidFill>
+                      <a:prstDash val="solid"/>
+                      <a:round/>
+                      <a:headEnd type="none" w="med" len="med"/>
+                      <a:tailEnd type="none" w="med" len="med"/>
+                    </a:lnT>
+                    <a:lnB w="6350" cap="flat" cmpd="sng" algn="ctr">
+                      <a:solidFill>
+                        <a:srgbClr val="24365A"/>
+                      </a:solidFill>
+                      <a:prstDash val="solid"/>
+                      <a:round/>
+                      <a:headEnd type="none" w="med" len="med"/>
+                      <a:tailEnd type="none" w="med" len="med"/>
+                    </a:lnB>
+                    <a:solidFill>
+                      <a:srgbClr val="16233B"/>
+                    </a:solidFill>
+                  </a:tcPr>
+                </a:tc>
+                <a:tc>
+                  <a:txBody>
+                    <a:bodyPr/>
+                    <a:lstStyle/>
+                    <a:p>
+                      <a:pPr indent="0" marL="0">
+                        <a:buNone/>
+                      </a:pPr>
+                      <a:r>
+                        <a:rPr lang="en-US" sz="1150" b="1" dirty="0">
+                          <a:solidFill>
+                            <a:srgbClr val="FFFFFF"/>
+                          </a:solidFill>
+                          <a:latin typeface="Segoe UI" pitchFamily="34" charset="0"/>
+                          <a:ea typeface="Segoe UI" pitchFamily="34" charset="-122"/>
+                          <a:cs typeface="Segoe UI" pitchFamily="34" charset="-120"/>
+                        </a:rPr>
+                        <a:t>Relational reality</a:t>
+                      </a:r>
+                      <a:endParaRPr lang="en-US" sz="1150" dirty="0">
+                        <a:latin typeface="Segoe UI" charset="0"/>
+                        <a:ea typeface="Segoe UI" charset="0"/>
+                        <a:cs typeface="Segoe UI" charset="0"/>
+                      </a:endParaRPr>
+                    </a:p>
+                  </a:txBody>
+                  <a:tcPr marL="64008" marR="64008" marT="64008" marB="64008" anchor="ctr">
+                    <a:lnL w="6350" cap="flat" cmpd="sng" algn="ctr">
+                      <a:solidFill>
+                        <a:srgbClr val="24365A"/>
+                      </a:solidFill>
+                      <a:prstDash val="solid"/>
+                      <a:round/>
+                      <a:headEnd type="none" w="med" len="med"/>
+                      <a:tailEnd type="none" w="med" len="med"/>
+                    </a:lnL>
+                    <a:lnR w="6350" cap="flat" cmpd="sng" algn="ctr">
+                      <a:solidFill>
+                        <a:srgbClr val="24365A"/>
+                      </a:solidFill>
+                      <a:prstDash val="solid"/>
+                      <a:round/>
+                      <a:headEnd type="none" w="med" len="med"/>
+                      <a:tailEnd type="none" w="med" len="med"/>
+                    </a:lnR>
+                    <a:lnT w="6350" cap="flat" cmpd="sng" algn="ctr">
+                      <a:solidFill>
+                        <a:srgbClr val="24365A"/>
+                      </a:solidFill>
+                      <a:prstDash val="solid"/>
+                      <a:round/>
+                      <a:headEnd type="none" w="med" len="med"/>
+                      <a:tailEnd type="none" w="med" len="med"/>
+                    </a:lnT>
+                    <a:lnB w="6350" cap="flat" cmpd="sng" algn="ctr">
+                      <a:solidFill>
+                        <a:srgbClr val="24365A"/>
+                      </a:solidFill>
+                      <a:prstDash val="solid"/>
+                      <a:round/>
+                      <a:headEnd type="none" w="med" len="med"/>
+                      <a:tailEnd type="none" w="med" len="med"/>
+                    </a:lnB>
+                    <a:solidFill>
+                      <a:srgbClr val="16233B"/>
+                    </a:solidFill>
+                  </a:tcPr>
+                </a:tc>
+                <a:tc>
+                  <a:txBody>
+                    <a:bodyPr/>
+                    <a:lstStyle/>
+                    <a:p>
+                      <a:pPr indent="0" marL="0">
+                        <a:buNone/>
+                      </a:pPr>
+                      <a:r>
+                        <a:rPr lang="en-US" sz="1150" b="1" dirty="0">
+                          <a:solidFill>
+                            <a:srgbClr val="FFFFFF"/>
+                          </a:solidFill>
+                          <a:latin typeface="Segoe UI" pitchFamily="34" charset="0"/>
+                          <a:ea typeface="Segoe UI" pitchFamily="34" charset="-122"/>
+                          <a:cs typeface="Segoe UI" pitchFamily="34" charset="-120"/>
+                        </a:rPr>
+                        <a:t>Graph reality</a:t>
+                      </a:r>
+                      <a:endParaRPr lang="en-US" sz="1150" dirty="0">
+                        <a:latin typeface="Segoe UI" charset="0"/>
+                        <a:ea typeface="Segoe UI" charset="0"/>
+                        <a:cs typeface="Segoe UI" charset="0"/>
+                      </a:endParaRPr>
+                    </a:p>
+                  </a:txBody>
+                  <a:tcPr marL="64008" marR="64008" marT="64008" marB="64008" anchor="ctr">
+                    <a:lnL w="6350" cap="flat" cmpd="sng" algn="ctr">
+                      <a:solidFill>
+                        <a:srgbClr val="24365A"/>
+                      </a:solidFill>
+                      <a:prstDash val="solid"/>
+                      <a:round/>
+                      <a:headEnd type="none" w="med" len="med"/>
+                      <a:tailEnd type="none" w="med" len="med"/>
+                    </a:lnL>
+                    <a:lnR w="6350" cap="flat" cmpd="sng" algn="ctr">
+                      <a:solidFill>
+                        <a:srgbClr val="24365A"/>
+                      </a:solidFill>
+                      <a:prstDash val="solid"/>
+                      <a:round/>
+                      <a:headEnd type="none" w="med" len="med"/>
+                      <a:tailEnd type="none" w="med" len="med"/>
+                    </a:lnR>
+                    <a:lnT w="6350" cap="flat" cmpd="sng" algn="ctr">
+                      <a:solidFill>
+                        <a:srgbClr val="24365A"/>
+                      </a:solidFill>
+                      <a:prstDash val="solid"/>
+                      <a:round/>
+                      <a:headEnd type="none" w="med" len="med"/>
+                      <a:tailEnd type="none" w="med" len="med"/>
+                    </a:lnT>
+                    <a:lnB w="6350" cap="flat" cmpd="sng" algn="ctr">
+                      <a:solidFill>
+                        <a:srgbClr val="24365A"/>
+                      </a:solidFill>
+                      <a:prstDash val="solid"/>
+                      <a:round/>
+                      <a:headEnd type="none" w="med" len="med"/>
+                      <a:tailEnd type="none" w="med" len="med"/>
+                    </a:lnB>
+                    <a:solidFill>
+                      <a:srgbClr val="16233B"/>
+                    </a:solidFill>
+                  </a:tcPr>
+                </a:tc>
+              </a:tr>
+              <a:tr h="402336">
+                <a:tc>
+                  <a:txBody>
+                    <a:bodyPr/>
+                    <a:lstStyle/>
+                    <a:p>
+                      <a:pPr indent="0" marL="0">
+                        <a:buNone/>
+                      </a:pPr>
+                      <a:r>
+                        <a:rPr lang="en-US" sz="1080" dirty="0">
+                          <a:solidFill>
+                            <a:srgbClr val="CBD5E1"/>
+                          </a:solidFill>
+                          <a:latin typeface="Segoe UI" pitchFamily="34" charset="0"/>
+                          <a:ea typeface="Segoe UI" pitchFamily="34" charset="-122"/>
+                          <a:cs typeface="Segoe UI" pitchFamily="34" charset="-120"/>
+                        </a:rPr>
+                        <a:t>Layered transfers</a:t>
+                      </a:r>
+                      <a:endParaRPr lang="en-US" sz="1080" dirty="0">
+                        <a:latin typeface="Segoe UI" charset="0"/>
+                        <a:ea typeface="Segoe UI" charset="0"/>
+                        <a:cs typeface="Segoe UI" charset="0"/>
+                      </a:endParaRPr>
+                    </a:p>
+                  </a:txBody>
+                  <a:tcPr marL="64008" marR="64008" marT="64008" marB="64008" anchor="ctr">
+                    <a:lnL w="6350" cap="flat" cmpd="sng" algn="ctr">
+                      <a:solidFill>
+                        <a:srgbClr val="24365A"/>
+                      </a:solidFill>
+                      <a:prstDash val="solid"/>
+                      <a:round/>
+                      <a:headEnd type="none" w="med" len="med"/>
+                      <a:tailEnd type="none" w="med" len="med"/>
+                    </a:lnL>
+                    <a:lnR w="6350" cap="flat" cmpd="sng" algn="ctr">
+                      <a:solidFill>
+                        <a:srgbClr val="24365A"/>
+                      </a:solidFill>
+                      <a:prstDash val="solid"/>
+                      <a:round/>
+                      <a:headEnd type="none" w="med" len="med"/>
+                      <a:tailEnd type="none" w="med" len="med"/>
+                    </a:lnR>
+                    <a:lnT w="6350" cap="flat" cmpd="sng" algn="ctr">
+                      <a:solidFill>
+                        <a:srgbClr val="24365A"/>
+                      </a:solidFill>
+                      <a:prstDash val="solid"/>
+                      <a:round/>
+                      <a:headEnd type="none" w="med" len="med"/>
+                      <a:tailEnd type="none" w="med" len="med"/>
+                    </a:lnT>
+                    <a:lnB w="6350" cap="flat" cmpd="sng" algn="ctr">
+                      <a:solidFill>
+                        <a:srgbClr val="24365A"/>
+                      </a:solidFill>
+                      <a:prstDash val="solid"/>
+                      <a:round/>
+                      <a:headEnd type="none" w="med" len="med"/>
+                      <a:tailEnd type="none" w="med" len="med"/>
+                    </a:lnB>
+                    <a:solidFill>
+                      <a:srgbClr val="101A2D"/>
+                    </a:solidFill>
+                  </a:tcPr>
+                </a:tc>
+                <a:tc>
+                  <a:txBody>
+                    <a:bodyPr/>
+                    <a:lstStyle/>
+                    <a:p>
+                      <a:pPr indent="0" marL="0">
+                        <a:buNone/>
+                      </a:pPr>
+                      <a:r>
+                        <a:rPr lang="en-US" sz="1080" dirty="0">
+                          <a:solidFill>
+                            <a:srgbClr val="CBD5E1"/>
+                          </a:solidFill>
+                          <a:latin typeface="Segoe UI" pitchFamily="34" charset="0"/>
+                          <a:ea typeface="Segoe UI" pitchFamily="34" charset="-122"/>
+                          <a:cs typeface="Segoe UI" pitchFamily="34" charset="-120"/>
+                        </a:rPr>
+                        <a:t>Chains of joins across accounts and dates that grow with every hop</a:t>
+                      </a:r>
+                      <a:endParaRPr lang="en-US" sz="1080" dirty="0">
+                        <a:latin typeface="Segoe UI" charset="0"/>
+                        <a:ea typeface="Segoe UI" charset="0"/>
+                        <a:cs typeface="Segoe UI" charset="0"/>
+                      </a:endParaRPr>
+                    </a:p>
+                  </a:txBody>
+                  <a:tcPr marL="64008" marR="64008" marT="64008" marB="64008" anchor="ctr">
+                    <a:lnL w="6350" cap="flat" cmpd="sng" algn="ctr">
+                      <a:solidFill>
+                        <a:srgbClr val="24365A"/>
+                      </a:solidFill>
+                      <a:prstDash val="solid"/>
+                      <a:round/>
+                      <a:headEnd type="none" w="med" len="med"/>
+                      <a:tailEnd type="none" w="med" len="med"/>
+                    </a:lnL>
+                    <a:lnR w="6350" cap="flat" cmpd="sng" algn="ctr">
+                      <a:solidFill>
+                        <a:srgbClr val="24365A"/>
+                      </a:solidFill>
+                      <a:prstDash val="solid"/>
+                      <a:round/>
+                      <a:headEnd type="none" w="med" len="med"/>
+                      <a:tailEnd type="none" w="med" len="med"/>
+                    </a:lnR>
+                    <a:lnT w="6350" cap="flat" cmpd="sng" algn="ctr">
+                      <a:solidFill>
+                        <a:srgbClr val="24365A"/>
+                      </a:solidFill>
+                      <a:prstDash val="solid"/>
+                      <a:round/>
+                      <a:headEnd type="none" w="med" len="med"/>
+                      <a:tailEnd type="none" w="med" len="med"/>
+                    </a:lnT>
+                    <a:lnB w="6350" cap="flat" cmpd="sng" algn="ctr">
+                      <a:solidFill>
+                        <a:srgbClr val="24365A"/>
+                      </a:solidFill>
+                      <a:prstDash val="solid"/>
+                      <a:round/>
+                      <a:headEnd type="none" w="med" len="med"/>
+                      <a:tailEnd type="none" w="med" len="med"/>
+                    </a:lnB>
+                    <a:solidFill>
+                      <a:srgbClr val="101A2D"/>
+                    </a:solidFill>
+                  </a:tcPr>
+                </a:tc>
+                <a:tc>
+                  <a:txBody>
+                    <a:bodyPr/>
+                    <a:lstStyle/>
+                    <a:p>
+                      <a:pPr indent="0" marL="0">
+                        <a:buNone/>
+                      </a:pPr>
+                      <a:r>
+                        <a:rPr lang="en-US" sz="1080" dirty="0">
+                          <a:solidFill>
+                            <a:srgbClr val="CBD5E1"/>
+                          </a:solidFill>
+                          <a:latin typeface="Segoe UI" pitchFamily="34" charset="0"/>
+                          <a:ea typeface="Segoe UI" pitchFamily="34" charset="-122"/>
+                          <a:cs typeface="Segoe UI" pitchFamily="34" charset="-120"/>
+                        </a:rPr>
+                        <a:t>A path - depth and hops read directly from the shape</a:t>
+                      </a:r>
+                      <a:endParaRPr lang="en-US" sz="1080" dirty="0">
+                        <a:latin typeface="Segoe UI" charset="0"/>
+                        <a:ea typeface="Segoe UI" charset="0"/>
+                        <a:cs typeface="Segoe UI" charset="0"/>
+                      </a:endParaRPr>
+                    </a:p>
+                  </a:txBody>
+                  <a:tcPr marL="64008" marR="64008" marT="64008" marB="64008" anchor="ctr">
+                    <a:lnL w="6350" cap="flat" cmpd="sng" algn="ctr">
+                      <a:solidFill>
+                        <a:srgbClr val="24365A"/>
+                      </a:solidFill>
+                      <a:prstDash val="solid"/>
+                      <a:round/>
+                      <a:headEnd type="none" w="med" len="med"/>
+                      <a:tailEnd type="none" w="med" len="med"/>
+                    </a:lnL>
+                    <a:lnR w="6350" cap="flat" cmpd="sng" algn="ctr">
+                      <a:solidFill>
+                        <a:srgbClr val="24365A"/>
+                      </a:solidFill>
+                      <a:prstDash val="solid"/>
+                      <a:round/>
+                      <a:headEnd type="none" w="med" len="med"/>
+                      <a:tailEnd type="none" w="med" len="med"/>
+                    </a:lnR>
+                    <a:lnT w="6350" cap="flat" cmpd="sng" algn="ctr">
+                      <a:solidFill>
+                        <a:srgbClr val="24365A"/>
+                      </a:solidFill>
+                      <a:prstDash val="solid"/>
+                      <a:round/>
+                      <a:headEnd type="none" w="med" len="med"/>
+                      <a:tailEnd type="none" w="med" len="med"/>
+                    </a:lnT>
+                    <a:lnB w="6350" cap="flat" cmpd="sng" algn="ctr">
+                      <a:solidFill>
+                        <a:srgbClr val="24365A"/>
+                      </a:solidFill>
+                      <a:prstDash val="solid"/>
+                      <a:round/>
+                      <a:headEnd type="none" w="med" len="med"/>
+                      <a:tailEnd type="none" w="med" len="med"/>
+                    </a:lnB>
+                    <a:solidFill>
+                      <a:srgbClr val="101A2D"/>
+                    </a:solidFill>
+                  </a:tcPr>
+                </a:tc>
+              </a:tr>
+              <a:tr h="402336">
+                <a:tc>
+                  <a:txBody>
+                    <a:bodyPr/>
+                    <a:lstStyle/>
+                    <a:p>
+                      <a:pPr indent="0" marL="0">
+                        <a:buNone/>
+                      </a:pPr>
+                      <a:r>
+                        <a:rPr lang="en-US" sz="1080" dirty="0">
+                          <a:solidFill>
+                            <a:srgbClr val="CBD5E1"/>
+                          </a:solidFill>
+                          <a:latin typeface="Segoe UI" pitchFamily="34" charset="0"/>
+                          <a:ea typeface="Segoe UI" pitchFamily="34" charset="-122"/>
+                          <a:cs typeface="Segoe UI" pitchFamily="34" charset="-120"/>
+                        </a:rPr>
+                        <a:t>Circular flows</a:t>
+                      </a:r>
+                      <a:endParaRPr lang="en-US" sz="1080" dirty="0">
+                        <a:latin typeface="Segoe UI" charset="0"/>
+                        <a:ea typeface="Segoe UI" charset="0"/>
+                        <a:cs typeface="Segoe UI" charset="0"/>
+                      </a:endParaRPr>
+                    </a:p>
+                  </a:txBody>
+                  <a:tcPr marL="64008" marR="64008" marT="64008" marB="64008" anchor="ctr">
+                    <a:lnL w="6350" cap="flat" cmpd="sng" algn="ctr">
+                      <a:solidFill>
+                        <a:srgbClr val="24365A"/>
+                      </a:solidFill>
+                      <a:prstDash val="solid"/>
+                      <a:round/>
+                      <a:headEnd type="none" w="med" len="med"/>
+                      <a:tailEnd type="none" w="med" len="med"/>
+                    </a:lnL>
+                    <a:lnR w="6350" cap="flat" cmpd="sng" algn="ctr">
+                      <a:solidFill>
+                        <a:srgbClr val="24365A"/>
+                      </a:solidFill>
+                      <a:prstDash val="solid"/>
+                      <a:round/>
+                      <a:headEnd type="none" w="med" len="med"/>
+                      <a:tailEnd type="none" w="med" len="med"/>
+                    </a:lnR>
+                    <a:lnT w="6350" cap="flat" cmpd="sng" algn="ctr">
+                      <a:solidFill>
+                        <a:srgbClr val="24365A"/>
+                      </a:solidFill>
+                      <a:prstDash val="solid"/>
+                      <a:round/>
+                      <a:headEnd type="none" w="med" len="med"/>
+                      <a:tailEnd type="none" w="med" len="med"/>
+                    </a:lnT>
+                    <a:lnB w="6350" cap="flat" cmpd="sng" algn="ctr">
+                      <a:solidFill>
+                        <a:srgbClr val="24365A"/>
+                      </a:solidFill>
+                      <a:prstDash val="solid"/>
+                      <a:round/>
+                      <a:headEnd type="none" w="med" len="med"/>
+                      <a:tailEnd type="none" w="med" len="med"/>
+                    </a:lnB>
+                    <a:solidFill>
+                      <a:srgbClr val="0D1420"/>
+                    </a:solidFill>
+                  </a:tcPr>
+                </a:tc>
+                <a:tc>
+                  <a:txBody>
+                    <a:bodyPr/>
+                    <a:lstStyle/>
+                    <a:p>
+                      <a:pPr indent="0" marL="0">
+                        <a:buNone/>
+                      </a:pPr>
+                      <a:r>
+                        <a:rPr lang="en-US" sz="1080" dirty="0">
+                          <a:solidFill>
+                            <a:srgbClr val="CBD5E1"/>
+                          </a:solidFill>
+                          <a:latin typeface="Segoe UI" pitchFamily="34" charset="0"/>
+                          <a:ea typeface="Segoe UI" pitchFamily="34" charset="-122"/>
+                          <a:cs typeface="Segoe UI" pitchFamily="34" charset="-120"/>
+                        </a:rPr>
+                        <a:t>Recursive queries that expand with each new hop</a:t>
+                      </a:r>
+                      <a:endParaRPr lang="en-US" sz="1080" dirty="0">
+                        <a:latin typeface="Segoe UI" charset="0"/>
+                        <a:ea typeface="Segoe UI" charset="0"/>
+                        <a:cs typeface="Segoe UI" charset="0"/>
+                      </a:endParaRPr>
+                    </a:p>
+                  </a:txBody>
+                  <a:tcPr marL="64008" marR="64008" marT="64008" marB="64008" anchor="ctr">
+                    <a:lnL w="6350" cap="flat" cmpd="sng" algn="ctr">
+                      <a:solidFill>
+                        <a:srgbClr val="24365A"/>
+                      </a:solidFill>
+                      <a:prstDash val="solid"/>
+                      <a:round/>
+                      <a:headEnd type="none" w="med" len="med"/>
+                      <a:tailEnd type="none" w="med" len="med"/>
+                    </a:lnL>
+                    <a:lnR w="6350" cap="flat" cmpd="sng" algn="ctr">
+                      <a:solidFill>
+                        <a:srgbClr val="24365A"/>
+                      </a:solidFill>
+                      <a:prstDash val="solid"/>
+                      <a:round/>
+                      <a:headEnd type="none" w="med" len="med"/>
+                      <a:tailEnd type="none" w="med" len="med"/>
+                    </a:lnR>
+                    <a:lnT w="6350" cap="flat" cmpd="sng" algn="ctr">
+                      <a:solidFill>
+                        <a:srgbClr val="24365A"/>
+                      </a:solidFill>
+                      <a:prstDash val="solid"/>
+                      <a:round/>
+                      <a:headEnd type="none" w="med" len="med"/>
+                      <a:tailEnd type="none" w="med" len="med"/>
+                    </a:lnT>
+                    <a:lnB w="6350" cap="flat" cmpd="sng" algn="ctr">
+                      <a:solidFill>
+                        <a:srgbClr val="24365A"/>
+                      </a:solidFill>
+                      <a:prstDash val="solid"/>
+                      <a:round/>
+                      <a:headEnd type="none" w="med" len="med"/>
+                      <a:tailEnd type="none" w="med" len="med"/>
+                    </a:lnB>
+                    <a:solidFill>
+                      <a:srgbClr val="0D1420"/>
+                    </a:solidFill>
+                  </a:tcPr>
+                </a:tc>
+                <a:tc>
+                  <a:txBody>
+                    <a:bodyPr/>
+                    <a:lstStyle/>
+                    <a:p>
+                      <a:pPr indent="0" marL="0">
+                        <a:buNone/>
+                      </a:pPr>
+                      <a:r>
+                        <a:rPr lang="en-US" sz="1080" dirty="0">
+                          <a:solidFill>
+                            <a:srgbClr val="CBD5E1"/>
+                          </a:solidFill>
+                          <a:latin typeface="Segoe UI" pitchFamily="34" charset="0"/>
+                          <a:ea typeface="Segoe UI" pitchFamily="34" charset="-122"/>
+                          <a:cs typeface="Segoe UI" pitchFamily="34" charset="-120"/>
+                        </a:rPr>
+                        <a:t>A cycle - closed loops are visible at a glance</a:t>
+                      </a:r>
+                      <a:endParaRPr lang="en-US" sz="1080" dirty="0">
+                        <a:latin typeface="Segoe UI" charset="0"/>
+                        <a:ea typeface="Segoe UI" charset="0"/>
+                        <a:cs typeface="Segoe UI" charset="0"/>
+                      </a:endParaRPr>
+                    </a:p>
+                  </a:txBody>
+                  <a:tcPr marL="64008" marR="64008" marT="64008" marB="64008" anchor="ctr">
+                    <a:lnL w="6350" cap="flat" cmpd="sng" algn="ctr">
+                      <a:solidFill>
+                        <a:srgbClr val="24365A"/>
+                      </a:solidFill>
+                      <a:prstDash val="solid"/>
+                      <a:round/>
+                      <a:headEnd type="none" w="med" len="med"/>
+                      <a:tailEnd type="none" w="med" len="med"/>
+                    </a:lnL>
+                    <a:lnR w="6350" cap="flat" cmpd="sng" algn="ctr">
+                      <a:solidFill>
+                        <a:srgbClr val="24365A"/>
+                      </a:solidFill>
+                      <a:prstDash val="solid"/>
+                      <a:round/>
+                      <a:headEnd type="none" w="med" len="med"/>
+                      <a:tailEnd type="none" w="med" len="med"/>
+                    </a:lnR>
+                    <a:lnT w="6350" cap="flat" cmpd="sng" algn="ctr">
+                      <a:solidFill>
+                        <a:srgbClr val="24365A"/>
+                      </a:solidFill>
+                      <a:prstDash val="solid"/>
+                      <a:round/>
+                      <a:headEnd type="none" w="med" len="med"/>
+                      <a:tailEnd type="none" w="med" len="med"/>
+                    </a:lnT>
+                    <a:lnB w="6350" cap="flat" cmpd="sng" algn="ctr">
+                      <a:solidFill>
+                        <a:srgbClr val="24365A"/>
+                      </a:solidFill>
+                      <a:prstDash val="solid"/>
+                      <a:round/>
+                      <a:headEnd type="none" w="med" len="med"/>
+                      <a:tailEnd type="none" w="med" len="med"/>
+                    </a:lnB>
+                    <a:solidFill>
+                      <a:srgbClr val="0D1420"/>
+                    </a:solidFill>
+                  </a:tcPr>
+                </a:tc>
+              </a:tr>
+              <a:tr h="402336">
+                <a:tc>
+                  <a:txBody>
+                    <a:bodyPr/>
+                    <a:lstStyle/>
+                    <a:p>
+                      <a:pPr indent="0" marL="0">
+                        <a:buNone/>
+                      </a:pPr>
+                      <a:r>
+                        <a:rPr lang="en-US" sz="1080" dirty="0">
+                          <a:solidFill>
+                            <a:srgbClr val="CBD5E1"/>
+                          </a:solidFill>
+                          <a:latin typeface="Segoe UI" pitchFamily="34" charset="0"/>
+                          <a:ea typeface="Segoe UI" pitchFamily="34" charset="-122"/>
+                          <a:cs typeface="Segoe UI" pitchFamily="34" charset="-120"/>
+                        </a:rPr>
+                        <a:t>Mule networks</a:t>
+                      </a:r>
+                      <a:endParaRPr lang="en-US" sz="1080" dirty="0">
+                        <a:latin typeface="Segoe UI" charset="0"/>
+                        <a:ea typeface="Segoe UI" charset="0"/>
+                        <a:cs typeface="Segoe UI" charset="0"/>
+                      </a:endParaRPr>
+                    </a:p>
+                  </a:txBody>
+                  <a:tcPr marL="64008" marR="64008" marT="64008" marB="64008" anchor="ctr">
+                    <a:lnL w="6350" cap="flat" cmpd="sng" algn="ctr">
+                      <a:solidFill>
+                        <a:srgbClr val="24365A"/>
+                      </a:solidFill>
+                      <a:prstDash val="solid"/>
+                      <a:round/>
+                      <a:headEnd type="none" w="med" len="med"/>
+                      <a:tailEnd type="none" w="med" len="med"/>
+                    </a:lnL>
+                    <a:lnR w="6350" cap="flat" cmpd="sng" algn="ctr">
+                      <a:solidFill>
+                        <a:srgbClr val="24365A"/>
+                      </a:solidFill>
+                      <a:prstDash val="solid"/>
+                      <a:round/>
+                      <a:headEnd type="none" w="med" len="med"/>
+                      <a:tailEnd type="none" w="med" len="med"/>
+                    </a:lnR>
+                    <a:lnT w="6350" cap="flat" cmpd="sng" algn="ctr">
+                      <a:solidFill>
+                        <a:srgbClr val="24365A"/>
+                      </a:solidFill>
+                      <a:prstDash val="solid"/>
+                      <a:round/>
+                      <a:headEnd type="none" w="med" len="med"/>
+                      <a:tailEnd type="none" w="med" len="med"/>
+                    </a:lnT>
+                    <a:lnB w="6350" cap="flat" cmpd="sng" algn="ctr">
+                      <a:solidFill>
+                        <a:srgbClr val="24365A"/>
+                      </a:solidFill>
+                      <a:prstDash val="solid"/>
+                      <a:round/>
+                      <a:headEnd type="none" w="med" len="med"/>
+                      <a:tailEnd type="none" w="med" len="med"/>
+                    </a:lnB>
+                    <a:solidFill>
+                      <a:srgbClr val="101A2D"/>
+                    </a:solidFill>
+                  </a:tcPr>
+                </a:tc>
+                <a:tc>
+                  <a:txBody>
+                    <a:bodyPr/>
+                    <a:lstStyle/>
+                    <a:p>
+                      <a:pPr indent="0" marL="0">
+                        <a:buNone/>
+                      </a:pPr>
+                      <a:r>
+                        <a:rPr lang="en-US" sz="1080" dirty="0">
+                          <a:solidFill>
+                            <a:srgbClr val="CBD5E1"/>
+                          </a:solidFill>
+                          <a:latin typeface="Segoe UI" pitchFamily="34" charset="0"/>
+                          <a:ea typeface="Segoe UI" pitchFamily="34" charset="-122"/>
+                          <a:cs typeface="Segoe UI" pitchFamily="34" charset="-120"/>
+                        </a:rPr>
+                        <a:t>Many-to-many joins that explode combinatorially</a:t>
+                      </a:r>
+                      <a:endParaRPr lang="en-US" sz="1080" dirty="0">
+                        <a:latin typeface="Segoe UI" charset="0"/>
+                        <a:ea typeface="Segoe UI" charset="0"/>
+                        <a:cs typeface="Segoe UI" charset="0"/>
+                      </a:endParaRPr>
+                    </a:p>
+                  </a:txBody>
+                  <a:tcPr marL="64008" marR="64008" marT="64008" marB="64008" anchor="ctr">
+                    <a:lnL w="6350" cap="flat" cmpd="sng" algn="ctr">
+                      <a:solidFill>
+                        <a:srgbClr val="24365A"/>
+                      </a:solidFill>
+                      <a:prstDash val="solid"/>
+                      <a:round/>
+                      <a:headEnd type="none" w="med" len="med"/>
+                      <a:tailEnd type="none" w="med" len="med"/>
+                    </a:lnL>
+                    <a:lnR w="6350" cap="flat" cmpd="sng" algn="ctr">
+                      <a:solidFill>
+                        <a:srgbClr val="24365A"/>
+                      </a:solidFill>
+                      <a:prstDash val="solid"/>
+                      <a:round/>
+                      <a:headEnd type="none" w="med" len="med"/>
+                      <a:tailEnd type="none" w="med" len="med"/>
+                    </a:lnR>
+                    <a:lnT w="6350" cap="flat" cmpd="sng" algn="ctr">
+                      <a:solidFill>
+                        <a:srgbClr val="24365A"/>
+                      </a:solidFill>
+                      <a:prstDash val="solid"/>
+                      <a:round/>
+                      <a:headEnd type="none" w="med" len="med"/>
+                      <a:tailEnd type="none" w="med" len="med"/>
+                    </a:lnT>
+                    <a:lnB w="6350" cap="flat" cmpd="sng" algn="ctr">
+                      <a:solidFill>
+                        <a:srgbClr val="24365A"/>
+                      </a:solidFill>
+                      <a:prstDash val="solid"/>
+                      <a:round/>
+                      <a:headEnd type="none" w="med" len="med"/>
+                      <a:tailEnd type="none" w="med" len="med"/>
+                    </a:lnB>
+                    <a:solidFill>
+                      <a:srgbClr val="101A2D"/>
+                    </a:solidFill>
+                  </a:tcPr>
+                </a:tc>
+                <a:tc>
+                  <a:txBody>
+                    <a:bodyPr/>
+                    <a:lstStyle/>
+                    <a:p>
+                      <a:pPr indent="0" marL="0">
+                        <a:buNone/>
+                      </a:pPr>
+                      <a:r>
+                        <a:rPr lang="en-US" sz="1080" dirty="0">
+                          <a:solidFill>
+                            <a:srgbClr val="CBD5E1"/>
+                          </a:solidFill>
+                          <a:latin typeface="Segoe UI" pitchFamily="34" charset="0"/>
+                          <a:ea typeface="Segoe UI" pitchFamily="34" charset="-122"/>
+                          <a:cs typeface="Segoe UI" pitchFamily="34" charset="-120"/>
+                        </a:rPr>
+                        <a:t>A hub - one account with abnormal fan-out</a:t>
+                      </a:r>
+                      <a:endParaRPr lang="en-US" sz="1080" dirty="0">
+                        <a:latin typeface="Segoe UI" charset="0"/>
+                        <a:ea typeface="Segoe UI" charset="0"/>
+                        <a:cs typeface="Segoe UI" charset="0"/>
+                      </a:endParaRPr>
+                    </a:p>
+                  </a:txBody>
+                  <a:tcPr marL="64008" marR="64008" marT="64008" marB="64008" anchor="ctr">
+                    <a:lnL w="6350" cap="flat" cmpd="sng" algn="ctr">
+                      <a:solidFill>
+                        <a:srgbClr val="24365A"/>
+                      </a:solidFill>
+                      <a:prstDash val="solid"/>
+                      <a:round/>
+                      <a:headEnd type="none" w="med" len="med"/>
+                      <a:tailEnd type="none" w="med" len="med"/>
+                    </a:lnL>
+                    <a:lnR w="6350" cap="flat" cmpd="sng" algn="ctr">
+                      <a:solidFill>
+                        <a:srgbClr val="24365A"/>
+                      </a:solidFill>
+                      <a:prstDash val="solid"/>
+                      <a:round/>
+                      <a:headEnd type="none" w="med" len="med"/>
+                      <a:tailEnd type="none" w="med" len="med"/>
+                    </a:lnR>
+                    <a:lnT w="6350" cap="flat" cmpd="sng" algn="ctr">
+                      <a:solidFill>
+                        <a:srgbClr val="24365A"/>
+                      </a:solidFill>
+                      <a:prstDash val="solid"/>
+                      <a:round/>
+                      <a:headEnd type="none" w="med" len="med"/>
+                      <a:tailEnd type="none" w="med" len="med"/>
+                    </a:lnT>
+                    <a:lnB w="6350" cap="flat" cmpd="sng" algn="ctr">
+                      <a:solidFill>
+                        <a:srgbClr val="24365A"/>
+                      </a:solidFill>
+                      <a:prstDash val="solid"/>
+                      <a:round/>
+                      <a:headEnd type="none" w="med" len="med"/>
+                      <a:tailEnd type="none" w="med" len="med"/>
+                    </a:lnB>
+                    <a:solidFill>
+                      <a:srgbClr val="101A2D"/>
+                    </a:solidFill>
+                  </a:tcPr>
+                </a:tc>
+              </a:tr>
+              <a:tr h="402336">
+                <a:tc>
+                  <a:txBody>
+                    <a:bodyPr/>
+                    <a:lstStyle/>
+                    <a:p>
+                      <a:pPr indent="0" marL="0">
+                        <a:buNone/>
+                      </a:pPr>
+                      <a:r>
+                        <a:rPr lang="en-US" sz="1080" dirty="0">
+                          <a:solidFill>
+                            <a:srgbClr val="CBD5E1"/>
+                          </a:solidFill>
+                          <a:latin typeface="Segoe UI" pitchFamily="34" charset="0"/>
+                          <a:ea typeface="Segoe UI" pitchFamily="34" charset="-122"/>
+                          <a:cs typeface="Segoe UI" pitchFamily="34" charset="-120"/>
+                        </a:rPr>
+                        <a:t>Ring detection</a:t>
+                      </a:r>
+                      <a:endParaRPr lang="en-US" sz="1080" dirty="0">
+                        <a:latin typeface="Segoe UI" charset="0"/>
+                        <a:ea typeface="Segoe UI" charset="0"/>
+                        <a:cs typeface="Segoe UI" charset="0"/>
+                      </a:endParaRPr>
+                    </a:p>
+                  </a:txBody>
+                  <a:tcPr marL="64008" marR="64008" marT="64008" marB="64008" anchor="ctr">
+                    <a:lnL w="6350" cap="flat" cmpd="sng" algn="ctr">
+                      <a:solidFill>
+                        <a:srgbClr val="24365A"/>
+                      </a:solidFill>
+                      <a:prstDash val="solid"/>
+                      <a:round/>
+                      <a:headEnd type="none" w="med" len="med"/>
+                      <a:tailEnd type="none" w="med" len="med"/>
+                    </a:lnL>
+                    <a:lnR w="6350" cap="flat" cmpd="sng" algn="ctr">
+                      <a:solidFill>
+                        <a:srgbClr val="24365A"/>
+                      </a:solidFill>
+                      <a:prstDash val="solid"/>
+                      <a:round/>
+                      <a:headEnd type="none" w="med" len="med"/>
+                      <a:tailEnd type="none" w="med" len="med"/>
+                    </a:lnR>
+                    <a:lnT w="6350" cap="flat" cmpd="sng" algn="ctr">
+                      <a:solidFill>
+                        <a:srgbClr val="24365A"/>
+                      </a:solidFill>
+                      <a:prstDash val="solid"/>
+                      <a:round/>
+                      <a:headEnd type="none" w="med" len="med"/>
+                      <a:tailEnd type="none" w="med" len="med"/>
+                    </a:lnT>
+                    <a:lnB w="6350" cap="flat" cmpd="sng" algn="ctr">
+                      <a:solidFill>
+                        <a:srgbClr val="24365A"/>
+                      </a:solidFill>
+                      <a:prstDash val="solid"/>
+                      <a:round/>
+                      <a:headEnd type="none" w="med" len="med"/>
+                      <a:tailEnd type="none" w="med" len="med"/>
+                    </a:lnB>
+                    <a:solidFill>
+                      <a:srgbClr val="0D1420"/>
+                    </a:solidFill>
+                  </a:tcPr>
+                </a:tc>
+                <a:tc>
+                  <a:txBody>
+                    <a:bodyPr/>
+                    <a:lstStyle/>
+                    <a:p>
+                      <a:pPr indent="0" marL="0">
+                        <a:buNone/>
+                      </a:pPr>
+                      <a:r>
+                        <a:rPr lang="en-US" sz="1080" dirty="0">
+                          <a:solidFill>
+                            <a:srgbClr val="CBD5E1"/>
+                          </a:solidFill>
+                          <a:latin typeface="Segoe UI" pitchFamily="34" charset="0"/>
+                          <a:ea typeface="Segoe UI" pitchFamily="34" charset="-122"/>
+                          <a:cs typeface="Segoe UI" pitchFamily="34" charset="-120"/>
+                        </a:rPr>
+                        <a:t>A 40-line query few reviewers can verify line by line</a:t>
+                      </a:r>
+                      <a:endParaRPr lang="en-US" sz="1080" dirty="0">
+                        <a:latin typeface="Segoe UI" charset="0"/>
+                        <a:ea typeface="Segoe UI" charset="0"/>
+                        <a:cs typeface="Segoe UI" charset="0"/>
+                      </a:endParaRPr>
+                    </a:p>
+                  </a:txBody>
+                  <a:tcPr marL="64008" marR="64008" marT="64008" marB="64008" anchor="ctr">
+                    <a:lnL w="6350" cap="flat" cmpd="sng" algn="ctr">
+                      <a:solidFill>
+                        <a:srgbClr val="24365A"/>
+                      </a:solidFill>
+                      <a:prstDash val="solid"/>
+                      <a:round/>
+                      <a:headEnd type="none" w="med" len="med"/>
+                      <a:tailEnd type="none" w="med" len="med"/>
+                    </a:lnL>
+                    <a:lnR w="6350" cap="flat" cmpd="sng" algn="ctr">
+                      <a:solidFill>
+                        <a:srgbClr val="24365A"/>
+                      </a:solidFill>
+                      <a:prstDash val="solid"/>
+                      <a:round/>
+                      <a:headEnd type="none" w="med" len="med"/>
+                      <a:tailEnd type="none" w="med" len="med"/>
+                    </a:lnR>
+                    <a:lnT w="6350" cap="flat" cmpd="sng" algn="ctr">
+                      <a:solidFill>
+                        <a:srgbClr val="24365A"/>
+                      </a:solidFill>
+                      <a:prstDash val="solid"/>
+                      <a:round/>
+                      <a:headEnd type="none" w="med" len="med"/>
+                      <a:tailEnd type="none" w="med" len="med"/>
+                    </a:lnT>
+                    <a:lnB w="6350" cap="flat" cmpd="sng" algn="ctr">
+                      <a:solidFill>
+                        <a:srgbClr val="24365A"/>
+                      </a:solidFill>
+                      <a:prstDash val="solid"/>
+                      <a:round/>
+                      <a:headEnd type="none" w="med" len="med"/>
+                      <a:tailEnd type="none" w="med" len="med"/>
+                    </a:lnB>
+                    <a:solidFill>
+                      <a:srgbClr val="0D1420"/>
+                    </a:solidFill>
+                  </a:tcPr>
+                </a:tc>
+                <a:tc>
+                  <a:txBody>
+                    <a:bodyPr/>
+                    <a:lstStyle/>
+                    <a:p>
+                      <a:pPr indent="0" marL="0">
+                        <a:buNone/>
+                      </a:pPr>
+                      <a:r>
+                        <a:rPr lang="en-US" sz="1080" dirty="0">
+                          <a:solidFill>
+                            <a:srgbClr val="CBD5E1"/>
+                          </a:solidFill>
+                          <a:latin typeface="Segoe UI" pitchFamily="34" charset="0"/>
+                          <a:ea typeface="Segoe UI" pitchFamily="34" charset="-122"/>
+                          <a:cs typeface="Segoe UI" pitchFamily="34" charset="-120"/>
+                        </a:rPr>
+                        <a:t>A shape a reviewer can confirm before reading the query</a:t>
+                      </a:r>
+                      <a:endParaRPr lang="en-US" sz="1080" dirty="0">
+                        <a:latin typeface="Segoe UI" charset="0"/>
+                        <a:ea typeface="Segoe UI" charset="0"/>
+                        <a:cs typeface="Segoe UI" charset="0"/>
+                      </a:endParaRPr>
+                    </a:p>
+                  </a:txBody>
+                  <a:tcPr marL="64008" marR="64008" marT="64008" marB="64008" anchor="ctr">
+                    <a:lnL w="6350" cap="flat" cmpd="sng" algn="ctr">
+                      <a:solidFill>
+                        <a:srgbClr val="24365A"/>
+                      </a:solidFill>
+                      <a:prstDash val="solid"/>
+                      <a:round/>
+                      <a:headEnd type="none" w="med" len="med"/>
+                      <a:tailEnd type="none" w="med" len="med"/>
+                    </a:lnL>
+                    <a:lnR w="6350" cap="flat" cmpd="sng" algn="ctr">
+                      <a:solidFill>
+                        <a:srgbClr val="24365A"/>
+                      </a:solidFill>
+                      <a:prstDash val="solid"/>
+                      <a:round/>
+                      <a:headEnd type="none" w="med" len="med"/>
+                      <a:tailEnd type="none" w="med" len="med"/>
+                    </a:lnR>
+                    <a:lnT w="6350" cap="flat" cmpd="sng" algn="ctr">
+                      <a:solidFill>
+                        <a:srgbClr val="24365A"/>
+                      </a:solidFill>
+                      <a:prstDash val="solid"/>
+                      <a:round/>
+                      <a:headEnd type="none" w="med" len="med"/>
+                      <a:tailEnd type="none" w="med" len="med"/>
+                    </a:lnT>
+                    <a:lnB w="6350" cap="flat" cmpd="sng" algn="ctr">
+                      <a:solidFill>
+                        <a:srgbClr val="24365A"/>
+                      </a:solidFill>
+                      <a:prstDash val="solid"/>
+                      <a:round/>
+                      <a:headEnd type="none" w="med" len="med"/>
+                      <a:tailEnd type="none" w="med" len="med"/>
+                    </a:lnB>
+                    <a:solidFill>
+                      <a:srgbClr val="0D1420"/>
+                    </a:solidFill>
+                  </a:tcPr>
+                </a:tc>
+              </a:tr>
+            </a:tbl>
+          </a:graphicData>
+        </a:graphic>
+      </p:graphicFrame>
+      <p:sp>
+        <p:nvSpPr>
+          <p:cNvPr id="7" name="Shape 4"/>
+          <p:cNvSpPr/>
+          <p:nvPr/>
+        </p:nvSpPr>
+        <p:spPr>
+          <a:xfrm>
+            <a:off x="822960" y="5961888"/>
+            <a:ext cx="10515600" cy="0"/>
+          </a:xfrm>
+          <a:prstGeom prst="line">
+            <a:avLst/>
+          </a:prstGeom>
+          <a:noFill/>
+          <a:ln w="12700">
+            <a:solidFill>
+              <a:srgbClr val="1E2D45"/>
+            </a:solidFill>
+            <a:prstDash val="solid"/>
+          </a:ln>
+        </p:spPr>
+      </p:sp>
+      <p:sp>
+        <p:nvSpPr>
+          <p:cNvPr id="8" name="Text 5"/>
+          <p:cNvSpPr/>
+          <p:nvPr/>
+        </p:nvSpPr>
+        <p:spPr>
+          <a:xfrm>
+            <a:off x="822960" y="6053328"/>
+            <a:ext cx="9692640" cy="457200"/>
+          </a:xfrm>
+          <a:prstGeom prst="rect">
+            <a:avLst/>
+          </a:prstGeom>
+          <a:noFill/>
+          <a:ln/>
+        </p:spPr>
+        <p:txBody>
+          <a:bodyPr wrap="square" rtlCol="0" anchor="ctr"/>
+          <a:lstStyle/>
+          <a:p>
+            <a:pPr indent="0" marL="0">
+              <a:buNone/>
+            </a:pPr>
+            <a:r>
+              <a:rPr lang="en-US" sz="1150" dirty="0">
+                <a:solidFill>
+                  <a:srgbClr val="64748B"/>
                 </a:solidFill>
                 <a:latin typeface="Segoe UI" pitchFamily="34" charset="0"/>
                 <a:ea typeface="Segoe UI" pitchFamily="34" charset="-122"/>
                 <a:cs typeface="Segoe UI" pitchFamily="34" charset="-120"/>
               </a:rPr>
-              <a:t>Graph-based analysis patterns for AML review</a:t>
-            </a:r>
-            <a:endParaRPr lang="en-US" sz="1600" dirty="0"/>
-          </a:p>
-          <a:p>
-            <a:pPr marL="342900" indent="-342900">
-              <a:lnSpc>
-                <a:spcPct val="115000"/>
-              </a:lnSpc>
-              <a:spcAft>
-                <a:spcPts val="1000"/>
-              </a:spcAft>
-              <a:buSzPct val="100000"/>
-              <a:buChar char="▸"/>
-            </a:pPr>
-            <a:r>
-              <a:rPr lang="en-US" sz="1600" dirty="0">
-                <a:solidFill>
-                  <a:srgbClr val="CBD5E1"/>
-                </a:solidFill>
-                <a:latin typeface="Segoe UI" pitchFamily="34" charset="0"/>
-                <a:ea typeface="Segoe UI" pitchFamily="34" charset="-122"/>
-                <a:cs typeface="Segoe UI" pitchFamily="34" charset="-120"/>
-              </a:rPr>
-              <a:t>Clear documentation for audit and stakeholders</a:t>
-            </a:r>
-            <a:endParaRPr lang="en-US" sz="1600" dirty="0"/>
-          </a:p>
-          <a:p>
-            <a:pPr marL="342900" indent="-342900">
-              <a:lnSpc>
-                <a:spcPct val="115000"/>
-              </a:lnSpc>
-              <a:spcAft>
-                <a:spcPts val="1000"/>
-              </a:spcAft>
-              <a:buSzPct val="100000"/>
-              <a:buChar char="▸"/>
-            </a:pPr>
-            <a:r>
-              <a:rPr lang="en-US" sz="1600" dirty="0">
-                <a:solidFill>
-                  <a:srgbClr val="CBD5E1"/>
-                </a:solidFill>
-                <a:latin typeface="Segoe UI" pitchFamily="34" charset="0"/>
-                <a:ea typeface="Segoe UI" pitchFamily="34" charset="-122"/>
-                <a:cs typeface="Segoe UI" pitchFamily="34" charset="-120"/>
-              </a:rPr>
-              <a:t>Identified operational optimization opportunities</a:t>
-            </a:r>
-            <a:endParaRPr lang="en-US" sz="1600" dirty="0"/>
-          </a:p>
-          <a:p>
-            <a:pPr marL="342900" indent="-342900">
-              <a:lnSpc>
-                <a:spcPct val="115000"/>
-              </a:lnSpc>
-              <a:spcAft>
-                <a:spcPts val="1000"/>
-              </a:spcAft>
-              <a:buSzPct val="100000"/>
-              <a:buChar char="▸"/>
-            </a:pPr>
-            <a:r>
-              <a:rPr lang="en-US" sz="1600" dirty="0">
-                <a:solidFill>
-                  <a:srgbClr val="CBD5E1"/>
-                </a:solidFill>
-                <a:latin typeface="Segoe UI" pitchFamily="34" charset="0"/>
-                <a:ea typeface="Segoe UI" pitchFamily="34" charset="-122"/>
-                <a:cs typeface="Segoe UI" pitchFamily="34" charset="-120"/>
-              </a:rPr>
-              <a:t>A team that thinks in networks now</a:t>
-            </a:r>
-            <a:endParaRPr lang="en-US" sz="1600" dirty="0"/>
-          </a:p>
-        </p:txBody>
-      </p:sp>
-      <p:sp>
-        <p:nvSpPr>
-          <p:cNvPr id="7" name="Text 5"/>
-          <p:cNvSpPr/>
-          <p:nvPr/>
-        </p:nvSpPr>
-        <p:spPr>
-          <a:xfrm>
-            <a:off x="10698480" y="6355080"/>
+              <a:t>Same data, different model - review meetings became shape discussions instead of SQL walkthroughs.</a:t>
+            </a:r>
+            <a:endParaRPr lang="en-US" sz="1150" dirty="0"/>
+          </a:p>
+        </p:txBody>
+      </p:sp>
+      <p:sp>
+        <p:nvSpPr>
+          <p:cNvPr id="9" name="Text 6"/>
+          <p:cNvSpPr/>
+          <p:nvPr/>
+        </p:nvSpPr>
+        <p:spPr>
+          <a:xfrm>
+            <a:off x="10698480" y="6382512"/>
             <a:ext cx="1188720" cy="365760"/>
           </a:xfrm>
           <a:prstGeom prst="rect">
@@ -3223,7 +9199,7 @@
                 <a:ea typeface="Consolas" pitchFamily="34" charset="-122"/>
                 <a:cs typeface="Consolas" pitchFamily="34" charset="-120"/>
               </a:rPr>
-              <a:t>6 / 8</a:t>
+              <a:t>6 / 14</a:t>
             </a:r>
             <a:endParaRPr lang="en-US" sz="1000" dirty="0"/>
           </a:p>
@@ -3334,7 +9310,7 @@
                 <a:ea typeface="Consolas" pitchFamily="34" charset="-122"/>
                 <a:cs typeface="Consolas" pitchFamily="34" charset="-120"/>
               </a:rPr>
-              <a:t>LESSONS</a:t>
+              <a:t>ANALYSIS DISCIPLINE</a:t>
             </a:r>
             <a:endParaRPr lang="en-US" sz="1200" dirty="0"/>
           </a:p>
@@ -3348,8 +9324,8 @@
         </p:nvSpPr>
         <p:spPr>
           <a:xfrm>
-            <a:off x="822960" y="960120"/>
-            <a:ext cx="10515600" cy="868680"/>
+            <a:off x="822960" y="914400"/>
+            <a:ext cx="10561320" cy="868680"/>
           </a:xfrm>
           <a:prstGeom prst="rect">
             <a:avLst/>
@@ -3365,7 +9341,7 @@
               <a:buNone/>
             </a:pPr>
             <a:r>
-              <a:rPr lang="en-US" sz="3000" b="1" dirty="0">
+              <a:rPr lang="en-US" sz="2700" b="1" dirty="0">
                 <a:solidFill>
                   <a:srgbClr val="FFFFFF"/>
                 </a:solidFill>
@@ -3373,9 +9349,9 @@
                 <a:ea typeface="Segoe UI" pitchFamily="34" charset="-122"/>
                 <a:cs typeface="Segoe UI" pitchFamily="34" charset="-120"/>
               </a:rPr>
-              <a:t>What outlived the project</a:t>
-            </a:r>
-            <a:endParaRPr lang="en-US" sz="3000" dirty="0"/>
+              <a:t>The analyst work behind the patterns</a:t>
+            </a:r>
+            <a:endParaRPr lang="en-US" sz="2700" dirty="0"/>
           </a:p>
         </p:txBody>
       </p:sp>
@@ -3387,7 +9363,7 @@
         </p:nvSpPr>
         <p:spPr>
           <a:xfrm>
-            <a:off x="868680" y="2057400"/>
+            <a:off x="868680" y="2011680"/>
             <a:ext cx="10424160" cy="3566160"/>
           </a:xfrm>
           <a:prstGeom prst="rect">
@@ -3402,10 +9378,10 @@
           <a:p>
             <a:pPr marL="342900" indent="-342900">
               <a:lnSpc>
-                <a:spcPct val="115000"/>
+                <a:spcPct val="112000"/>
               </a:lnSpc>
               <a:spcAft>
-                <a:spcPts val="1000"/>
+                <a:spcPts val="900"/>
               </a:spcAft>
               <a:buSzPct val="100000"/>
               <a:buChar char="▸"/>
@@ -3419,17 +9395,17 @@
                 <a:ea typeface="Segoe UI" pitchFamily="34" charset="-122"/>
                 <a:cs typeface="Segoe UI" pitchFamily="34" charset="-120"/>
               </a:rPr>
-              <a:t>Domain constraints before technology choices</a:t>
+              <a:t>Requirements gathering with compliance stakeholders who think in regulations, not data models</a:t>
             </a:r>
             <a:endParaRPr lang="en-US" sz="1600" dirty="0"/>
           </a:p>
           <a:p>
             <a:pPr marL="342900" indent="-342900">
               <a:lnSpc>
-                <a:spcPct val="115000"/>
+                <a:spcPct val="112000"/>
               </a:lnSpc>
               <a:spcAft>
-                <a:spcPts val="1000"/>
+                <a:spcPts val="900"/>
               </a:spcAft>
               <a:buSzPct val="100000"/>
               <a:buChar char="▸"/>
@@ -3443,17 +9419,17 @@
                 <a:ea typeface="Segoe UI" pitchFamily="34" charset="-122"/>
                 <a:cs typeface="Segoe UI" pitchFamily="34" charset="-120"/>
               </a:rPr>
-              <a:t>The schema is the analysis</a:t>
+              <a:t>Analysis and pattern definition in the graph toolkit, iterated against real reviewer feedback</a:t>
             </a:r>
             <a:endParaRPr lang="en-US" sz="1600" dirty="0"/>
           </a:p>
           <a:p>
             <a:pPr marL="342900" indent="-342900">
               <a:lnSpc>
-                <a:spcPct val="115000"/>
+                <a:spcPct val="112000"/>
               </a:lnSpc>
               <a:spcAft>
-                <a:spcPts val="1000"/>
+                <a:spcPts val="900"/>
               </a:spcAft>
               <a:buSzPct val="100000"/>
               <a:buChar char="▸"/>
@@ -3467,10 +9443,34 @@
                 <a:ea typeface="Segoe UI" pitchFamily="34" charset="-122"/>
                 <a:cs typeface="Segoe UI" pitchFamily="34" charset="-120"/>
               </a:rPr>
-              <a:t>When data is about relationships, model relationships</a:t>
+              <a:t>Documentation written for auditors and non-technical reviewers, not just engineers</a:t>
             </a:r>
             <a:endParaRPr lang="en-US" sz="1600" dirty="0"/>
           </a:p>
+          <a:p>
+            <a:pPr marL="342900" indent="-342900">
+              <a:lnSpc>
+                <a:spcPct val="112000"/>
+              </a:lnSpc>
+              <a:spcAft>
+                <a:spcPts val="900"/>
+              </a:spcAft>
+              <a:buSzPct val="100000"/>
+              <a:buChar char="▸"/>
+            </a:pPr>
+            <a:r>
+              <a:rPr lang="en-US" sz="1600" dirty="0">
+                <a:solidFill>
+                  <a:srgbClr val="CBD5E1"/>
+                </a:solidFill>
+                <a:latin typeface="Segoe UI" pitchFamily="34" charset="0"/>
+                <a:ea typeface="Segoe UI" pitchFamily="34" charset="-122"/>
+                <a:cs typeface="Segoe UI" pitchFamily="34" charset="-120"/>
+              </a:rPr>
+              <a:t>Identification of operational optimization opportunities across the analysis workflow</a:t>
+            </a:r>
+            <a:endParaRPr lang="en-US" sz="1600" dirty="0"/>
+          </a:p>
         </p:txBody>
       </p:sp>
       <p:sp>
@@ -3481,7 +9481,7 @@
         </p:nvSpPr>
         <p:spPr>
           <a:xfrm>
-            <a:off x="10698480" y="6355080"/>
+            <a:off x="10698480" y="6382512"/>
             <a:ext cx="1188720" cy="365760"/>
           </a:xfrm>
           <a:prstGeom prst="rect">
@@ -3506,7 +9506,7 @@
                 <a:ea typeface="Consolas" pitchFamily="34" charset="-122"/>
                 <a:cs typeface="Consolas" pitchFamily="34" charset="-120"/>
               </a:rPr>
-              <a:t>7 / 8</a:t>
+              <a:t>7 / 14</a:t>
             </a:r>
             <a:endParaRPr lang="en-US" sz="1000" dirty="0"/>
           </a:p>
@@ -3592,8 +9592,8 @@
         </p:nvSpPr>
         <p:spPr>
           <a:xfrm>
-            <a:off x="822960" y="1554480"/>
-            <a:ext cx="10515600" cy="457200"/>
+            <a:off x="822960" y="502920"/>
+            <a:ext cx="10515600" cy="365760"/>
           </a:xfrm>
           <a:prstGeom prst="rect">
             <a:avLst/>
@@ -3609,7 +9609,7 @@
               <a:buNone/>
             </a:pPr>
             <a:r>
-              <a:rPr lang="en-US" sz="1400" spc="400" kern="0" dirty="0">
+              <a:rPr lang="en-US" sz="1200" spc="300" kern="0" dirty="0">
                 <a:solidFill>
                   <a:srgbClr val="06B6D4"/>
                 </a:solidFill>
@@ -3617,9 +9617,9 @@
                 <a:ea typeface="Consolas" pitchFamily="34" charset="-122"/>
                 <a:cs typeface="Consolas" pitchFamily="34" charset="-120"/>
               </a:rPr>
-              <a:t>TAKEAWAY</a:t>
-            </a:r>
-            <a:endParaRPr lang="en-US" sz="1400" dirty="0"/>
+              <a:t>WHERE THE EFFORT WENT</a:t>
+            </a:r>
+            <a:endParaRPr lang="en-US" sz="1200" dirty="0"/>
           </a:p>
         </p:txBody>
       </p:sp>
@@ -3631,8 +9631,8 @@
         </p:nvSpPr>
         <p:spPr>
           <a:xfrm>
-            <a:off x="822960" y="2286000"/>
-            <a:ext cx="10515600" cy="1737360"/>
+            <a:off x="822960" y="914400"/>
+            <a:ext cx="10561320" cy="868680"/>
           </a:xfrm>
           <a:prstGeom prst="rect">
             <a:avLst/>
@@ -3648,7 +9648,7 @@
               <a:buNone/>
             </a:pPr>
             <a:r>
-              <a:rPr lang="en-US" sz="4400" b="1" dirty="0">
+              <a:rPr lang="en-US" sz="2700" b="1" dirty="0">
                 <a:solidFill>
                   <a:srgbClr val="FFFFFF"/>
                 </a:solidFill>
@@ -3656,22 +9656,61 @@
                 <a:ea typeface="Segoe UI" pitchFamily="34" charset="-122"/>
                 <a:cs typeface="Segoe UI" pitchFamily="34" charset="-120"/>
               </a:rPr>
-              <a:t>Model the relationships, not the tables</a:t>
-            </a:r>
-            <a:endParaRPr lang="en-US" sz="4400" dirty="0"/>
-          </a:p>
-        </p:txBody>
-      </p:sp>
-      <p:sp>
-        <p:nvSpPr>
-          <p:cNvPr id="6" name="Text 4"/>
-          <p:cNvSpPr/>
-          <p:nvPr/>
-        </p:nvSpPr>
-        <p:spPr>
-          <a:xfrm>
-            <a:off x="822960" y="4206240"/>
-            <a:ext cx="10515600" cy="914400"/>
+              <a:t>Analysis effort concentrated where money actually hides</a:t>
+            </a:r>
+            <a:endParaRPr lang="en-US" sz="2700" dirty="0"/>
+          </a:p>
+        </p:txBody>
+      </p:sp>
+      <p:graphicFrame>
+        <p:nvGraphicFramePr>
+          <p:cNvPr id="6" name="Chart 0" descr=""/>
+          <p:cNvGraphicFramePr/>
+          <p:nvPr/>
+        </p:nvGraphicFramePr>
+        <p:xfrm>
+          <a:off x="822960" y="1874520"/>
+          <a:ext cx="10515600" cy="3337560"/>
+        </p:xfrm>
+        <a:graphic xmlns:a="http://schemas.openxmlformats.org/drawingml/2006/main">
+          <a:graphicData uri="http://schemas.openxmlformats.org/drawingml/2006/chart">
+            <c:chart xmlns:c="http://schemas.openxmlformats.org/drawingml/2006/chart" r:id="rId1"/>
+          </a:graphicData>
+        </a:graphic>
+      </p:graphicFrame>
+      <p:sp>
+        <p:nvSpPr>
+          <p:cNvPr id="7" name="Shape 4"/>
+          <p:cNvSpPr/>
+          <p:nvPr/>
+        </p:nvSpPr>
+        <p:spPr>
+          <a:xfrm>
+            <a:off x="822960" y="5413248"/>
+            <a:ext cx="10515600" cy="0"/>
+          </a:xfrm>
+          <a:prstGeom prst="line">
+            <a:avLst/>
+          </a:prstGeom>
+          <a:noFill/>
+          <a:ln w="12700">
+            <a:solidFill>
+              <a:srgbClr val="1E2D45"/>
+            </a:solidFill>
+            <a:prstDash val="solid"/>
+          </a:ln>
+        </p:spPr>
+      </p:sp>
+      <p:sp>
+        <p:nvSpPr>
+          <p:cNvPr id="8" name="Text 5"/>
+          <p:cNvSpPr/>
+          <p:nvPr/>
+        </p:nvSpPr>
+        <p:spPr>
+          <a:xfrm>
+            <a:off x="822960" y="5504688"/>
+            <a:ext cx="10424160" cy="411480"/>
           </a:xfrm>
           <a:prstGeom prst="rect">
             <a:avLst/>
@@ -3687,29 +9726,91 @@
               <a:buNone/>
             </a:pPr>
             <a:r>
-              <a:rPr lang="en-US" sz="1600" dirty="0">
-                <a:solidFill>
-                  <a:srgbClr val="94A3B8"/>
+              <a:rPr lang="en-US" sz="1300" i="1" dirty="0">
+                <a:solidFill>
+                  <a:srgbClr val="06B6D4"/>
                 </a:solidFill>
                 <a:latin typeface="Segoe UI" pitchFamily="34" charset="0"/>
                 <a:ea typeface="Segoe UI" pitchFamily="34" charset="-122"/>
                 <a:cs typeface="Segoe UI" pitchFamily="34" charset="-120"/>
               </a:rPr>
-              <a:t>Sounds obvious - almost nobody does it. · rezalianvatiady.github.io</a:t>
-            </a:r>
-            <a:endParaRPr lang="en-US" sz="1600" dirty="0"/>
-          </a:p>
-        </p:txBody>
-      </p:sp>
-      <p:sp>
-        <p:nvSpPr>
-          <p:cNvPr id="7" name="Text 5"/>
-          <p:cNvSpPr/>
-          <p:nvPr/>
-        </p:nvSpPr>
-        <p:spPr>
-          <a:xfrm>
-            <a:off x="10698480" y="6355080"/>
+              <a:t>→  Half the value came from modeling - schema and pattern definition, not querying.</a:t>
+            </a:r>
+            <a:endParaRPr lang="en-US" sz="1300" dirty="0"/>
+          </a:p>
+        </p:txBody>
+      </p:sp>
+      <p:sp>
+        <p:nvSpPr>
+          <p:cNvPr id="9" name="Shape 6"/>
+          <p:cNvSpPr/>
+          <p:nvPr/>
+        </p:nvSpPr>
+        <p:spPr>
+          <a:xfrm>
+            <a:off x="822960" y="5961888"/>
+            <a:ext cx="10515600" cy="0"/>
+          </a:xfrm>
+          <a:prstGeom prst="line">
+            <a:avLst/>
+          </a:prstGeom>
+          <a:noFill/>
+          <a:ln w="12700">
+            <a:solidFill>
+              <a:srgbClr val="1E2D45"/>
+            </a:solidFill>
+            <a:prstDash val="solid"/>
+          </a:ln>
+        </p:spPr>
+      </p:sp>
+      <p:sp>
+        <p:nvSpPr>
+          <p:cNvPr id="10" name="Text 7"/>
+          <p:cNvSpPr/>
+          <p:nvPr/>
+        </p:nvSpPr>
+        <p:spPr>
+          <a:xfrm>
+            <a:off x="822960" y="6053328"/>
+            <a:ext cx="9692640" cy="457200"/>
+          </a:xfrm>
+          <a:prstGeom prst="rect">
+            <a:avLst/>
+          </a:prstGeom>
+          <a:noFill/>
+          <a:ln/>
+        </p:spPr>
+        <p:txBody>
+          <a:bodyPr wrap="square" rtlCol="0" anchor="ctr"/>
+          <a:lstStyle/>
+          <a:p>
+            <a:pPr indent="0" marL="0">
+              <a:buNone/>
+            </a:pPr>
+            <a:r>
+              <a:rPr lang="en-US" sz="1150" dirty="0">
+                <a:solidFill>
+                  <a:srgbClr val="64748B"/>
+                </a:solidFill>
+                <a:latin typeface="Segoe UI" pitchFamily="34" charset="0"/>
+                <a:ea typeface="Segoe UI" pitchFamily="34" charset="-122"/>
+                <a:cs typeface="Segoe UI" pitchFamily="34" charset="-120"/>
+              </a:rPr>
+              <a:t>Illustrative distribution of analysis effort across the engagement.</a:t>
+            </a:r>
+            <a:endParaRPr lang="en-US" sz="1150" dirty="0"/>
+          </a:p>
+        </p:txBody>
+      </p:sp>
+      <p:sp>
+        <p:nvSpPr>
+          <p:cNvPr id="11" name="Text 8"/>
+          <p:cNvSpPr/>
+          <p:nvPr/>
+        </p:nvSpPr>
+        <p:spPr>
+          <a:xfrm>
+            <a:off x="10698480" y="6382512"/>
             <a:ext cx="1188720" cy="365760"/>
           </a:xfrm>
           <a:prstGeom prst="rect">
@@ -3734,7 +9835,314 @@
                 <a:ea typeface="Consolas" pitchFamily="34" charset="-122"/>
                 <a:cs typeface="Consolas" pitchFamily="34" charset="-120"/>
               </a:rPr>
-              <a:t>8 / 8</a:t>
+              <a:t>8 / 14</a:t>
+            </a:r>
+            <a:endParaRPr lang="en-US" sz="1000" dirty="0"/>
+          </a:p>
+        </p:txBody>
+      </p:sp>
+    </p:spTree>
+  </p:cSld>
+  <p:clrMapOvr>
+    <a:masterClrMapping/>
+  </p:clrMapOvr>
+</p:sld>
+</file>
+
+<file path=ppt/slides/slide9.xml><?xml version="1.0" encoding="utf-8"?>
+<p:sld xmlns:a="http://schemas.openxmlformats.org/drawingml/2006/main" xmlns:r="http://schemas.openxmlformats.org/officeDocument/2006/relationships" xmlns:p="http://schemas.openxmlformats.org/presentationml/2006/main">
+  <p:cSld name="Slide 9">
+    <p:bg>
+      <p:bgPr>
+        <a:solidFill>
+          <a:srgbClr val="0A0C12"/>
+        </a:solidFill>
+      </p:bgPr>
+    </p:bg>
+    <p:spTree>
+      <p:nvGrpSpPr>
+        <p:cNvPr id="1" name=""/>
+        <p:cNvGrpSpPr/>
+        <p:nvPr/>
+      </p:nvGrpSpPr>
+      <p:grpSpPr>
+        <a:xfrm>
+          <a:off x="0" y="0"/>
+          <a:ext cx="0" cy="0"/>
+          <a:chOff x="0" y="0"/>
+          <a:chExt cx="0" cy="0"/>
+        </a:xfrm>
+      </p:grpSpPr>
+      <p:sp>
+        <p:nvSpPr>
+          <p:cNvPr id="2" name="Shape 0"/>
+          <p:cNvSpPr/>
+          <p:nvPr/>
+        </p:nvSpPr>
+        <p:spPr>
+          <a:xfrm>
+            <a:off x="0" y="0"/>
+            <a:ext cx="7680960" cy="64008"/>
+          </a:xfrm>
+          <a:prstGeom prst="rect">
+            <a:avLst/>
+          </a:prstGeom>
+          <a:solidFill>
+            <a:srgbClr val="3B82F6"/>
+          </a:solidFill>
+          <a:ln/>
+        </p:spPr>
+      </p:sp>
+      <p:sp>
+        <p:nvSpPr>
+          <p:cNvPr id="3" name="Shape 1"/>
+          <p:cNvSpPr/>
+          <p:nvPr/>
+        </p:nvSpPr>
+        <p:spPr>
+          <a:xfrm>
+            <a:off x="7680960" y="0"/>
+            <a:ext cx="4510735" cy="64008"/>
+          </a:xfrm>
+          <a:prstGeom prst="rect">
+            <a:avLst/>
+          </a:prstGeom>
+          <a:solidFill>
+            <a:srgbClr val="06B6D4"/>
+          </a:solidFill>
+          <a:ln/>
+        </p:spPr>
+      </p:sp>
+      <p:sp>
+        <p:nvSpPr>
+          <p:cNvPr id="4" name="Text 2"/>
+          <p:cNvSpPr/>
+          <p:nvPr/>
+        </p:nvSpPr>
+        <p:spPr>
+          <a:xfrm>
+            <a:off x="822960" y="502920"/>
+            <a:ext cx="10515600" cy="365760"/>
+          </a:xfrm>
+          <a:prstGeom prst="rect">
+            <a:avLst/>
+          </a:prstGeom>
+          <a:noFill/>
+          <a:ln/>
+        </p:spPr>
+        <p:txBody>
+          <a:bodyPr wrap="square" rtlCol="0" anchor="ctr"/>
+          <a:lstStyle/>
+          <a:p>
+            <a:pPr indent="0" marL="0">
+              <a:buNone/>
+            </a:pPr>
+            <a:r>
+              <a:rPr lang="en-US" sz="1200" spc="300" kern="0" dirty="0">
+                <a:solidFill>
+                  <a:srgbClr val="06B6D4"/>
+                </a:solidFill>
+                <a:latin typeface="Consolas" pitchFamily="34" charset="0"/>
+                <a:ea typeface="Consolas" pitchFamily="34" charset="-122"/>
+                <a:cs typeface="Consolas" pitchFamily="34" charset="-120"/>
+              </a:rPr>
+              <a:t>APPROACH</a:t>
+            </a:r>
+            <a:endParaRPr lang="en-US" sz="1200" dirty="0"/>
+          </a:p>
+        </p:txBody>
+      </p:sp>
+      <p:sp>
+        <p:nvSpPr>
+          <p:cNvPr id="5" name="Text 3"/>
+          <p:cNvSpPr/>
+          <p:nvPr/>
+        </p:nvSpPr>
+        <p:spPr>
+          <a:xfrm>
+            <a:off x="822960" y="914400"/>
+            <a:ext cx="10561320" cy="868680"/>
+          </a:xfrm>
+          <a:prstGeom prst="rect">
+            <a:avLst/>
+          </a:prstGeom>
+          <a:noFill/>
+          <a:ln/>
+        </p:spPr>
+        <p:txBody>
+          <a:bodyPr wrap="square" rtlCol="0" anchor="ctr"/>
+          <a:lstStyle/>
+          <a:p>
+            <a:pPr indent="0" marL="0">
+              <a:buNone/>
+            </a:pPr>
+            <a:r>
+              <a:rPr lang="en-US" sz="2700" b="1" dirty="0">
+                <a:solidFill>
+                  <a:srgbClr val="FFFFFF"/>
+                </a:solidFill>
+                <a:latin typeface="Segoe UI" pitchFamily="34" charset="0"/>
+                <a:ea typeface="Segoe UI" pitchFamily="34" charset="-122"/>
+                <a:cs typeface="Segoe UI" pitchFamily="34" charset="-120"/>
+              </a:rPr>
+              <a:t>Constraints first, technology second</a:t>
+            </a:r>
+            <a:endParaRPr lang="en-US" sz="2700" dirty="0"/>
+          </a:p>
+        </p:txBody>
+      </p:sp>
+      <p:sp>
+        <p:nvSpPr>
+          <p:cNvPr id="6" name="Text 4"/>
+          <p:cNvSpPr/>
+          <p:nvPr/>
+        </p:nvSpPr>
+        <p:spPr>
+          <a:xfrm>
+            <a:off x="868680" y="2011680"/>
+            <a:ext cx="10424160" cy="3566160"/>
+          </a:xfrm>
+          <a:prstGeom prst="rect">
+            <a:avLst/>
+          </a:prstGeom>
+          <a:noFill/>
+          <a:ln/>
+        </p:spPr>
+        <p:txBody>
+          <a:bodyPr wrap="square" rtlCol="0" anchor="t"/>
+          <a:lstStyle/>
+          <a:p>
+            <a:pPr marL="342900" indent="-342900">
+              <a:lnSpc>
+                <a:spcPct val="112000"/>
+              </a:lnSpc>
+              <a:spcAft>
+                <a:spcPts val="900"/>
+              </a:spcAft>
+              <a:buSzPct val="100000"/>
+              <a:buChar char="▸"/>
+            </a:pPr>
+            <a:r>
+              <a:rPr lang="en-US" sz="1600" dirty="0">
+                <a:solidFill>
+                  <a:srgbClr val="CBD5E1"/>
+                </a:solidFill>
+                <a:latin typeface="Segoe UI" pitchFamily="34" charset="0"/>
+                <a:ea typeface="Segoe UI" pitchFamily="34" charset="-122"/>
+                <a:cs typeface="Segoe UI" pitchFamily="34" charset="-120"/>
+              </a:rPr>
+              <a:t>AML has hard rules and thresholds - learn them before choosing any technology</a:t>
+            </a:r>
+            <a:endParaRPr lang="en-US" sz="1600" dirty="0"/>
+          </a:p>
+          <a:p>
+            <a:pPr marL="342900" indent="-342900">
+              <a:lnSpc>
+                <a:spcPct val="112000"/>
+              </a:lnSpc>
+              <a:spcAft>
+                <a:spcPts val="900"/>
+              </a:spcAft>
+              <a:buSzPct val="100000"/>
+              <a:buChar char="▸"/>
+            </a:pPr>
+            <a:r>
+              <a:rPr lang="en-US" sz="1600" dirty="0">
+                <a:solidFill>
+                  <a:srgbClr val="CBD5E1"/>
+                </a:solidFill>
+                <a:latin typeface="Segoe UI" pitchFamily="34" charset="0"/>
+                <a:ea typeface="Segoe UI" pitchFamily="34" charset="-122"/>
+                <a:cs typeface="Segoe UI" pitchFamily="34" charset="-120"/>
+              </a:rPr>
+              <a:t>Entity relationships were defined with the business, not for them</a:t>
+            </a:r>
+            <a:endParaRPr lang="en-US" sz="1600" dirty="0"/>
+          </a:p>
+          <a:p>
+            <a:pPr marL="342900" indent="-342900">
+              <a:lnSpc>
+                <a:spcPct val="112000"/>
+              </a:lnSpc>
+              <a:spcAft>
+                <a:spcPts val="900"/>
+              </a:spcAft>
+              <a:buSzPct val="100000"/>
+              <a:buChar char="▸"/>
+            </a:pPr>
+            <a:r>
+              <a:rPr lang="en-US" sz="1600" dirty="0">
+                <a:solidFill>
+                  <a:srgbClr val="CBD5E1"/>
+                </a:solidFill>
+                <a:latin typeface="Segoe UI" pitchFamily="34" charset="0"/>
+                <a:ea typeface="Segoe UI" pitchFamily="34" charset="-122"/>
+                <a:cs typeface="Segoe UI" pitchFamily="34" charset="-120"/>
+              </a:rPr>
+              <a:t>Patterns were iterated against real reviewer feedback, not internal opinion</a:t>
+            </a:r>
+            <a:endParaRPr lang="en-US" sz="1600" dirty="0"/>
+          </a:p>
+          <a:p>
+            <a:pPr marL="342900" indent="-342900">
+              <a:lnSpc>
+                <a:spcPct val="112000"/>
+              </a:lnSpc>
+              <a:spcAft>
+                <a:spcPts val="900"/>
+              </a:spcAft>
+              <a:buSzPct val="100000"/>
+              <a:buChar char="▸"/>
+            </a:pPr>
+            <a:r>
+              <a:rPr lang="en-US" sz="1600" dirty="0">
+                <a:solidFill>
+                  <a:srgbClr val="CBD5E1"/>
+                </a:solidFill>
+                <a:latin typeface="Segoe UI" pitchFamily="34" charset="0"/>
+                <a:ea typeface="Segoe UI" pitchFamily="34" charset="-122"/>
+                <a:cs typeface="Segoe UI" pitchFamily="34" charset="-120"/>
+              </a:rPr>
+              <a:t>Explainability was treated as a feature: an unexplainable detection is an unusable detection</a:t>
+            </a:r>
+            <a:endParaRPr lang="en-US" sz="1600" dirty="0"/>
+          </a:p>
+        </p:txBody>
+      </p:sp>
+      <p:sp>
+        <p:nvSpPr>
+          <p:cNvPr id="7" name="Text 5"/>
+          <p:cNvSpPr/>
+          <p:nvPr/>
+        </p:nvSpPr>
+        <p:spPr>
+          <a:xfrm>
+            <a:off x="10698480" y="6382512"/>
+            <a:ext cx="1188720" cy="365760"/>
+          </a:xfrm>
+          <a:prstGeom prst="rect">
+            <a:avLst/>
+          </a:prstGeom>
+          <a:noFill/>
+          <a:ln/>
+        </p:spPr>
+        <p:txBody>
+          <a:bodyPr wrap="square" rtlCol="0" anchor="ctr"/>
+          <a:lstStyle/>
+          <a:p>
+            <a:pPr algn="r" indent="0" marL="0">
+              <a:buNone/>
+            </a:pPr>
+            <a:r>
+              <a:rPr lang="en-US" sz="1000" dirty="0">
+                <a:solidFill>
+                  <a:srgbClr val="64748B"/>
+                </a:solidFill>
+                <a:latin typeface="Consolas" pitchFamily="34" charset="0"/>
+                <a:ea typeface="Consolas" pitchFamily="34" charset="-122"/>
+                <a:cs typeface="Consolas" pitchFamily="34" charset="-120"/>
+              </a:rPr>
+              <a:t>9 / 14</a:t>
             </a:r>
             <a:endParaRPr lang="en-US" sz="1000" dirty="0"/>
           </a:p>

--- a/decks/aml-graph-bri.pptx
+++ b/decks/aml-graph-bri.pptx
@@ -160,7 +160,7 @@
               <a:lstStyle/>
               <a:p>
                 <a:pPr>
-                  <a:defRPr b="0" i="0" strike="noStrike" sz="1000" u="none">
+                  <a:defRPr b="0" i="0" strike="noStrike" sz="1800" u="none">
                     <a:solidFill>
                       <a:srgbClr val="E2E8F0"/>
                     </a:solidFill>
@@ -289,7 +289,7 @@
             <a:lstStyle/>
             <a:p>
               <a:pPr>
-                <a:defRPr b="0" i="0" strike="noStrike" sz="1000" u="none">
+                <a:defRPr b="0" i="0" strike="noStrike" sz="1800" u="none">
                   <a:solidFill>
                     <a:srgbClr val="E2E8F0"/>
                   </a:solidFill>
@@ -337,7 +337,7 @@
           <a:lstStyle/>
           <a:p>
             <a:pPr>
-              <a:defRPr sz="1100" b="0" i="0" u="none" strike="noStrike">
+              <a:defRPr sz="1800" b="0" i="0" u="none" strike="noStrike">
                 <a:solidFill>
                   <a:srgbClr val="94A3B8"/>
                 </a:solidFill>
@@ -357,6 +357,7 @@
         <c:axId val="2094734552"/>
         <c:scaling>
           <c:orientation val="minMax"/>
+          <c:min val="0"/>
         </c:scaling>
         <c:delete val="0"/>
         <c:axPos val="l"/>
@@ -389,7 +390,7 @@
           <a:lstStyle/>
           <a:p>
             <a:pPr>
-              <a:defRPr sz="1000" b="0" i="0" u="none" strike="noStrike">
+              <a:defRPr sz="1800" b="0" i="0" u="none" strike="noStrike">
                 <a:solidFill>
                   <a:srgbClr val="94A3B8"/>
                 </a:solidFill>
@@ -623,7 +624,7 @@
           <a:lstStyle/>
           <a:p>
             <a:pPr>
-              <a:defRPr sz="1100" b="0" i="0" u="none" strike="noStrike">
+              <a:defRPr sz="1800" b="0" i="0" u="none" strike="noStrike">
                 <a:solidFill>
                   <a:srgbClr val="94A3B8"/>
                 </a:solidFill>
@@ -643,6 +644,7 @@
         <c:axId val="2094734552"/>
         <c:scaling>
           <c:orientation val="minMax"/>
+          <c:min val="0"/>
         </c:scaling>
         <c:delete val="0"/>
         <c:axPos val="l"/>
@@ -675,7 +677,7 @@
           <a:lstStyle/>
           <a:p>
             <a:pPr>
-              <a:defRPr sz="1000" b="0" i="0" u="none" strike="noStrike">
+              <a:defRPr sz="1800" b="0" i="0" u="none" strike="noStrike">
                 <a:solidFill>
                   <a:srgbClr val="94A3B8"/>
                 </a:solidFill>
@@ -806,7 +808,7 @@
                 <a:lstStyle/>
                 <a:p>
                   <a:pPr>
-                    <a:defRPr sz="1000" b="0" i="0" u="none" strike="noStrike">
+                    <a:defRPr sz="1800" b="0" i="0" u="none" strike="noStrike">
                       <a:solidFill>
                         <a:srgbClr val="E2E8F0"/>
                       </a:solidFill>
@@ -831,7 +833,7 @@
                 <a:lstStyle/>
                 <a:p>
                   <a:pPr>
-                    <a:defRPr sz="1000" b="0" i="0" u="none" strike="noStrike">
+                    <a:defRPr sz="1800" b="0" i="0" u="none" strike="noStrike">
                       <a:solidFill>
                         <a:srgbClr val="E2E8F0"/>
                       </a:solidFill>
@@ -856,7 +858,7 @@
                 <a:lstStyle/>
                 <a:p>
                   <a:pPr>
-                    <a:defRPr sz="1000" b="0" i="0" u="none" strike="noStrike">
+                    <a:defRPr sz="1800" b="0" i="0" u="none" strike="noStrike">
                       <a:solidFill>
                         <a:srgbClr val="E2E8F0"/>
                       </a:solidFill>
@@ -881,7 +883,7 @@
                 <a:lstStyle/>
                 <a:p>
                   <a:pPr>
-                    <a:defRPr sz="1000" b="0" i="0" u="none" strike="noStrike">
+                    <a:defRPr sz="1800" b="0" i="0" u="none" strike="noStrike">
                       <a:solidFill>
                         <a:srgbClr val="E2E8F0"/>
                       </a:solidFill>
@@ -962,7 +964,7 @@
           </c:val>
         </c:ser>
         <c:firstSliceAng val="0"/>
-        <c:holeSize val="62"/>
+        <c:holeSize val="60"/>
       </c:doughnutChart>
       <c:spPr>
         <a:solidFill>
@@ -982,7 +984,7 @@
         <a:lstStyle/>
         <a:p>
           <a:pPr>
-            <a:defRPr sz="1100">
+            <a:defRPr sz="1800">
               <a:solidFill>
                 <a:srgbClr val="CBD5E1"/>
               </a:solidFill>
@@ -1409,7 +1411,7 @@
           <a:p>
             <a:r>
               <a:rPr lang="en-US" dirty="0"/>
-              <a:t/>
+              <a:t>Opening: introduce yourself and this deck, "AML Analytics with Graph Databases". | Transition: next up - "What this deck covers".</a:t>
             </a:r>
             <a:endParaRPr lang="en-US" dirty="0"/>
           </a:p>
@@ -1497,7 +1499,7 @@
           <a:p>
             <a:r>
               <a:rPr lang="en-US" dirty="0"/>
-              <a:t/>
+              <a:t>Key message: Reviewer trust grew with iteration, not with more queries | Insight: Each review cycle tightened definitions until patterns survived compliance review first time. | Talk track: Illustrative iteration curve across review cycles. | Transition: next up - "An explainable detection is an actionable detection".</a:t>
             </a:r>
             <a:endParaRPr lang="en-US" dirty="0"/>
           </a:p>
@@ -1585,7 +1587,7 @@
           <a:p>
             <a:r>
               <a:rPr lang="en-US" dirty="0"/>
-              <a:t/>
+              <a:t>Key message: An explainable detection is an actionable detection | Insight: Detection logic reviewers can replay and explain is what converts alerts into action. | Talk track: Illustrative weighting of review criteria from the engagement. | Transition: next up - "Model the transactions, or model the relationships".</a:t>
             </a:r>
             <a:endParaRPr lang="en-US" dirty="0"/>
           </a:p>
@@ -1673,7 +1675,7 @@
           <a:p>
             <a:r>
               <a:rPr lang="en-US" dirty="0"/>
-              <a:t/>
+              <a:t>Key message: Model the transactions, or model the relationships | Talk track: The schema is the analysis: half the value came from defining what connected means. | Transition: next up - "Three lessons that outlived the project".</a:t>
             </a:r>
             <a:endParaRPr lang="en-US" dirty="0"/>
           </a:p>
@@ -1761,7 +1763,7 @@
           <a:p>
             <a:r>
               <a:rPr lang="en-US" dirty="0"/>
-              <a:t/>
+              <a:t>Key message: Three lessons that outlived the project | Transition: next up - "Need analysis your auditors can actually follow?".</a:t>
             </a:r>
             <a:endParaRPr lang="en-US" dirty="0"/>
           </a:p>
@@ -1849,7 +1851,7 @@
           <a:p>
             <a:r>
               <a:rPr lang="en-US" dirty="0"/>
-              <a:t/>
+              <a:t>Key message: Need analysis your auditors can actually follow? | Transition: close with the call to action on the contact slide, invite questions.</a:t>
             </a:r>
             <a:endParaRPr lang="en-US" dirty="0"/>
           </a:p>
@@ -1937,7 +1939,7 @@
           <a:p>
             <a:r>
               <a:rPr lang="en-US" dirty="0"/>
-              <a:t/>
+              <a:t>Key message: What this deck covers | Agenda: The engagement: anti-money laundering analysis at Bank Rakyat Indonesia; Why relational tables hide fraud that graphs make visible; How detection patterns were defined with compliance stakeholders; Evidence: effort distribution, pattern maturity, and what makes detections actionable; Lessons that transfer to any relationship-heavy data problem | Transition: next up - "Compliance needed patterns, not another report".</a:t>
             </a:r>
             <a:endParaRPr lang="en-US" dirty="0"/>
           </a:p>
@@ -2025,7 +2027,7 @@
           <a:p>
             <a:r>
               <a:rPr lang="en-US" dirty="0"/>
-              <a:t/>
+              <a:t>Key message: Compliance needed patterns, not another report | Transition: next up - "Why AML resists the usual tooling".</a:t>
             </a:r>
             <a:endParaRPr lang="en-US" dirty="0"/>
           </a:p>
@@ -2113,7 +2115,7 @@
           <a:p>
             <a:r>
               <a:rPr lang="en-US" dirty="0"/>
-              <a:t/>
+              <a:t>Key message: Why AML resists the usual tooling | Talk track: The constraints that shaped the approach: relationship density and explainability, not data volume. | Transition: next up - "From regulatory requirements to reviewable patterns".</a:t>
             </a:r>
             <a:endParaRPr lang="en-US" dirty="0"/>
           </a:p>
@@ -2201,7 +2203,7 @@
           <a:p>
             <a:r>
               <a:rPr lang="en-US" dirty="0"/>
-              <a:t/>
+              <a:t>Key message: From regulatory requirements to reviewable patterns | Talk track: The schema was half the value: it forced a shared definition of connected. | Transition: next up - "Three laundering patterns, two ways to see them".</a:t>
             </a:r>
             <a:endParaRPr lang="en-US" dirty="0"/>
           </a:p>
@@ -2289,7 +2291,7 @@
           <a:p>
             <a:r>
               <a:rPr lang="en-US" dirty="0"/>
-              <a:t/>
+              <a:t>Key message: Three laundering patterns, two ways to see them | Talk track: Same data, different model - review meetings became shape discussions instead of SQL walkthroughs. | Transition: next up - "The analyst work behind the patterns".</a:t>
             </a:r>
             <a:endParaRPr lang="en-US" dirty="0"/>
           </a:p>
@@ -2377,7 +2379,7 @@
           <a:p>
             <a:r>
               <a:rPr lang="en-US" dirty="0"/>
-              <a:t/>
+              <a:t>Key message: The analyst work behind the patterns | Transition: next up - "Analysis effort concentrated where money actually hides".</a:t>
             </a:r>
             <a:endParaRPr lang="en-US" dirty="0"/>
           </a:p>
@@ -2465,7 +2467,7 @@
           <a:p>
             <a:r>
               <a:rPr lang="en-US" dirty="0"/>
-              <a:t/>
+              <a:t>Key message: Analysis effort concentrated where money actually hides | Insight: Half the value came from modeling - schema and pattern definition, not querying. | Talk track: Illustrative distribution of analysis effort across the engagement. | Transition: next up - "Constraints first, technology second".</a:t>
             </a:r>
             <a:endParaRPr lang="en-US" dirty="0"/>
           </a:p>
@@ -2553,7 +2555,7 @@
           <a:p>
             <a:r>
               <a:rPr lang="en-US" dirty="0"/>
-              <a:t/>
+              <a:t>Key message: Constraints first, technology second | Transition: next up - "Reviewer trust grew with iteration, not with more queries".</a:t>
             </a:r>
             <a:endParaRPr lang="en-US" dirty="0"/>
           </a:p>
@@ -2974,7 +2976,7 @@
         </p:nvSpPr>
         <p:spPr>
           <a:xfrm>
-            <a:off x="822960" y="1783080"/>
+            <a:off x="822960" y="1737360"/>
             <a:ext cx="10515600" cy="457200"/>
           </a:xfrm>
           <a:prstGeom prst="rect">
@@ -2991,7 +2993,7 @@
               <a:buNone/>
             </a:pPr>
             <a:r>
-              <a:rPr lang="en-US" sz="1400" spc="400" kern="0" dirty="0">
+              <a:rPr lang="en-US" sz="1800" spc="400" kern="0" dirty="0">
                 <a:solidFill>
                   <a:srgbClr val="06B6D4"/>
                 </a:solidFill>
@@ -3001,7 +3003,7 @@
               </a:rPr>
               <a:t>CASE STUDY · BANKING</a:t>
             </a:r>
-            <a:endParaRPr lang="en-US" sz="1400" dirty="0"/>
+            <a:endParaRPr lang="en-US" sz="1800" dirty="0"/>
           </a:p>
         </p:txBody>
       </p:sp>
@@ -3013,7 +3015,7 @@
         </p:nvSpPr>
         <p:spPr>
           <a:xfrm>
-            <a:off x="822960" y="2286000"/>
+            <a:off x="822960" y="2240280"/>
             <a:ext cx="10607040" cy="1691640"/>
           </a:xfrm>
           <a:prstGeom prst="rect">
@@ -3052,8 +3054,8 @@
         </p:nvSpPr>
         <p:spPr>
           <a:xfrm>
-            <a:off x="822960" y="4023360"/>
-            <a:ext cx="10058400" cy="777240"/>
+            <a:off x="822960" y="3977640"/>
+            <a:ext cx="10058400" cy="822960"/>
           </a:xfrm>
           <a:prstGeom prst="rect">
             <a:avLst/>
@@ -3069,7 +3071,7 @@
               <a:buNone/>
             </a:pPr>
             <a:r>
-              <a:rPr lang="en-US" sz="1700" dirty="0">
+              <a:rPr lang="en-US" sz="2000" dirty="0">
                 <a:solidFill>
                   <a:srgbClr val="94A3B8"/>
                 </a:solidFill>
@@ -3079,7 +3081,7 @@
               </a:rPr>
               <a:t>Fraud is a network problem - network problems need graphs</a:t>
             </a:r>
-            <a:endParaRPr lang="en-US" sz="1700" dirty="0"/>
+            <a:endParaRPr lang="en-US" sz="2000" dirty="0"/>
           </a:p>
         </p:txBody>
       </p:sp>
@@ -3091,7 +3093,7 @@
         </p:nvSpPr>
         <p:spPr>
           <a:xfrm>
-            <a:off x="822960" y="5440680"/>
+            <a:off x="822960" y="5349240"/>
             <a:ext cx="4114800" cy="0"/>
           </a:xfrm>
           <a:prstGeom prst="line">
@@ -3114,8 +3116,8 @@
         </p:nvSpPr>
         <p:spPr>
           <a:xfrm>
-            <a:off x="822960" y="5596128"/>
-            <a:ext cx="10058400" cy="457200"/>
+            <a:off x="822960" y="5532120"/>
+            <a:ext cx="10058400" cy="502920"/>
           </a:xfrm>
           <a:prstGeom prst="rect">
             <a:avLst/>
@@ -3131,9 +3133,9 @@
               <a:buNone/>
             </a:pPr>
             <a:r>
-              <a:rPr lang="en-US" sz="1250" dirty="0">
-                <a:solidFill>
-                  <a:srgbClr val="64748B"/>
+              <a:rPr lang="en-US" sz="1800" dirty="0">
+                <a:solidFill>
+                  <a:srgbClr val="8FA3BF"/>
                 </a:solidFill>
                 <a:latin typeface="Segoe UI" pitchFamily="34" charset="0"/>
                 <a:ea typeface="Segoe UI" pitchFamily="34" charset="-122"/>
@@ -3141,7 +3143,7 @@
               </a:rPr>
               <a:t>Rezalian Vatiady · Zalin Labs · 2026</a:t>
             </a:r>
-            <a:endParaRPr lang="en-US" sz="1250" dirty="0"/>
+            <a:endParaRPr lang="en-US" sz="1800" dirty="0"/>
           </a:p>
         </p:txBody>
       </p:sp>
@@ -3153,8 +3155,8 @@
         </p:nvSpPr>
         <p:spPr>
           <a:xfrm>
-            <a:off x="10698480" y="6382512"/>
-            <a:ext cx="1188720" cy="365760"/>
+            <a:off x="10698480" y="6309360"/>
+            <a:ext cx="1188720" cy="411480"/>
           </a:xfrm>
           <a:prstGeom prst="rect">
             <a:avLst/>
@@ -3170,9 +3172,9 @@
               <a:buNone/>
             </a:pPr>
             <a:r>
-              <a:rPr lang="en-US" sz="1000" dirty="0">
-                <a:solidFill>
-                  <a:srgbClr val="64748B"/>
+              <a:rPr lang="en-US" sz="1800" dirty="0">
+                <a:solidFill>
+                  <a:srgbClr val="8FA3BF"/>
                 </a:solidFill>
                 <a:latin typeface="Consolas" pitchFamily="34" charset="0"/>
                 <a:ea typeface="Consolas" pitchFamily="34" charset="-122"/>
@@ -3180,7 +3182,7 @@
               </a:rPr>
               <a:t>1 / 14</a:t>
             </a:r>
-            <a:endParaRPr lang="en-US" sz="1000" dirty="0"/>
+            <a:endParaRPr lang="en-US" sz="1800" dirty="0"/>
           </a:p>
         </p:txBody>
       </p:sp>
@@ -3264,8 +3266,8 @@
         </p:nvSpPr>
         <p:spPr>
           <a:xfrm>
-            <a:off x="822960" y="502920"/>
-            <a:ext cx="10515600" cy="365760"/>
+            <a:off x="822960" y="457200"/>
+            <a:ext cx="10515600" cy="411480"/>
           </a:xfrm>
           <a:prstGeom prst="rect">
             <a:avLst/>
@@ -3281,7 +3283,7 @@
               <a:buNone/>
             </a:pPr>
             <a:r>
-              <a:rPr lang="en-US" sz="1200" spc="300" kern="0" dirty="0">
+              <a:rPr lang="en-US" sz="1800" spc="300" kern="0" dirty="0">
                 <a:solidFill>
                   <a:srgbClr val="06B6D4"/>
                 </a:solidFill>
@@ -3291,7 +3293,7 @@
               </a:rPr>
               <a:t>PATTERN MATURITY</a:t>
             </a:r>
-            <a:endParaRPr lang="en-US" sz="1200" dirty="0"/>
+            <a:endParaRPr lang="en-US" sz="1800" dirty="0"/>
           </a:p>
         </p:txBody>
       </p:sp>
@@ -3342,7 +3344,7 @@
         </p:nvGraphicFramePr>
         <p:xfrm>
           <a:off x="822960" y="1874520"/>
-          <a:ext cx="10515600" cy="3337560"/>
+          <a:ext cx="10515600" cy="3246120"/>
         </p:xfrm>
         <a:graphic xmlns:a="http://schemas.openxmlformats.org/drawingml/2006/main">
           <a:graphicData uri="http://schemas.openxmlformats.org/drawingml/2006/chart">
@@ -3358,7 +3360,7 @@
         </p:nvSpPr>
         <p:spPr>
           <a:xfrm>
-            <a:off x="822960" y="5413248"/>
+            <a:off x="822960" y="5321808"/>
             <a:ext cx="10515600" cy="0"/>
           </a:xfrm>
           <a:prstGeom prst="line">
@@ -3381,8 +3383,8 @@
         </p:nvSpPr>
         <p:spPr>
           <a:xfrm>
-            <a:off x="822960" y="5504688"/>
-            <a:ext cx="10424160" cy="411480"/>
+            <a:off x="822960" y="5394960"/>
+            <a:ext cx="10424160" cy="502920"/>
           </a:xfrm>
           <a:prstGeom prst="rect">
             <a:avLst/>
@@ -3398,7 +3400,7 @@
               <a:buNone/>
             </a:pPr>
             <a:r>
-              <a:rPr lang="en-US" sz="1300" i="1" dirty="0">
+              <a:rPr lang="en-US" sz="1800" i="1" dirty="0">
                 <a:solidFill>
                   <a:srgbClr val="06B6D4"/>
                 </a:solidFill>
@@ -3408,7 +3410,7 @@
               </a:rPr>
               <a:t>→  Each review cycle tightened definitions until patterns survived compliance review first time.</a:t>
             </a:r>
-            <a:endParaRPr lang="en-US" sz="1300" dirty="0"/>
+            <a:endParaRPr lang="en-US" sz="1800" dirty="0"/>
           </a:p>
         </p:txBody>
       </p:sp>
@@ -3443,8 +3445,8 @@
         </p:nvSpPr>
         <p:spPr>
           <a:xfrm>
-            <a:off x="822960" y="6053328"/>
-            <a:ext cx="9692640" cy="457200"/>
+            <a:off x="822960" y="6035040"/>
+            <a:ext cx="10424160" cy="566928"/>
           </a:xfrm>
           <a:prstGeom prst="rect">
             <a:avLst/>
@@ -3460,9 +3462,9 @@
               <a:buNone/>
             </a:pPr>
             <a:r>
-              <a:rPr lang="en-US" sz="1150" dirty="0">
-                <a:solidFill>
-                  <a:srgbClr val="64748B"/>
+              <a:rPr lang="en-US" sz="1800" dirty="0">
+                <a:solidFill>
+                  <a:srgbClr val="8FA3BF"/>
                 </a:solidFill>
                 <a:latin typeface="Segoe UI" pitchFamily="34" charset="0"/>
                 <a:ea typeface="Segoe UI" pitchFamily="34" charset="-122"/>
@@ -3470,7 +3472,7 @@
               </a:rPr>
               <a:t>Illustrative iteration curve across review cycles.</a:t>
             </a:r>
-            <a:endParaRPr lang="en-US" sz="1150" dirty="0"/>
+            <a:endParaRPr lang="en-US" sz="1800" dirty="0"/>
           </a:p>
         </p:txBody>
       </p:sp>
@@ -3482,8 +3484,8 @@
         </p:nvSpPr>
         <p:spPr>
           <a:xfrm>
-            <a:off x="10698480" y="6382512"/>
-            <a:ext cx="1188720" cy="365760"/>
+            <a:off x="10698480" y="6309360"/>
+            <a:ext cx="1188720" cy="411480"/>
           </a:xfrm>
           <a:prstGeom prst="rect">
             <a:avLst/>
@@ -3499,9 +3501,9 @@
               <a:buNone/>
             </a:pPr>
             <a:r>
-              <a:rPr lang="en-US" sz="1000" dirty="0">
-                <a:solidFill>
-                  <a:srgbClr val="64748B"/>
+              <a:rPr lang="en-US" sz="1800" dirty="0">
+                <a:solidFill>
+                  <a:srgbClr val="8FA3BF"/>
                 </a:solidFill>
                 <a:latin typeface="Consolas" pitchFamily="34" charset="0"/>
                 <a:ea typeface="Consolas" pitchFamily="34" charset="-122"/>
@@ -3509,7 +3511,7 @@
               </a:rPr>
               <a:t>10 / 14</a:t>
             </a:r>
-            <a:endParaRPr lang="en-US" sz="1000" dirty="0"/>
+            <a:endParaRPr lang="en-US" sz="1800" dirty="0"/>
           </a:p>
         </p:txBody>
       </p:sp>
@@ -3593,8 +3595,8 @@
         </p:nvSpPr>
         <p:spPr>
           <a:xfrm>
-            <a:off x="822960" y="502920"/>
-            <a:ext cx="10515600" cy="365760"/>
+            <a:off x="822960" y="457200"/>
+            <a:ext cx="10515600" cy="411480"/>
           </a:xfrm>
           <a:prstGeom prst="rect">
             <a:avLst/>
@@ -3610,7 +3612,7 @@
               <a:buNone/>
             </a:pPr>
             <a:r>
-              <a:rPr lang="en-US" sz="1200" spc="300" kern="0" dirty="0">
+              <a:rPr lang="en-US" sz="1800" spc="300" kern="0" dirty="0">
                 <a:solidFill>
                   <a:srgbClr val="06B6D4"/>
                 </a:solidFill>
@@ -3620,7 +3622,7 @@
               </a:rPr>
               <a:t>WHAT MAKES A DETECTION ACTIONABLE</a:t>
             </a:r>
-            <a:endParaRPr lang="en-US" sz="1200" dirty="0"/>
+            <a:endParaRPr lang="en-US" sz="1800" dirty="0"/>
           </a:p>
         </p:txBody>
       </p:sp>
@@ -3670,8 +3672,8 @@
           <p:nvPr/>
         </p:nvGraphicFramePr>
         <p:xfrm>
-          <a:off x="822960" y="1874520"/>
-          <a:ext cx="10515600" cy="3337560"/>
+          <a:off x="822960" y="1783080"/>
+          <a:ext cx="10515600" cy="3383280"/>
         </p:xfrm>
         <a:graphic xmlns:a="http://schemas.openxmlformats.org/drawingml/2006/main">
           <a:graphicData uri="http://schemas.openxmlformats.org/drawingml/2006/chart">
@@ -3687,7 +3689,7 @@
         </p:nvSpPr>
         <p:spPr>
           <a:xfrm>
-            <a:off x="822960" y="5413248"/>
+            <a:off x="822960" y="5321808"/>
             <a:ext cx="10515600" cy="0"/>
           </a:xfrm>
           <a:prstGeom prst="line">
@@ -3710,8 +3712,8 @@
         </p:nvSpPr>
         <p:spPr>
           <a:xfrm>
-            <a:off x="822960" y="5504688"/>
-            <a:ext cx="10424160" cy="411480"/>
+            <a:off x="822960" y="5394960"/>
+            <a:ext cx="10424160" cy="502920"/>
           </a:xfrm>
           <a:prstGeom prst="rect">
             <a:avLst/>
@@ -3727,7 +3729,7 @@
               <a:buNone/>
             </a:pPr>
             <a:r>
-              <a:rPr lang="en-US" sz="1300" i="1" dirty="0">
+              <a:rPr lang="en-US" sz="1800" i="1" dirty="0">
                 <a:solidFill>
                   <a:srgbClr val="06B6D4"/>
                 </a:solidFill>
@@ -3737,7 +3739,7 @@
               </a:rPr>
               <a:t>→  Detection logic reviewers can replay and explain is what converts alerts into action.</a:t>
             </a:r>
-            <a:endParaRPr lang="en-US" sz="1300" dirty="0"/>
+            <a:endParaRPr lang="en-US" sz="1800" dirty="0"/>
           </a:p>
         </p:txBody>
       </p:sp>
@@ -3772,8 +3774,8 @@
         </p:nvSpPr>
         <p:spPr>
           <a:xfrm>
-            <a:off x="822960" y="6053328"/>
-            <a:ext cx="9692640" cy="457200"/>
+            <a:off x="822960" y="6035040"/>
+            <a:ext cx="10424160" cy="566928"/>
           </a:xfrm>
           <a:prstGeom prst="rect">
             <a:avLst/>
@@ -3789,9 +3791,9 @@
               <a:buNone/>
             </a:pPr>
             <a:r>
-              <a:rPr lang="en-US" sz="1150" dirty="0">
-                <a:solidFill>
-                  <a:srgbClr val="64748B"/>
+              <a:rPr lang="en-US" sz="1800" dirty="0">
+                <a:solidFill>
+                  <a:srgbClr val="8FA3BF"/>
                 </a:solidFill>
                 <a:latin typeface="Segoe UI" pitchFamily="34" charset="0"/>
                 <a:ea typeface="Segoe UI" pitchFamily="34" charset="-122"/>
@@ -3799,7 +3801,7 @@
               </a:rPr>
               <a:t>Illustrative weighting of review criteria from the engagement.</a:t>
             </a:r>
-            <a:endParaRPr lang="en-US" sz="1150" dirty="0"/>
+            <a:endParaRPr lang="en-US" sz="1800" dirty="0"/>
           </a:p>
         </p:txBody>
       </p:sp>
@@ -3811,8 +3813,8 @@
         </p:nvSpPr>
         <p:spPr>
           <a:xfrm>
-            <a:off x="10698480" y="6382512"/>
-            <a:ext cx="1188720" cy="365760"/>
+            <a:off x="10698480" y="6309360"/>
+            <a:ext cx="1188720" cy="411480"/>
           </a:xfrm>
           <a:prstGeom prst="rect">
             <a:avLst/>
@@ -3828,9 +3830,9 @@
               <a:buNone/>
             </a:pPr>
             <a:r>
-              <a:rPr lang="en-US" sz="1000" dirty="0">
-                <a:solidFill>
-                  <a:srgbClr val="64748B"/>
+              <a:rPr lang="en-US" sz="1800" dirty="0">
+                <a:solidFill>
+                  <a:srgbClr val="8FA3BF"/>
                 </a:solidFill>
                 <a:latin typeface="Consolas" pitchFamily="34" charset="0"/>
                 <a:ea typeface="Consolas" pitchFamily="34" charset="-122"/>
@@ -3838,7 +3840,7 @@
               </a:rPr>
               <a:t>11 / 14</a:t>
             </a:r>
-            <a:endParaRPr lang="en-US" sz="1000" dirty="0"/>
+            <a:endParaRPr lang="en-US" sz="1800" dirty="0"/>
           </a:p>
         </p:txBody>
       </p:sp>
@@ -3922,8 +3924,8 @@
         </p:nvSpPr>
         <p:spPr>
           <a:xfrm>
-            <a:off x="822960" y="502920"/>
-            <a:ext cx="10515600" cy="365760"/>
+            <a:off x="822960" y="457200"/>
+            <a:ext cx="10515600" cy="411480"/>
           </a:xfrm>
           <a:prstGeom prst="rect">
             <a:avLst/>
@@ -3939,7 +3941,7 @@
               <a:buNone/>
             </a:pPr>
             <a:r>
-              <a:rPr lang="en-US" sz="1200" spc="300" kern="0" dirty="0">
+              <a:rPr lang="en-US" sz="1800" spc="300" kern="0" dirty="0">
                 <a:solidFill>
                   <a:srgbClr val="06B6D4"/>
                 </a:solidFill>
@@ -3949,7 +3951,7 @@
               </a:rPr>
               <a:t>THE COMPARISON</a:t>
             </a:r>
-            <a:endParaRPr lang="en-US" sz="1200" dirty="0"/>
+            <a:endParaRPr lang="en-US" sz="1800" dirty="0"/>
           </a:p>
         </p:txBody>
       </p:sp>
@@ -4000,12 +4002,12 @@
         </p:nvSpPr>
         <p:spPr>
           <a:xfrm>
-            <a:off x="822960" y="2011680"/>
-            <a:ext cx="5074920" cy="3611880"/>
+            <a:off x="822960" y="1965960"/>
+            <a:ext cx="5074920" cy="3657600"/>
           </a:xfrm>
           <a:prstGeom prst="roundRect">
             <a:avLst>
-              <a:gd name="adj" fmla="val 2025"/>
+              <a:gd name="adj" fmla="val 2000"/>
             </a:avLst>
           </a:prstGeom>
           <a:solidFill>
@@ -4027,8 +4029,8 @@
         </p:nvSpPr>
         <p:spPr>
           <a:xfrm>
-            <a:off x="1097280" y="2240280"/>
-            <a:ext cx="4526280" cy="502920"/>
+            <a:off x="1097280" y="2194560"/>
+            <a:ext cx="4526280" cy="548640"/>
           </a:xfrm>
           <a:prstGeom prst="rect">
             <a:avLst/>
@@ -4044,7 +4046,7 @@
               <a:buNone/>
             </a:pPr>
             <a:r>
-              <a:rPr lang="en-US" sz="1650" b="1" dirty="0">
+              <a:rPr lang="en-US" sz="2000" b="1" dirty="0">
                 <a:solidFill>
                   <a:srgbClr val="06B6D4"/>
                 </a:solidFill>
@@ -4054,7 +4056,7 @@
               </a:rPr>
               <a:t>Relational-first</a:t>
             </a:r>
-            <a:endParaRPr lang="en-US" sz="1650" dirty="0"/>
+            <a:endParaRPr lang="en-US" sz="2000" dirty="0"/>
           </a:p>
         </p:txBody>
       </p:sp>
@@ -4090,7 +4092,7 @@
               <a:buChar char="▸"/>
             </a:pPr>
             <a:r>
-              <a:rPr lang="en-US" sz="1280" dirty="0">
+              <a:rPr lang="en-US" sz="1800" dirty="0">
                 <a:solidFill>
                   <a:srgbClr val="CBD5E1"/>
                 </a:solidFill>
@@ -4100,7 +4102,7 @@
               </a:rPr>
               <a:t>Fraud patterns expressed as ever-growing join chains</a:t>
             </a:r>
-            <a:endParaRPr lang="en-US" sz="1280" dirty="0"/>
+            <a:endParaRPr lang="en-US" sz="1800" dirty="0"/>
           </a:p>
           <a:p>
             <a:pPr marL="342900" indent="-342900">
@@ -4114,7 +4116,7 @@
               <a:buChar char="▸"/>
             </a:pPr>
             <a:r>
-              <a:rPr lang="en-US" sz="1280" dirty="0">
+              <a:rPr lang="en-US" sz="1800" dirty="0">
                 <a:solidFill>
                   <a:srgbClr val="CBD5E1"/>
                 </a:solidFill>
@@ -4124,7 +4126,7 @@
               </a:rPr>
               <a:t>Every new hop multiplies query complexity and review cost</a:t>
             </a:r>
-            <a:endParaRPr lang="en-US" sz="1280" dirty="0"/>
+            <a:endParaRPr lang="en-US" sz="1800" dirty="0"/>
           </a:p>
           <a:p>
             <a:pPr marL="342900" indent="-342900">
@@ -4138,7 +4140,7 @@
               <a:buChar char="▸"/>
             </a:pPr>
             <a:r>
-              <a:rPr lang="en-US" sz="1280" dirty="0">
+              <a:rPr lang="en-US" sz="1800" dirty="0">
                 <a:solidFill>
                   <a:srgbClr val="CBD5E1"/>
                 </a:solidFill>
@@ -4148,7 +4150,7 @@
               </a:rPr>
               <a:t>Reviewers audit SQL instead of discussing shapes</a:t>
             </a:r>
-            <a:endParaRPr lang="en-US" sz="1280" dirty="0"/>
+            <a:endParaRPr lang="en-US" sz="1800" dirty="0"/>
           </a:p>
         </p:txBody>
       </p:sp>
@@ -4160,12 +4162,12 @@
         </p:nvSpPr>
         <p:spPr>
           <a:xfrm>
-            <a:off x="6291072" y="2011680"/>
-            <a:ext cx="5074920" cy="3611880"/>
+            <a:off x="6291072" y="1965960"/>
+            <a:ext cx="5074920" cy="3657600"/>
           </a:xfrm>
           <a:prstGeom prst="roundRect">
             <a:avLst>
-              <a:gd name="adj" fmla="val 2025"/>
+              <a:gd name="adj" fmla="val 2000"/>
             </a:avLst>
           </a:prstGeom>
           <a:solidFill>
@@ -4187,8 +4189,8 @@
         </p:nvSpPr>
         <p:spPr>
           <a:xfrm>
-            <a:off x="6565392" y="2240280"/>
-            <a:ext cx="4526280" cy="502920"/>
+            <a:off x="6565392" y="2194560"/>
+            <a:ext cx="4526280" cy="548640"/>
           </a:xfrm>
           <a:prstGeom prst="rect">
             <a:avLst/>
@@ -4204,7 +4206,7 @@
               <a:buNone/>
             </a:pPr>
             <a:r>
-              <a:rPr lang="en-US" sz="1650" b="1" dirty="0">
+              <a:rPr lang="en-US" sz="2000" b="1" dirty="0">
                 <a:solidFill>
                   <a:srgbClr val="93C5FD"/>
                 </a:solidFill>
@@ -4214,7 +4216,7 @@
               </a:rPr>
               <a:t>Graph-first</a:t>
             </a:r>
-            <a:endParaRPr lang="en-US" sz="1650" dirty="0"/>
+            <a:endParaRPr lang="en-US" sz="2000" dirty="0"/>
           </a:p>
         </p:txBody>
       </p:sp>
@@ -4250,7 +4252,7 @@
               <a:buChar char="▸"/>
             </a:pPr>
             <a:r>
-              <a:rPr lang="en-US" sz="1280" dirty="0">
+              <a:rPr lang="en-US" sz="1800" dirty="0">
                 <a:solidFill>
                   <a:srgbClr val="CBD5E1"/>
                 </a:solidFill>
@@ -4260,7 +4262,7 @@
               </a:rPr>
               <a:t>Fraud patterns appear as paths, cycles, and hubs</a:t>
             </a:r>
-            <a:endParaRPr lang="en-US" sz="1280" dirty="0"/>
+            <a:endParaRPr lang="en-US" sz="1800" dirty="0"/>
           </a:p>
           <a:p>
             <a:pPr marL="342900" indent="-342900">
@@ -4274,7 +4276,7 @@
               <a:buChar char="▸"/>
             </a:pPr>
             <a:r>
-              <a:rPr lang="en-US" sz="1280" dirty="0">
+              <a:rPr lang="en-US" sz="1800" dirty="0">
                 <a:solidFill>
                   <a:srgbClr val="CBD5E1"/>
                 </a:solidFill>
@@ -4284,7 +4286,7 @@
               </a:rPr>
               <a:t>New detection questions reuse the same schema</a:t>
             </a:r>
-            <a:endParaRPr lang="en-US" sz="1280" dirty="0"/>
+            <a:endParaRPr lang="en-US" sz="1800" dirty="0"/>
           </a:p>
           <a:p>
             <a:pPr marL="342900" indent="-342900">
@@ -4298,7 +4300,7 @@
               <a:buChar char="▸"/>
             </a:pPr>
             <a:r>
-              <a:rPr lang="en-US" sz="1280" dirty="0">
+              <a:rPr lang="en-US" sz="1800" dirty="0">
                 <a:solidFill>
                   <a:srgbClr val="CBD5E1"/>
                 </a:solidFill>
@@ -4308,7 +4310,7 @@
               </a:rPr>
               <a:t>Reviewers confirm a shape, then trust the query behind it</a:t>
             </a:r>
-            <a:endParaRPr lang="en-US" sz="1280" dirty="0"/>
+            <a:endParaRPr lang="en-US" sz="1800" dirty="0"/>
           </a:p>
         </p:txBody>
       </p:sp>
@@ -4343,8 +4345,8 @@
         </p:nvSpPr>
         <p:spPr>
           <a:xfrm>
-            <a:off x="822960" y="6053328"/>
-            <a:ext cx="9692640" cy="457200"/>
+            <a:off x="822960" y="6035040"/>
+            <a:ext cx="10424160" cy="566928"/>
           </a:xfrm>
           <a:prstGeom prst="rect">
             <a:avLst/>
@@ -4360,9 +4362,9 @@
               <a:buNone/>
             </a:pPr>
             <a:r>
-              <a:rPr lang="en-US" sz="1150" dirty="0">
-                <a:solidFill>
-                  <a:srgbClr val="64748B"/>
+              <a:rPr lang="en-US" sz="1800" dirty="0">
+                <a:solidFill>
+                  <a:srgbClr val="8FA3BF"/>
                 </a:solidFill>
                 <a:latin typeface="Segoe UI" pitchFamily="34" charset="0"/>
                 <a:ea typeface="Segoe UI" pitchFamily="34" charset="-122"/>
@@ -4370,7 +4372,7 @@
               </a:rPr>
               <a:t>The schema is the analysis: half the value came from defining what connected means.</a:t>
             </a:r>
-            <a:endParaRPr lang="en-US" sz="1150" dirty="0"/>
+            <a:endParaRPr lang="en-US" sz="1800" dirty="0"/>
           </a:p>
         </p:txBody>
       </p:sp>
@@ -4382,8 +4384,8 @@
         </p:nvSpPr>
         <p:spPr>
           <a:xfrm>
-            <a:off x="10698480" y="6382512"/>
-            <a:ext cx="1188720" cy="365760"/>
+            <a:off x="10698480" y="6309360"/>
+            <a:ext cx="1188720" cy="411480"/>
           </a:xfrm>
           <a:prstGeom prst="rect">
             <a:avLst/>
@@ -4399,9 +4401,9 @@
               <a:buNone/>
             </a:pPr>
             <a:r>
-              <a:rPr lang="en-US" sz="1000" dirty="0">
-                <a:solidFill>
-                  <a:srgbClr val="64748B"/>
+              <a:rPr lang="en-US" sz="1800" dirty="0">
+                <a:solidFill>
+                  <a:srgbClr val="8FA3BF"/>
                 </a:solidFill>
                 <a:latin typeface="Consolas" pitchFamily="34" charset="0"/>
                 <a:ea typeface="Consolas" pitchFamily="34" charset="-122"/>
@@ -4409,7 +4411,7 @@
               </a:rPr>
               <a:t>12 / 14</a:t>
             </a:r>
-            <a:endParaRPr lang="en-US" sz="1000" dirty="0"/>
+            <a:endParaRPr lang="en-US" sz="1800" dirty="0"/>
           </a:p>
         </p:txBody>
       </p:sp>
@@ -4493,8 +4495,8 @@
         </p:nvSpPr>
         <p:spPr>
           <a:xfrm>
-            <a:off x="822960" y="502920"/>
-            <a:ext cx="10515600" cy="365760"/>
+            <a:off x="822960" y="457200"/>
+            <a:ext cx="10515600" cy="411480"/>
           </a:xfrm>
           <a:prstGeom prst="rect">
             <a:avLst/>
@@ -4510,7 +4512,7 @@
               <a:buNone/>
             </a:pPr>
             <a:r>
-              <a:rPr lang="en-US" sz="1200" spc="300" kern="0" dirty="0">
+              <a:rPr lang="en-US" sz="1800" spc="300" kern="0" dirty="0">
                 <a:solidFill>
                   <a:srgbClr val="06B6D4"/>
                 </a:solidFill>
@@ -4520,7 +4522,7 @@
               </a:rPr>
               <a:t>LESSONS</a:t>
             </a:r>
-            <a:endParaRPr lang="en-US" sz="1200" dirty="0"/>
+            <a:endParaRPr lang="en-US" sz="1800" dirty="0"/>
           </a:p>
         </p:txBody>
       </p:sp>
@@ -4571,8 +4573,8 @@
         </p:nvSpPr>
         <p:spPr>
           <a:xfrm>
-            <a:off x="868680" y="2011680"/>
-            <a:ext cx="10424160" cy="3566160"/>
+            <a:off x="868680" y="1965960"/>
+            <a:ext cx="10424160" cy="3840480"/>
           </a:xfrm>
           <a:prstGeom prst="rect">
             <a:avLst/>
@@ -4595,7 +4597,7 @@
               <a:buChar char="▸"/>
             </a:pPr>
             <a:r>
-              <a:rPr lang="en-US" sz="1600" dirty="0">
+              <a:rPr lang="en-US" sz="2000" dirty="0">
                 <a:solidFill>
                   <a:srgbClr val="CBD5E1"/>
                 </a:solidFill>
@@ -4605,7 +4607,7 @@
               </a:rPr>
               <a:t>Domain constraints come first - learn AML's hard rules before choosing any technology</a:t>
             </a:r>
-            <a:endParaRPr lang="en-US" sz="1600" dirty="0"/>
+            <a:endParaRPr lang="en-US" sz="2000" dirty="0"/>
           </a:p>
           <a:p>
             <a:pPr marL="342900" indent="-342900">
@@ -4619,7 +4621,7 @@
               <a:buChar char="▸"/>
             </a:pPr>
             <a:r>
-              <a:rPr lang="en-US" sz="1600" dirty="0">
+              <a:rPr lang="en-US" sz="2000" dirty="0">
                 <a:solidFill>
                   <a:srgbClr val="CBD5E1"/>
                 </a:solidFill>
@@ -4629,7 +4631,7 @@
               </a:rPr>
               <a:t>Explainability is a feature: a detection nobody can explain is one nobody can act on</a:t>
             </a:r>
-            <a:endParaRPr lang="en-US" sz="1600" dirty="0"/>
+            <a:endParaRPr lang="en-US" sz="2000" dirty="0"/>
           </a:p>
           <a:p>
             <a:pPr marL="342900" indent="-342900">
@@ -4643,7 +4645,7 @@
               <a:buChar char="▸"/>
             </a:pPr>
             <a:r>
-              <a:rPr lang="en-US" sz="1600" dirty="0">
+              <a:rPr lang="en-US" sz="2000" dirty="0">
                 <a:solidFill>
                   <a:srgbClr val="CBD5E1"/>
                 </a:solidFill>
@@ -4653,7 +4655,7 @@
               </a:rPr>
               <a:t>The schema is the analysis - forcing a shared definition of connected was half the value</a:t>
             </a:r>
-            <a:endParaRPr lang="en-US" sz="1600" dirty="0"/>
+            <a:endParaRPr lang="en-US" sz="2000" dirty="0"/>
           </a:p>
           <a:p>
             <a:pPr marL="342900" indent="-342900">
@@ -4667,7 +4669,7 @@
               <a:buChar char="▸"/>
             </a:pPr>
             <a:r>
-              <a:rPr lang="en-US" sz="1600" dirty="0">
+              <a:rPr lang="en-US" sz="2000" dirty="0">
                 <a:solidFill>
                   <a:srgbClr val="CBD5E1"/>
                 </a:solidFill>
@@ -4677,7 +4679,7 @@
               </a:rPr>
               <a:t>When your data is about relationships, model relationships</a:t>
             </a:r>
-            <a:endParaRPr lang="en-US" sz="1600" dirty="0"/>
+            <a:endParaRPr lang="en-US" sz="2000" dirty="0"/>
           </a:p>
         </p:txBody>
       </p:sp>
@@ -4689,8 +4691,8 @@
         </p:nvSpPr>
         <p:spPr>
           <a:xfrm>
-            <a:off x="10698480" y="6382512"/>
-            <a:ext cx="1188720" cy="365760"/>
+            <a:off x="10698480" y="6309360"/>
+            <a:ext cx="1188720" cy="411480"/>
           </a:xfrm>
           <a:prstGeom prst="rect">
             <a:avLst/>
@@ -4706,9 +4708,9 @@
               <a:buNone/>
             </a:pPr>
             <a:r>
-              <a:rPr lang="en-US" sz="1000" dirty="0">
-                <a:solidFill>
-                  <a:srgbClr val="64748B"/>
+              <a:rPr lang="en-US" sz="1800" dirty="0">
+                <a:solidFill>
+                  <a:srgbClr val="8FA3BF"/>
                 </a:solidFill>
                 <a:latin typeface="Consolas" pitchFamily="34" charset="0"/>
                 <a:ea typeface="Consolas" pitchFamily="34" charset="-122"/>
@@ -4716,7 +4718,7 @@
               </a:rPr>
               <a:t>13 / 14</a:t>
             </a:r>
-            <a:endParaRPr lang="en-US" sz="1000" dirty="0"/>
+            <a:endParaRPr lang="en-US" sz="1800" dirty="0"/>
           </a:p>
         </p:txBody>
       </p:sp>
@@ -4800,8 +4802,8 @@
         </p:nvSpPr>
         <p:spPr>
           <a:xfrm>
-            <a:off x="822960" y="1417320"/>
-            <a:ext cx="10515600" cy="411480"/>
+            <a:off x="822960" y="1371600"/>
+            <a:ext cx="10515600" cy="457200"/>
           </a:xfrm>
           <a:prstGeom prst="rect">
             <a:avLst/>
@@ -4817,7 +4819,7 @@
               <a:buNone/>
             </a:pPr>
             <a:r>
-              <a:rPr lang="en-US" sz="1300" spc="400" kern="0" dirty="0">
+              <a:rPr lang="en-US" sz="1800" spc="400" kern="0" dirty="0">
                 <a:solidFill>
                   <a:srgbClr val="06B6D4"/>
                 </a:solidFill>
@@ -4827,7 +4829,7 @@
               </a:rPr>
               <a:t>WORK WITH ME</a:t>
             </a:r>
-            <a:endParaRPr lang="en-US" sz="1300" dirty="0"/>
+            <a:endParaRPr lang="en-US" sz="1800" dirty="0"/>
           </a:p>
         </p:txBody>
       </p:sp>
@@ -4839,7 +4841,7 @@
         </p:nvSpPr>
         <p:spPr>
           <a:xfrm>
-            <a:off x="822960" y="1920240"/>
+            <a:off x="822960" y="1874520"/>
             <a:ext cx="10515600" cy="1371600"/>
           </a:xfrm>
           <a:prstGeom prst="rect">
@@ -4878,8 +4880,8 @@
         </p:nvSpPr>
         <p:spPr>
           <a:xfrm>
-            <a:off x="2011680" y="3429000"/>
-            <a:ext cx="8183880" cy="1554480"/>
+            <a:off x="2011680" y="3383280"/>
+            <a:ext cx="8183880" cy="1691640"/>
           </a:xfrm>
           <a:prstGeom prst="rect">
             <a:avLst/>
@@ -4898,7 +4900,7 @@
               <a:buNone/>
             </a:pPr>
             <a:r>
-              <a:rPr lang="en-US" sz="1500" dirty="0">
+              <a:rPr lang="en-US" sz="2000" dirty="0">
                 <a:solidFill>
                   <a:srgbClr val="CBD5E1"/>
                 </a:solidFill>
@@ -4915,7 +4917,7 @@
               <a:buNone/>
             </a:pPr>
             <a:r>
-              <a:rPr lang="en-US" sz="1500" dirty="0">
+              <a:rPr lang="en-US" sz="2000" dirty="0">
                 <a:solidFill>
                   <a:srgbClr val="CBD5E1"/>
                 </a:solidFill>
@@ -4932,7 +4934,7 @@
               <a:buNone/>
             </a:pPr>
             <a:r>
-              <a:rPr lang="en-US" sz="1500" dirty="0">
+              <a:rPr lang="en-US" sz="2000" dirty="0">
                 <a:solidFill>
                   <a:srgbClr val="CBD5E1"/>
                 </a:solidFill>
@@ -4942,7 +4944,7 @@
               </a:rPr>
               <a:t>Available for freelance and contract engagements worldwide</a:t>
             </a:r>
-            <a:endParaRPr lang="en-US" sz="1500" dirty="0"/>
+            <a:endParaRPr lang="en-US" sz="2000" dirty="0"/>
           </a:p>
         </p:txBody>
       </p:sp>
@@ -4977,8 +4979,8 @@
         </p:nvSpPr>
         <p:spPr>
           <a:xfrm>
-            <a:off x="822960" y="5376672"/>
-            <a:ext cx="10515600" cy="457200"/>
+            <a:off x="822960" y="5349240"/>
+            <a:ext cx="10515600" cy="502920"/>
           </a:xfrm>
           <a:prstGeom prst="rect">
             <a:avLst/>
@@ -4994,7 +4996,7 @@
               <a:buNone/>
             </a:pPr>
             <a:r>
-              <a:rPr lang="en-US" sz="1350" b="1" dirty="0">
+              <a:rPr lang="en-US" sz="1800" b="1" dirty="0">
                 <a:solidFill>
                   <a:srgbClr val="06B6D4"/>
                 </a:solidFill>
@@ -5004,7 +5006,7 @@
               </a:rPr>
               <a:t>rezalianvatiady.github.io · github.com/rezalianvatiady</a:t>
             </a:r>
-            <a:endParaRPr lang="en-US" sz="1350" dirty="0"/>
+            <a:endParaRPr lang="en-US" sz="1800" dirty="0"/>
           </a:p>
         </p:txBody>
       </p:sp>
@@ -5016,8 +5018,8 @@
         </p:nvSpPr>
         <p:spPr>
           <a:xfrm>
-            <a:off x="10698480" y="6382512"/>
-            <a:ext cx="1188720" cy="365760"/>
+            <a:off x="10698480" y="6309360"/>
+            <a:ext cx="1188720" cy="411480"/>
           </a:xfrm>
           <a:prstGeom prst="rect">
             <a:avLst/>
@@ -5033,9 +5035,9 @@
               <a:buNone/>
             </a:pPr>
             <a:r>
-              <a:rPr lang="en-US" sz="1000" dirty="0">
-                <a:solidFill>
-                  <a:srgbClr val="64748B"/>
+              <a:rPr lang="en-US" sz="1800" dirty="0">
+                <a:solidFill>
+                  <a:srgbClr val="8FA3BF"/>
                 </a:solidFill>
                 <a:latin typeface="Consolas" pitchFamily="34" charset="0"/>
                 <a:ea typeface="Consolas" pitchFamily="34" charset="-122"/>
@@ -5043,7 +5045,7 @@
               </a:rPr>
               <a:t>14 / 14</a:t>
             </a:r>
-            <a:endParaRPr lang="en-US" sz="1000" dirty="0"/>
+            <a:endParaRPr lang="en-US" sz="1800" dirty="0"/>
           </a:p>
         </p:txBody>
       </p:sp>
@@ -5127,8 +5129,8 @@
         </p:nvSpPr>
         <p:spPr>
           <a:xfrm>
-            <a:off x="822960" y="502920"/>
-            <a:ext cx="10515600" cy="365760"/>
+            <a:off x="822960" y="457200"/>
+            <a:ext cx="10515600" cy="411480"/>
           </a:xfrm>
           <a:prstGeom prst="rect">
             <a:avLst/>
@@ -5144,7 +5146,7 @@
               <a:buNone/>
             </a:pPr>
             <a:r>
-              <a:rPr lang="en-US" sz="1200" spc="300" kern="0" dirty="0">
+              <a:rPr lang="en-US" sz="1800" spc="300" kern="0" dirty="0">
                 <a:solidFill>
                   <a:srgbClr val="06B6D4"/>
                 </a:solidFill>
@@ -5154,7 +5156,7 @@
               </a:rPr>
               <a:t>AGENDA</a:t>
             </a:r>
-            <a:endParaRPr lang="en-US" sz="1200" dirty="0"/>
+            <a:endParaRPr lang="en-US" sz="1800" dirty="0"/>
           </a:p>
         </p:txBody>
       </p:sp>
@@ -5205,8 +5207,8 @@
         </p:nvSpPr>
         <p:spPr>
           <a:xfrm>
-            <a:off x="868680" y="2112264"/>
-            <a:ext cx="420624" cy="420624"/>
+            <a:off x="868680" y="2103120"/>
+            <a:ext cx="457200" cy="457200"/>
           </a:xfrm>
           <a:prstGeom prst="ellipse">
             <a:avLst/>
@@ -5230,8 +5232,8 @@
         </p:nvSpPr>
         <p:spPr>
           <a:xfrm>
-            <a:off x="868680" y="2112264"/>
-            <a:ext cx="420624" cy="420624"/>
+            <a:off x="868680" y="2103120"/>
+            <a:ext cx="457200" cy="457200"/>
           </a:xfrm>
           <a:prstGeom prst="rect">
             <a:avLst/>
@@ -5247,7 +5249,7 @@
               <a:buNone/>
             </a:pPr>
             <a:r>
-              <a:rPr lang="en-US" sz="1300" b="1" dirty="0">
+              <a:rPr lang="en-US" sz="1800" b="1" dirty="0">
                 <a:solidFill>
                   <a:srgbClr val="3B82F6"/>
                 </a:solidFill>
@@ -5257,7 +5259,7 @@
               </a:rPr>
               <a:t>1</a:t>
             </a:r>
-            <a:endParaRPr lang="en-US" sz="1300" dirty="0"/>
+            <a:endParaRPr lang="en-US" sz="1800" dirty="0"/>
           </a:p>
         </p:txBody>
       </p:sp>
@@ -5269,8 +5271,8 @@
         </p:nvSpPr>
         <p:spPr>
           <a:xfrm>
-            <a:off x="1435608" y="2057400"/>
-            <a:ext cx="4480560" cy="822960"/>
+            <a:off x="1472184" y="2011680"/>
+            <a:ext cx="4443984" cy="960120"/>
           </a:xfrm>
           <a:prstGeom prst="rect">
             <a:avLst/>
@@ -5286,7 +5288,7 @@
               <a:buNone/>
             </a:pPr>
             <a:r>
-              <a:rPr lang="en-US" sz="1450" dirty="0">
+              <a:rPr lang="en-US" sz="2000" dirty="0">
                 <a:solidFill>
                   <a:srgbClr val="CBD5E1"/>
                 </a:solidFill>
@@ -5296,7 +5298,7 @@
               </a:rPr>
               <a:t>The engagement: anti-money laundering analysis at Bank Rakyat Indonesia</a:t>
             </a:r>
-            <a:endParaRPr lang="en-US" sz="1450" dirty="0"/>
+            <a:endParaRPr lang="en-US" sz="2000" dirty="0"/>
           </a:p>
         </p:txBody>
       </p:sp>
@@ -5308,8 +5310,8 @@
         </p:nvSpPr>
         <p:spPr>
           <a:xfrm>
-            <a:off x="868680" y="3044952"/>
-            <a:ext cx="420624" cy="420624"/>
+            <a:off x="868680" y="3182112"/>
+            <a:ext cx="457200" cy="457200"/>
           </a:xfrm>
           <a:prstGeom prst="ellipse">
             <a:avLst/>
@@ -5333,8 +5335,8 @@
         </p:nvSpPr>
         <p:spPr>
           <a:xfrm>
-            <a:off x="868680" y="3044952"/>
-            <a:ext cx="420624" cy="420624"/>
+            <a:off x="868680" y="3182112"/>
+            <a:ext cx="457200" cy="457200"/>
           </a:xfrm>
           <a:prstGeom prst="rect">
             <a:avLst/>
@@ -5350,7 +5352,7 @@
               <a:buNone/>
             </a:pPr>
             <a:r>
-              <a:rPr lang="en-US" sz="1300" b="1" dirty="0">
+              <a:rPr lang="en-US" sz="1800" b="1" dirty="0">
                 <a:solidFill>
                   <a:srgbClr val="06B6D4"/>
                 </a:solidFill>
@@ -5360,7 +5362,7 @@
               </a:rPr>
               <a:t>2</a:t>
             </a:r>
-            <a:endParaRPr lang="en-US" sz="1300" dirty="0"/>
+            <a:endParaRPr lang="en-US" sz="1800" dirty="0"/>
           </a:p>
         </p:txBody>
       </p:sp>
@@ -5372,8 +5374,8 @@
         </p:nvSpPr>
         <p:spPr>
           <a:xfrm>
-            <a:off x="1435608" y="2990088"/>
-            <a:ext cx="4480560" cy="822960"/>
+            <a:off x="1472184" y="3090672"/>
+            <a:ext cx="4443984" cy="960120"/>
           </a:xfrm>
           <a:prstGeom prst="rect">
             <a:avLst/>
@@ -5389,7 +5391,7 @@
               <a:buNone/>
             </a:pPr>
             <a:r>
-              <a:rPr lang="en-US" sz="1450" dirty="0">
+              <a:rPr lang="en-US" sz="2000" dirty="0">
                 <a:solidFill>
                   <a:srgbClr val="CBD5E1"/>
                 </a:solidFill>
@@ -5399,7 +5401,7 @@
               </a:rPr>
               <a:t>Why relational tables hide fraud that graphs make visible</a:t>
             </a:r>
-            <a:endParaRPr lang="en-US" sz="1450" dirty="0"/>
+            <a:endParaRPr lang="en-US" sz="2000" dirty="0"/>
           </a:p>
         </p:txBody>
       </p:sp>
@@ -5411,8 +5413,8 @@
         </p:nvSpPr>
         <p:spPr>
           <a:xfrm>
-            <a:off x="868680" y="3977640"/>
-            <a:ext cx="420624" cy="420624"/>
+            <a:off x="868680" y="4261104"/>
+            <a:ext cx="457200" cy="457200"/>
           </a:xfrm>
           <a:prstGeom prst="ellipse">
             <a:avLst/>
@@ -5436,8 +5438,8 @@
         </p:nvSpPr>
         <p:spPr>
           <a:xfrm>
-            <a:off x="868680" y="3977640"/>
-            <a:ext cx="420624" cy="420624"/>
+            <a:off x="868680" y="4261104"/>
+            <a:ext cx="457200" cy="457200"/>
           </a:xfrm>
           <a:prstGeom prst="rect">
             <a:avLst/>
@@ -5453,7 +5455,7 @@
               <a:buNone/>
             </a:pPr>
             <a:r>
-              <a:rPr lang="en-US" sz="1300" b="1" dirty="0">
+              <a:rPr lang="en-US" sz="1800" b="1" dirty="0">
                 <a:solidFill>
                   <a:srgbClr val="3B82F6"/>
                 </a:solidFill>
@@ -5463,7 +5465,7 @@
               </a:rPr>
               <a:t>3</a:t>
             </a:r>
-            <a:endParaRPr lang="en-US" sz="1300" dirty="0"/>
+            <a:endParaRPr lang="en-US" sz="1800" dirty="0"/>
           </a:p>
         </p:txBody>
       </p:sp>
@@ -5475,8 +5477,8 @@
         </p:nvSpPr>
         <p:spPr>
           <a:xfrm>
-            <a:off x="1435608" y="3922776"/>
-            <a:ext cx="4480560" cy="822960"/>
+            <a:off x="1472184" y="4169664"/>
+            <a:ext cx="4443984" cy="960120"/>
           </a:xfrm>
           <a:prstGeom prst="rect">
             <a:avLst/>
@@ -5492,7 +5494,7 @@
               <a:buNone/>
             </a:pPr>
             <a:r>
-              <a:rPr lang="en-US" sz="1450" dirty="0">
+              <a:rPr lang="en-US" sz="2000" dirty="0">
                 <a:solidFill>
                   <a:srgbClr val="CBD5E1"/>
                 </a:solidFill>
@@ -5502,7 +5504,7 @@
               </a:rPr>
               <a:t>How detection patterns were defined with compliance stakeholders</a:t>
             </a:r>
-            <a:endParaRPr lang="en-US" sz="1450" dirty="0"/>
+            <a:endParaRPr lang="en-US" sz="2000" dirty="0"/>
           </a:p>
         </p:txBody>
       </p:sp>
@@ -5514,8 +5516,8 @@
         </p:nvSpPr>
         <p:spPr>
           <a:xfrm>
-            <a:off x="6355080" y="2112264"/>
-            <a:ext cx="420624" cy="420624"/>
+            <a:off x="6355080" y="2103120"/>
+            <a:ext cx="457200" cy="457200"/>
           </a:xfrm>
           <a:prstGeom prst="ellipse">
             <a:avLst/>
@@ -5539,8 +5541,8 @@
         </p:nvSpPr>
         <p:spPr>
           <a:xfrm>
-            <a:off x="6355080" y="2112264"/>
-            <a:ext cx="420624" cy="420624"/>
+            <a:off x="6355080" y="2103120"/>
+            <a:ext cx="457200" cy="457200"/>
           </a:xfrm>
           <a:prstGeom prst="rect">
             <a:avLst/>
@@ -5556,7 +5558,7 @@
               <a:buNone/>
             </a:pPr>
             <a:r>
-              <a:rPr lang="en-US" sz="1300" b="1" dirty="0">
+              <a:rPr lang="en-US" sz="1800" b="1" dirty="0">
                 <a:solidFill>
                   <a:srgbClr val="06B6D4"/>
                 </a:solidFill>
@@ -5566,7 +5568,7 @@
               </a:rPr>
               <a:t>4</a:t>
             </a:r>
-            <a:endParaRPr lang="en-US" sz="1300" dirty="0"/>
+            <a:endParaRPr lang="en-US" sz="1800" dirty="0"/>
           </a:p>
         </p:txBody>
       </p:sp>
@@ -5578,8 +5580,8 @@
         </p:nvSpPr>
         <p:spPr>
           <a:xfrm>
-            <a:off x="6922008" y="2057400"/>
-            <a:ext cx="4480560" cy="822960"/>
+            <a:off x="6958584" y="2011680"/>
+            <a:ext cx="4443984" cy="960120"/>
           </a:xfrm>
           <a:prstGeom prst="rect">
             <a:avLst/>
@@ -5595,7 +5597,7 @@
               <a:buNone/>
             </a:pPr>
             <a:r>
-              <a:rPr lang="en-US" sz="1450" dirty="0">
+              <a:rPr lang="en-US" sz="2000" dirty="0">
                 <a:solidFill>
                   <a:srgbClr val="CBD5E1"/>
                 </a:solidFill>
@@ -5605,7 +5607,7 @@
               </a:rPr>
               <a:t>Evidence: effort distribution, pattern maturity, and what makes detections actionable</a:t>
             </a:r>
-            <a:endParaRPr lang="en-US" sz="1450" dirty="0"/>
+            <a:endParaRPr lang="en-US" sz="2000" dirty="0"/>
           </a:p>
         </p:txBody>
       </p:sp>
@@ -5617,8 +5619,8 @@
         </p:nvSpPr>
         <p:spPr>
           <a:xfrm>
-            <a:off x="6355080" y="3044952"/>
-            <a:ext cx="420624" cy="420624"/>
+            <a:off x="6355080" y="3182112"/>
+            <a:ext cx="457200" cy="457200"/>
           </a:xfrm>
           <a:prstGeom prst="ellipse">
             <a:avLst/>
@@ -5642,8 +5644,8 @@
         </p:nvSpPr>
         <p:spPr>
           <a:xfrm>
-            <a:off x="6355080" y="3044952"/>
-            <a:ext cx="420624" cy="420624"/>
+            <a:off x="6355080" y="3182112"/>
+            <a:ext cx="457200" cy="457200"/>
           </a:xfrm>
           <a:prstGeom prst="rect">
             <a:avLst/>
@@ -5659,7 +5661,7 @@
               <a:buNone/>
             </a:pPr>
             <a:r>
-              <a:rPr lang="en-US" sz="1300" b="1" dirty="0">
+              <a:rPr lang="en-US" sz="1800" b="1" dirty="0">
                 <a:solidFill>
                   <a:srgbClr val="3B82F6"/>
                 </a:solidFill>
@@ -5669,7 +5671,7 @@
               </a:rPr>
               <a:t>5</a:t>
             </a:r>
-            <a:endParaRPr lang="en-US" sz="1300" dirty="0"/>
+            <a:endParaRPr lang="en-US" sz="1800" dirty="0"/>
           </a:p>
         </p:txBody>
       </p:sp>
@@ -5681,8 +5683,8 @@
         </p:nvSpPr>
         <p:spPr>
           <a:xfrm>
-            <a:off x="6922008" y="2990088"/>
-            <a:ext cx="4480560" cy="822960"/>
+            <a:off x="6958584" y="3090672"/>
+            <a:ext cx="4443984" cy="960120"/>
           </a:xfrm>
           <a:prstGeom prst="rect">
             <a:avLst/>
@@ -5698,7 +5700,7 @@
               <a:buNone/>
             </a:pPr>
             <a:r>
-              <a:rPr lang="en-US" sz="1450" dirty="0">
+              <a:rPr lang="en-US" sz="2000" dirty="0">
                 <a:solidFill>
                   <a:srgbClr val="CBD5E1"/>
                 </a:solidFill>
@@ -5708,7 +5710,7 @@
               </a:rPr>
               <a:t>Lessons that transfer to any relationship-heavy data problem</a:t>
             </a:r>
-            <a:endParaRPr lang="en-US" sz="1450" dirty="0"/>
+            <a:endParaRPr lang="en-US" sz="2000" dirty="0"/>
           </a:p>
         </p:txBody>
       </p:sp>
@@ -5720,8 +5722,8 @@
         </p:nvSpPr>
         <p:spPr>
           <a:xfrm>
-            <a:off x="10698480" y="6382512"/>
-            <a:ext cx="1188720" cy="365760"/>
+            <a:off x="10698480" y="6309360"/>
+            <a:ext cx="1188720" cy="411480"/>
           </a:xfrm>
           <a:prstGeom prst="rect">
             <a:avLst/>
@@ -5737,9 +5739,9 @@
               <a:buNone/>
             </a:pPr>
             <a:r>
-              <a:rPr lang="en-US" sz="1000" dirty="0">
-                <a:solidFill>
-                  <a:srgbClr val="64748B"/>
+              <a:rPr lang="en-US" sz="1800" dirty="0">
+                <a:solidFill>
+                  <a:srgbClr val="8FA3BF"/>
                 </a:solidFill>
                 <a:latin typeface="Consolas" pitchFamily="34" charset="0"/>
                 <a:ea typeface="Consolas" pitchFamily="34" charset="-122"/>
@@ -5747,7 +5749,7 @@
               </a:rPr>
               <a:t>2 / 14</a:t>
             </a:r>
-            <a:endParaRPr lang="en-US" sz="1000" dirty="0"/>
+            <a:endParaRPr lang="en-US" sz="1800" dirty="0"/>
           </a:p>
         </p:txBody>
       </p:sp>
@@ -5831,8 +5833,8 @@
         </p:nvSpPr>
         <p:spPr>
           <a:xfrm>
-            <a:off x="822960" y="502920"/>
-            <a:ext cx="10515600" cy="365760"/>
+            <a:off x="822960" y="457200"/>
+            <a:ext cx="10515600" cy="411480"/>
           </a:xfrm>
           <a:prstGeom prst="rect">
             <a:avLst/>
@@ -5848,7 +5850,7 @@
               <a:buNone/>
             </a:pPr>
             <a:r>
-              <a:rPr lang="en-US" sz="1200" spc="300" kern="0" dirty="0">
+              <a:rPr lang="en-US" sz="1800" spc="300" kern="0" dirty="0">
                 <a:solidFill>
                   <a:srgbClr val="06B6D4"/>
                 </a:solidFill>
@@ -5858,7 +5860,7 @@
               </a:rPr>
               <a:t>CONTEXT</a:t>
             </a:r>
-            <a:endParaRPr lang="en-US" sz="1200" dirty="0"/>
+            <a:endParaRPr lang="en-US" sz="1800" dirty="0"/>
           </a:p>
         </p:txBody>
       </p:sp>
@@ -5909,8 +5911,8 @@
         </p:nvSpPr>
         <p:spPr>
           <a:xfrm>
-            <a:off x="868680" y="2011680"/>
-            <a:ext cx="10424160" cy="3566160"/>
+            <a:off x="868680" y="1965960"/>
+            <a:ext cx="10424160" cy="3840480"/>
           </a:xfrm>
           <a:prstGeom prst="rect">
             <a:avLst/>
@@ -5933,7 +5935,7 @@
               <a:buChar char="▸"/>
             </a:pPr>
             <a:r>
-              <a:rPr lang="en-US" sz="1600" dirty="0">
+              <a:rPr lang="en-US" sz="2000" dirty="0">
                 <a:solidFill>
                   <a:srgbClr val="CBD5E1"/>
                 </a:solidFill>
@@ -5943,7 +5945,7 @@
               </a:rPr>
               <a:t>Anti-money laundering analysis engagement with Bank Rakyat Indonesia (BRI)</a:t>
             </a:r>
-            <a:endParaRPr lang="en-US" sz="1600" dirty="0"/>
+            <a:endParaRPr lang="en-US" sz="2000" dirty="0"/>
           </a:p>
           <a:p>
             <a:pPr marL="342900" indent="-342900">
@@ -5957,7 +5959,7 @@
               <a:buChar char="▸"/>
             </a:pPr>
             <a:r>
-              <a:rPr lang="en-US" sz="1600" dirty="0">
+              <a:rPr lang="en-US" sz="2000" dirty="0">
                 <a:solidFill>
                   <a:srgbClr val="CBD5E1"/>
                 </a:solidFill>
@@ -5967,7 +5969,7 @@
               </a:rPr>
               <a:t>Role: IT Business Analyst, Feb 2023 - Sep 2023, via PT Prima Integrasi Network</a:t>
             </a:r>
-            <a:endParaRPr lang="en-US" sz="1600" dirty="0"/>
+            <a:endParaRPr lang="en-US" sz="2000" dirty="0"/>
           </a:p>
           <a:p>
             <a:pPr marL="342900" indent="-342900">
@@ -5981,7 +5983,7 @@
               <a:buChar char="▸"/>
             </a:pPr>
             <a:r>
-              <a:rPr lang="en-US" sz="1600" dirty="0">
+              <a:rPr lang="en-US" sz="2000" dirty="0">
                 <a:solidFill>
                   <a:srgbClr val="CBD5E1"/>
                 </a:solidFill>
@@ -5991,7 +5993,7 @@
               </a:rPr>
               <a:t>Core toolkit: a graph database toolkit purpose-built for relationship analysis</a:t>
             </a:r>
-            <a:endParaRPr lang="en-US" sz="1600" dirty="0"/>
+            <a:endParaRPr lang="en-US" sz="2000" dirty="0"/>
           </a:p>
           <a:p>
             <a:pPr marL="342900" indent="-342900">
@@ -6005,7 +6007,7 @@
               <a:buChar char="▸"/>
             </a:pPr>
             <a:r>
-              <a:rPr lang="en-US" sz="1600" dirty="0">
+              <a:rPr lang="en-US" sz="2000" dirty="0">
                 <a:solidFill>
                   <a:srgbClr val="CBD5E1"/>
                 </a:solidFill>
@@ -6015,7 +6017,7 @@
               </a:rPr>
               <a:t>Deliverables: pattern definitions, audit-ready documentation, and stakeholder reporting</a:t>
             </a:r>
-            <a:endParaRPr lang="en-US" sz="1600" dirty="0"/>
+            <a:endParaRPr lang="en-US" sz="2000" dirty="0"/>
           </a:p>
           <a:p>
             <a:pPr marL="342900" indent="-342900">
@@ -6029,7 +6031,7 @@
               <a:buChar char="▸"/>
             </a:pPr>
             <a:r>
-              <a:rPr lang="en-US" sz="1600" dirty="0">
+              <a:rPr lang="en-US" sz="2000" dirty="0">
                 <a:solidFill>
                   <a:srgbClr val="CBD5E1"/>
                 </a:solidFill>
@@ -6039,7 +6041,7 @@
               </a:rPr>
               <a:t>Stakeholders thought in regulations - the analysis had to speak both languages</a:t>
             </a:r>
-            <a:endParaRPr lang="en-US" sz="1600" dirty="0"/>
+            <a:endParaRPr lang="en-US" sz="2000" dirty="0"/>
           </a:p>
         </p:txBody>
       </p:sp>
@@ -6051,8 +6053,8 @@
         </p:nvSpPr>
         <p:spPr>
           <a:xfrm>
-            <a:off x="10698480" y="6382512"/>
-            <a:ext cx="1188720" cy="365760"/>
+            <a:off x="10698480" y="6309360"/>
+            <a:ext cx="1188720" cy="411480"/>
           </a:xfrm>
           <a:prstGeom prst="rect">
             <a:avLst/>
@@ -6068,9 +6070,9 @@
               <a:buNone/>
             </a:pPr>
             <a:r>
-              <a:rPr lang="en-US" sz="1000" dirty="0">
-                <a:solidFill>
-                  <a:srgbClr val="64748B"/>
+              <a:rPr lang="en-US" sz="1800" dirty="0">
+                <a:solidFill>
+                  <a:srgbClr val="8FA3BF"/>
                 </a:solidFill>
                 <a:latin typeface="Consolas" pitchFamily="34" charset="0"/>
                 <a:ea typeface="Consolas" pitchFamily="34" charset="-122"/>
@@ -6078,7 +6080,7 @@
               </a:rPr>
               <a:t>3 / 14</a:t>
             </a:r>
-            <a:endParaRPr lang="en-US" sz="1000" dirty="0"/>
+            <a:endParaRPr lang="en-US" sz="1800" dirty="0"/>
           </a:p>
         </p:txBody>
       </p:sp>
@@ -6162,8 +6164,8 @@
         </p:nvSpPr>
         <p:spPr>
           <a:xfrm>
-            <a:off x="822960" y="502920"/>
-            <a:ext cx="10515600" cy="365760"/>
+            <a:off x="822960" y="457200"/>
+            <a:ext cx="10515600" cy="411480"/>
           </a:xfrm>
           <a:prstGeom prst="rect">
             <a:avLst/>
@@ -6179,7 +6181,7 @@
               <a:buNone/>
             </a:pPr>
             <a:r>
-              <a:rPr lang="en-US" sz="1200" spc="300" kern="0" dirty="0">
+              <a:rPr lang="en-US" sz="1800" spc="300" kern="0" dirty="0">
                 <a:solidFill>
                   <a:srgbClr val="06B6D4"/>
                 </a:solidFill>
@@ -6189,7 +6191,7 @@
               </a:rPr>
               <a:t>THE CHALLENGE</a:t>
             </a:r>
-            <a:endParaRPr lang="en-US" sz="1200" dirty="0"/>
+            <a:endParaRPr lang="en-US" sz="1800" dirty="0"/>
           </a:p>
         </p:txBody>
       </p:sp>
@@ -6240,8 +6242,8 @@
         </p:nvSpPr>
         <p:spPr>
           <a:xfrm>
-            <a:off x="822960" y="2194560"/>
-            <a:ext cx="2423160" cy="2697480"/>
+            <a:off x="822960" y="1965960"/>
+            <a:ext cx="2423160" cy="3154680"/>
           </a:xfrm>
           <a:prstGeom prst="roundRect">
             <a:avLst>
@@ -6267,7 +6269,7 @@
         </p:nvSpPr>
         <p:spPr>
           <a:xfrm>
-            <a:off x="960120" y="2514600"/>
+            <a:off x="960120" y="2194560"/>
             <a:ext cx="2148840" cy="914400"/>
           </a:xfrm>
           <a:prstGeom prst="rect">
@@ -6306,8 +6308,8 @@
         </p:nvSpPr>
         <p:spPr>
           <a:xfrm>
-            <a:off x="960120" y="3520440"/>
-            <a:ext cx="2148840" cy="502920"/>
+            <a:off x="960120" y="3200400"/>
+            <a:ext cx="2148840" cy="868680"/>
           </a:xfrm>
           <a:prstGeom prst="rect">
             <a:avLst/>
@@ -6323,7 +6325,7 @@
               <a:buNone/>
             </a:pPr>
             <a:r>
-              <a:rPr lang="en-US" sz="1450" b="1" dirty="0">
+              <a:rPr lang="en-US" sz="1800" b="1" dirty="0">
                 <a:solidFill>
                   <a:srgbClr val="FFFFFF"/>
                 </a:solidFill>
@@ -6333,7 +6335,7 @@
               </a:rPr>
               <a:t>Entity types linked</a:t>
             </a:r>
-            <a:endParaRPr lang="en-US" sz="1450" dirty="0"/>
+            <a:endParaRPr lang="en-US" sz="1800" dirty="0"/>
           </a:p>
         </p:txBody>
       </p:sp>
@@ -6345,8 +6347,8 @@
         </p:nvSpPr>
         <p:spPr>
           <a:xfrm>
-            <a:off x="1005840" y="4069080"/>
-            <a:ext cx="2057400" cy="685800"/>
+            <a:off x="1005840" y="4114800"/>
+            <a:ext cx="2057400" cy="914400"/>
           </a:xfrm>
           <a:prstGeom prst="rect">
             <a:avLst/>
@@ -6362,7 +6364,7 @@
               <a:buNone/>
             </a:pPr>
             <a:r>
-              <a:rPr lang="en-US" sz="1050" dirty="0">
+              <a:rPr lang="en-US" sz="1800" dirty="0">
                 <a:solidFill>
                   <a:srgbClr val="94A3B8"/>
                 </a:solidFill>
@@ -6372,7 +6374,7 @@
               </a:rPr>
               <a:t>Accounts, transactions, and parties joined over and over to expose one pattern</a:t>
             </a:r>
-            <a:endParaRPr lang="en-US" sz="1050" dirty="0"/>
+            <a:endParaRPr lang="en-US" sz="1800" dirty="0"/>
           </a:p>
         </p:txBody>
       </p:sp>
@@ -6384,8 +6386,8 @@
         </p:nvSpPr>
         <p:spPr>
           <a:xfrm>
-            <a:off x="3520440" y="2194560"/>
-            <a:ext cx="2423160" cy="2697480"/>
+            <a:off x="3520440" y="1965960"/>
+            <a:ext cx="2423160" cy="3154680"/>
           </a:xfrm>
           <a:prstGeom prst="roundRect">
             <a:avLst>
@@ -6411,7 +6413,7 @@
         </p:nvSpPr>
         <p:spPr>
           <a:xfrm>
-            <a:off x="3657600" y="2514600"/>
+            <a:off x="3657600" y="2194560"/>
             <a:ext cx="2148840" cy="914400"/>
           </a:xfrm>
           <a:prstGeom prst="rect">
@@ -6450,8 +6452,8 @@
         </p:nvSpPr>
         <p:spPr>
           <a:xfrm>
-            <a:off x="3657600" y="3520440"/>
-            <a:ext cx="2148840" cy="502920"/>
+            <a:off x="3657600" y="3200400"/>
+            <a:ext cx="2148840" cy="868680"/>
           </a:xfrm>
           <a:prstGeom prst="rect">
             <a:avLst/>
@@ -6467,7 +6469,7 @@
               <a:buNone/>
             </a:pPr>
             <a:r>
-              <a:rPr lang="en-US" sz="1450" b="1" dirty="0">
+              <a:rPr lang="en-US" sz="1800" b="1" dirty="0">
                 <a:solidFill>
                   <a:srgbClr val="FFFFFF"/>
                 </a:solidFill>
@@ -6477,7 +6479,7 @@
               </a:rPr>
               <a:t>Lines per ring query</a:t>
             </a:r>
-            <a:endParaRPr lang="en-US" sz="1450" dirty="0"/>
+            <a:endParaRPr lang="en-US" sz="1800" dirty="0"/>
           </a:p>
         </p:txBody>
       </p:sp>
@@ -6489,8 +6491,8 @@
         </p:nvSpPr>
         <p:spPr>
           <a:xfrm>
-            <a:off x="3703320" y="4069080"/>
-            <a:ext cx="2057400" cy="685800"/>
+            <a:off x="3703320" y="4114800"/>
+            <a:ext cx="2057400" cy="914400"/>
           </a:xfrm>
           <a:prstGeom prst="rect">
             <a:avLst/>
@@ -6506,7 +6508,7 @@
               <a:buNone/>
             </a:pPr>
             <a:r>
-              <a:rPr lang="en-US" sz="1050" dirty="0">
+              <a:rPr lang="en-US" sz="1800" dirty="0">
                 <a:solidFill>
                   <a:srgbClr val="94A3B8"/>
                 </a:solidFill>
@@ -6516,7 +6518,7 @@
               </a:rPr>
               <a:t>What a single suspicious ring took to express in relational SQL - versus one visible shape</a:t>
             </a:r>
-            <a:endParaRPr lang="en-US" sz="1050" dirty="0"/>
+            <a:endParaRPr lang="en-US" sz="1800" dirty="0"/>
           </a:p>
         </p:txBody>
       </p:sp>
@@ -6528,8 +6530,8 @@
         </p:nvSpPr>
         <p:spPr>
           <a:xfrm>
-            <a:off x="6217920" y="2194560"/>
-            <a:ext cx="2423160" cy="2697480"/>
+            <a:off x="6217920" y="1965960"/>
+            <a:ext cx="2423160" cy="3154680"/>
           </a:xfrm>
           <a:prstGeom prst="roundRect">
             <a:avLst>
@@ -6555,7 +6557,7 @@
         </p:nvSpPr>
         <p:spPr>
           <a:xfrm>
-            <a:off x="6355080" y="2514600"/>
+            <a:off x="6355080" y="2194560"/>
             <a:ext cx="2148840" cy="914400"/>
           </a:xfrm>
           <a:prstGeom prst="rect">
@@ -6594,8 +6596,8 @@
         </p:nvSpPr>
         <p:spPr>
           <a:xfrm>
-            <a:off x="6355080" y="3520440"/>
-            <a:ext cx="2148840" cy="502920"/>
+            <a:off x="6355080" y="3200400"/>
+            <a:ext cx="2148840" cy="868680"/>
           </a:xfrm>
           <a:prstGeom prst="rect">
             <a:avLst/>
@@ -6611,7 +6613,7 @@
               <a:buNone/>
             </a:pPr>
             <a:r>
-              <a:rPr lang="en-US" sz="1450" b="1" dirty="0">
+              <a:rPr lang="en-US" sz="1800" b="1" dirty="0">
                 <a:solidFill>
                   <a:srgbClr val="FFFFFF"/>
                 </a:solidFill>
@@ -6621,7 +6623,7 @@
               </a:rPr>
               <a:t>Detections explainable</a:t>
             </a:r>
-            <a:endParaRPr lang="en-US" sz="1450" dirty="0"/>
+            <a:endParaRPr lang="en-US" sz="1800" dirty="0"/>
           </a:p>
         </p:txBody>
       </p:sp>
@@ -6633,8 +6635,8 @@
         </p:nvSpPr>
         <p:spPr>
           <a:xfrm>
-            <a:off x="6400800" y="4069080"/>
-            <a:ext cx="2057400" cy="685800"/>
+            <a:off x="6400800" y="4114800"/>
+            <a:ext cx="2057400" cy="914400"/>
           </a:xfrm>
           <a:prstGeom prst="rect">
             <a:avLst/>
@@ -6650,7 +6652,7 @@
               <a:buNone/>
             </a:pPr>
             <a:r>
-              <a:rPr lang="en-US" sz="1050" dirty="0">
+              <a:rPr lang="en-US" sz="1800" dirty="0">
                 <a:solidFill>
                   <a:srgbClr val="94A3B8"/>
                 </a:solidFill>
@@ -6660,7 +6662,7 @@
               </a:rPr>
               <a:t>Every pattern had to survive audit and non-technical review</a:t>
             </a:r>
-            <a:endParaRPr lang="en-US" sz="1050" dirty="0"/>
+            <a:endParaRPr lang="en-US" sz="1800" dirty="0"/>
           </a:p>
         </p:txBody>
       </p:sp>
@@ -6672,8 +6674,8 @@
         </p:nvSpPr>
         <p:spPr>
           <a:xfrm>
-            <a:off x="8915400" y="2194560"/>
-            <a:ext cx="2423160" cy="2697480"/>
+            <a:off x="8915400" y="1965960"/>
+            <a:ext cx="2423160" cy="3154680"/>
           </a:xfrm>
           <a:prstGeom prst="roundRect">
             <a:avLst>
@@ -6699,7 +6701,7 @@
         </p:nvSpPr>
         <p:spPr>
           <a:xfrm>
-            <a:off x="9052560" y="2514600"/>
+            <a:off x="9052560" y="2194560"/>
             <a:ext cx="2148840" cy="914400"/>
           </a:xfrm>
           <a:prstGeom prst="rect">
@@ -6738,8 +6740,8 @@
         </p:nvSpPr>
         <p:spPr>
           <a:xfrm>
-            <a:off x="9052560" y="3520440"/>
-            <a:ext cx="2148840" cy="502920"/>
+            <a:off x="9052560" y="3200400"/>
+            <a:ext cx="2148840" cy="868680"/>
           </a:xfrm>
           <a:prstGeom prst="rect">
             <a:avLst/>
@@ -6755,7 +6757,7 @@
               <a:buNone/>
             </a:pPr>
             <a:r>
-              <a:rPr lang="en-US" sz="1450" b="1" dirty="0">
+              <a:rPr lang="en-US" sz="1800" b="1" dirty="0">
                 <a:solidFill>
                   <a:srgbClr val="FFFFFF"/>
                 </a:solidFill>
@@ -6765,7 +6767,7 @@
               </a:rPr>
               <a:t>Definition that mattered</a:t>
             </a:r>
-            <a:endParaRPr lang="en-US" sz="1450" dirty="0"/>
+            <a:endParaRPr lang="en-US" sz="1800" dirty="0"/>
           </a:p>
         </p:txBody>
       </p:sp>
@@ -6777,8 +6779,8 @@
         </p:nvSpPr>
         <p:spPr>
           <a:xfrm>
-            <a:off x="9098280" y="4069080"/>
-            <a:ext cx="2057400" cy="685800"/>
+            <a:off x="9098280" y="4114800"/>
+            <a:ext cx="2057400" cy="914400"/>
           </a:xfrm>
           <a:prstGeom prst="rect">
             <a:avLst/>
@@ -6794,7 +6796,7 @@
               <a:buNone/>
             </a:pPr>
             <a:r>
-              <a:rPr lang="en-US" sz="1050" dirty="0">
+              <a:rPr lang="en-US" sz="1800" dirty="0">
                 <a:solidFill>
                   <a:srgbClr val="94A3B8"/>
                 </a:solidFill>
@@ -6804,7 +6806,7 @@
               </a:rPr>
               <a:t>What connected actually means - agreed with compliance, not assumed</a:t>
             </a:r>
-            <a:endParaRPr lang="en-US" sz="1050" dirty="0"/>
+            <a:endParaRPr lang="en-US" sz="1800" dirty="0"/>
           </a:p>
         </p:txBody>
       </p:sp>
@@ -6816,7 +6818,7 @@
         </p:nvSpPr>
         <p:spPr>
           <a:xfrm>
-            <a:off x="822960" y="5413248"/>
+            <a:off x="822960" y="5321808"/>
             <a:ext cx="10515600" cy="0"/>
           </a:xfrm>
           <a:prstGeom prst="line">
@@ -6839,8 +6841,8 @@
         </p:nvSpPr>
         <p:spPr>
           <a:xfrm>
-            <a:off x="822960" y="5504688"/>
-            <a:ext cx="10424160" cy="411480"/>
+            <a:off x="822960" y="5394960"/>
+            <a:ext cx="10424160" cy="502920"/>
           </a:xfrm>
           <a:prstGeom prst="rect">
             <a:avLst/>
@@ -6856,7 +6858,7 @@
               <a:buNone/>
             </a:pPr>
             <a:r>
-              <a:rPr lang="en-US" sz="1300" i="1" dirty="0">
+              <a:rPr lang="en-US" sz="1800" i="1" dirty="0">
                 <a:solidFill>
                   <a:srgbClr val="06B6D4"/>
                 </a:solidFill>
@@ -6866,7 +6868,7 @@
               </a:rPr>
               <a:t>→  The constraints that shaped the approach: relationship density and explainability, not data volume.</a:t>
             </a:r>
-            <a:endParaRPr lang="en-US" sz="1300" dirty="0"/>
+            <a:endParaRPr lang="en-US" sz="1800" dirty="0"/>
           </a:p>
         </p:txBody>
       </p:sp>
@@ -6878,8 +6880,8 @@
         </p:nvSpPr>
         <p:spPr>
           <a:xfrm>
-            <a:off x="10698480" y="6382512"/>
-            <a:ext cx="1188720" cy="365760"/>
+            <a:off x="10698480" y="6309360"/>
+            <a:ext cx="1188720" cy="411480"/>
           </a:xfrm>
           <a:prstGeom prst="rect">
             <a:avLst/>
@@ -6895,9 +6897,9 @@
               <a:buNone/>
             </a:pPr>
             <a:r>
-              <a:rPr lang="en-US" sz="1000" dirty="0">
-                <a:solidFill>
-                  <a:srgbClr val="64748B"/>
+              <a:rPr lang="en-US" sz="1800" dirty="0">
+                <a:solidFill>
+                  <a:srgbClr val="8FA3BF"/>
                 </a:solidFill>
                 <a:latin typeface="Consolas" pitchFamily="34" charset="0"/>
                 <a:ea typeface="Consolas" pitchFamily="34" charset="-122"/>
@@ -6905,7 +6907,7 @@
               </a:rPr>
               <a:t>4 / 14</a:t>
             </a:r>
-            <a:endParaRPr lang="en-US" sz="1000" dirty="0"/>
+            <a:endParaRPr lang="en-US" sz="1800" dirty="0"/>
           </a:p>
         </p:txBody>
       </p:sp>
@@ -6989,8 +6991,8 @@
         </p:nvSpPr>
         <p:spPr>
           <a:xfrm>
-            <a:off x="822960" y="502920"/>
-            <a:ext cx="10515600" cy="365760"/>
+            <a:off x="822960" y="457200"/>
+            <a:ext cx="10515600" cy="411480"/>
           </a:xfrm>
           <a:prstGeom prst="rect">
             <a:avLst/>
@@ -7006,7 +7008,7 @@
               <a:buNone/>
             </a:pPr>
             <a:r>
-              <a:rPr lang="en-US" sz="1200" spc="300" kern="0" dirty="0">
+              <a:rPr lang="en-US" sz="1800" spc="300" kern="0" dirty="0">
                 <a:solidFill>
                   <a:srgbClr val="06B6D4"/>
                 </a:solidFill>
@@ -7016,7 +7018,7 @@
               </a:rPr>
               <a:t>ENGAGEMENT TIMELINE</a:t>
             </a:r>
-            <a:endParaRPr lang="en-US" sz="1200" dirty="0"/>
+            <a:endParaRPr lang="en-US" sz="1800" dirty="0"/>
           </a:p>
         </p:txBody>
       </p:sp>
@@ -7067,7 +7069,7 @@
         </p:nvSpPr>
         <p:spPr>
           <a:xfrm>
-            <a:off x="1371600" y="3035808"/>
+            <a:off x="1371600" y="2907792"/>
             <a:ext cx="9464040" cy="0"/>
           </a:xfrm>
           <a:prstGeom prst="line">
@@ -7090,7 +7092,7 @@
         </p:nvSpPr>
         <p:spPr>
           <a:xfrm>
-            <a:off x="1289304" y="2953512"/>
+            <a:off x="1289304" y="2825496"/>
             <a:ext cx="164592" cy="164592"/>
           </a:xfrm>
           <a:prstGeom prst="ellipse">
@@ -7115,8 +7117,8 @@
         </p:nvSpPr>
         <p:spPr>
           <a:xfrm>
-            <a:off x="342900" y="2395728"/>
-            <a:ext cx="2057400" cy="365760"/>
+            <a:off x="297180" y="2212848"/>
+            <a:ext cx="2148840" cy="384048"/>
           </a:xfrm>
           <a:prstGeom prst="rect">
             <a:avLst/>
@@ -7132,7 +7134,7 @@
               <a:buNone/>
             </a:pPr>
             <a:r>
-              <a:rPr lang="en-US" sz="1100" b="1" dirty="0">
+              <a:rPr lang="en-US" sz="1800" b="1" dirty="0">
                 <a:solidFill>
                   <a:srgbClr val="3B82F6"/>
                 </a:solidFill>
@@ -7142,7 +7144,7 @@
               </a:rPr>
               <a:t>Phase 1</a:t>
             </a:r>
-            <a:endParaRPr lang="en-US" sz="1100" dirty="0"/>
+            <a:endParaRPr lang="en-US" sz="1800" dirty="0"/>
           </a:p>
         </p:txBody>
       </p:sp>
@@ -7154,8 +7156,8 @@
         </p:nvSpPr>
         <p:spPr>
           <a:xfrm>
-            <a:off x="342900" y="3310128"/>
-            <a:ext cx="2057400" cy="566928"/>
+            <a:off x="297180" y="3200400"/>
+            <a:ext cx="2148840" cy="713232"/>
           </a:xfrm>
           <a:prstGeom prst="rect">
             <a:avLst/>
@@ -7171,7 +7173,7 @@
               <a:buNone/>
             </a:pPr>
             <a:r>
-              <a:rPr lang="en-US" sz="1250" b="1" dirty="0">
+              <a:rPr lang="en-US" sz="1800" b="1" dirty="0">
                 <a:solidFill>
                   <a:srgbClr val="FFFFFF"/>
                 </a:solidFill>
@@ -7181,7 +7183,7 @@
               </a:rPr>
               <a:t>Requirements</a:t>
             </a:r>
-            <a:endParaRPr lang="en-US" sz="1250" dirty="0"/>
+            <a:endParaRPr lang="en-US" sz="1800" dirty="0"/>
           </a:p>
         </p:txBody>
       </p:sp>
@@ -7193,8 +7195,8 @@
         </p:nvSpPr>
         <p:spPr>
           <a:xfrm>
-            <a:off x="342900" y="3895344"/>
-            <a:ext cx="2057400" cy="1234440"/>
+            <a:off x="297180" y="3931920"/>
+            <a:ext cx="2148840" cy="1417320"/>
           </a:xfrm>
           <a:prstGeom prst="rect">
             <a:avLst/>
@@ -7210,7 +7212,7 @@
               <a:buNone/>
             </a:pPr>
             <a:r>
-              <a:rPr lang="en-US" sz="1000" dirty="0">
+              <a:rPr lang="en-US" sz="1800" dirty="0">
                 <a:solidFill>
                   <a:srgbClr val="CBD5E1"/>
                 </a:solidFill>
@@ -7220,7 +7222,7 @@
               </a:rPr>
               <a:t>Translated AML rules and thresholds into entities, relationships, and detection goals together with compliance stakeholders.</a:t>
             </a:r>
-            <a:endParaRPr lang="en-US" sz="1000" dirty="0"/>
+            <a:endParaRPr lang="en-US" sz="1800" dirty="0"/>
           </a:p>
         </p:txBody>
       </p:sp>
@@ -7232,7 +7234,7 @@
         </p:nvSpPr>
         <p:spPr>
           <a:xfrm>
-            <a:off x="3655314" y="2953512"/>
+            <a:off x="3655314" y="2825496"/>
             <a:ext cx="164592" cy="164592"/>
           </a:xfrm>
           <a:prstGeom prst="ellipse">
@@ -7257,8 +7259,8 @@
         </p:nvSpPr>
         <p:spPr>
           <a:xfrm>
-            <a:off x="2708910" y="2395728"/>
-            <a:ext cx="2057400" cy="365760"/>
+            <a:off x="2663190" y="2212848"/>
+            <a:ext cx="2148840" cy="384048"/>
           </a:xfrm>
           <a:prstGeom prst="rect">
             <a:avLst/>
@@ -7274,7 +7276,7 @@
               <a:buNone/>
             </a:pPr>
             <a:r>
-              <a:rPr lang="en-US" sz="1100" b="1" dirty="0">
+              <a:rPr lang="en-US" sz="1800" b="1" dirty="0">
                 <a:solidFill>
                   <a:srgbClr val="06B6D4"/>
                 </a:solidFill>
@@ -7284,7 +7286,7 @@
               </a:rPr>
               <a:t>Phase 2</a:t>
             </a:r>
-            <a:endParaRPr lang="en-US" sz="1100" dirty="0"/>
+            <a:endParaRPr lang="en-US" sz="1800" dirty="0"/>
           </a:p>
         </p:txBody>
       </p:sp>
@@ -7296,8 +7298,8 @@
         </p:nvSpPr>
         <p:spPr>
           <a:xfrm>
-            <a:off x="2708910" y="3310128"/>
-            <a:ext cx="2057400" cy="566928"/>
+            <a:off x="2663190" y="3200400"/>
+            <a:ext cx="2148840" cy="713232"/>
           </a:xfrm>
           <a:prstGeom prst="rect">
             <a:avLst/>
@@ -7313,7 +7315,7 @@
               <a:buNone/>
             </a:pPr>
             <a:r>
-              <a:rPr lang="en-US" sz="1250" b="1" dirty="0">
+              <a:rPr lang="en-US" sz="1800" b="1" dirty="0">
                 <a:solidFill>
                   <a:srgbClr val="FFFFFF"/>
                 </a:solidFill>
@@ -7323,7 +7325,7 @@
               </a:rPr>
               <a:t>Schema design</a:t>
             </a:r>
-            <a:endParaRPr lang="en-US" sz="1250" dirty="0"/>
+            <a:endParaRPr lang="en-US" sz="1800" dirty="0"/>
           </a:p>
         </p:txBody>
       </p:sp>
@@ -7335,8 +7337,8 @@
         </p:nvSpPr>
         <p:spPr>
           <a:xfrm>
-            <a:off x="2708910" y="3895344"/>
-            <a:ext cx="2057400" cy="1234440"/>
+            <a:off x="2663190" y="3931920"/>
+            <a:ext cx="2148840" cy="1417320"/>
           </a:xfrm>
           <a:prstGeom prst="rect">
             <a:avLst/>
@@ -7352,7 +7354,7 @@
               <a:buNone/>
             </a:pPr>
             <a:r>
-              <a:rPr lang="en-US" sz="1000" dirty="0">
+              <a:rPr lang="en-US" sz="1800" dirty="0">
                 <a:solidFill>
                   <a:srgbClr val="CBD5E1"/>
                 </a:solidFill>
@@ -7362,7 +7364,7 @@
               </a:rPr>
               <a:t>Modeled accounts, transactions, and parties so the schema itself expressed the analysis.</a:t>
             </a:r>
-            <a:endParaRPr lang="en-US" sz="1000" dirty="0"/>
+            <a:endParaRPr lang="en-US" sz="1800" dirty="0"/>
           </a:p>
         </p:txBody>
       </p:sp>
@@ -7374,7 +7376,7 @@
         </p:nvSpPr>
         <p:spPr>
           <a:xfrm>
-            <a:off x="6021324" y="2953512"/>
+            <a:off x="6021324" y="2825496"/>
             <a:ext cx="164592" cy="164592"/>
           </a:xfrm>
           <a:prstGeom prst="ellipse">
@@ -7399,8 +7401,8 @@
         </p:nvSpPr>
         <p:spPr>
           <a:xfrm>
-            <a:off x="5074920" y="2395728"/>
-            <a:ext cx="2057400" cy="365760"/>
+            <a:off x="5029200" y="2212848"/>
+            <a:ext cx="2148840" cy="384048"/>
           </a:xfrm>
           <a:prstGeom prst="rect">
             <a:avLst/>
@@ -7416,7 +7418,7 @@
               <a:buNone/>
             </a:pPr>
             <a:r>
-              <a:rPr lang="en-US" sz="1100" b="1" dirty="0">
+              <a:rPr lang="en-US" sz="1800" b="1" dirty="0">
                 <a:solidFill>
                   <a:srgbClr val="3B82F6"/>
                 </a:solidFill>
@@ -7426,7 +7428,7 @@
               </a:rPr>
               <a:t>Phase 3</a:t>
             </a:r>
-            <a:endParaRPr lang="en-US" sz="1100" dirty="0"/>
+            <a:endParaRPr lang="en-US" sz="1800" dirty="0"/>
           </a:p>
         </p:txBody>
       </p:sp>
@@ -7438,8 +7440,8 @@
         </p:nvSpPr>
         <p:spPr>
           <a:xfrm>
-            <a:off x="5074920" y="3310128"/>
-            <a:ext cx="2057400" cy="566928"/>
+            <a:off x="5029200" y="3200400"/>
+            <a:ext cx="2148840" cy="713232"/>
           </a:xfrm>
           <a:prstGeom prst="rect">
             <a:avLst/>
@@ -7455,7 +7457,7 @@
               <a:buNone/>
             </a:pPr>
             <a:r>
-              <a:rPr lang="en-US" sz="1250" b="1" dirty="0">
+              <a:rPr lang="en-US" sz="1800" b="1" dirty="0">
                 <a:solidFill>
                   <a:srgbClr val="FFFFFF"/>
                 </a:solidFill>
@@ -7465,7 +7467,7 @@
               </a:rPr>
               <a:t>Pattern definition</a:t>
             </a:r>
-            <a:endParaRPr lang="en-US" sz="1250" dirty="0"/>
+            <a:endParaRPr lang="en-US" sz="1800" dirty="0"/>
           </a:p>
         </p:txBody>
       </p:sp>
@@ -7477,8 +7479,8 @@
         </p:nvSpPr>
         <p:spPr>
           <a:xfrm>
-            <a:off x="5074920" y="3895344"/>
-            <a:ext cx="2057400" cy="1234440"/>
+            <a:off x="5029200" y="3931920"/>
+            <a:ext cx="2148840" cy="1417320"/>
           </a:xfrm>
           <a:prstGeom prst="rect">
             <a:avLst/>
@@ -7494,7 +7496,7 @@
               <a:buNone/>
             </a:pPr>
             <a:r>
-              <a:rPr lang="en-US" sz="1000" dirty="0">
+              <a:rPr lang="en-US" sz="1800" dirty="0">
                 <a:solidFill>
                   <a:srgbClr val="CBD5E1"/>
                 </a:solidFill>
@@ -7504,7 +7506,7 @@
               </a:rPr>
               <a:t>Built detection patterns in the graph toolkit: layered transfers, circular flows, and mule networks.</a:t>
             </a:r>
-            <a:endParaRPr lang="en-US" sz="1000" dirty="0"/>
+            <a:endParaRPr lang="en-US" sz="1800" dirty="0"/>
           </a:p>
         </p:txBody>
       </p:sp>
@@ -7516,7 +7518,7 @@
         </p:nvSpPr>
         <p:spPr>
           <a:xfrm>
-            <a:off x="8387334" y="2953512"/>
+            <a:off x="8387334" y="2825496"/>
             <a:ext cx="164592" cy="164592"/>
           </a:xfrm>
           <a:prstGeom prst="ellipse">
@@ -7541,8 +7543,8 @@
         </p:nvSpPr>
         <p:spPr>
           <a:xfrm>
-            <a:off x="7440930" y="2395728"/>
-            <a:ext cx="2057400" cy="365760"/>
+            <a:off x="7395210" y="2212848"/>
+            <a:ext cx="2148840" cy="384048"/>
           </a:xfrm>
           <a:prstGeom prst="rect">
             <a:avLst/>
@@ -7558,7 +7560,7 @@
               <a:buNone/>
             </a:pPr>
             <a:r>
-              <a:rPr lang="en-US" sz="1100" b="1" dirty="0">
+              <a:rPr lang="en-US" sz="1800" b="1" dirty="0">
                 <a:solidFill>
                   <a:srgbClr val="06B6D4"/>
                 </a:solidFill>
@@ -7568,7 +7570,7 @@
               </a:rPr>
               <a:t>Phase 4</a:t>
             </a:r>
-            <a:endParaRPr lang="en-US" sz="1100" dirty="0"/>
+            <a:endParaRPr lang="en-US" sz="1800" dirty="0"/>
           </a:p>
         </p:txBody>
       </p:sp>
@@ -7580,8 +7582,8 @@
         </p:nvSpPr>
         <p:spPr>
           <a:xfrm>
-            <a:off x="7440930" y="3310128"/>
-            <a:ext cx="2057400" cy="566928"/>
+            <a:off x="7395210" y="3200400"/>
+            <a:ext cx="2148840" cy="713232"/>
           </a:xfrm>
           <a:prstGeom prst="rect">
             <a:avLst/>
@@ -7597,7 +7599,7 @@
               <a:buNone/>
             </a:pPr>
             <a:r>
-              <a:rPr lang="en-US" sz="1250" b="1" dirty="0">
+              <a:rPr lang="en-US" sz="1800" b="1" dirty="0">
                 <a:solidFill>
                   <a:srgbClr val="FFFFFF"/>
                 </a:solidFill>
@@ -7607,7 +7609,7 @@
               </a:rPr>
               <a:t>Validation</a:t>
             </a:r>
-            <a:endParaRPr lang="en-US" sz="1250" dirty="0"/>
+            <a:endParaRPr lang="en-US" sz="1800" dirty="0"/>
           </a:p>
         </p:txBody>
       </p:sp>
@@ -7619,8 +7621,8 @@
         </p:nvSpPr>
         <p:spPr>
           <a:xfrm>
-            <a:off x="7440930" y="3895344"/>
-            <a:ext cx="2057400" cy="1234440"/>
+            <a:off x="7395210" y="3931920"/>
+            <a:ext cx="2148840" cy="1417320"/>
           </a:xfrm>
           <a:prstGeom prst="rect">
             <a:avLst/>
@@ -7636,7 +7638,7 @@
               <a:buNone/>
             </a:pPr>
             <a:r>
-              <a:rPr lang="en-US" sz="1000" dirty="0">
+              <a:rPr lang="en-US" sz="1800" dirty="0">
                 <a:solidFill>
                   <a:srgbClr val="CBD5E1"/>
                 </a:solidFill>
@@ -7646,7 +7648,7 @@
               </a:rPr>
               <a:t>Iterated every pattern against reviewer feedback and hard regulatory rules before it was trusted.</a:t>
             </a:r>
-            <a:endParaRPr lang="en-US" sz="1000" dirty="0"/>
+            <a:endParaRPr lang="en-US" sz="1800" dirty="0"/>
           </a:p>
         </p:txBody>
       </p:sp>
@@ -7658,7 +7660,7 @@
         </p:nvSpPr>
         <p:spPr>
           <a:xfrm>
-            <a:off x="10753344" y="2953512"/>
+            <a:off x="10753344" y="2825496"/>
             <a:ext cx="164592" cy="164592"/>
           </a:xfrm>
           <a:prstGeom prst="ellipse">
@@ -7683,8 +7685,8 @@
         </p:nvSpPr>
         <p:spPr>
           <a:xfrm>
-            <a:off x="9806940" y="2395728"/>
-            <a:ext cx="2057400" cy="365760"/>
+            <a:off x="9761220" y="2212848"/>
+            <a:ext cx="2148840" cy="384048"/>
           </a:xfrm>
           <a:prstGeom prst="rect">
             <a:avLst/>
@@ -7700,7 +7702,7 @@
               <a:buNone/>
             </a:pPr>
             <a:r>
-              <a:rPr lang="en-US" sz="1100" b="1" dirty="0">
+              <a:rPr lang="en-US" sz="1800" b="1" dirty="0">
                 <a:solidFill>
                   <a:srgbClr val="3B82F6"/>
                 </a:solidFill>
@@ -7710,7 +7712,7 @@
               </a:rPr>
               <a:t>Phase 5</a:t>
             </a:r>
-            <a:endParaRPr lang="en-US" sz="1100" dirty="0"/>
+            <a:endParaRPr lang="en-US" sz="1800" dirty="0"/>
           </a:p>
         </p:txBody>
       </p:sp>
@@ -7722,8 +7724,8 @@
         </p:nvSpPr>
         <p:spPr>
           <a:xfrm>
-            <a:off x="9806940" y="3310128"/>
-            <a:ext cx="2057400" cy="566928"/>
+            <a:off x="9761220" y="3200400"/>
+            <a:ext cx="2148840" cy="713232"/>
           </a:xfrm>
           <a:prstGeom prst="rect">
             <a:avLst/>
@@ -7739,7 +7741,7 @@
               <a:buNone/>
             </a:pPr>
             <a:r>
-              <a:rPr lang="en-US" sz="1250" b="1" dirty="0">
+              <a:rPr lang="en-US" sz="1800" b="1" dirty="0">
                 <a:solidFill>
                   <a:srgbClr val="FFFFFF"/>
                 </a:solidFill>
@@ -7749,7 +7751,7 @@
               </a:rPr>
               <a:t>Handover</a:t>
             </a:r>
-            <a:endParaRPr lang="en-US" sz="1250" dirty="0"/>
+            <a:endParaRPr lang="en-US" sz="1800" dirty="0"/>
           </a:p>
         </p:txBody>
       </p:sp>
@@ -7761,8 +7763,8 @@
         </p:nvSpPr>
         <p:spPr>
           <a:xfrm>
-            <a:off x="9806940" y="3895344"/>
-            <a:ext cx="2057400" cy="1234440"/>
+            <a:off x="9761220" y="3931920"/>
+            <a:ext cx="2148840" cy="1417320"/>
           </a:xfrm>
           <a:prstGeom prst="rect">
             <a:avLst/>
@@ -7778,7 +7780,7 @@
               <a:buNone/>
             </a:pPr>
             <a:r>
-              <a:rPr lang="en-US" sz="1000" dirty="0">
+              <a:rPr lang="en-US" sz="1800" dirty="0">
                 <a:solidFill>
                   <a:srgbClr val="CBD5E1"/>
                 </a:solidFill>
@@ -7788,7 +7790,7 @@
               </a:rPr>
               <a:t>Delivered documentation auditors and non-technical reviewers could follow, plus workflow optimization recommendations.</a:t>
             </a:r>
-            <a:endParaRPr lang="en-US" sz="1000" dirty="0"/>
+            <a:endParaRPr lang="en-US" sz="1800" dirty="0"/>
           </a:p>
         </p:txBody>
       </p:sp>
@@ -7823,8 +7825,8 @@
         </p:nvSpPr>
         <p:spPr>
           <a:xfrm>
-            <a:off x="822960" y="6053328"/>
-            <a:ext cx="9692640" cy="457200"/>
+            <a:off x="822960" y="6035040"/>
+            <a:ext cx="10424160" cy="566928"/>
           </a:xfrm>
           <a:prstGeom prst="rect">
             <a:avLst/>
@@ -7840,9 +7842,9 @@
               <a:buNone/>
             </a:pPr>
             <a:r>
-              <a:rPr lang="en-US" sz="1150" dirty="0">
-                <a:solidFill>
-                  <a:srgbClr val="64748B"/>
+              <a:rPr lang="en-US" sz="1800" dirty="0">
+                <a:solidFill>
+                  <a:srgbClr val="8FA3BF"/>
                 </a:solidFill>
                 <a:latin typeface="Segoe UI" pitchFamily="34" charset="0"/>
                 <a:ea typeface="Segoe UI" pitchFamily="34" charset="-122"/>
@@ -7850,7 +7852,7 @@
               </a:rPr>
               <a:t>The schema was half the value: it forced a shared definition of connected.</a:t>
             </a:r>
-            <a:endParaRPr lang="en-US" sz="1150" dirty="0"/>
+            <a:endParaRPr lang="en-US" sz="1800" dirty="0"/>
           </a:p>
         </p:txBody>
       </p:sp>
@@ -7862,8 +7864,8 @@
         </p:nvSpPr>
         <p:spPr>
           <a:xfrm>
-            <a:off x="10698480" y="6382512"/>
-            <a:ext cx="1188720" cy="365760"/>
+            <a:off x="10698480" y="6309360"/>
+            <a:ext cx="1188720" cy="411480"/>
           </a:xfrm>
           <a:prstGeom prst="rect">
             <a:avLst/>
@@ -7879,9 +7881,9 @@
               <a:buNone/>
             </a:pPr>
             <a:r>
-              <a:rPr lang="en-US" sz="1000" dirty="0">
-                <a:solidFill>
-                  <a:srgbClr val="64748B"/>
+              <a:rPr lang="en-US" sz="1800" dirty="0">
+                <a:solidFill>
+                  <a:srgbClr val="8FA3BF"/>
                 </a:solidFill>
                 <a:latin typeface="Consolas" pitchFamily="34" charset="0"/>
                 <a:ea typeface="Consolas" pitchFamily="34" charset="-122"/>
@@ -7889,7 +7891,7 @@
               </a:rPr>
               <a:t>5 / 14</a:t>
             </a:r>
-            <a:endParaRPr lang="en-US" sz="1000" dirty="0"/>
+            <a:endParaRPr lang="en-US" sz="1800" dirty="0"/>
           </a:p>
         </p:txBody>
       </p:sp>
@@ -7973,8 +7975,8 @@
         </p:nvSpPr>
         <p:spPr>
           <a:xfrm>
-            <a:off x="822960" y="502920"/>
-            <a:ext cx="10515600" cy="365760"/>
+            <a:off x="822960" y="457200"/>
+            <a:ext cx="10515600" cy="411480"/>
           </a:xfrm>
           <a:prstGeom prst="rect">
             <a:avLst/>
@@ -7990,7 +7992,7 @@
               <a:buNone/>
             </a:pPr>
             <a:r>
-              <a:rPr lang="en-US" sz="1200" spc="300" kern="0" dirty="0">
+              <a:rPr lang="en-US" sz="1800" spc="300" kern="0" dirty="0">
                 <a:solidFill>
                   <a:srgbClr val="06B6D4"/>
                 </a:solidFill>
@@ -8000,7 +8002,7 @@
               </a:rPr>
               <a:t>THE SHAPE OF THE PROBLEM</a:t>
             </a:r>
-            <a:endParaRPr lang="en-US" sz="1200" dirty="0"/>
+            <a:endParaRPr lang="en-US" sz="1800" dirty="0"/>
           </a:p>
         </p:txBody>
       </p:sp>
@@ -8058,7 +8060,7 @@
           </p:nvPr>
         </p:nvGraphicFramePr>
         <p:xfrm>
-          <a:off x="822960" y="2011680"/>
+          <a:off x="822960" y="1828800"/>
           <a:ext cx="10515600" cy="914400"/>
         </p:xfrm>
         <a:graphic>
@@ -8070,7 +8072,7 @@
                 <a:gridCol w="3505200"/>
                 <a:gridCol w="3505200"/>
               </a:tblGrid>
-              <a:tr h="402336">
+              <a:tr h="457200">
                 <a:tc>
                   <a:txBody>
                     <a:bodyPr/>
@@ -8080,7 +8082,7 @@
                         <a:buNone/>
                       </a:pPr>
                       <a:r>
-                        <a:rPr lang="en-US" sz="1150" b="1" dirty="0">
+                        <a:rPr lang="en-US" sz="1800" b="1" dirty="0">
                           <a:solidFill>
                             <a:srgbClr val="FFFFFF"/>
                           </a:solidFill>
@@ -8090,14 +8092,14 @@
                         </a:rPr>
                         <a:t>Pattern</a:t>
                       </a:r>
-                      <a:endParaRPr lang="en-US" sz="1150" dirty="0">
+                      <a:endParaRPr lang="en-US" sz="1800" dirty="0">
                         <a:latin typeface="Segoe UI" charset="0"/>
                         <a:ea typeface="Segoe UI" charset="0"/>
                         <a:cs typeface="Segoe UI" charset="0"/>
                       </a:endParaRPr>
                     </a:p>
                   </a:txBody>
-                  <a:tcPr marL="64008" marR="64008" marT="64008" marB="64008" anchor="ctr">
+                  <a:tcPr marL="36576" marR="36576" marT="36576" marB="36576" anchor="ctr">
                     <a:lnL w="6350" cap="flat" cmpd="sng" algn="ctr">
                       <a:solidFill>
                         <a:srgbClr val="24365A"/>
@@ -8148,7 +8150,7 @@
                         <a:buNone/>
                       </a:pPr>
                       <a:r>
-                        <a:rPr lang="en-US" sz="1150" b="1" dirty="0">
+                        <a:rPr lang="en-US" sz="1800" b="1" dirty="0">
                           <a:solidFill>
                             <a:srgbClr val="FFFFFF"/>
                           </a:solidFill>
@@ -8158,14 +8160,14 @@
                         </a:rPr>
                         <a:t>Relational reality</a:t>
                       </a:r>
-                      <a:endParaRPr lang="en-US" sz="1150" dirty="0">
+                      <a:endParaRPr lang="en-US" sz="1800" dirty="0">
                         <a:latin typeface="Segoe UI" charset="0"/>
                         <a:ea typeface="Segoe UI" charset="0"/>
                         <a:cs typeface="Segoe UI" charset="0"/>
                       </a:endParaRPr>
                     </a:p>
                   </a:txBody>
-                  <a:tcPr marL="64008" marR="64008" marT="64008" marB="64008" anchor="ctr">
+                  <a:tcPr marL="36576" marR="36576" marT="36576" marB="36576" anchor="ctr">
                     <a:lnL w="6350" cap="flat" cmpd="sng" algn="ctr">
                       <a:solidFill>
                         <a:srgbClr val="24365A"/>
@@ -8216,7 +8218,7 @@
                         <a:buNone/>
                       </a:pPr>
                       <a:r>
-                        <a:rPr lang="en-US" sz="1150" b="1" dirty="0">
+                        <a:rPr lang="en-US" sz="1800" b="1" dirty="0">
                           <a:solidFill>
                             <a:srgbClr val="FFFFFF"/>
                           </a:solidFill>
@@ -8226,14 +8228,14 @@
                         </a:rPr>
                         <a:t>Graph reality</a:t>
                       </a:r>
-                      <a:endParaRPr lang="en-US" sz="1150" dirty="0">
+                      <a:endParaRPr lang="en-US" sz="1800" dirty="0">
                         <a:latin typeface="Segoe UI" charset="0"/>
                         <a:ea typeface="Segoe UI" charset="0"/>
                         <a:cs typeface="Segoe UI" charset="0"/>
                       </a:endParaRPr>
                     </a:p>
                   </a:txBody>
-                  <a:tcPr marL="64008" marR="64008" marT="64008" marB="64008" anchor="ctr">
+                  <a:tcPr marL="36576" marR="36576" marT="36576" marB="36576" anchor="ctr">
                     <a:lnL w="6350" cap="flat" cmpd="sng" algn="ctr">
                       <a:solidFill>
                         <a:srgbClr val="24365A"/>
@@ -8276,7 +8278,7 @@
                   </a:tcPr>
                 </a:tc>
               </a:tr>
-              <a:tr h="402336">
+              <a:tr h="457200">
                 <a:tc>
                   <a:txBody>
                     <a:bodyPr/>
@@ -8286,7 +8288,7 @@
                         <a:buNone/>
                       </a:pPr>
                       <a:r>
-                        <a:rPr lang="en-US" sz="1080" dirty="0">
+                        <a:rPr lang="en-US" sz="1800" dirty="0">
                           <a:solidFill>
                             <a:srgbClr val="CBD5E1"/>
                           </a:solidFill>
@@ -8296,14 +8298,14 @@
                         </a:rPr>
                         <a:t>Layered transfers</a:t>
                       </a:r>
-                      <a:endParaRPr lang="en-US" sz="1080" dirty="0">
+                      <a:endParaRPr lang="en-US" sz="1800" dirty="0">
                         <a:latin typeface="Segoe UI" charset="0"/>
                         <a:ea typeface="Segoe UI" charset="0"/>
                         <a:cs typeface="Segoe UI" charset="0"/>
                       </a:endParaRPr>
                     </a:p>
                   </a:txBody>
-                  <a:tcPr marL="64008" marR="64008" marT="64008" marB="64008" anchor="ctr">
+                  <a:tcPr marL="36576" marR="36576" marT="36576" marB="36576" anchor="ctr">
                     <a:lnL w="6350" cap="flat" cmpd="sng" algn="ctr">
                       <a:solidFill>
                         <a:srgbClr val="24365A"/>
@@ -8354,7 +8356,7 @@
                         <a:buNone/>
                       </a:pPr>
                       <a:r>
-                        <a:rPr lang="en-US" sz="1080" dirty="0">
+                        <a:rPr lang="en-US" sz="1800" dirty="0">
                           <a:solidFill>
                             <a:srgbClr val="CBD5E1"/>
                           </a:solidFill>
@@ -8364,14 +8366,14 @@
                         </a:rPr>
                         <a:t>Chains of joins across accounts and dates that grow with every hop</a:t>
                       </a:r>
-                      <a:endParaRPr lang="en-US" sz="1080" dirty="0">
+                      <a:endParaRPr lang="en-US" sz="1800" dirty="0">
                         <a:latin typeface="Segoe UI" charset="0"/>
                         <a:ea typeface="Segoe UI" charset="0"/>
                         <a:cs typeface="Segoe UI" charset="0"/>
                       </a:endParaRPr>
                     </a:p>
                   </a:txBody>
-                  <a:tcPr marL="64008" marR="64008" marT="64008" marB="64008" anchor="ctr">
+                  <a:tcPr marL="36576" marR="36576" marT="36576" marB="36576" anchor="ctr">
                     <a:lnL w="6350" cap="flat" cmpd="sng" algn="ctr">
                       <a:solidFill>
                         <a:srgbClr val="24365A"/>
@@ -8422,7 +8424,7 @@
                         <a:buNone/>
                       </a:pPr>
                       <a:r>
-                        <a:rPr lang="en-US" sz="1080" dirty="0">
+                        <a:rPr lang="en-US" sz="1800" dirty="0">
                           <a:solidFill>
                             <a:srgbClr val="CBD5E1"/>
                           </a:solidFill>
@@ -8432,14 +8434,14 @@
                         </a:rPr>
                         <a:t>A path - depth and hops read directly from the shape</a:t>
                       </a:r>
-                      <a:endParaRPr lang="en-US" sz="1080" dirty="0">
+                      <a:endParaRPr lang="en-US" sz="1800" dirty="0">
                         <a:latin typeface="Segoe UI" charset="0"/>
                         <a:ea typeface="Segoe UI" charset="0"/>
                         <a:cs typeface="Segoe UI" charset="0"/>
                       </a:endParaRPr>
                     </a:p>
                   </a:txBody>
-                  <a:tcPr marL="64008" marR="64008" marT="64008" marB="64008" anchor="ctr">
+                  <a:tcPr marL="36576" marR="36576" marT="36576" marB="36576" anchor="ctr">
                     <a:lnL w="6350" cap="flat" cmpd="sng" algn="ctr">
                       <a:solidFill>
                         <a:srgbClr val="24365A"/>
@@ -8482,7 +8484,7 @@
                   </a:tcPr>
                 </a:tc>
               </a:tr>
-              <a:tr h="402336">
+              <a:tr h="457200">
                 <a:tc>
                   <a:txBody>
                     <a:bodyPr/>
@@ -8492,7 +8494,7 @@
                         <a:buNone/>
                       </a:pPr>
                       <a:r>
-                        <a:rPr lang="en-US" sz="1080" dirty="0">
+                        <a:rPr lang="en-US" sz="1800" dirty="0">
                           <a:solidFill>
                             <a:srgbClr val="CBD5E1"/>
                           </a:solidFill>
@@ -8502,14 +8504,14 @@
                         </a:rPr>
                         <a:t>Circular flows</a:t>
                       </a:r>
-                      <a:endParaRPr lang="en-US" sz="1080" dirty="0">
+                      <a:endParaRPr lang="en-US" sz="1800" dirty="0">
                         <a:latin typeface="Segoe UI" charset="0"/>
                         <a:ea typeface="Segoe UI" charset="0"/>
                         <a:cs typeface="Segoe UI" charset="0"/>
                       </a:endParaRPr>
                     </a:p>
                   </a:txBody>
-                  <a:tcPr marL="64008" marR="64008" marT="64008" marB="64008" anchor="ctr">
+                  <a:tcPr marL="36576" marR="36576" marT="36576" marB="36576" anchor="ctr">
                     <a:lnL w="6350" cap="flat" cmpd="sng" algn="ctr">
                       <a:solidFill>
                         <a:srgbClr val="24365A"/>
@@ -8560,7 +8562,7 @@
                         <a:buNone/>
                       </a:pPr>
                       <a:r>
-                        <a:rPr lang="en-US" sz="1080" dirty="0">
+                        <a:rPr lang="en-US" sz="1800" dirty="0">
                           <a:solidFill>
                             <a:srgbClr val="CBD5E1"/>
                           </a:solidFill>
@@ -8570,14 +8572,14 @@
                         </a:rPr>
                         <a:t>Recursive queries that expand with each new hop</a:t>
                       </a:r>
-                      <a:endParaRPr lang="en-US" sz="1080" dirty="0">
+                      <a:endParaRPr lang="en-US" sz="1800" dirty="0">
                         <a:latin typeface="Segoe UI" charset="0"/>
                         <a:ea typeface="Segoe UI" charset="0"/>
                         <a:cs typeface="Segoe UI" charset="0"/>
                       </a:endParaRPr>
                     </a:p>
                   </a:txBody>
-                  <a:tcPr marL="64008" marR="64008" marT="64008" marB="64008" anchor="ctr">
+                  <a:tcPr marL="36576" marR="36576" marT="36576" marB="36576" anchor="ctr">
                     <a:lnL w="6350" cap="flat" cmpd="sng" algn="ctr">
                       <a:solidFill>
                         <a:srgbClr val="24365A"/>
@@ -8628,7 +8630,7 @@
                         <a:buNone/>
                       </a:pPr>
                       <a:r>
-                        <a:rPr lang="en-US" sz="1080" dirty="0">
+                        <a:rPr lang="en-US" sz="1800" dirty="0">
                           <a:solidFill>
                             <a:srgbClr val="CBD5E1"/>
                           </a:solidFill>
@@ -8638,14 +8640,14 @@
                         </a:rPr>
                         <a:t>A cycle - closed loops are visible at a glance</a:t>
                       </a:r>
-                      <a:endParaRPr lang="en-US" sz="1080" dirty="0">
+                      <a:endParaRPr lang="en-US" sz="1800" dirty="0">
                         <a:latin typeface="Segoe UI" charset="0"/>
                         <a:ea typeface="Segoe UI" charset="0"/>
                         <a:cs typeface="Segoe UI" charset="0"/>
                       </a:endParaRPr>
                     </a:p>
                   </a:txBody>
-                  <a:tcPr marL="64008" marR="64008" marT="64008" marB="64008" anchor="ctr">
+                  <a:tcPr marL="36576" marR="36576" marT="36576" marB="36576" anchor="ctr">
                     <a:lnL w="6350" cap="flat" cmpd="sng" algn="ctr">
                       <a:solidFill>
                         <a:srgbClr val="24365A"/>
@@ -8688,7 +8690,7 @@
                   </a:tcPr>
                 </a:tc>
               </a:tr>
-              <a:tr h="402336">
+              <a:tr h="457200">
                 <a:tc>
                   <a:txBody>
                     <a:bodyPr/>
@@ -8698,7 +8700,7 @@
                         <a:buNone/>
                       </a:pPr>
                       <a:r>
-                        <a:rPr lang="en-US" sz="1080" dirty="0">
+                        <a:rPr lang="en-US" sz="1800" dirty="0">
                           <a:solidFill>
                             <a:srgbClr val="CBD5E1"/>
                           </a:solidFill>
@@ -8708,14 +8710,14 @@
                         </a:rPr>
                         <a:t>Mule networks</a:t>
                       </a:r>
-                      <a:endParaRPr lang="en-US" sz="1080" dirty="0">
+                      <a:endParaRPr lang="en-US" sz="1800" dirty="0">
                         <a:latin typeface="Segoe UI" charset="0"/>
                         <a:ea typeface="Segoe UI" charset="0"/>
                         <a:cs typeface="Segoe UI" charset="0"/>
                       </a:endParaRPr>
                     </a:p>
                   </a:txBody>
-                  <a:tcPr marL="64008" marR="64008" marT="64008" marB="64008" anchor="ctr">
+                  <a:tcPr marL="36576" marR="36576" marT="36576" marB="36576" anchor="ctr">
                     <a:lnL w="6350" cap="flat" cmpd="sng" algn="ctr">
                       <a:solidFill>
                         <a:srgbClr val="24365A"/>
@@ -8766,7 +8768,7 @@
                         <a:buNone/>
                       </a:pPr>
                       <a:r>
-                        <a:rPr lang="en-US" sz="1080" dirty="0">
+                        <a:rPr lang="en-US" sz="1800" dirty="0">
                           <a:solidFill>
                             <a:srgbClr val="CBD5E1"/>
                           </a:solidFill>
@@ -8776,14 +8778,14 @@
                         </a:rPr>
                         <a:t>Many-to-many joins that explode combinatorially</a:t>
                       </a:r>
-                      <a:endParaRPr lang="en-US" sz="1080" dirty="0">
+                      <a:endParaRPr lang="en-US" sz="1800" dirty="0">
                         <a:latin typeface="Segoe UI" charset="0"/>
                         <a:ea typeface="Segoe UI" charset="0"/>
                         <a:cs typeface="Segoe UI" charset="0"/>
                       </a:endParaRPr>
                     </a:p>
                   </a:txBody>
-                  <a:tcPr marL="64008" marR="64008" marT="64008" marB="64008" anchor="ctr">
+                  <a:tcPr marL="36576" marR="36576" marT="36576" marB="36576" anchor="ctr">
                     <a:lnL w="6350" cap="flat" cmpd="sng" algn="ctr">
                       <a:solidFill>
                         <a:srgbClr val="24365A"/>
@@ -8834,7 +8836,7 @@
                         <a:buNone/>
                       </a:pPr>
                       <a:r>
-                        <a:rPr lang="en-US" sz="1080" dirty="0">
+                        <a:rPr lang="en-US" sz="1800" dirty="0">
                           <a:solidFill>
                             <a:srgbClr val="CBD5E1"/>
                           </a:solidFill>
@@ -8844,14 +8846,14 @@
                         </a:rPr>
                         <a:t>A hub - one account with abnormal fan-out</a:t>
                       </a:r>
-                      <a:endParaRPr lang="en-US" sz="1080" dirty="0">
+                      <a:endParaRPr lang="en-US" sz="1800" dirty="0">
                         <a:latin typeface="Segoe UI" charset="0"/>
                         <a:ea typeface="Segoe UI" charset="0"/>
                         <a:cs typeface="Segoe UI" charset="0"/>
                       </a:endParaRPr>
                     </a:p>
                   </a:txBody>
-                  <a:tcPr marL="64008" marR="64008" marT="64008" marB="64008" anchor="ctr">
+                  <a:tcPr marL="36576" marR="36576" marT="36576" marB="36576" anchor="ctr">
                     <a:lnL w="6350" cap="flat" cmpd="sng" algn="ctr">
                       <a:solidFill>
                         <a:srgbClr val="24365A"/>
@@ -8894,7 +8896,7 @@
                   </a:tcPr>
                 </a:tc>
               </a:tr>
-              <a:tr h="402336">
+              <a:tr h="457200">
                 <a:tc>
                   <a:txBody>
                     <a:bodyPr/>
@@ -8904,7 +8906,7 @@
                         <a:buNone/>
                       </a:pPr>
                       <a:r>
-                        <a:rPr lang="en-US" sz="1080" dirty="0">
+                        <a:rPr lang="en-US" sz="1800" dirty="0">
                           <a:solidFill>
                             <a:srgbClr val="CBD5E1"/>
                           </a:solidFill>
@@ -8914,14 +8916,14 @@
                         </a:rPr>
                         <a:t>Ring detection</a:t>
                       </a:r>
-                      <a:endParaRPr lang="en-US" sz="1080" dirty="0">
+                      <a:endParaRPr lang="en-US" sz="1800" dirty="0">
                         <a:latin typeface="Segoe UI" charset="0"/>
                         <a:ea typeface="Segoe UI" charset="0"/>
                         <a:cs typeface="Segoe UI" charset="0"/>
                       </a:endParaRPr>
                     </a:p>
                   </a:txBody>
-                  <a:tcPr marL="64008" marR="64008" marT="64008" marB="64008" anchor="ctr">
+                  <a:tcPr marL="36576" marR="36576" marT="36576" marB="36576" anchor="ctr">
                     <a:lnL w="6350" cap="flat" cmpd="sng" algn="ctr">
                       <a:solidFill>
                         <a:srgbClr val="24365A"/>
@@ -8972,7 +8974,7 @@
                         <a:buNone/>
                       </a:pPr>
                       <a:r>
-                        <a:rPr lang="en-US" sz="1080" dirty="0">
+                        <a:rPr lang="en-US" sz="1800" dirty="0">
                           <a:solidFill>
                             <a:srgbClr val="CBD5E1"/>
                           </a:solidFill>
@@ -8982,14 +8984,14 @@
                         </a:rPr>
                         <a:t>A 40-line query few reviewers can verify line by line</a:t>
                       </a:r>
-                      <a:endParaRPr lang="en-US" sz="1080" dirty="0">
+                      <a:endParaRPr lang="en-US" sz="1800" dirty="0">
                         <a:latin typeface="Segoe UI" charset="0"/>
                         <a:ea typeface="Segoe UI" charset="0"/>
                         <a:cs typeface="Segoe UI" charset="0"/>
                       </a:endParaRPr>
                     </a:p>
                   </a:txBody>
-                  <a:tcPr marL="64008" marR="64008" marT="64008" marB="64008" anchor="ctr">
+                  <a:tcPr marL="36576" marR="36576" marT="36576" marB="36576" anchor="ctr">
                     <a:lnL w="6350" cap="flat" cmpd="sng" algn="ctr">
                       <a:solidFill>
                         <a:srgbClr val="24365A"/>
@@ -9040,7 +9042,7 @@
                         <a:buNone/>
                       </a:pPr>
                       <a:r>
-                        <a:rPr lang="en-US" sz="1080" dirty="0">
+                        <a:rPr lang="en-US" sz="1800" dirty="0">
                           <a:solidFill>
                             <a:srgbClr val="CBD5E1"/>
                           </a:solidFill>
@@ -9050,14 +9052,14 @@
                         </a:rPr>
                         <a:t>A shape a reviewer can confirm before reading the query</a:t>
                       </a:r>
-                      <a:endParaRPr lang="en-US" sz="1080" dirty="0">
+                      <a:endParaRPr lang="en-US" sz="1800" dirty="0">
                         <a:latin typeface="Segoe UI" charset="0"/>
                         <a:ea typeface="Segoe UI" charset="0"/>
                         <a:cs typeface="Segoe UI" charset="0"/>
                       </a:endParaRPr>
                     </a:p>
                   </a:txBody>
-                  <a:tcPr marL="64008" marR="64008" marT="64008" marB="64008" anchor="ctr">
+                  <a:tcPr marL="36576" marR="36576" marT="36576" marB="36576" anchor="ctr">
                     <a:lnL w="6350" cap="flat" cmpd="sng" algn="ctr">
                       <a:solidFill>
                         <a:srgbClr val="24365A"/>
@@ -9135,8 +9137,8 @@
         </p:nvSpPr>
         <p:spPr>
           <a:xfrm>
-            <a:off x="822960" y="6053328"/>
-            <a:ext cx="9692640" cy="457200"/>
+            <a:off x="822960" y="6035040"/>
+            <a:ext cx="10424160" cy="566928"/>
           </a:xfrm>
           <a:prstGeom prst="rect">
             <a:avLst/>
@@ -9152,9 +9154,9 @@
               <a:buNone/>
             </a:pPr>
             <a:r>
-              <a:rPr lang="en-US" sz="1150" dirty="0">
-                <a:solidFill>
-                  <a:srgbClr val="64748B"/>
+              <a:rPr lang="en-US" sz="1800" dirty="0">
+                <a:solidFill>
+                  <a:srgbClr val="8FA3BF"/>
                 </a:solidFill>
                 <a:latin typeface="Segoe UI" pitchFamily="34" charset="0"/>
                 <a:ea typeface="Segoe UI" pitchFamily="34" charset="-122"/>
@@ -9162,7 +9164,7 @@
               </a:rPr>
               <a:t>Same data, different model - review meetings became shape discussions instead of SQL walkthroughs.</a:t>
             </a:r>
-            <a:endParaRPr lang="en-US" sz="1150" dirty="0"/>
+            <a:endParaRPr lang="en-US" sz="1800" dirty="0"/>
           </a:p>
         </p:txBody>
       </p:sp>
@@ -9174,8 +9176,8 @@
         </p:nvSpPr>
         <p:spPr>
           <a:xfrm>
-            <a:off x="10698480" y="6382512"/>
-            <a:ext cx="1188720" cy="365760"/>
+            <a:off x="10698480" y="6309360"/>
+            <a:ext cx="1188720" cy="411480"/>
           </a:xfrm>
           <a:prstGeom prst="rect">
             <a:avLst/>
@@ -9191,9 +9193,9 @@
               <a:buNone/>
             </a:pPr>
             <a:r>
-              <a:rPr lang="en-US" sz="1000" dirty="0">
-                <a:solidFill>
-                  <a:srgbClr val="64748B"/>
+              <a:rPr lang="en-US" sz="1800" dirty="0">
+                <a:solidFill>
+                  <a:srgbClr val="8FA3BF"/>
                 </a:solidFill>
                 <a:latin typeface="Consolas" pitchFamily="34" charset="0"/>
                 <a:ea typeface="Consolas" pitchFamily="34" charset="-122"/>
@@ -9201,7 +9203,7 @@
               </a:rPr>
               <a:t>6 / 14</a:t>
             </a:r>
-            <a:endParaRPr lang="en-US" sz="1000" dirty="0"/>
+            <a:endParaRPr lang="en-US" sz="1800" dirty="0"/>
           </a:p>
         </p:txBody>
       </p:sp>
@@ -9285,8 +9287,8 @@
         </p:nvSpPr>
         <p:spPr>
           <a:xfrm>
-            <a:off x="822960" y="502920"/>
-            <a:ext cx="10515600" cy="365760"/>
+            <a:off x="822960" y="457200"/>
+            <a:ext cx="10515600" cy="411480"/>
           </a:xfrm>
           <a:prstGeom prst="rect">
             <a:avLst/>
@@ -9302,7 +9304,7 @@
               <a:buNone/>
             </a:pPr>
             <a:r>
-              <a:rPr lang="en-US" sz="1200" spc="300" kern="0" dirty="0">
+              <a:rPr lang="en-US" sz="1800" spc="300" kern="0" dirty="0">
                 <a:solidFill>
                   <a:srgbClr val="06B6D4"/>
                 </a:solidFill>
@@ -9312,7 +9314,7 @@
               </a:rPr>
               <a:t>ANALYSIS DISCIPLINE</a:t>
             </a:r>
-            <a:endParaRPr lang="en-US" sz="1200" dirty="0"/>
+            <a:endParaRPr lang="en-US" sz="1800" dirty="0"/>
           </a:p>
         </p:txBody>
       </p:sp>
@@ -9363,8 +9365,8 @@
         </p:nvSpPr>
         <p:spPr>
           <a:xfrm>
-            <a:off x="868680" y="2011680"/>
-            <a:ext cx="10424160" cy="3566160"/>
+            <a:off x="868680" y="1965960"/>
+            <a:ext cx="10424160" cy="3840480"/>
           </a:xfrm>
           <a:prstGeom prst="rect">
             <a:avLst/>
@@ -9387,7 +9389,7 @@
               <a:buChar char="▸"/>
             </a:pPr>
             <a:r>
-              <a:rPr lang="en-US" sz="1600" dirty="0">
+              <a:rPr lang="en-US" sz="2000" dirty="0">
                 <a:solidFill>
                   <a:srgbClr val="CBD5E1"/>
                 </a:solidFill>
@@ -9397,7 +9399,7 @@
               </a:rPr>
               <a:t>Requirements gathering with compliance stakeholders who think in regulations, not data models</a:t>
             </a:r>
-            <a:endParaRPr lang="en-US" sz="1600" dirty="0"/>
+            <a:endParaRPr lang="en-US" sz="2000" dirty="0"/>
           </a:p>
           <a:p>
             <a:pPr marL="342900" indent="-342900">
@@ -9411,7 +9413,7 @@
               <a:buChar char="▸"/>
             </a:pPr>
             <a:r>
-              <a:rPr lang="en-US" sz="1600" dirty="0">
+              <a:rPr lang="en-US" sz="2000" dirty="0">
                 <a:solidFill>
                   <a:srgbClr val="CBD5E1"/>
                 </a:solidFill>
@@ -9421,7 +9423,7 @@
               </a:rPr>
               <a:t>Analysis and pattern definition in the graph toolkit, iterated against real reviewer feedback</a:t>
             </a:r>
-            <a:endParaRPr lang="en-US" sz="1600" dirty="0"/>
+            <a:endParaRPr lang="en-US" sz="2000" dirty="0"/>
           </a:p>
           <a:p>
             <a:pPr marL="342900" indent="-342900">
@@ -9435,7 +9437,7 @@
               <a:buChar char="▸"/>
             </a:pPr>
             <a:r>
-              <a:rPr lang="en-US" sz="1600" dirty="0">
+              <a:rPr lang="en-US" sz="2000" dirty="0">
                 <a:solidFill>
                   <a:srgbClr val="CBD5E1"/>
                 </a:solidFill>
@@ -9445,7 +9447,7 @@
               </a:rPr>
               <a:t>Documentation written for auditors and non-technical reviewers, not just engineers</a:t>
             </a:r>
-            <a:endParaRPr lang="en-US" sz="1600" dirty="0"/>
+            <a:endParaRPr lang="en-US" sz="2000" dirty="0"/>
           </a:p>
           <a:p>
             <a:pPr marL="342900" indent="-342900">
@@ -9459,7 +9461,7 @@
               <a:buChar char="▸"/>
             </a:pPr>
             <a:r>
-              <a:rPr lang="en-US" sz="1600" dirty="0">
+              <a:rPr lang="en-US" sz="2000" dirty="0">
                 <a:solidFill>
                   <a:srgbClr val="CBD5E1"/>
                 </a:solidFill>
@@ -9469,7 +9471,7 @@
               </a:rPr>
               <a:t>Identification of operational optimization opportunities across the analysis workflow</a:t>
             </a:r>
-            <a:endParaRPr lang="en-US" sz="1600" dirty="0"/>
+            <a:endParaRPr lang="en-US" sz="2000" dirty="0"/>
           </a:p>
         </p:txBody>
       </p:sp>
@@ -9481,8 +9483,8 @@
         </p:nvSpPr>
         <p:spPr>
           <a:xfrm>
-            <a:off x="10698480" y="6382512"/>
-            <a:ext cx="1188720" cy="365760"/>
+            <a:off x="10698480" y="6309360"/>
+            <a:ext cx="1188720" cy="411480"/>
           </a:xfrm>
           <a:prstGeom prst="rect">
             <a:avLst/>
@@ -9498,9 +9500,9 @@
               <a:buNone/>
             </a:pPr>
             <a:r>
-              <a:rPr lang="en-US" sz="1000" dirty="0">
-                <a:solidFill>
-                  <a:srgbClr val="64748B"/>
+              <a:rPr lang="en-US" sz="1800" dirty="0">
+                <a:solidFill>
+                  <a:srgbClr val="8FA3BF"/>
                 </a:solidFill>
                 <a:latin typeface="Consolas" pitchFamily="34" charset="0"/>
                 <a:ea typeface="Consolas" pitchFamily="34" charset="-122"/>
@@ -9508,7 +9510,7 @@
               </a:rPr>
               <a:t>7 / 14</a:t>
             </a:r>
-            <a:endParaRPr lang="en-US" sz="1000" dirty="0"/>
+            <a:endParaRPr lang="en-US" sz="1800" dirty="0"/>
           </a:p>
         </p:txBody>
       </p:sp>
@@ -9592,8 +9594,8 @@
         </p:nvSpPr>
         <p:spPr>
           <a:xfrm>
-            <a:off x="822960" y="502920"/>
-            <a:ext cx="10515600" cy="365760"/>
+            <a:off x="822960" y="457200"/>
+            <a:ext cx="10515600" cy="411480"/>
           </a:xfrm>
           <a:prstGeom prst="rect">
             <a:avLst/>
@@ -9609,7 +9611,7 @@
               <a:buNone/>
             </a:pPr>
             <a:r>
-              <a:rPr lang="en-US" sz="1200" spc="300" kern="0" dirty="0">
+              <a:rPr lang="en-US" sz="1800" spc="300" kern="0" dirty="0">
                 <a:solidFill>
                   <a:srgbClr val="06B6D4"/>
                 </a:solidFill>
@@ -9619,7 +9621,7 @@
               </a:rPr>
               <a:t>WHERE THE EFFORT WENT</a:t>
             </a:r>
-            <a:endParaRPr lang="en-US" sz="1200" dirty="0"/>
+            <a:endParaRPr lang="en-US" sz="1800" dirty="0"/>
           </a:p>
         </p:txBody>
       </p:sp>
@@ -9670,7 +9672,7 @@
         </p:nvGraphicFramePr>
         <p:xfrm>
           <a:off x="822960" y="1874520"/>
-          <a:ext cx="10515600" cy="3337560"/>
+          <a:ext cx="10515600" cy="3246120"/>
         </p:xfrm>
         <a:graphic xmlns:a="http://schemas.openxmlformats.org/drawingml/2006/main">
           <a:graphicData uri="http://schemas.openxmlformats.org/drawingml/2006/chart">
@@ -9686,7 +9688,7 @@
         </p:nvSpPr>
         <p:spPr>
           <a:xfrm>
-            <a:off x="822960" y="5413248"/>
+            <a:off x="822960" y="5321808"/>
             <a:ext cx="10515600" cy="0"/>
           </a:xfrm>
           <a:prstGeom prst="line">
@@ -9709,8 +9711,8 @@
         </p:nvSpPr>
         <p:spPr>
           <a:xfrm>
-            <a:off x="822960" y="5504688"/>
-            <a:ext cx="10424160" cy="411480"/>
+            <a:off x="822960" y="5394960"/>
+            <a:ext cx="10424160" cy="502920"/>
           </a:xfrm>
           <a:prstGeom prst="rect">
             <a:avLst/>
@@ -9726,7 +9728,7 @@
               <a:buNone/>
             </a:pPr>
             <a:r>
-              <a:rPr lang="en-US" sz="1300" i="1" dirty="0">
+              <a:rPr lang="en-US" sz="1800" i="1" dirty="0">
                 <a:solidFill>
                   <a:srgbClr val="06B6D4"/>
                 </a:solidFill>
@@ -9736,7 +9738,7 @@
               </a:rPr>
               <a:t>→  Half the value came from modeling - schema and pattern definition, not querying.</a:t>
             </a:r>
-            <a:endParaRPr lang="en-US" sz="1300" dirty="0"/>
+            <a:endParaRPr lang="en-US" sz="1800" dirty="0"/>
           </a:p>
         </p:txBody>
       </p:sp>
@@ -9771,8 +9773,8 @@
         </p:nvSpPr>
         <p:spPr>
           <a:xfrm>
-            <a:off x="822960" y="6053328"/>
-            <a:ext cx="9692640" cy="457200"/>
+            <a:off x="822960" y="6035040"/>
+            <a:ext cx="10424160" cy="566928"/>
           </a:xfrm>
           <a:prstGeom prst="rect">
             <a:avLst/>
@@ -9788,9 +9790,9 @@
               <a:buNone/>
             </a:pPr>
             <a:r>
-              <a:rPr lang="en-US" sz="1150" dirty="0">
-                <a:solidFill>
-                  <a:srgbClr val="64748B"/>
+              <a:rPr lang="en-US" sz="1800" dirty="0">
+                <a:solidFill>
+                  <a:srgbClr val="8FA3BF"/>
                 </a:solidFill>
                 <a:latin typeface="Segoe UI" pitchFamily="34" charset="0"/>
                 <a:ea typeface="Segoe UI" pitchFamily="34" charset="-122"/>
@@ -9798,7 +9800,7 @@
               </a:rPr>
               <a:t>Illustrative distribution of analysis effort across the engagement.</a:t>
             </a:r>
-            <a:endParaRPr lang="en-US" sz="1150" dirty="0"/>
+            <a:endParaRPr lang="en-US" sz="1800" dirty="0"/>
           </a:p>
         </p:txBody>
       </p:sp>
@@ -9810,8 +9812,8 @@
         </p:nvSpPr>
         <p:spPr>
           <a:xfrm>
-            <a:off x="10698480" y="6382512"/>
-            <a:ext cx="1188720" cy="365760"/>
+            <a:off x="10698480" y="6309360"/>
+            <a:ext cx="1188720" cy="411480"/>
           </a:xfrm>
           <a:prstGeom prst="rect">
             <a:avLst/>
@@ -9827,9 +9829,9 @@
               <a:buNone/>
             </a:pPr>
             <a:r>
-              <a:rPr lang="en-US" sz="1000" dirty="0">
-                <a:solidFill>
-                  <a:srgbClr val="64748B"/>
+              <a:rPr lang="en-US" sz="1800" dirty="0">
+                <a:solidFill>
+                  <a:srgbClr val="8FA3BF"/>
                 </a:solidFill>
                 <a:latin typeface="Consolas" pitchFamily="34" charset="0"/>
                 <a:ea typeface="Consolas" pitchFamily="34" charset="-122"/>
@@ -9837,7 +9839,7 @@
               </a:rPr>
               <a:t>8 / 14</a:t>
             </a:r>
-            <a:endParaRPr lang="en-US" sz="1000" dirty="0"/>
+            <a:endParaRPr lang="en-US" sz="1800" dirty="0"/>
           </a:p>
         </p:txBody>
       </p:sp>
@@ -9921,8 +9923,8 @@
         </p:nvSpPr>
         <p:spPr>
           <a:xfrm>
-            <a:off x="822960" y="502920"/>
-            <a:ext cx="10515600" cy="365760"/>
+            <a:off x="822960" y="457200"/>
+            <a:ext cx="10515600" cy="411480"/>
           </a:xfrm>
           <a:prstGeom prst="rect">
             <a:avLst/>
@@ -9938,7 +9940,7 @@
               <a:buNone/>
             </a:pPr>
             <a:r>
-              <a:rPr lang="en-US" sz="1200" spc="300" kern="0" dirty="0">
+              <a:rPr lang="en-US" sz="1800" spc="300" kern="0" dirty="0">
                 <a:solidFill>
                   <a:srgbClr val="06B6D4"/>
                 </a:solidFill>
@@ -9948,7 +9950,7 @@
               </a:rPr>
               <a:t>APPROACH</a:t>
             </a:r>
-            <a:endParaRPr lang="en-US" sz="1200" dirty="0"/>
+            <a:endParaRPr lang="en-US" sz="1800" dirty="0"/>
           </a:p>
         </p:txBody>
       </p:sp>
@@ -9999,8 +10001,8 @@
         </p:nvSpPr>
         <p:spPr>
           <a:xfrm>
-            <a:off x="868680" y="2011680"/>
-            <a:ext cx="10424160" cy="3566160"/>
+            <a:off x="868680" y="1965960"/>
+            <a:ext cx="10424160" cy="3840480"/>
           </a:xfrm>
           <a:prstGeom prst="rect">
             <a:avLst/>
@@ -10023,7 +10025,7 @@
               <a:buChar char="▸"/>
             </a:pPr>
             <a:r>
-              <a:rPr lang="en-US" sz="1600" dirty="0">
+              <a:rPr lang="en-US" sz="2000" dirty="0">
                 <a:solidFill>
                   <a:srgbClr val="CBD5E1"/>
                 </a:solidFill>
@@ -10033,7 +10035,7 @@
               </a:rPr>
               <a:t>AML has hard rules and thresholds - learn them before choosing any technology</a:t>
             </a:r>
-            <a:endParaRPr lang="en-US" sz="1600" dirty="0"/>
+            <a:endParaRPr lang="en-US" sz="2000" dirty="0"/>
           </a:p>
           <a:p>
             <a:pPr marL="342900" indent="-342900">
@@ -10047,7 +10049,7 @@
               <a:buChar char="▸"/>
             </a:pPr>
             <a:r>
-              <a:rPr lang="en-US" sz="1600" dirty="0">
+              <a:rPr lang="en-US" sz="2000" dirty="0">
                 <a:solidFill>
                   <a:srgbClr val="CBD5E1"/>
                 </a:solidFill>
@@ -10057,7 +10059,7 @@
               </a:rPr>
               <a:t>Entity relationships were defined with the business, not for them</a:t>
             </a:r>
-            <a:endParaRPr lang="en-US" sz="1600" dirty="0"/>
+            <a:endParaRPr lang="en-US" sz="2000" dirty="0"/>
           </a:p>
           <a:p>
             <a:pPr marL="342900" indent="-342900">
@@ -10071,7 +10073,7 @@
               <a:buChar char="▸"/>
             </a:pPr>
             <a:r>
-              <a:rPr lang="en-US" sz="1600" dirty="0">
+              <a:rPr lang="en-US" sz="2000" dirty="0">
                 <a:solidFill>
                   <a:srgbClr val="CBD5E1"/>
                 </a:solidFill>
@@ -10081,7 +10083,7 @@
               </a:rPr>
               <a:t>Patterns were iterated against real reviewer feedback, not internal opinion</a:t>
             </a:r>
-            <a:endParaRPr lang="en-US" sz="1600" dirty="0"/>
+            <a:endParaRPr lang="en-US" sz="2000" dirty="0"/>
           </a:p>
           <a:p>
             <a:pPr marL="342900" indent="-342900">
@@ -10095,7 +10097,7 @@
               <a:buChar char="▸"/>
             </a:pPr>
             <a:r>
-              <a:rPr lang="en-US" sz="1600" dirty="0">
+              <a:rPr lang="en-US" sz="2000" dirty="0">
                 <a:solidFill>
                   <a:srgbClr val="CBD5E1"/>
                 </a:solidFill>
@@ -10105,7 +10107,7 @@
               </a:rPr>
               <a:t>Explainability was treated as a feature: an unexplainable detection is an unusable detection</a:t>
             </a:r>
-            <a:endParaRPr lang="en-US" sz="1600" dirty="0"/>
+            <a:endParaRPr lang="en-US" sz="2000" dirty="0"/>
           </a:p>
         </p:txBody>
       </p:sp>
@@ -10117,8 +10119,8 @@
         </p:nvSpPr>
         <p:spPr>
           <a:xfrm>
-            <a:off x="10698480" y="6382512"/>
-            <a:ext cx="1188720" cy="365760"/>
+            <a:off x="10698480" y="6309360"/>
+            <a:ext cx="1188720" cy="411480"/>
           </a:xfrm>
           <a:prstGeom prst="rect">
             <a:avLst/>
@@ -10134,9 +10136,9 @@
               <a:buNone/>
             </a:pPr>
             <a:r>
-              <a:rPr lang="en-US" sz="1000" dirty="0">
-                <a:solidFill>
-                  <a:srgbClr val="64748B"/>
+              <a:rPr lang="en-US" sz="1800" dirty="0">
+                <a:solidFill>
+                  <a:srgbClr val="8FA3BF"/>
                 </a:solidFill>
                 <a:latin typeface="Consolas" pitchFamily="34" charset="0"/>
                 <a:ea typeface="Consolas" pitchFamily="34" charset="-122"/>
@@ -10144,7 +10146,7 @@
               </a:rPr>
               <a:t>9 / 14</a:t>
             </a:r>
-            <a:endParaRPr lang="en-US" sz="1000" dirty="0"/>
+            <a:endParaRPr lang="en-US" sz="1800" dirty="0"/>
           </a:p>
         </p:txBody>
       </p:sp>
